--- a/Mi Panel de Datos - Emisiones Ganaderas_1.pptx
+++ b/Mi Panel de Datos - Emisiones Ganaderas_1.pptx
@@ -1,25 +1,25 @@
 
 <file path=ppt/presentation.xml><?xml version="1.0" encoding="utf-8"?>
-<p:presentation xmlns:a="http://schemas.openxmlformats.org/drawingml/2006/main" xmlns:r="http://schemas.openxmlformats.org/officeDocument/2006/relationships" xmlns:p="http://schemas.openxmlformats.org/presentationml/2006/main" xmlns:m="http://schemas.openxmlformats.org/officeDocument/2006/math" xmlns:a14="http://schemas.microsoft.com/office/drawing/2010/main">
+<p:presentation xmlns:a="http://schemas.openxmlformats.org/drawingml/2006/main" xmlns:r="http://schemas.openxmlformats.org/officeDocument/2006/relationships" xmlns:p="http://schemas.openxmlformats.org/presentationml/2006/main">
   <p:sldMasterIdLst>
-    <p:sldMasterId id="2147483648" r:id="rId5"/>
+    <p:sldMasterId id="2147483648" r:id="rId1"/>
   </p:sldMasterIdLst>
   <p:notesMasterIdLst>
-    <p:notesMasterId r:id="rId7"/>
+    <p:notesMasterId r:id="rId14"/>
   </p:notesMasterIdLst>
   <p:sldIdLst>
-    <p:sldId id="256" r:id="rId8"/>
-    <p:sldId id="257" r:id="rId9"/>
-    <p:sldId id="258" r:id="rId10"/>
-    <p:sldId id="259" r:id="rId11"/>
-    <p:sldId id="260" r:id="rId12"/>
-    <p:sldId id="261" r:id="rId13"/>
-    <p:sldId id="262" r:id="rId14"/>
-    <p:sldId id="263" r:id="rId15"/>
-    <p:sldId id="264" r:id="rId16"/>
-    <p:sldId id="265" r:id="rId17"/>
-    <p:sldId id="266" r:id="rId18"/>
-    <p:sldId id="267" r:id="rId19"/>
+    <p:sldId id="256" r:id="rId2"/>
+    <p:sldId id="257" r:id="rId3"/>
+    <p:sldId id="258" r:id="rId4"/>
+    <p:sldId id="259" r:id="rId5"/>
+    <p:sldId id="260" r:id="rId6"/>
+    <p:sldId id="261" r:id="rId7"/>
+    <p:sldId id="262" r:id="rId8"/>
+    <p:sldId id="263" r:id="rId9"/>
+    <p:sldId id="264" r:id="rId10"/>
+    <p:sldId id="265" r:id="rId11"/>
+    <p:sldId id="266" r:id="rId12"/>
+    <p:sldId id="267" r:id="rId13"/>
   </p:sldIdLst>
   <p:sldSz cx="12192000" cy="6858000"/>
   <p:notesSz cx="6858000" cy="9144000"/>
@@ -39,7 +39,7 @@
       <a:buFontTx/>
       <a:buNone/>
       <a:tabLst/>
-      <a:defRPr b="0" baseline="0" cap="none" i="0" spc="0" strike="noStrike" sz="1800" u="none" kumimoji="0" normalizeH="0">
+      <a:defRPr kumimoji="0" sz="1800" b="0" i="0" u="none" strike="noStrike" cap="none" spc="0" normalizeH="0" baseline="0">
         <a:ln>
           <a:noFill/>
         </a:ln>
@@ -65,7 +65,7 @@
       <a:buFontTx/>
       <a:buNone/>
       <a:tabLst/>
-      <a:defRPr b="0" baseline="0" cap="none" i="0" spc="0" strike="noStrike" sz="1800" u="none" kumimoji="0" normalizeH="0">
+      <a:defRPr kumimoji="0" sz="1800" b="0" i="0" u="none" strike="noStrike" cap="none" spc="0" normalizeH="0" baseline="0">
         <a:ln>
           <a:noFill/>
         </a:ln>
@@ -95,7 +95,7 @@
       <a:buFontTx/>
       <a:buNone/>
       <a:tabLst/>
-      <a:defRPr b="0" baseline="0" cap="none" i="0" spc="0" strike="noStrike" sz="1800" u="none" kumimoji="0" normalizeH="0">
+      <a:defRPr kumimoji="0" sz="1800" b="0" i="0" u="none" strike="noStrike" cap="none" spc="0" normalizeH="0" baseline="0">
         <a:ln>
           <a:noFill/>
         </a:ln>
@@ -125,7 +125,7 @@
       <a:buFontTx/>
       <a:buNone/>
       <a:tabLst/>
-      <a:defRPr b="0" baseline="0" cap="none" i="0" spc="0" strike="noStrike" sz="1800" u="none" kumimoji="0" normalizeH="0">
+      <a:defRPr kumimoji="0" sz="1800" b="0" i="0" u="none" strike="noStrike" cap="none" spc="0" normalizeH="0" baseline="0">
         <a:ln>
           <a:noFill/>
         </a:ln>
@@ -155,7 +155,7 @@
       <a:buFontTx/>
       <a:buNone/>
       <a:tabLst/>
-      <a:defRPr b="0" baseline="0" cap="none" i="0" spc="0" strike="noStrike" sz="1800" u="none" kumimoji="0" normalizeH="0">
+      <a:defRPr kumimoji="0" sz="1800" b="0" i="0" u="none" strike="noStrike" cap="none" spc="0" normalizeH="0" baseline="0">
         <a:ln>
           <a:noFill/>
         </a:ln>
@@ -185,7 +185,7 @@
       <a:buFontTx/>
       <a:buNone/>
       <a:tabLst/>
-      <a:defRPr b="0" baseline="0" cap="none" i="0" spc="0" strike="noStrike" sz="1800" u="none" kumimoji="0" normalizeH="0">
+      <a:defRPr kumimoji="0" sz="1800" b="0" i="0" u="none" strike="noStrike" cap="none" spc="0" normalizeH="0" baseline="0">
         <a:ln>
           <a:noFill/>
         </a:ln>
@@ -215,7 +215,7 @@
       <a:buFontTx/>
       <a:buNone/>
       <a:tabLst/>
-      <a:defRPr b="0" baseline="0" cap="none" i="0" spc="0" strike="noStrike" sz="1800" u="none" kumimoji="0" normalizeH="0">
+      <a:defRPr kumimoji="0" sz="1800" b="0" i="0" u="none" strike="noStrike" cap="none" spc="0" normalizeH="0" baseline="0">
         <a:ln>
           <a:noFill/>
         </a:ln>
@@ -245,7 +245,7 @@
       <a:buFontTx/>
       <a:buNone/>
       <a:tabLst/>
-      <a:defRPr b="0" baseline="0" cap="none" i="0" spc="0" strike="noStrike" sz="1800" u="none" kumimoji="0" normalizeH="0">
+      <a:defRPr kumimoji="0" sz="1800" b="0" i="0" u="none" strike="noStrike" cap="none" spc="0" normalizeH="0" baseline="0">
         <a:ln>
           <a:noFill/>
         </a:ln>
@@ -275,7 +275,7 @@
       <a:buFontTx/>
       <a:buNone/>
       <a:tabLst/>
-      <a:defRPr b="0" baseline="0" cap="none" i="0" spc="0" strike="noStrike" sz="1800" u="none" kumimoji="0" normalizeH="0">
+      <a:defRPr kumimoji="0" sz="1800" b="0" i="0" u="none" strike="noStrike" cap="none" spc="0" normalizeH="0" baseline="0">
         <a:ln>
           <a:noFill/>
         </a:ln>
@@ -305,7 +305,7 @@
       <a:buFontTx/>
       <a:buNone/>
       <a:tabLst/>
-      <a:defRPr b="0" baseline="0" cap="none" i="0" spc="0" strike="noStrike" sz="1800" u="none" kumimoji="0" normalizeH="0">
+      <a:defRPr kumimoji="0" sz="1800" b="0" i="0" u="none" strike="noStrike" cap="none" spc="0" normalizeH="0" baseline="0">
         <a:ln>
           <a:noFill/>
         </a:ln>
@@ -324,13 +324,14 @@
 </p:presentation>
 </file>
 
-<file path=ppt/commentAuthors.xml><?xml version="1.0" encoding="utf-8"?>
-<p:cmAuthorLst xmlns:a="http://schemas.openxmlformats.org/drawingml/2006/main" xmlns:r="http://schemas.openxmlformats.org/officeDocument/2006/relationships" xmlns:p="http://schemas.openxmlformats.org/presentationml/2006/main" xmlns:m="http://schemas.openxmlformats.org/officeDocument/2006/math" xmlns:a14="http://schemas.microsoft.com/office/drawing/2010/main"/>
-</file>
-
 <file path=ppt/notesMasters/notesMaster1.xml><?xml version="1.0" encoding="utf-8"?>
-<p:notesMaster xmlns:a="http://schemas.openxmlformats.org/drawingml/2006/main" xmlns:r="http://schemas.openxmlformats.org/officeDocument/2006/relationships" xmlns:p="http://schemas.openxmlformats.org/presentationml/2006/main" xmlns:m="http://schemas.openxmlformats.org/officeDocument/2006/math" xmlns:a14="http://schemas.microsoft.com/office/drawing/2010/main">
+<p:notesMaster xmlns:a="http://schemas.openxmlformats.org/drawingml/2006/main" xmlns:r="http://schemas.openxmlformats.org/officeDocument/2006/relationships" xmlns:p="http://schemas.openxmlformats.org/presentationml/2006/main">
   <p:cSld>
+    <p:bg>
+      <p:bgRef idx="1001">
+        <a:schemeClr val="bg1"/>
+      </p:bgRef>
+    </p:bg>
     <p:spTree>
       <p:nvGrpSpPr>
         <p:cNvPr id="1" name=""/>
@@ -348,7 +349,9 @@
       <p:sp>
         <p:nvSpPr>
           <p:cNvPr id="17" name="Shape 17"/>
-          <p:cNvSpPr/>
+          <p:cNvSpPr>
+            <a:spLocks noGrp="1" noRot="1" noChangeAspect="1"/>
+          </p:cNvSpPr>
           <p:nvPr>
             <p:ph type="sldImg"/>
           </p:nvPr>
@@ -366,14 +369,16 @@
           <a:bodyPr/>
           <a:lstStyle/>
           <a:p>
-            <a:pPr/>
+            <a:endParaRPr/>
           </a:p>
         </p:txBody>
       </p:sp>
       <p:sp>
         <p:nvSpPr>
           <p:cNvPr id="18" name="Shape 18"/>
-          <p:cNvSpPr/>
+          <p:cNvSpPr>
+            <a:spLocks noGrp="1"/>
+          </p:cNvSpPr>
           <p:nvPr>
             <p:ph type="body" sz="quarter" idx="1"/>
           </p:nvPr>
@@ -391,7 +396,7 @@
           <a:bodyPr/>
           <a:lstStyle/>
           <a:p>
-            <a:pPr/>
+            <a:endParaRPr/>
           </a:p>
         </p:txBody>
       </p:sp>
@@ -476,7 +481,7 @@
 </file>
 
 <file path=ppt/slideLayouts/slideLayout1.xml><?xml version="1.0" encoding="utf-8"?>
-<p:sldLayout xmlns:a="http://schemas.openxmlformats.org/drawingml/2006/main" xmlns:r="http://schemas.openxmlformats.org/officeDocument/2006/relationships" xmlns:p="http://schemas.openxmlformats.org/presentationml/2006/main" xmlns:m="http://schemas.openxmlformats.org/officeDocument/2006/math" xmlns:a14="http://schemas.microsoft.com/office/drawing/2010/main" type="tx" showMasterSp="1" showMasterPhAnim="1">
+<p:sldLayout xmlns:a="http://schemas.openxmlformats.org/drawingml/2006/main" xmlns:r="http://schemas.openxmlformats.org/officeDocument/2006/relationships" xmlns:p="http://schemas.openxmlformats.org/presentationml/2006/main" type="tx">
   <p:cSld name="DEFAULT">
     <p:spTree>
       <p:nvGrpSpPr>
@@ -495,7 +500,9 @@
       <p:sp>
         <p:nvSpPr>
           <p:cNvPr id="11" name="Número de diapositiva"/>
-          <p:cNvSpPr txBox="1"/>
+          <p:cNvSpPr txBox="1">
+            <a:spLocks noGrp="1"/>
+          </p:cNvSpPr>
           <p:nvPr>
             <p:ph type="sldNum" sz="quarter" idx="2"/>
           </p:nvPr>
@@ -509,8 +516,10 @@
           <a:bodyPr/>
           <a:lstStyle/>
           <a:p>
-            <a:pPr/>
-            <a:fld id="{86CB4B4D-7CA3-9044-876B-883B54F8677D}" type="slidenum"/>
+            <a:fld id="{86CB4B4D-7CA3-9044-876B-883B54F8677D}" type="slidenum">
+              <a:t>‹Nº›</a:t>
+            </a:fld>
+            <a:endParaRPr/>
           </a:p>
         </p:txBody>
       </p:sp>
@@ -519,18 +528,19 @@
   <p:clrMapOvr>
     <a:masterClrMapping/>
   </p:clrMapOvr>
-  <p:transition xmlns:p14="http://schemas.microsoft.com/office/powerpoint/2010/main" spd="med" advClick="1"/>
+  <p:transition spd="med"/>
 </p:sldLayout>
 </file>
 
 <file path=ppt/slideMasters/slideMaster1.xml><?xml version="1.0" encoding="utf-8"?>
-<p:sldMaster xmlns:a="http://schemas.openxmlformats.org/drawingml/2006/main" xmlns:r="http://schemas.openxmlformats.org/officeDocument/2006/relationships" xmlns:p="http://schemas.openxmlformats.org/presentationml/2006/main" xmlns:m="http://schemas.openxmlformats.org/officeDocument/2006/math" xmlns:a14="http://schemas.microsoft.com/office/drawing/2010/main">
+<p:sldMaster xmlns:a="http://schemas.openxmlformats.org/drawingml/2006/main" xmlns:r="http://schemas.openxmlformats.org/officeDocument/2006/relationships" xmlns:p="http://schemas.openxmlformats.org/presentationml/2006/main">
   <p:cSld>
     <p:bg>
       <p:bgPr>
         <a:solidFill>
           <a:srgbClr val="FFFFFF"/>
         </a:solidFill>
+        <a:effectLst/>
       </p:bgPr>
     </p:bg>
     <p:spTree>
@@ -550,7 +560,9 @@
       <p:sp>
         <p:nvSpPr>
           <p:cNvPr id="2" name="Texto del título"/>
-          <p:cNvSpPr txBox="1"/>
+          <p:cNvSpPr txBox="1">
+            <a:spLocks noGrp="1"/>
+          </p:cNvSpPr>
           <p:nvPr>
             <p:ph type="title"/>
           </p:nvPr>
@@ -568,7 +580,7 @@
           </a:ln>
           <a:extLst>
             <a:ext uri="{C572A759-6A51-4108-AA02-DFA0A04FC94B}">
-              <ma14:wrappingTextBoxFlag xmlns:ma14="http://schemas.microsoft.com/office/mac/drawingml/2011/main" val="1"/>
+              <ma14:wrappingTextBoxFlag xmlns:ma14="http://schemas.microsoft.com/office/mac/drawingml/2011/main" xmlns:a14="http://schemas.microsoft.com/office/drawing/2010/main" xmlns:m="http://schemas.openxmlformats.org/officeDocument/2006/math" xmlns="" val="1"/>
             </a:ext>
           </a:extLst>
         </p:spPr>
@@ -576,7 +588,6 @@
           <a:bodyPr lIns="45719" rIns="45719" anchor="ctr"/>
           <a:lstStyle/>
           <a:p>
-            <a:pPr/>
             <a:r>
               <a:t>Texto del título</a:t>
             </a:r>
@@ -586,7 +597,9 @@
       <p:sp>
         <p:nvSpPr>
           <p:cNvPr id="3" name="Nivel de texto 1…"/>
-          <p:cNvSpPr txBox="1"/>
+          <p:cNvSpPr txBox="1">
+            <a:spLocks noGrp="1"/>
+          </p:cNvSpPr>
           <p:nvPr>
             <p:ph type="body" idx="1"/>
           </p:nvPr>
@@ -604,7 +617,7 @@
           </a:ln>
           <a:extLst>
             <a:ext uri="{C572A759-6A51-4108-AA02-DFA0A04FC94B}">
-              <ma14:wrappingTextBoxFlag xmlns:ma14="http://schemas.microsoft.com/office/mac/drawingml/2011/main" val="1"/>
+              <ma14:wrappingTextBoxFlag xmlns:ma14="http://schemas.microsoft.com/office/mac/drawingml/2011/main" xmlns:a14="http://schemas.microsoft.com/office/drawing/2010/main" xmlns:m="http://schemas.openxmlformats.org/officeDocument/2006/math" xmlns="" val="1"/>
             </a:ext>
           </a:extLst>
         </p:spPr>
@@ -612,7 +625,6 @@
           <a:bodyPr lIns="45719" rIns="45719"/>
           <a:lstStyle/>
           <a:p>
-            <a:pPr/>
             <a:r>
               <a:t>Nivel de texto 1</a:t>
             </a:r>
@@ -646,7 +658,9 @@
       <p:sp>
         <p:nvSpPr>
           <p:cNvPr id="4" name="Número de diapositiva"/>
-          <p:cNvSpPr txBox="1"/>
+          <p:cNvSpPr txBox="1">
+            <a:spLocks noGrp="1"/>
+          </p:cNvSpPr>
           <p:nvPr>
             <p:ph type="sldNum" sz="quarter" idx="2"/>
           </p:nvPr>
@@ -673,8 +687,10 @@
             </a:lvl1pPr>
           </a:lstStyle>
           <a:p>
-            <a:pPr/>
-            <a:fld id="{86CB4B4D-7CA3-9044-876B-883B54F8677D}" type="slidenum"/>
+            <a:fld id="{86CB4B4D-7CA3-9044-876B-883B54F8677D}" type="slidenum">
+              <a:t>‹Nº›</a:t>
+            </a:fld>
+            <a:endParaRPr/>
           </a:p>
         </p:txBody>
       </p:sp>
@@ -682,9 +698,9 @@
   </p:cSld>
   <p:clrMap bg1="lt1" tx1="dk1" bg2="lt2" tx2="dk2" accent1="accent1" accent2="accent2" accent3="accent3" accent4="accent4" accent5="accent5" accent6="accent6" hlink="hlink" folHlink="folHlink"/>
   <p:sldLayoutIdLst>
-    <p:sldLayoutId id="2147483649" r:id="rId2"/>
+    <p:sldLayoutId id="2147483649" r:id="rId1"/>
   </p:sldLayoutIdLst>
-  <p:transition xmlns:p14="http://schemas.microsoft.com/office/powerpoint/2010/main" spd="med" advClick="1"/>
+  <p:transition spd="med"/>
   <p:txStyles>
     <p:titleStyle>
       <a:lvl1pPr marL="0" marR="0" indent="0" algn="ctr" defTabSz="914400" rtl="0" latinLnBrk="0">
@@ -702,7 +718,7 @@
         <a:buFontTx/>
         <a:buNone/>
         <a:tabLst/>
-        <a:defRPr b="0" baseline="0" cap="none" i="0" spc="0" strike="noStrike" sz="4400" u="none">
+        <a:defRPr sz="4400" b="0" i="0" u="none" strike="noStrike" cap="none" spc="0" baseline="0">
           <a:solidFill>
             <a:srgbClr val="000000"/>
           </a:solidFill>
@@ -728,7 +744,7 @@
         <a:buFontTx/>
         <a:buNone/>
         <a:tabLst/>
-        <a:defRPr b="0" baseline="0" cap="none" i="0" spc="0" strike="noStrike" sz="4400" u="none">
+        <a:defRPr sz="4400" b="0" i="0" u="none" strike="noStrike" cap="none" spc="0" baseline="0">
           <a:solidFill>
             <a:srgbClr val="000000"/>
           </a:solidFill>
@@ -754,7 +770,7 @@
         <a:buFontTx/>
         <a:buNone/>
         <a:tabLst/>
-        <a:defRPr b="0" baseline="0" cap="none" i="0" spc="0" strike="noStrike" sz="4400" u="none">
+        <a:defRPr sz="4400" b="0" i="0" u="none" strike="noStrike" cap="none" spc="0" baseline="0">
           <a:solidFill>
             <a:srgbClr val="000000"/>
           </a:solidFill>
@@ -780,7 +796,7 @@
         <a:buFontTx/>
         <a:buNone/>
         <a:tabLst/>
-        <a:defRPr b="0" baseline="0" cap="none" i="0" spc="0" strike="noStrike" sz="4400" u="none">
+        <a:defRPr sz="4400" b="0" i="0" u="none" strike="noStrike" cap="none" spc="0" baseline="0">
           <a:solidFill>
             <a:srgbClr val="000000"/>
           </a:solidFill>
@@ -806,7 +822,7 @@
         <a:buFontTx/>
         <a:buNone/>
         <a:tabLst/>
-        <a:defRPr b="0" baseline="0" cap="none" i="0" spc="0" strike="noStrike" sz="4400" u="none">
+        <a:defRPr sz="4400" b="0" i="0" u="none" strike="noStrike" cap="none" spc="0" baseline="0">
           <a:solidFill>
             <a:srgbClr val="000000"/>
           </a:solidFill>
@@ -832,7 +848,7 @@
         <a:buFontTx/>
         <a:buNone/>
         <a:tabLst/>
-        <a:defRPr b="0" baseline="0" cap="none" i="0" spc="0" strike="noStrike" sz="4400" u="none">
+        <a:defRPr sz="4400" b="0" i="0" u="none" strike="noStrike" cap="none" spc="0" baseline="0">
           <a:solidFill>
             <a:srgbClr val="000000"/>
           </a:solidFill>
@@ -858,7 +874,7 @@
         <a:buFontTx/>
         <a:buNone/>
         <a:tabLst/>
-        <a:defRPr b="0" baseline="0" cap="none" i="0" spc="0" strike="noStrike" sz="4400" u="none">
+        <a:defRPr sz="4400" b="0" i="0" u="none" strike="noStrike" cap="none" spc="0" baseline="0">
           <a:solidFill>
             <a:srgbClr val="000000"/>
           </a:solidFill>
@@ -884,7 +900,7 @@
         <a:buFontTx/>
         <a:buNone/>
         <a:tabLst/>
-        <a:defRPr b="0" baseline="0" cap="none" i="0" spc="0" strike="noStrike" sz="4400" u="none">
+        <a:defRPr sz="4400" b="0" i="0" u="none" strike="noStrike" cap="none" spc="0" baseline="0">
           <a:solidFill>
             <a:srgbClr val="000000"/>
           </a:solidFill>
@@ -910,7 +926,7 @@
         <a:buFontTx/>
         <a:buNone/>
         <a:tabLst/>
-        <a:defRPr b="0" baseline="0" cap="none" i="0" spc="0" strike="noStrike" sz="4400" u="none">
+        <a:defRPr sz="4400" b="0" i="0" u="none" strike="noStrike" cap="none" spc="0" baseline="0">
           <a:solidFill>
             <a:srgbClr val="000000"/>
           </a:solidFill>
@@ -938,7 +954,7 @@
         <a:buFont typeface="Arial"/>
         <a:buChar char="•"/>
         <a:tabLst/>
-        <a:defRPr b="0" baseline="0" cap="none" i="0" spc="0" strike="noStrike" sz="3200" u="none">
+        <a:defRPr sz="3200" b="0" i="0" u="none" strike="noStrike" cap="none" spc="0" baseline="0">
           <a:solidFill>
             <a:srgbClr val="000000"/>
           </a:solidFill>
@@ -964,7 +980,7 @@
         <a:buFont typeface="Arial"/>
         <a:buChar char="–"/>
         <a:tabLst/>
-        <a:defRPr b="0" baseline="0" cap="none" i="0" spc="0" strike="noStrike" sz="3200" u="none">
+        <a:defRPr sz="3200" b="0" i="0" u="none" strike="noStrike" cap="none" spc="0" baseline="0">
           <a:solidFill>
             <a:srgbClr val="000000"/>
           </a:solidFill>
@@ -990,7 +1006,7 @@
         <a:buFont typeface="Arial"/>
         <a:buChar char="•"/>
         <a:tabLst/>
-        <a:defRPr b="0" baseline="0" cap="none" i="0" spc="0" strike="noStrike" sz="3200" u="none">
+        <a:defRPr sz="3200" b="0" i="0" u="none" strike="noStrike" cap="none" spc="0" baseline="0">
           <a:solidFill>
             <a:srgbClr val="000000"/>
           </a:solidFill>
@@ -1016,7 +1032,7 @@
         <a:buFont typeface="Arial"/>
         <a:buChar char="–"/>
         <a:tabLst/>
-        <a:defRPr b="0" baseline="0" cap="none" i="0" spc="0" strike="noStrike" sz="3200" u="none">
+        <a:defRPr sz="3200" b="0" i="0" u="none" strike="noStrike" cap="none" spc="0" baseline="0">
           <a:solidFill>
             <a:srgbClr val="000000"/>
           </a:solidFill>
@@ -1042,7 +1058,7 @@
         <a:buFont typeface="Arial"/>
         <a:buChar char="»"/>
         <a:tabLst/>
-        <a:defRPr b="0" baseline="0" cap="none" i="0" spc="0" strike="noStrike" sz="3200" u="none">
+        <a:defRPr sz="3200" b="0" i="0" u="none" strike="noStrike" cap="none" spc="0" baseline="0">
           <a:solidFill>
             <a:srgbClr val="000000"/>
           </a:solidFill>
@@ -1068,7 +1084,7 @@
         <a:buFont typeface="Arial"/>
         <a:buChar char="•"/>
         <a:tabLst/>
-        <a:defRPr b="0" baseline="0" cap="none" i="0" spc="0" strike="noStrike" sz="3200" u="none">
+        <a:defRPr sz="3200" b="0" i="0" u="none" strike="noStrike" cap="none" spc="0" baseline="0">
           <a:solidFill>
             <a:srgbClr val="000000"/>
           </a:solidFill>
@@ -1094,7 +1110,7 @@
         <a:buFont typeface="Arial"/>
         <a:buChar char="•"/>
         <a:tabLst/>
-        <a:defRPr b="0" baseline="0" cap="none" i="0" spc="0" strike="noStrike" sz="3200" u="none">
+        <a:defRPr sz="3200" b="0" i="0" u="none" strike="noStrike" cap="none" spc="0" baseline="0">
           <a:solidFill>
             <a:srgbClr val="000000"/>
           </a:solidFill>
@@ -1120,7 +1136,7 @@
         <a:buFont typeface="Arial"/>
         <a:buChar char="•"/>
         <a:tabLst/>
-        <a:defRPr b="0" baseline="0" cap="none" i="0" spc="0" strike="noStrike" sz="3200" u="none">
+        <a:defRPr sz="3200" b="0" i="0" u="none" strike="noStrike" cap="none" spc="0" baseline="0">
           <a:solidFill>
             <a:srgbClr val="000000"/>
           </a:solidFill>
@@ -1146,7 +1162,7 @@
         <a:buFont typeface="Arial"/>
         <a:buChar char="•"/>
         <a:tabLst/>
-        <a:defRPr b="0" baseline="0" cap="none" i="0" spc="0" strike="noStrike" sz="3200" u="none">
+        <a:defRPr sz="3200" b="0" i="0" u="none" strike="noStrike" cap="none" spc="0" baseline="0">
           <a:solidFill>
             <a:srgbClr val="000000"/>
           </a:solidFill>
@@ -1174,7 +1190,7 @@
         <a:buFontTx/>
         <a:buNone/>
         <a:tabLst/>
-        <a:defRPr b="0" baseline="0" cap="none" i="0" spc="0" strike="noStrike" sz="1200" u="none">
+        <a:defRPr sz="1200" b="0" i="0" u="none" strike="noStrike" cap="none" spc="0" baseline="0">
           <a:solidFill>
             <a:schemeClr val="tx1"/>
           </a:solidFill>
@@ -1200,7 +1216,7 @@
         <a:buFontTx/>
         <a:buNone/>
         <a:tabLst/>
-        <a:defRPr b="0" baseline="0" cap="none" i="0" spc="0" strike="noStrike" sz="1200" u="none">
+        <a:defRPr sz="1200" b="0" i="0" u="none" strike="noStrike" cap="none" spc="0" baseline="0">
           <a:solidFill>
             <a:schemeClr val="tx1"/>
           </a:solidFill>
@@ -1226,7 +1242,7 @@
         <a:buFontTx/>
         <a:buNone/>
         <a:tabLst/>
-        <a:defRPr b="0" baseline="0" cap="none" i="0" spc="0" strike="noStrike" sz="1200" u="none">
+        <a:defRPr sz="1200" b="0" i="0" u="none" strike="noStrike" cap="none" spc="0" baseline="0">
           <a:solidFill>
             <a:schemeClr val="tx1"/>
           </a:solidFill>
@@ -1252,7 +1268,7 @@
         <a:buFontTx/>
         <a:buNone/>
         <a:tabLst/>
-        <a:defRPr b="0" baseline="0" cap="none" i="0" spc="0" strike="noStrike" sz="1200" u="none">
+        <a:defRPr sz="1200" b="0" i="0" u="none" strike="noStrike" cap="none" spc="0" baseline="0">
           <a:solidFill>
             <a:schemeClr val="tx1"/>
           </a:solidFill>
@@ -1278,7 +1294,7 @@
         <a:buFontTx/>
         <a:buNone/>
         <a:tabLst/>
-        <a:defRPr b="0" baseline="0" cap="none" i="0" spc="0" strike="noStrike" sz="1200" u="none">
+        <a:defRPr sz="1200" b="0" i="0" u="none" strike="noStrike" cap="none" spc="0" baseline="0">
           <a:solidFill>
             <a:schemeClr val="tx1"/>
           </a:solidFill>
@@ -1304,7 +1320,7 @@
         <a:buFontTx/>
         <a:buNone/>
         <a:tabLst/>
-        <a:defRPr b="0" baseline="0" cap="none" i="0" spc="0" strike="noStrike" sz="1200" u="none">
+        <a:defRPr sz="1200" b="0" i="0" u="none" strike="noStrike" cap="none" spc="0" baseline="0">
           <a:solidFill>
             <a:schemeClr val="tx1"/>
           </a:solidFill>
@@ -1330,7 +1346,7 @@
         <a:buFontTx/>
         <a:buNone/>
         <a:tabLst/>
-        <a:defRPr b="0" baseline="0" cap="none" i="0" spc="0" strike="noStrike" sz="1200" u="none">
+        <a:defRPr sz="1200" b="0" i="0" u="none" strike="noStrike" cap="none" spc="0" baseline="0">
           <a:solidFill>
             <a:schemeClr val="tx1"/>
           </a:solidFill>
@@ -1356,7 +1372,7 @@
         <a:buFontTx/>
         <a:buNone/>
         <a:tabLst/>
-        <a:defRPr b="0" baseline="0" cap="none" i="0" spc="0" strike="noStrike" sz="1200" u="none">
+        <a:defRPr sz="1200" b="0" i="0" u="none" strike="noStrike" cap="none" spc="0" baseline="0">
           <a:solidFill>
             <a:schemeClr val="tx1"/>
           </a:solidFill>
@@ -1382,7 +1398,7 @@
         <a:buFontTx/>
         <a:buNone/>
         <a:tabLst/>
-        <a:defRPr b="0" baseline="0" cap="none" i="0" spc="0" strike="noStrike" sz="1200" u="none">
+        <a:defRPr sz="1200" b="0" i="0" u="none" strike="noStrike" cap="none" spc="0" baseline="0">
           <a:solidFill>
             <a:schemeClr val="tx1"/>
           </a:solidFill>
@@ -1399,13 +1415,14 @@
 </file>
 
 <file path=ppt/slides/slide1.xml><?xml version="1.0" encoding="utf-8"?>
-<p:sld xmlns:a="http://schemas.openxmlformats.org/drawingml/2006/main" xmlns:r="http://schemas.openxmlformats.org/officeDocument/2006/relationships" xmlns:p="http://schemas.openxmlformats.org/presentationml/2006/main" xmlns:m="http://schemas.openxmlformats.org/officeDocument/2006/math" xmlns:a14="http://schemas.microsoft.com/office/drawing/2010/main" showMasterSp="1" showMasterPhAnim="1">
+<p:sld xmlns:a="http://schemas.openxmlformats.org/drawingml/2006/main" xmlns:r="http://schemas.openxmlformats.org/officeDocument/2006/relationships" xmlns:p="http://schemas.openxmlformats.org/presentationml/2006/main">
   <p:cSld>
     <p:bg>
       <p:bgPr>
         <a:solidFill>
           <a:srgbClr val="1F3A2E"/>
         </a:solidFill>
+        <a:effectLst/>
       </p:bgPr>
     </p:bg>
     <p:spTree>
@@ -1447,7 +1464,7 @@
           <a:bodyPr lIns="45719" rIns="45719"/>
           <a:lstStyle/>
           <a:p>
-            <a:pPr/>
+            <a:endParaRPr/>
           </a:p>
         </p:txBody>
       </p:sp>
@@ -1475,7 +1492,7 @@
           <a:bodyPr lIns="45719" rIns="45719"/>
           <a:lstStyle/>
           <a:p>
-            <a:pPr/>
+            <a:endParaRPr/>
           </a:p>
         </p:txBody>
       </p:sp>
@@ -1503,7 +1520,7 @@
           <a:bodyPr lIns="45719" rIns="45719"/>
           <a:lstStyle/>
           <a:p>
-            <a:pPr/>
+            <a:endParaRPr/>
           </a:p>
         </p:txBody>
       </p:sp>
@@ -1516,9 +1533,7 @@
           <p:nvPr/>
         </p:nvPicPr>
         <p:blipFill>
-          <a:blip r:embed="rId2">
-            <a:extLst/>
-          </a:blip>
+          <a:blip r:embed="rId2"/>
           <a:stretch>
             <a:fillRect/>
           </a:stretch>
@@ -1563,7 +1578,7 @@
           <a:bodyPr lIns="45719" rIns="45719"/>
           <a:lstStyle/>
           <a:p>
-            <a:pPr/>
+            <a:endParaRPr/>
           </a:p>
         </p:txBody>
       </p:sp>
@@ -1586,7 +1601,7 @@
           </a:ln>
           <a:extLst>
             <a:ext uri="{C572A759-6A51-4108-AA02-DFA0A04FC94B}">
-              <ma14:wrappingTextBoxFlag xmlns:ma14="http://schemas.microsoft.com/office/mac/drawingml/2011/main" val="1"/>
+              <ma14:wrappingTextBoxFlag xmlns:ma14="http://schemas.microsoft.com/office/mac/drawingml/2011/main" xmlns:a14="http://schemas.microsoft.com/office/drawing/2010/main" xmlns:m="http://schemas.openxmlformats.org/officeDocument/2006/math" xmlns="" val="1"/>
             </a:ext>
           </a:extLst>
         </p:spPr>
@@ -1596,7 +1611,7 @@
           </a:bodyPr>
           <a:lstStyle>
             <a:lvl1pPr algn="ctr">
-              <a:defRPr b="1" spc="100" sz="1000">
+              <a:defRPr sz="1000" b="1" spc="100">
                 <a:solidFill>
                   <a:srgbClr val="FFFFFF"/>
                 </a:solidFill>
@@ -1604,7 +1619,6 @@
             </a:lvl1pPr>
           </a:lstStyle>
           <a:p>
-            <a:pPr/>
             <a:r>
               <a:t>TRABAJO FINAL · CURSO DE ANÁLISIS DE DATOS</a:t>
             </a:r>
@@ -1630,7 +1644,7 @@
           </a:ln>
           <a:extLst>
             <a:ext uri="{C572A759-6A51-4108-AA02-DFA0A04FC94B}">
-              <ma14:wrappingTextBoxFlag xmlns:ma14="http://schemas.microsoft.com/office/mac/drawingml/2011/main" val="1"/>
+              <ma14:wrappingTextBoxFlag xmlns:ma14="http://schemas.microsoft.com/office/mac/drawingml/2011/main" xmlns:a14="http://schemas.microsoft.com/office/drawing/2010/main" xmlns:m="http://schemas.openxmlformats.org/officeDocument/2006/math" xmlns="" val="1"/>
             </a:ext>
           </a:extLst>
         </p:spPr>
@@ -1640,7 +1654,7 @@
           </a:bodyPr>
           <a:lstStyle>
             <a:lvl1pPr>
-              <a:defRPr b="1" sz="4200">
+              <a:defRPr sz="4200" b="1">
                 <a:solidFill>
                   <a:srgbClr val="FFFFFF"/>
                 </a:solidFill>
@@ -1652,8 +1666,8 @@
             </a:lvl1pPr>
           </a:lstStyle>
           <a:p>
-            <a:pPr/>
-            <a:r>
+            <a:r>
+              <a:rPr dirty="0"/>
               <a:t>Proyecto:</a:t>
             </a:r>
           </a:p>
@@ -1678,7 +1692,7 @@
           </a:ln>
           <a:extLst>
             <a:ext uri="{C572A759-6A51-4108-AA02-DFA0A04FC94B}">
-              <ma14:wrappingTextBoxFlag xmlns:ma14="http://schemas.microsoft.com/office/mac/drawingml/2011/main" val="1"/>
+              <ma14:wrappingTextBoxFlag xmlns:ma14="http://schemas.microsoft.com/office/mac/drawingml/2011/main" xmlns:a14="http://schemas.microsoft.com/office/drawing/2010/main" xmlns:m="http://schemas.openxmlformats.org/officeDocument/2006/math" xmlns="" val="1"/>
             </a:ext>
           </a:extLst>
         </p:spPr>
@@ -1696,7 +1710,6 @@
             </a:lvl1pPr>
           </a:lstStyle>
           <a:p>
-            <a:pPr/>
             <a:r>
               <a:t>Emisiones del sector ganadero mundial (1961–2023)</a:t>
             </a:r>
@@ -1730,7 +1743,7 @@
           <a:bodyPr lIns="45719" rIns="45719"/>
           <a:lstStyle/>
           <a:p>
-            <a:pPr/>
+            <a:endParaRPr/>
           </a:p>
         </p:txBody>
       </p:sp>
@@ -1753,7 +1766,7 @@
           </a:ln>
           <a:extLst>
             <a:ext uri="{C572A759-6A51-4108-AA02-DFA0A04FC94B}">
-              <ma14:wrappingTextBoxFlag xmlns:ma14="http://schemas.microsoft.com/office/mac/drawingml/2011/main" val="1"/>
+              <ma14:wrappingTextBoxFlag xmlns:ma14="http://schemas.microsoft.com/office/mac/drawingml/2011/main" xmlns:a14="http://schemas.microsoft.com/office/drawing/2010/main" xmlns:m="http://schemas.openxmlformats.org/officeDocument/2006/math" xmlns="" val="1"/>
             </a:ext>
           </a:extLst>
         </p:spPr>
@@ -1767,7 +1780,7 @@
               <a:lnSpc>
                 <a:spcPct val="116000"/>
               </a:lnSpc>
-              <a:defRPr b="1" sz="1300">
+              <a:defRPr sz="1300" b="1">
                 <a:solidFill>
                   <a:srgbClr val="E8A79B"/>
                 </a:solidFill>
@@ -1784,18 +1797,13 @@
               </a:rPr>
               <a:t>Creo que mucha gente no es consciente del impacto del sector ganadero en las emisiones de CO2 y de que, por tanto, haciendo pequeños cambios de alimentación, como reducir la ingesta de carne, podemos ayudar, aunque sea un poco, a este planeta del que no somos más que inquilinos: lo compartimos con miles de especies y solemos olvidarlo.</a:t>
             </a:r>
-            <a:endParaRPr b="0" i="1">
-              <a:solidFill>
-                <a:srgbClr val="E7E2D6"/>
-              </a:solidFill>
-            </a:endParaRPr>
           </a:p>
           <a:p>
             <a:pPr>
               <a:lnSpc>
                 <a:spcPct val="116000"/>
               </a:lnSpc>
-              <a:defRPr b="1" sz="1200">
+              <a:defRPr sz="1200" b="1">
                 <a:solidFill>
                   <a:srgbClr val="E8A79B"/>
                 </a:solidFill>
@@ -1812,7 +1820,7 @@
               <a:lnSpc>
                 <a:spcPct val="116000"/>
               </a:lnSpc>
-              <a:defRPr b="1" sz="1300">
+              <a:defRPr sz="1300" b="1">
                 <a:solidFill>
                   <a:srgbClr val="E8A79B"/>
                 </a:solidFill>
@@ -1837,7 +1845,7 @@
               <a:lnSpc>
                 <a:spcPct val="116000"/>
               </a:lnSpc>
-              <a:defRPr b="1" sz="1200">
+              <a:defRPr sz="1200" b="1">
                 <a:solidFill>
                   <a:srgbClr val="E8A79B"/>
                 </a:solidFill>
@@ -1870,7 +1878,7 @@
           </a:ln>
           <a:extLst>
             <a:ext uri="{C572A759-6A51-4108-AA02-DFA0A04FC94B}">
-              <ma14:wrappingTextBoxFlag xmlns:ma14="http://schemas.microsoft.com/office/mac/drawingml/2011/main" val="1"/>
+              <ma14:wrappingTextBoxFlag xmlns:ma14="http://schemas.microsoft.com/office/mac/drawingml/2011/main" xmlns:a14="http://schemas.microsoft.com/office/drawing/2010/main" xmlns:m="http://schemas.openxmlformats.org/officeDocument/2006/math" xmlns="" val="1"/>
             </a:ext>
           </a:extLst>
         </p:spPr>
@@ -1881,7 +1889,7 @@
           <a:lstStyle/>
           <a:p>
             <a:pPr>
-              <a:defRPr b="1" sz="1300">
+              <a:defRPr sz="1300" b="1">
                 <a:solidFill>
                   <a:srgbClr val="CFE0D4"/>
                 </a:solidFill>
@@ -1920,7 +1928,7 @@
           </a:ln>
           <a:extLst>
             <a:ext uri="{C572A759-6A51-4108-AA02-DFA0A04FC94B}">
-              <ma14:wrappingTextBoxFlag xmlns:ma14="http://schemas.microsoft.com/office/mac/drawingml/2011/main" val="1"/>
+              <ma14:wrappingTextBoxFlag xmlns:ma14="http://schemas.microsoft.com/office/mac/drawingml/2011/main" xmlns:a14="http://schemas.microsoft.com/office/drawing/2010/main" xmlns:m="http://schemas.openxmlformats.org/officeDocument/2006/math" xmlns="" val="1"/>
             </a:ext>
           </a:extLst>
         </p:spPr>
@@ -1930,7 +1938,7 @@
           </a:bodyPr>
           <a:lstStyle>
             <a:lvl1pPr>
-              <a:defRPr i="1" sz="1000">
+              <a:defRPr sz="1000" i="1">
                 <a:solidFill>
                   <a:srgbClr val="6E8578"/>
                 </a:solidFill>
@@ -1938,7 +1946,6 @@
             </a:lvl1pPr>
           </a:lstStyle>
           <a:p>
-            <a:pPr/>
             <a:r>
               <a:t>fao.org/faostat/es/#data/GLE</a:t>
             </a:r>
@@ -1964,7 +1971,7 @@
           </a:ln>
           <a:extLst>
             <a:ext uri="{C572A759-6A51-4108-AA02-DFA0A04FC94B}">
-              <ma14:wrappingTextBoxFlag xmlns:ma14="http://schemas.microsoft.com/office/mac/drawingml/2011/main" val="1"/>
+              <ma14:wrappingTextBoxFlag xmlns:ma14="http://schemas.microsoft.com/office/mac/drawingml/2011/main" xmlns:a14="http://schemas.microsoft.com/office/drawing/2010/main" xmlns:m="http://schemas.openxmlformats.org/officeDocument/2006/math" xmlns="" val="1"/>
             </a:ext>
           </a:extLst>
         </p:spPr>
@@ -1974,7 +1981,7 @@
           </a:bodyPr>
           <a:lstStyle>
             <a:lvl1pPr>
-              <a:defRPr b="1" sz="2400">
+              <a:defRPr sz="2400" b="1">
                 <a:solidFill>
                   <a:srgbClr val="D98C3F"/>
                 </a:solidFill>
@@ -1986,7 +1993,6 @@
             </a:lvl1pPr>
           </a:lstStyle>
           <a:p>
-            <a:pPr/>
             <a:r>
               <a:t>5</a:t>
             </a:r>
@@ -2012,7 +2018,7 @@
           </a:ln>
           <a:extLst>
             <a:ext uri="{C572A759-6A51-4108-AA02-DFA0A04FC94B}">
-              <ma14:wrappingTextBoxFlag xmlns:ma14="http://schemas.microsoft.com/office/mac/drawingml/2011/main" val="1"/>
+              <ma14:wrappingTextBoxFlag xmlns:ma14="http://schemas.microsoft.com/office/mac/drawingml/2011/main" xmlns:a14="http://schemas.microsoft.com/office/drawing/2010/main" xmlns:m="http://schemas.openxmlformats.org/officeDocument/2006/math" xmlns="" val="1"/>
             </a:ext>
           </a:extLst>
         </p:spPr>
@@ -2066,7 +2072,7 @@
           </a:ln>
           <a:extLst>
             <a:ext uri="{C572A759-6A51-4108-AA02-DFA0A04FC94B}">
-              <ma14:wrappingTextBoxFlag xmlns:ma14="http://schemas.microsoft.com/office/mac/drawingml/2011/main" val="1"/>
+              <ma14:wrappingTextBoxFlag xmlns:ma14="http://schemas.microsoft.com/office/mac/drawingml/2011/main" xmlns:a14="http://schemas.microsoft.com/office/drawing/2010/main" xmlns:m="http://schemas.openxmlformats.org/officeDocument/2006/math" xmlns="" val="1"/>
             </a:ext>
           </a:extLst>
         </p:spPr>
@@ -2076,7 +2082,7 @@
           </a:bodyPr>
           <a:lstStyle>
             <a:lvl1pPr>
-              <a:defRPr b="1" sz="2400">
+              <a:defRPr sz="2400" b="1">
                 <a:solidFill>
                   <a:srgbClr val="D98C3F"/>
                 </a:solidFill>
@@ -2088,7 +2094,6 @@
             </a:lvl1pPr>
           </a:lstStyle>
           <a:p>
-            <a:pPr/>
             <a:r>
               <a:t>77.491</a:t>
             </a:r>
@@ -2114,7 +2119,7 @@
           </a:ln>
           <a:extLst>
             <a:ext uri="{C572A759-6A51-4108-AA02-DFA0A04FC94B}">
-              <ma14:wrappingTextBoxFlag xmlns:ma14="http://schemas.microsoft.com/office/mac/drawingml/2011/main" val="1"/>
+              <ma14:wrappingTextBoxFlag xmlns:ma14="http://schemas.microsoft.com/office/mac/drawingml/2011/main" xmlns:a14="http://schemas.microsoft.com/office/drawing/2010/main" xmlns:m="http://schemas.openxmlformats.org/officeDocument/2006/math" xmlns="" val="1"/>
             </a:ext>
           </a:extLst>
         </p:spPr>
@@ -2132,7 +2137,6 @@
             </a:lvl1pPr>
           </a:lstStyle>
           <a:p>
-            <a:pPr/>
             <a:r>
               <a:t>registros combinados</a:t>
             </a:r>
@@ -2158,7 +2162,7 @@
           </a:ln>
           <a:extLst>
             <a:ext uri="{C572A759-6A51-4108-AA02-DFA0A04FC94B}">
-              <ma14:wrappingTextBoxFlag xmlns:ma14="http://schemas.microsoft.com/office/mac/drawingml/2011/main" val="1"/>
+              <ma14:wrappingTextBoxFlag xmlns:ma14="http://schemas.microsoft.com/office/mac/drawingml/2011/main" xmlns:a14="http://schemas.microsoft.com/office/drawing/2010/main" xmlns:m="http://schemas.openxmlformats.org/officeDocument/2006/math" xmlns="" val="1"/>
             </a:ext>
           </a:extLst>
         </p:spPr>
@@ -2168,7 +2172,7 @@
           </a:bodyPr>
           <a:lstStyle>
             <a:lvl1pPr>
-              <a:defRPr b="1" sz="2400">
+              <a:defRPr sz="2400" b="1">
                 <a:solidFill>
                   <a:srgbClr val="D98C3F"/>
                 </a:solidFill>
@@ -2180,7 +2184,6 @@
             </a:lvl1pPr>
           </a:lstStyle>
           <a:p>
-            <a:pPr/>
             <a:r>
               <a:t>1961–2023</a:t>
             </a:r>
@@ -2206,7 +2209,7 @@
           </a:ln>
           <a:extLst>
             <a:ext uri="{C572A759-6A51-4108-AA02-DFA0A04FC94B}">
-              <ma14:wrappingTextBoxFlag xmlns:ma14="http://schemas.microsoft.com/office/mac/drawingml/2011/main" val="1"/>
+              <ma14:wrappingTextBoxFlag xmlns:ma14="http://schemas.microsoft.com/office/mac/drawingml/2011/main" xmlns:a14="http://schemas.microsoft.com/office/drawing/2010/main" xmlns:m="http://schemas.openxmlformats.org/officeDocument/2006/math" xmlns="" val="1"/>
             </a:ext>
           </a:extLst>
         </p:spPr>
@@ -2224,7 +2227,6 @@
             </a:lvl1pPr>
           </a:lstStyle>
           <a:p>
-            <a:pPr/>
             <a:r>
               <a:t>63 años de histórico</a:t>
             </a:r>
@@ -2260,7 +2262,7 @@
           <a:bodyPr lIns="45719" rIns="45719"/>
           <a:lstStyle/>
           <a:p>
-            <a:pPr/>
+            <a:endParaRPr/>
           </a:p>
         </p:txBody>
       </p:sp>
@@ -2283,7 +2285,7 @@
           </a:ln>
           <a:extLst>
             <a:ext uri="{C572A759-6A51-4108-AA02-DFA0A04FC94B}">
-              <ma14:wrappingTextBoxFlag xmlns:ma14="http://schemas.microsoft.com/office/mac/drawingml/2011/main" val="1"/>
+              <ma14:wrappingTextBoxFlag xmlns:ma14="http://schemas.microsoft.com/office/mac/drawingml/2011/main" xmlns:a14="http://schemas.microsoft.com/office/drawing/2010/main" xmlns:m="http://schemas.openxmlformats.org/officeDocument/2006/math" xmlns="" val="1"/>
             </a:ext>
           </a:extLst>
         </p:spPr>
@@ -2293,7 +2295,7 @@
           </a:bodyPr>
           <a:lstStyle>
             <a:lvl1pPr>
-              <a:defRPr b="1" spc="100" sz="1100">
+              <a:defRPr sz="1100" b="1" spc="100">
                 <a:solidFill>
                   <a:srgbClr val="B5443A"/>
                 </a:solidFill>
@@ -2301,7 +2303,6 @@
             </a:lvl1pPr>
           </a:lstStyle>
           <a:p>
-            <a:pPr/>
             <a:r>
               <a:t>EL PIPELINE</a:t>
             </a:r>
@@ -2333,7 +2334,7 @@
           <a:bodyPr lIns="45719" rIns="45719"/>
           <a:lstStyle/>
           <a:p>
-            <a:pPr/>
+            <a:endParaRPr/>
           </a:p>
         </p:txBody>
       </p:sp>
@@ -2356,7 +2357,7 @@
           </a:ln>
           <a:extLst>
             <a:ext uri="{C572A759-6A51-4108-AA02-DFA0A04FC94B}">
-              <ma14:wrappingTextBoxFlag xmlns:ma14="http://schemas.microsoft.com/office/mac/drawingml/2011/main" val="1"/>
+              <ma14:wrappingTextBoxFlag xmlns:ma14="http://schemas.microsoft.com/office/mac/drawingml/2011/main" xmlns:a14="http://schemas.microsoft.com/office/drawing/2010/main" xmlns:m="http://schemas.openxmlformats.org/officeDocument/2006/math" xmlns="" val="1"/>
             </a:ext>
           </a:extLst>
         </p:spPr>
@@ -2366,7 +2367,7 @@
           </a:bodyPr>
           <a:lstStyle>
             <a:lvl1pPr algn="ctr">
-              <a:defRPr b="1" sz="1200">
+              <a:defRPr sz="1200" b="1">
                 <a:solidFill>
                   <a:srgbClr val="FFFFFF"/>
                 </a:solidFill>
@@ -2374,7 +2375,6 @@
             </a:lvl1pPr>
           </a:lstStyle>
           <a:p>
-            <a:pPr/>
             <a:r>
               <a:t>1</a:t>
             </a:r>
@@ -2400,7 +2400,7 @@
           </a:ln>
           <a:extLst>
             <a:ext uri="{C572A759-6A51-4108-AA02-DFA0A04FC94B}">
-              <ma14:wrappingTextBoxFlag xmlns:ma14="http://schemas.microsoft.com/office/mac/drawingml/2011/main" val="1"/>
+              <ma14:wrappingTextBoxFlag xmlns:ma14="http://schemas.microsoft.com/office/mac/drawingml/2011/main" xmlns:a14="http://schemas.microsoft.com/office/drawing/2010/main" xmlns:m="http://schemas.openxmlformats.org/officeDocument/2006/math" xmlns="" val="1"/>
             </a:ext>
           </a:extLst>
         </p:spPr>
@@ -2418,7 +2418,6 @@
             </a:lvl1pPr>
           </a:lstStyle>
           <a:p>
-            <a:pPr/>
             <a:r>
               <a:t>Recoger</a:t>
             </a:r>
@@ -2450,7 +2449,7 @@
           <a:bodyPr lIns="45719" rIns="45719"/>
           <a:lstStyle/>
           <a:p>
-            <a:pPr/>
+            <a:endParaRPr/>
           </a:p>
         </p:txBody>
       </p:sp>
@@ -2479,7 +2478,7 @@
           <a:bodyPr lIns="45719" rIns="45719"/>
           <a:lstStyle/>
           <a:p>
-            <a:pPr/>
+            <a:endParaRPr/>
           </a:p>
         </p:txBody>
       </p:sp>
@@ -2502,7 +2501,7 @@
           </a:ln>
           <a:extLst>
             <a:ext uri="{C572A759-6A51-4108-AA02-DFA0A04FC94B}">
-              <ma14:wrappingTextBoxFlag xmlns:ma14="http://schemas.microsoft.com/office/mac/drawingml/2011/main" val="1"/>
+              <ma14:wrappingTextBoxFlag xmlns:ma14="http://schemas.microsoft.com/office/mac/drawingml/2011/main" xmlns:a14="http://schemas.microsoft.com/office/drawing/2010/main" xmlns:m="http://schemas.openxmlformats.org/officeDocument/2006/math" xmlns="" val="1"/>
             </a:ext>
           </a:extLst>
         </p:spPr>
@@ -2512,7 +2511,7 @@
           </a:bodyPr>
           <a:lstStyle>
             <a:lvl1pPr algn="ctr">
-              <a:defRPr b="1" sz="1200">
+              <a:defRPr sz="1200" b="1">
                 <a:solidFill>
                   <a:srgbClr val="FFFFFF"/>
                 </a:solidFill>
@@ -2520,7 +2519,6 @@
             </a:lvl1pPr>
           </a:lstStyle>
           <a:p>
-            <a:pPr/>
             <a:r>
               <a:t>2</a:t>
             </a:r>
@@ -2546,7 +2544,7 @@
           </a:ln>
           <a:extLst>
             <a:ext uri="{C572A759-6A51-4108-AA02-DFA0A04FC94B}">
-              <ma14:wrappingTextBoxFlag xmlns:ma14="http://schemas.microsoft.com/office/mac/drawingml/2011/main" val="1"/>
+              <ma14:wrappingTextBoxFlag xmlns:ma14="http://schemas.microsoft.com/office/mac/drawingml/2011/main" xmlns:a14="http://schemas.microsoft.com/office/drawing/2010/main" xmlns:m="http://schemas.openxmlformats.org/officeDocument/2006/math" xmlns="" val="1"/>
             </a:ext>
           </a:extLst>
         </p:spPr>
@@ -2564,7 +2562,6 @@
             </a:lvl1pPr>
           </a:lstStyle>
           <a:p>
-            <a:pPr/>
             <a:r>
               <a:t>Almacenar</a:t>
             </a:r>
@@ -2596,7 +2593,7 @@
           <a:bodyPr lIns="45719" rIns="45719"/>
           <a:lstStyle/>
           <a:p>
-            <a:pPr/>
+            <a:endParaRPr/>
           </a:p>
         </p:txBody>
       </p:sp>
@@ -2625,7 +2622,7 @@
           <a:bodyPr lIns="45719" rIns="45719"/>
           <a:lstStyle/>
           <a:p>
-            <a:pPr/>
+            <a:endParaRPr/>
           </a:p>
         </p:txBody>
       </p:sp>
@@ -2648,7 +2645,7 @@
           </a:ln>
           <a:extLst>
             <a:ext uri="{C572A759-6A51-4108-AA02-DFA0A04FC94B}">
-              <ma14:wrappingTextBoxFlag xmlns:ma14="http://schemas.microsoft.com/office/mac/drawingml/2011/main" val="1"/>
+              <ma14:wrappingTextBoxFlag xmlns:ma14="http://schemas.microsoft.com/office/mac/drawingml/2011/main" xmlns:a14="http://schemas.microsoft.com/office/drawing/2010/main" xmlns:m="http://schemas.openxmlformats.org/officeDocument/2006/math" xmlns="" val="1"/>
             </a:ext>
           </a:extLst>
         </p:spPr>
@@ -2658,7 +2655,7 @@
           </a:bodyPr>
           <a:lstStyle>
             <a:lvl1pPr algn="ctr">
-              <a:defRPr b="1" sz="1200">
+              <a:defRPr sz="1200" b="1">
                 <a:solidFill>
                   <a:srgbClr val="FFFFFF"/>
                 </a:solidFill>
@@ -2666,7 +2663,6 @@
             </a:lvl1pPr>
           </a:lstStyle>
           <a:p>
-            <a:pPr/>
             <a:r>
               <a:t>3</a:t>
             </a:r>
@@ -2692,7 +2688,7 @@
           </a:ln>
           <a:extLst>
             <a:ext uri="{C572A759-6A51-4108-AA02-DFA0A04FC94B}">
-              <ma14:wrappingTextBoxFlag xmlns:ma14="http://schemas.microsoft.com/office/mac/drawingml/2011/main" val="1"/>
+              <ma14:wrappingTextBoxFlag xmlns:ma14="http://schemas.microsoft.com/office/mac/drawingml/2011/main" xmlns:a14="http://schemas.microsoft.com/office/drawing/2010/main" xmlns:m="http://schemas.openxmlformats.org/officeDocument/2006/math" xmlns="" val="1"/>
             </a:ext>
           </a:extLst>
         </p:spPr>
@@ -2710,7 +2706,6 @@
             </a:lvl1pPr>
           </a:lstStyle>
           <a:p>
-            <a:pPr/>
             <a:r>
               <a:t>Procesar</a:t>
             </a:r>
@@ -2742,7 +2737,7 @@
           <a:bodyPr lIns="45719" rIns="45719"/>
           <a:lstStyle/>
           <a:p>
-            <a:pPr/>
+            <a:endParaRPr/>
           </a:p>
         </p:txBody>
       </p:sp>
@@ -2771,7 +2766,7 @@
           <a:bodyPr lIns="45719" rIns="45719"/>
           <a:lstStyle/>
           <a:p>
-            <a:pPr/>
+            <a:endParaRPr/>
           </a:p>
         </p:txBody>
       </p:sp>
@@ -2794,7 +2789,7 @@
           </a:ln>
           <a:extLst>
             <a:ext uri="{C572A759-6A51-4108-AA02-DFA0A04FC94B}">
-              <ma14:wrappingTextBoxFlag xmlns:ma14="http://schemas.microsoft.com/office/mac/drawingml/2011/main" val="1"/>
+              <ma14:wrappingTextBoxFlag xmlns:ma14="http://schemas.microsoft.com/office/mac/drawingml/2011/main" xmlns:a14="http://schemas.microsoft.com/office/drawing/2010/main" xmlns:m="http://schemas.openxmlformats.org/officeDocument/2006/math" xmlns="" val="1"/>
             </a:ext>
           </a:extLst>
         </p:spPr>
@@ -2804,7 +2799,7 @@
           </a:bodyPr>
           <a:lstStyle>
             <a:lvl1pPr algn="ctr">
-              <a:defRPr b="1" sz="1200">
+              <a:defRPr sz="1200" b="1">
                 <a:solidFill>
                   <a:srgbClr val="FFFFFF"/>
                 </a:solidFill>
@@ -2812,7 +2807,6 @@
             </a:lvl1pPr>
           </a:lstStyle>
           <a:p>
-            <a:pPr/>
             <a:r>
               <a:t>4</a:t>
             </a:r>
@@ -2838,7 +2832,7 @@
           </a:ln>
           <a:extLst>
             <a:ext uri="{C572A759-6A51-4108-AA02-DFA0A04FC94B}">
-              <ma14:wrappingTextBoxFlag xmlns:ma14="http://schemas.microsoft.com/office/mac/drawingml/2011/main" val="1"/>
+              <ma14:wrappingTextBoxFlag xmlns:ma14="http://schemas.microsoft.com/office/mac/drawingml/2011/main" xmlns:a14="http://schemas.microsoft.com/office/drawing/2010/main" xmlns:m="http://schemas.openxmlformats.org/officeDocument/2006/math" xmlns="" val="1"/>
             </a:ext>
           </a:extLst>
         </p:spPr>
@@ -2856,7 +2850,6 @@
             </a:lvl1pPr>
           </a:lstStyle>
           <a:p>
-            <a:pPr/>
             <a:r>
               <a:t>Visualizar</a:t>
             </a:r>
@@ -2888,7 +2881,7 @@
           <a:bodyPr lIns="45719" rIns="45719"/>
           <a:lstStyle/>
           <a:p>
-            <a:pPr/>
+            <a:endParaRPr/>
           </a:p>
         </p:txBody>
       </p:sp>
@@ -2917,7 +2910,7 @@
           <a:bodyPr lIns="45719" rIns="45719"/>
           <a:lstStyle/>
           <a:p>
-            <a:pPr/>
+            <a:endParaRPr/>
           </a:p>
         </p:txBody>
       </p:sp>
@@ -2940,7 +2933,7 @@
           </a:ln>
           <a:extLst>
             <a:ext uri="{C572A759-6A51-4108-AA02-DFA0A04FC94B}">
-              <ma14:wrappingTextBoxFlag xmlns:ma14="http://schemas.microsoft.com/office/mac/drawingml/2011/main" val="1"/>
+              <ma14:wrappingTextBoxFlag xmlns:ma14="http://schemas.microsoft.com/office/mac/drawingml/2011/main" xmlns:a14="http://schemas.microsoft.com/office/drawing/2010/main" xmlns:m="http://schemas.openxmlformats.org/officeDocument/2006/math" xmlns="" val="1"/>
             </a:ext>
           </a:extLst>
         </p:spPr>
@@ -2950,7 +2943,7 @@
           </a:bodyPr>
           <a:lstStyle>
             <a:lvl1pPr algn="ctr">
-              <a:defRPr b="1" sz="1200">
+              <a:defRPr sz="1200" b="1">
                 <a:solidFill>
                   <a:srgbClr val="FFFFFF"/>
                 </a:solidFill>
@@ -2958,7 +2951,6 @@
             </a:lvl1pPr>
           </a:lstStyle>
           <a:p>
-            <a:pPr/>
             <a:r>
               <a:t>5</a:t>
             </a:r>
@@ -2984,7 +2976,7 @@
           </a:ln>
           <a:extLst>
             <a:ext uri="{C572A759-6A51-4108-AA02-DFA0A04FC94B}">
-              <ma14:wrappingTextBoxFlag xmlns:ma14="http://schemas.microsoft.com/office/mac/drawingml/2011/main" val="1"/>
+              <ma14:wrappingTextBoxFlag xmlns:ma14="http://schemas.microsoft.com/office/mac/drawingml/2011/main" xmlns:a14="http://schemas.microsoft.com/office/drawing/2010/main" xmlns:m="http://schemas.openxmlformats.org/officeDocument/2006/math" xmlns="" val="1"/>
             </a:ext>
           </a:extLst>
         </p:spPr>
@@ -3002,7 +2994,6 @@
             </a:lvl1pPr>
           </a:lstStyle>
           <a:p>
-            <a:pPr/>
             <a:r>
               <a:t>Automatizar</a:t>
             </a:r>
@@ -3018,9 +3009,7 @@
           <p:nvPr/>
         </p:nvPicPr>
         <p:blipFill>
-          <a:blip r:embed="rId3">
-            <a:extLst/>
-          </a:blip>
+          <a:blip r:embed="rId3"/>
           <a:stretch>
             <a:fillRect/>
           </a:stretch>
@@ -3043,18 +3032,19 @@
   <p:clrMapOvr>
     <a:masterClrMapping/>
   </p:clrMapOvr>
-  <p:transition xmlns:p14="http://schemas.microsoft.com/office/powerpoint/2010/main" spd="med" advClick="1"/>
+  <p:transition spd="med"/>
 </p:sld>
 </file>
 
 <file path=ppt/slides/slide10.xml><?xml version="1.0" encoding="utf-8"?>
-<p:sld xmlns:a="http://schemas.openxmlformats.org/drawingml/2006/main" xmlns:r="http://schemas.openxmlformats.org/officeDocument/2006/relationships" xmlns:p="http://schemas.openxmlformats.org/presentationml/2006/main" xmlns:m="http://schemas.openxmlformats.org/officeDocument/2006/math" xmlns:a14="http://schemas.microsoft.com/office/drawing/2010/main" showMasterSp="1" showMasterPhAnim="1">
+<p:sld xmlns:a="http://schemas.openxmlformats.org/drawingml/2006/main" xmlns:r="http://schemas.openxmlformats.org/officeDocument/2006/relationships" xmlns:p="http://schemas.openxmlformats.org/presentationml/2006/main">
   <p:cSld>
     <p:bg>
       <p:bgPr>
         <a:solidFill>
           <a:srgbClr val="F4EFE6"/>
         </a:solidFill>
+        <a:effectLst/>
       </p:bgPr>
     </p:bg>
     <p:spTree>
@@ -3098,7 +3088,7 @@
           <a:bodyPr lIns="45719" rIns="45719"/>
           <a:lstStyle/>
           <a:p>
-            <a:pPr/>
+            <a:endParaRPr/>
           </a:p>
         </p:txBody>
       </p:sp>
@@ -3121,7 +3111,7 @@
           </a:ln>
           <a:extLst>
             <a:ext uri="{C572A759-6A51-4108-AA02-DFA0A04FC94B}">
-              <ma14:wrappingTextBoxFlag xmlns:ma14="http://schemas.microsoft.com/office/mac/drawingml/2011/main" val="1"/>
+              <ma14:wrappingTextBoxFlag xmlns:ma14="http://schemas.microsoft.com/office/mac/drawingml/2011/main" xmlns:a14="http://schemas.microsoft.com/office/drawing/2010/main" xmlns:m="http://schemas.openxmlformats.org/officeDocument/2006/math" xmlns="" val="1"/>
             </a:ext>
           </a:extLst>
         </p:spPr>
@@ -3131,7 +3121,7 @@
           </a:bodyPr>
           <a:lstStyle>
             <a:lvl1pPr algn="ctr">
-              <a:defRPr b="1" spc="100" sz="1000">
+              <a:defRPr sz="1000" b="1" spc="100">
                 <a:solidFill>
                   <a:srgbClr val="FFFFFF"/>
                 </a:solidFill>
@@ -3139,7 +3129,6 @@
             </a:lvl1pPr>
           </a:lstStyle>
           <a:p>
-            <a:pPr/>
             <a:r>
               <a:t>PASO 6 · N8N</a:t>
             </a:r>
@@ -3173,7 +3162,7 @@
           <a:bodyPr lIns="45719" rIns="45719"/>
           <a:lstStyle/>
           <a:p>
-            <a:pPr/>
+            <a:endParaRPr/>
           </a:p>
         </p:txBody>
       </p:sp>
@@ -3196,7 +3185,7 @@
           </a:ln>
           <a:extLst>
             <a:ext uri="{C572A759-6A51-4108-AA02-DFA0A04FC94B}">
-              <ma14:wrappingTextBoxFlag xmlns:ma14="http://schemas.microsoft.com/office/mac/drawingml/2011/main" val="1"/>
+              <ma14:wrappingTextBoxFlag xmlns:ma14="http://schemas.microsoft.com/office/mac/drawingml/2011/main" xmlns:a14="http://schemas.microsoft.com/office/drawing/2010/main" xmlns:m="http://schemas.openxmlformats.org/officeDocument/2006/math" xmlns="" val="1"/>
             </a:ext>
           </a:extLst>
         </p:spPr>
@@ -3206,7 +3195,7 @@
           </a:bodyPr>
           <a:lstStyle>
             <a:lvl1pPr algn="ctr">
-              <a:defRPr b="1" sz="1000">
+              <a:defRPr sz="1000" b="1">
                 <a:solidFill>
                   <a:srgbClr val="FFFFFF"/>
                 </a:solidFill>
@@ -3214,7 +3203,6 @@
             </a:lvl1pPr>
           </a:lstStyle>
           <a:p>
-            <a:pPr/>
             <a:r>
               <a:t>● DEMO EN VIVO</a:t>
             </a:r>
@@ -3240,7 +3228,7 @@
           </a:ln>
           <a:extLst>
             <a:ext uri="{C572A759-6A51-4108-AA02-DFA0A04FC94B}">
-              <ma14:wrappingTextBoxFlag xmlns:ma14="http://schemas.microsoft.com/office/mac/drawingml/2011/main" val="1"/>
+              <ma14:wrappingTextBoxFlag xmlns:ma14="http://schemas.microsoft.com/office/mac/drawingml/2011/main" xmlns:a14="http://schemas.microsoft.com/office/drawing/2010/main" xmlns:m="http://schemas.openxmlformats.org/officeDocument/2006/math" xmlns="" val="1"/>
             </a:ext>
           </a:extLst>
         </p:spPr>
@@ -3250,7 +3238,7 @@
           </a:bodyPr>
           <a:lstStyle>
             <a:lvl1pPr>
-              <a:defRPr b="1" sz="3000">
+              <a:defRPr sz="3000" b="1">
                 <a:solidFill>
                   <a:srgbClr val="22302A"/>
                 </a:solidFill>
@@ -3262,7 +3250,6 @@
             </a:lvl1pPr>
           </a:lstStyle>
           <a:p>
-            <a:pPr/>
             <a:r>
               <a:t>Automatización con n8n</a:t>
             </a:r>
@@ -3288,7 +3275,7 @@
           </a:ln>
           <a:extLst>
             <a:ext uri="{C572A759-6A51-4108-AA02-DFA0A04FC94B}">
-              <ma14:wrappingTextBoxFlag xmlns:ma14="http://schemas.microsoft.com/office/mac/drawingml/2011/main" val="1"/>
+              <ma14:wrappingTextBoxFlag xmlns:ma14="http://schemas.microsoft.com/office/mac/drawingml/2011/main" xmlns:a14="http://schemas.microsoft.com/office/drawing/2010/main" xmlns:m="http://schemas.openxmlformats.org/officeDocument/2006/math" xmlns="" val="1"/>
             </a:ext>
           </a:extLst>
         </p:spPr>
@@ -3306,7 +3293,6 @@
             </a:lvl1pPr>
           </a:lstStyle>
           <a:p>
-            <a:pPr/>
             <a:r>
               <a:t>emisiones_workflow_n8n.json — consulta MySQL y envía un resumen por Telegram</a:t>
             </a:r>
@@ -3342,7 +3328,7 @@
           <a:bodyPr lIns="45719" rIns="45719"/>
           <a:lstStyle/>
           <a:p>
-            <a:pPr/>
+            <a:endParaRPr/>
           </a:p>
         </p:txBody>
       </p:sp>
@@ -3365,7 +3351,7 @@
           </a:ln>
           <a:extLst>
             <a:ext uri="{C572A759-6A51-4108-AA02-DFA0A04FC94B}">
-              <ma14:wrappingTextBoxFlag xmlns:ma14="http://schemas.microsoft.com/office/mac/drawingml/2011/main" val="1"/>
+              <ma14:wrappingTextBoxFlag xmlns:ma14="http://schemas.microsoft.com/office/mac/drawingml/2011/main" xmlns:a14="http://schemas.microsoft.com/office/drawing/2010/main" xmlns:m="http://schemas.openxmlformats.org/officeDocument/2006/math" xmlns="" val="1"/>
             </a:ext>
           </a:extLst>
         </p:spPr>
@@ -3379,7 +3365,6 @@
             </a:lvl1pPr>
           </a:lstStyle>
           <a:p>
-            <a:pPr/>
             <a:r>
               <a:t>▶</a:t>
             </a:r>
@@ -3405,7 +3390,7 @@
           </a:ln>
           <a:extLst>
             <a:ext uri="{C572A759-6A51-4108-AA02-DFA0A04FC94B}">
-              <ma14:wrappingTextBoxFlag xmlns:ma14="http://schemas.microsoft.com/office/mac/drawingml/2011/main" val="1"/>
+              <ma14:wrappingTextBoxFlag xmlns:ma14="http://schemas.microsoft.com/office/mac/drawingml/2011/main" xmlns:a14="http://schemas.microsoft.com/office/drawing/2010/main" xmlns:m="http://schemas.openxmlformats.org/officeDocument/2006/math" xmlns="" val="1"/>
             </a:ext>
           </a:extLst>
         </p:spPr>
@@ -3416,7 +3401,7 @@
           <a:lstStyle/>
           <a:p>
             <a:pPr algn="ctr">
-              <a:defRPr b="1" sz="1000">
+              <a:defRPr sz="1000" b="1">
                 <a:solidFill>
                   <a:srgbClr val="22302A"/>
                 </a:solidFill>
@@ -3428,7 +3413,7 @@
           </a:p>
           <a:p>
             <a:pPr algn="ctr">
-              <a:defRPr b="1" sz="1000">
+              <a:defRPr sz="1000" b="1">
                 <a:solidFill>
                   <a:srgbClr val="22302A"/>
                 </a:solidFill>
@@ -3459,7 +3444,7 @@
           </a:ln>
           <a:extLst>
             <a:ext uri="{C572A759-6A51-4108-AA02-DFA0A04FC94B}">
-              <ma14:wrappingTextBoxFlag xmlns:ma14="http://schemas.microsoft.com/office/mac/drawingml/2011/main" val="1"/>
+              <ma14:wrappingTextBoxFlag xmlns:ma14="http://schemas.microsoft.com/office/mac/drawingml/2011/main" xmlns:a14="http://schemas.microsoft.com/office/drawing/2010/main" xmlns:m="http://schemas.openxmlformats.org/officeDocument/2006/math" xmlns="" val="1"/>
             </a:ext>
           </a:extLst>
         </p:spPr>
@@ -3477,7 +3462,6 @@
             </a:lvl1pPr>
           </a:lstStyle>
           <a:p>
-            <a:pPr/>
             <a:r>
               <a:t>→</a:t>
             </a:r>
@@ -3513,7 +3497,7 @@
           <a:bodyPr lIns="45719" rIns="45719"/>
           <a:lstStyle/>
           <a:p>
-            <a:pPr/>
+            <a:endParaRPr/>
           </a:p>
         </p:txBody>
       </p:sp>
@@ -3536,7 +3520,7 @@
           </a:ln>
           <a:extLst>
             <a:ext uri="{C572A759-6A51-4108-AA02-DFA0A04FC94B}">
-              <ma14:wrappingTextBoxFlag xmlns:ma14="http://schemas.microsoft.com/office/mac/drawingml/2011/main" val="1"/>
+              <ma14:wrappingTextBoxFlag xmlns:ma14="http://schemas.microsoft.com/office/mac/drawingml/2011/main" xmlns:a14="http://schemas.microsoft.com/office/drawing/2010/main" xmlns:m="http://schemas.openxmlformats.org/officeDocument/2006/math" xmlns="" val="1"/>
             </a:ext>
           </a:extLst>
         </p:spPr>
@@ -3550,7 +3534,6 @@
             </a:lvl1pPr>
           </a:lstStyle>
           <a:p>
-            <a:pPr/>
             <a:r>
               <a:t>🐮</a:t>
             </a:r>
@@ -3576,7 +3559,7 @@
           </a:ln>
           <a:extLst>
             <a:ext uri="{C572A759-6A51-4108-AA02-DFA0A04FC94B}">
-              <ma14:wrappingTextBoxFlag xmlns:ma14="http://schemas.microsoft.com/office/mac/drawingml/2011/main" val="1"/>
+              <ma14:wrappingTextBoxFlag xmlns:ma14="http://schemas.microsoft.com/office/mac/drawingml/2011/main" xmlns:a14="http://schemas.microsoft.com/office/drawing/2010/main" xmlns:m="http://schemas.openxmlformats.org/officeDocument/2006/math" xmlns="" val="1"/>
             </a:ext>
           </a:extLst>
         </p:spPr>
@@ -3586,7 +3569,7 @@
           </a:bodyPr>
           <a:lstStyle>
             <a:lvl1pPr algn="ctr">
-              <a:defRPr b="1" sz="1000">
+              <a:defRPr sz="1000" b="1">
                 <a:solidFill>
                   <a:srgbClr val="22302A"/>
                 </a:solidFill>
@@ -3594,7 +3577,6 @@
             </a:lvl1pPr>
           </a:lstStyle>
           <a:p>
-            <a:pPr/>
             <a:r>
               <a:t>Vacunos</a:t>
             </a:r>
@@ -3620,7 +3602,7 @@
           </a:ln>
           <a:extLst>
             <a:ext uri="{C572A759-6A51-4108-AA02-DFA0A04FC94B}">
-              <ma14:wrappingTextBoxFlag xmlns:ma14="http://schemas.microsoft.com/office/mac/drawingml/2011/main" val="1"/>
+              <ma14:wrappingTextBoxFlag xmlns:ma14="http://schemas.microsoft.com/office/mac/drawingml/2011/main" xmlns:a14="http://schemas.microsoft.com/office/drawing/2010/main" xmlns:m="http://schemas.openxmlformats.org/officeDocument/2006/math" xmlns="" val="1"/>
             </a:ext>
           </a:extLst>
         </p:spPr>
@@ -3638,7 +3620,6 @@
             </a:lvl1pPr>
           </a:lstStyle>
           <a:p>
-            <a:pPr/>
             <a:r>
               <a:t>→</a:t>
             </a:r>
@@ -3674,7 +3655,7 @@
           <a:bodyPr lIns="45719" rIns="45719"/>
           <a:lstStyle/>
           <a:p>
-            <a:pPr/>
+            <a:endParaRPr/>
           </a:p>
         </p:txBody>
       </p:sp>
@@ -3697,7 +3678,7 @@
           </a:ln>
           <a:extLst>
             <a:ext uri="{C572A759-6A51-4108-AA02-DFA0A04FC94B}">
-              <ma14:wrappingTextBoxFlag xmlns:ma14="http://schemas.microsoft.com/office/mac/drawingml/2011/main" val="1"/>
+              <ma14:wrappingTextBoxFlag xmlns:ma14="http://schemas.microsoft.com/office/mac/drawingml/2011/main" xmlns:a14="http://schemas.microsoft.com/office/drawing/2010/main" xmlns:m="http://schemas.openxmlformats.org/officeDocument/2006/math" xmlns="" val="1"/>
             </a:ext>
           </a:extLst>
         </p:spPr>
@@ -3711,7 +3692,6 @@
             </a:lvl1pPr>
           </a:lstStyle>
           <a:p>
-            <a:pPr/>
             <a:r>
               <a:t>🐔</a:t>
             </a:r>
@@ -3737,7 +3717,7 @@
           </a:ln>
           <a:extLst>
             <a:ext uri="{C572A759-6A51-4108-AA02-DFA0A04FC94B}">
-              <ma14:wrappingTextBoxFlag xmlns:ma14="http://schemas.microsoft.com/office/mac/drawingml/2011/main" val="1"/>
+              <ma14:wrappingTextBoxFlag xmlns:ma14="http://schemas.microsoft.com/office/mac/drawingml/2011/main" xmlns:a14="http://schemas.microsoft.com/office/drawing/2010/main" xmlns:m="http://schemas.openxmlformats.org/officeDocument/2006/math" xmlns="" val="1"/>
             </a:ext>
           </a:extLst>
         </p:spPr>
@@ -3747,7 +3727,7 @@
           </a:bodyPr>
           <a:lstStyle>
             <a:lvl1pPr algn="ctr">
-              <a:defRPr b="1" sz="1000">
+              <a:defRPr sz="1000" b="1">
                 <a:solidFill>
                   <a:srgbClr val="22302A"/>
                 </a:solidFill>
@@ -3755,7 +3735,6 @@
             </a:lvl1pPr>
           </a:lstStyle>
           <a:p>
-            <a:pPr/>
             <a:r>
               <a:t>Aves</a:t>
             </a:r>
@@ -3781,7 +3760,7 @@
           </a:ln>
           <a:extLst>
             <a:ext uri="{C572A759-6A51-4108-AA02-DFA0A04FC94B}">
-              <ma14:wrappingTextBoxFlag xmlns:ma14="http://schemas.microsoft.com/office/mac/drawingml/2011/main" val="1"/>
+              <ma14:wrappingTextBoxFlag xmlns:ma14="http://schemas.microsoft.com/office/mac/drawingml/2011/main" xmlns:a14="http://schemas.microsoft.com/office/drawing/2010/main" xmlns:m="http://schemas.openxmlformats.org/officeDocument/2006/math" xmlns="" val="1"/>
             </a:ext>
           </a:extLst>
         </p:spPr>
@@ -3799,7 +3778,6 @@
             </a:lvl1pPr>
           </a:lstStyle>
           <a:p>
-            <a:pPr/>
             <a:r>
               <a:t>→</a:t>
             </a:r>
@@ -3835,7 +3813,7 @@
           <a:bodyPr lIns="45719" rIns="45719"/>
           <a:lstStyle/>
           <a:p>
-            <a:pPr/>
+            <a:endParaRPr/>
           </a:p>
         </p:txBody>
       </p:sp>
@@ -3858,7 +3836,7 @@
           </a:ln>
           <a:extLst>
             <a:ext uri="{C572A759-6A51-4108-AA02-DFA0A04FC94B}">
-              <ma14:wrappingTextBoxFlag xmlns:ma14="http://schemas.microsoft.com/office/mac/drawingml/2011/main" val="1"/>
+              <ma14:wrappingTextBoxFlag xmlns:ma14="http://schemas.microsoft.com/office/mac/drawingml/2011/main" xmlns:a14="http://schemas.microsoft.com/office/drawing/2010/main" xmlns:m="http://schemas.openxmlformats.org/officeDocument/2006/math" xmlns="" val="1"/>
             </a:ext>
           </a:extLst>
         </p:spPr>
@@ -3872,7 +3850,6 @@
             </a:lvl1pPr>
           </a:lstStyle>
           <a:p>
-            <a:pPr/>
             <a:r>
               <a:t>🐑</a:t>
             </a:r>
@@ -3898,7 +3875,7 @@
           </a:ln>
           <a:extLst>
             <a:ext uri="{C572A759-6A51-4108-AA02-DFA0A04FC94B}">
-              <ma14:wrappingTextBoxFlag xmlns:ma14="http://schemas.microsoft.com/office/mac/drawingml/2011/main" val="1"/>
+              <ma14:wrappingTextBoxFlag xmlns:ma14="http://schemas.microsoft.com/office/mac/drawingml/2011/main" xmlns:a14="http://schemas.microsoft.com/office/drawing/2010/main" xmlns:m="http://schemas.openxmlformats.org/officeDocument/2006/math" xmlns="" val="1"/>
             </a:ext>
           </a:extLst>
         </p:spPr>
@@ -3908,7 +3885,7 @@
           </a:bodyPr>
           <a:lstStyle>
             <a:lvl1pPr algn="ctr">
-              <a:defRPr b="1" sz="1000">
+              <a:defRPr sz="1000" b="1">
                 <a:solidFill>
                   <a:srgbClr val="22302A"/>
                 </a:solidFill>
@@ -3916,7 +3893,6 @@
             </a:lvl1pPr>
           </a:lstStyle>
           <a:p>
-            <a:pPr/>
             <a:r>
               <a:t>Ovinos</a:t>
             </a:r>
@@ -3942,7 +3918,7 @@
           </a:ln>
           <a:extLst>
             <a:ext uri="{C572A759-6A51-4108-AA02-DFA0A04FC94B}">
-              <ma14:wrappingTextBoxFlag xmlns:ma14="http://schemas.microsoft.com/office/mac/drawingml/2011/main" val="1"/>
+              <ma14:wrappingTextBoxFlag xmlns:ma14="http://schemas.microsoft.com/office/mac/drawingml/2011/main" xmlns:a14="http://schemas.microsoft.com/office/drawing/2010/main" xmlns:m="http://schemas.openxmlformats.org/officeDocument/2006/math" xmlns="" val="1"/>
             </a:ext>
           </a:extLst>
         </p:spPr>
@@ -3960,7 +3936,6 @@
             </a:lvl1pPr>
           </a:lstStyle>
           <a:p>
-            <a:pPr/>
             <a:r>
               <a:t>→</a:t>
             </a:r>
@@ -3996,7 +3971,7 @@
           <a:bodyPr lIns="45719" rIns="45719"/>
           <a:lstStyle/>
           <a:p>
-            <a:pPr/>
+            <a:endParaRPr/>
           </a:p>
         </p:txBody>
       </p:sp>
@@ -4019,7 +3994,7 @@
           </a:ln>
           <a:extLst>
             <a:ext uri="{C572A759-6A51-4108-AA02-DFA0A04FC94B}">
-              <ma14:wrappingTextBoxFlag xmlns:ma14="http://schemas.microsoft.com/office/mac/drawingml/2011/main" val="1"/>
+              <ma14:wrappingTextBoxFlag xmlns:ma14="http://schemas.microsoft.com/office/mac/drawingml/2011/main" xmlns:a14="http://schemas.microsoft.com/office/drawing/2010/main" xmlns:m="http://schemas.openxmlformats.org/officeDocument/2006/math" xmlns="" val="1"/>
             </a:ext>
           </a:extLst>
         </p:spPr>
@@ -4033,7 +4008,6 @@
             </a:lvl1pPr>
           </a:lstStyle>
           <a:p>
-            <a:pPr/>
             <a:r>
               <a:t>🐐</a:t>
             </a:r>
@@ -4059,7 +4033,7 @@
           </a:ln>
           <a:extLst>
             <a:ext uri="{C572A759-6A51-4108-AA02-DFA0A04FC94B}">
-              <ma14:wrappingTextBoxFlag xmlns:ma14="http://schemas.microsoft.com/office/mac/drawingml/2011/main" val="1"/>
+              <ma14:wrappingTextBoxFlag xmlns:ma14="http://schemas.microsoft.com/office/mac/drawingml/2011/main" xmlns:a14="http://schemas.microsoft.com/office/drawing/2010/main" xmlns:m="http://schemas.openxmlformats.org/officeDocument/2006/math" xmlns="" val="1"/>
             </a:ext>
           </a:extLst>
         </p:spPr>
@@ -4069,7 +4043,7 @@
           </a:bodyPr>
           <a:lstStyle>
             <a:lvl1pPr algn="ctr">
-              <a:defRPr b="1" sz="1000">
+              <a:defRPr sz="1000" b="1">
                 <a:solidFill>
                   <a:srgbClr val="22302A"/>
                 </a:solidFill>
@@ -4077,7 +4051,6 @@
             </a:lvl1pPr>
           </a:lstStyle>
           <a:p>
-            <a:pPr/>
             <a:r>
               <a:t>Caprinos</a:t>
             </a:r>
@@ -4103,7 +4076,7 @@
           </a:ln>
           <a:extLst>
             <a:ext uri="{C572A759-6A51-4108-AA02-DFA0A04FC94B}">
-              <ma14:wrappingTextBoxFlag xmlns:ma14="http://schemas.microsoft.com/office/mac/drawingml/2011/main" val="1"/>
+              <ma14:wrappingTextBoxFlag xmlns:ma14="http://schemas.microsoft.com/office/mac/drawingml/2011/main" xmlns:a14="http://schemas.microsoft.com/office/drawing/2010/main" xmlns:m="http://schemas.openxmlformats.org/officeDocument/2006/math" xmlns="" val="1"/>
             </a:ext>
           </a:extLst>
         </p:spPr>
@@ -4121,7 +4094,6 @@
             </a:lvl1pPr>
           </a:lstStyle>
           <a:p>
-            <a:pPr/>
             <a:r>
               <a:t>→</a:t>
             </a:r>
@@ -4157,7 +4129,7 @@
           <a:bodyPr lIns="45719" rIns="45719"/>
           <a:lstStyle/>
           <a:p>
-            <a:pPr/>
+            <a:endParaRPr/>
           </a:p>
         </p:txBody>
       </p:sp>
@@ -4180,7 +4152,7 @@
           </a:ln>
           <a:extLst>
             <a:ext uri="{C572A759-6A51-4108-AA02-DFA0A04FC94B}">
-              <ma14:wrappingTextBoxFlag xmlns:ma14="http://schemas.microsoft.com/office/mac/drawingml/2011/main" val="1"/>
+              <ma14:wrappingTextBoxFlag xmlns:ma14="http://schemas.microsoft.com/office/mac/drawingml/2011/main" xmlns:a14="http://schemas.microsoft.com/office/drawing/2010/main" xmlns:m="http://schemas.openxmlformats.org/officeDocument/2006/math" xmlns="" val="1"/>
             </a:ext>
           </a:extLst>
         </p:spPr>
@@ -4194,7 +4166,6 @@
             </a:lvl1pPr>
           </a:lstStyle>
           <a:p>
-            <a:pPr/>
             <a:r>
               <a:t>🐷</a:t>
             </a:r>
@@ -4220,7 +4191,7 @@
           </a:ln>
           <a:extLst>
             <a:ext uri="{C572A759-6A51-4108-AA02-DFA0A04FC94B}">
-              <ma14:wrappingTextBoxFlag xmlns:ma14="http://schemas.microsoft.com/office/mac/drawingml/2011/main" val="1"/>
+              <ma14:wrappingTextBoxFlag xmlns:ma14="http://schemas.microsoft.com/office/mac/drawingml/2011/main" xmlns:a14="http://schemas.microsoft.com/office/drawing/2010/main" xmlns:m="http://schemas.openxmlformats.org/officeDocument/2006/math" xmlns="" val="1"/>
             </a:ext>
           </a:extLst>
         </p:spPr>
@@ -4230,7 +4201,7 @@
           </a:bodyPr>
           <a:lstStyle>
             <a:lvl1pPr algn="ctr">
-              <a:defRPr b="1" sz="1000">
+              <a:defRPr sz="1000" b="1">
                 <a:solidFill>
                   <a:srgbClr val="22302A"/>
                 </a:solidFill>
@@ -4238,7 +4209,6 @@
             </a:lvl1pPr>
           </a:lstStyle>
           <a:p>
-            <a:pPr/>
             <a:r>
               <a:t>Porcinos</a:t>
             </a:r>
@@ -4264,7 +4234,7 @@
           </a:ln>
           <a:extLst>
             <a:ext uri="{C572A759-6A51-4108-AA02-DFA0A04FC94B}">
-              <ma14:wrappingTextBoxFlag xmlns:ma14="http://schemas.microsoft.com/office/mac/drawingml/2011/main" val="1"/>
+              <ma14:wrappingTextBoxFlag xmlns:ma14="http://schemas.microsoft.com/office/mac/drawingml/2011/main" xmlns:a14="http://schemas.microsoft.com/office/drawing/2010/main" xmlns:m="http://schemas.openxmlformats.org/officeDocument/2006/math" xmlns="" val="1"/>
             </a:ext>
           </a:extLst>
         </p:spPr>
@@ -4282,7 +4252,6 @@
             </a:lvl1pPr>
           </a:lstStyle>
           <a:p>
-            <a:pPr/>
             <a:r>
               <a:t>→</a:t>
             </a:r>
@@ -4316,7 +4285,7 @@
           <a:bodyPr lIns="45719" rIns="45719"/>
           <a:lstStyle/>
           <a:p>
-            <a:pPr/>
+            <a:endParaRPr/>
           </a:p>
         </p:txBody>
       </p:sp>
@@ -4339,7 +4308,7 @@
           </a:ln>
           <a:extLst>
             <a:ext uri="{C572A759-6A51-4108-AA02-DFA0A04FC94B}">
-              <ma14:wrappingTextBoxFlag xmlns:ma14="http://schemas.microsoft.com/office/mac/drawingml/2011/main" val="1"/>
+              <ma14:wrappingTextBoxFlag xmlns:ma14="http://schemas.microsoft.com/office/mac/drawingml/2011/main" xmlns:a14="http://schemas.microsoft.com/office/drawing/2010/main" xmlns:m="http://schemas.openxmlformats.org/officeDocument/2006/math" xmlns="" val="1"/>
             </a:ext>
           </a:extLst>
         </p:spPr>
@@ -4357,7 +4326,6 @@
             </a:lvl1pPr>
           </a:lstStyle>
           <a:p>
-            <a:pPr/>
             <a:r>
               <a:t>✈</a:t>
             </a:r>
@@ -4383,7 +4351,7 @@
           </a:ln>
           <a:extLst>
             <a:ext uri="{C572A759-6A51-4108-AA02-DFA0A04FC94B}">
-              <ma14:wrappingTextBoxFlag xmlns:ma14="http://schemas.microsoft.com/office/mac/drawingml/2011/main" val="1"/>
+              <ma14:wrappingTextBoxFlag xmlns:ma14="http://schemas.microsoft.com/office/mac/drawingml/2011/main" xmlns:a14="http://schemas.microsoft.com/office/drawing/2010/main" xmlns:m="http://schemas.openxmlformats.org/officeDocument/2006/math" xmlns="" val="1"/>
             </a:ext>
           </a:extLst>
         </p:spPr>
@@ -4393,7 +4361,7 @@
           </a:bodyPr>
           <a:lstStyle>
             <a:lvl1pPr algn="ctr">
-              <a:defRPr b="1" sz="1100">
+              <a:defRPr sz="1100" b="1">
                 <a:solidFill>
                   <a:srgbClr val="FFFFFF"/>
                 </a:solidFill>
@@ -4401,7 +4369,6 @@
             </a:lvl1pPr>
           </a:lstStyle>
           <a:p>
-            <a:pPr/>
             <a:r>
               <a:t>Telegram</a:t>
             </a:r>
@@ -4427,7 +4394,7 @@
           </a:ln>
           <a:extLst>
             <a:ext uri="{C572A759-6A51-4108-AA02-DFA0A04FC94B}">
-              <ma14:wrappingTextBoxFlag xmlns:ma14="http://schemas.microsoft.com/office/mac/drawingml/2011/main" val="1"/>
+              <ma14:wrappingTextBoxFlag xmlns:ma14="http://schemas.microsoft.com/office/mac/drawingml/2011/main" xmlns:a14="http://schemas.microsoft.com/office/drawing/2010/main" xmlns:m="http://schemas.openxmlformats.org/officeDocument/2006/math" xmlns="" val="1"/>
             </a:ext>
           </a:extLst>
         </p:spPr>
@@ -4445,7 +4412,6 @@
             </a:lvl1pPr>
           </a:lstStyle>
           <a:p>
-            <a:pPr/>
             <a:r>
               <a:t>mensaje final</a:t>
             </a:r>
@@ -4471,7 +4437,7 @@
           </a:ln>
           <a:extLst>
             <a:ext uri="{C572A759-6A51-4108-AA02-DFA0A04FC94B}">
-              <ma14:wrappingTextBoxFlag xmlns:ma14="http://schemas.microsoft.com/office/mac/drawingml/2011/main" val="1"/>
+              <ma14:wrappingTextBoxFlag xmlns:ma14="http://schemas.microsoft.com/office/mac/drawingml/2011/main" xmlns:a14="http://schemas.microsoft.com/office/drawing/2010/main" xmlns:m="http://schemas.openxmlformats.org/officeDocument/2006/math" xmlns="" val="1"/>
             </a:ext>
           </a:extLst>
         </p:spPr>
@@ -4481,7 +4447,7 @@
           </a:bodyPr>
           <a:lstStyle>
             <a:lvl1pPr>
-              <a:defRPr i="1" sz="1100">
+              <a:defRPr sz="1100" i="1">
                 <a:solidFill>
                   <a:srgbClr val="5B6B62"/>
                 </a:solidFill>
@@ -4489,7 +4455,6 @@
             </a:lvl1pPr>
           </a:lstStyle>
           <a:p>
-            <a:pPr/>
             <a:r>
               <a:t>Cada nodo lanza una consulta SQL sobre dataset_fao filtrando por producto, elemento = 'Existencias' y año = 2023, agrupando por área (continente).</a:t>
             </a:r>
@@ -4515,7 +4480,7 @@
           </a:ln>
           <a:extLst>
             <a:ext uri="{C572A759-6A51-4108-AA02-DFA0A04FC94B}">
-              <ma14:wrappingTextBoxFlag xmlns:ma14="http://schemas.microsoft.com/office/mac/drawingml/2011/main" val="1"/>
+              <ma14:wrappingTextBoxFlag xmlns:ma14="http://schemas.microsoft.com/office/mac/drawingml/2011/main" xmlns:a14="http://schemas.microsoft.com/office/drawing/2010/main" xmlns:m="http://schemas.openxmlformats.org/officeDocument/2006/math" xmlns="" val="1"/>
             </a:ext>
           </a:extLst>
         </p:spPr>
@@ -4525,7 +4490,7 @@
           </a:bodyPr>
           <a:lstStyle>
             <a:lvl1pPr>
-              <a:defRPr b="1" spc="50" sz="1100">
+              <a:defRPr sz="1100" b="1" spc="50">
                 <a:solidFill>
                   <a:srgbClr val="1F9BD1"/>
                 </a:solidFill>
@@ -4533,7 +4498,6 @@
             </a:lvl1pPr>
           </a:lstStyle>
           <a:p>
-            <a:pPr/>
             <a:r>
               <a:t>MENSAJE RESULTANTE EN TELEGRAM</a:t>
             </a:r>
@@ -4569,7 +4533,7 @@
           <a:bodyPr lIns="45719" rIns="45719"/>
           <a:lstStyle/>
           <a:p>
-            <a:pPr/>
+            <a:endParaRPr/>
           </a:p>
         </p:txBody>
       </p:sp>
@@ -4592,7 +4556,7 @@
           </a:ln>
           <a:extLst>
             <a:ext uri="{C572A759-6A51-4108-AA02-DFA0A04FC94B}">
-              <ma14:wrappingTextBoxFlag xmlns:ma14="http://schemas.microsoft.com/office/mac/drawingml/2011/main" val="1"/>
+              <ma14:wrappingTextBoxFlag xmlns:ma14="http://schemas.microsoft.com/office/mac/drawingml/2011/main" xmlns:a14="http://schemas.microsoft.com/office/drawing/2010/main" xmlns:m="http://schemas.openxmlformats.org/officeDocument/2006/math" xmlns="" val="1"/>
             </a:ext>
           </a:extLst>
         </p:spPr>
@@ -4606,7 +4570,7 @@
               <a:lnSpc>
                 <a:spcPct val="115000"/>
               </a:lnSpc>
-              <a:defRPr b="1" sz="1000">
+              <a:defRPr sz="1000" b="1">
                 <a:solidFill>
                   <a:srgbClr val="1B2E38"/>
                 </a:solidFill>
@@ -4625,7 +4589,7 @@
               <a:lnSpc>
                 <a:spcPct val="115000"/>
               </a:lnSpc>
-              <a:defRPr b="1" sz="1000">
+              <a:defRPr sz="1000" b="1">
                 <a:solidFill>
                   <a:srgbClr val="1B2E38"/>
                 </a:solidFill>
@@ -4635,13 +4599,14 @@
                 <a:sym typeface="Consolas"/>
               </a:defRPr>
             </a:pPr>
+            <a:endParaRPr/>
           </a:p>
           <a:p>
             <a:pPr>
               <a:lnSpc>
                 <a:spcPct val="115000"/>
               </a:lnSpc>
-              <a:defRPr b="1" sz="1000">
+              <a:defRPr sz="1000" b="1">
                 <a:solidFill>
                   <a:srgbClr val="1B2E38"/>
                 </a:solidFill>
@@ -4658,14 +4623,13 @@
               <a:rPr b="0"/>
               <a:t>Américas: 456… Asia: 512…</a:t>
             </a:r>
-            <a:endParaRPr b="0"/>
           </a:p>
           <a:p>
             <a:pPr>
               <a:lnSpc>
                 <a:spcPct val="115000"/>
               </a:lnSpc>
-              <a:defRPr b="1" sz="1000">
+              <a:defRPr sz="1000" b="1">
                 <a:solidFill>
                   <a:srgbClr val="1B2E38"/>
                 </a:solidFill>
@@ -4682,14 +4646,13 @@
               <a:rPr b="0"/>
               <a:t>Américas: 210… Asia: 890…</a:t>
             </a:r>
-            <a:endParaRPr b="0"/>
           </a:p>
           <a:p>
             <a:pPr>
               <a:lnSpc>
                 <a:spcPct val="115000"/>
               </a:lnSpc>
-              <a:defRPr b="1" sz="1000">
+              <a:defRPr sz="1000" b="1">
                 <a:solidFill>
                   <a:srgbClr val="1B2E38"/>
                 </a:solidFill>
@@ -4706,14 +4669,13 @@
               <a:rPr b="0"/>
               <a:t>Américas: 3.400… Asia: 9.100…</a:t>
             </a:r>
-            <a:endParaRPr b="0"/>
           </a:p>
           <a:p>
             <a:pPr>
               <a:lnSpc>
                 <a:spcPct val="115000"/>
               </a:lnSpc>
-              <a:defRPr b="1" sz="1000">
+              <a:defRPr sz="1000" b="1">
                 <a:solidFill>
                   <a:srgbClr val="1B2E38"/>
                 </a:solidFill>
@@ -4730,14 +4692,13 @@
               <a:rPr b="0"/>
               <a:t>África: 320… Asia: 610…</a:t>
             </a:r>
-            <a:endParaRPr b="0"/>
           </a:p>
           <a:p>
             <a:pPr>
               <a:lnSpc>
                 <a:spcPct val="115000"/>
               </a:lnSpc>
-              <a:defRPr b="1" sz="1000">
+              <a:defRPr sz="1000" b="1">
                 <a:solidFill>
                   <a:srgbClr val="1B2E38"/>
                 </a:solidFill>
@@ -4784,7 +4745,7 @@
           <a:bodyPr lIns="45719" rIns="45719"/>
           <a:lstStyle/>
           <a:p>
-            <a:pPr/>
+            <a:endParaRPr/>
           </a:p>
         </p:txBody>
       </p:sp>
@@ -4807,7 +4768,7 @@
           </a:ln>
           <a:extLst>
             <a:ext uri="{C572A759-6A51-4108-AA02-DFA0A04FC94B}">
-              <ma14:wrappingTextBoxFlag xmlns:ma14="http://schemas.microsoft.com/office/mac/drawingml/2011/main" val="1"/>
+              <ma14:wrappingTextBoxFlag xmlns:ma14="http://schemas.microsoft.com/office/mac/drawingml/2011/main" xmlns:a14="http://schemas.microsoft.com/office/drawing/2010/main" xmlns:m="http://schemas.openxmlformats.org/officeDocument/2006/math" xmlns="" val="1"/>
             </a:ext>
           </a:extLst>
         </p:spPr>
@@ -4817,7 +4778,7 @@
           </a:bodyPr>
           <a:lstStyle>
             <a:lvl1pPr>
-              <a:defRPr b="1" spc="50" sz="1100">
+              <a:defRPr sz="1100" b="1" spc="50">
                 <a:solidFill>
                   <a:srgbClr val="D98C3F"/>
                 </a:solidFill>
@@ -4825,7 +4786,6 @@
             </a:lvl1pPr>
           </a:lstStyle>
           <a:p>
-            <a:pPr/>
             <a:r>
               <a:t>QUÉ DEMUESTRA</a:t>
             </a:r>
@@ -4851,7 +4811,7 @@
           </a:ln>
           <a:extLst>
             <a:ext uri="{C572A759-6A51-4108-AA02-DFA0A04FC94B}">
-              <ma14:wrappingTextBoxFlag xmlns:ma14="http://schemas.microsoft.com/office/mac/drawingml/2011/main" val="1"/>
+              <ma14:wrappingTextBoxFlag xmlns:ma14="http://schemas.microsoft.com/office/mac/drawingml/2011/main" xmlns:a14="http://schemas.microsoft.com/office/drawing/2010/main" xmlns:m="http://schemas.openxmlformats.org/officeDocument/2006/math" xmlns="" val="1"/>
             </a:ext>
           </a:extLst>
         </p:spPr>
@@ -4869,7 +4829,6 @@
             </a:lvl1pPr>
           </a:lstStyle>
           <a:p>
-            <a:pPr/>
             <a:r>
               <a:t>—</a:t>
             </a:r>
@@ -4895,7 +4854,7 @@
           </a:ln>
           <a:extLst>
             <a:ext uri="{C572A759-6A51-4108-AA02-DFA0A04FC94B}">
-              <ma14:wrappingTextBoxFlag xmlns:ma14="http://schemas.microsoft.com/office/mac/drawingml/2011/main" val="1"/>
+              <ma14:wrappingTextBoxFlag xmlns:ma14="http://schemas.microsoft.com/office/mac/drawingml/2011/main" xmlns:a14="http://schemas.microsoft.com/office/drawing/2010/main" xmlns:m="http://schemas.openxmlformats.org/officeDocument/2006/math" xmlns="" val="1"/>
             </a:ext>
           </a:extLst>
         </p:spPr>
@@ -4916,7 +4875,6 @@
             </a:lvl1pPr>
           </a:lstStyle>
           <a:p>
-            <a:pPr/>
             <a:r>
               <a:t>El sistema puede “vivir solo”: sin abrir Python, SQL ni Power BI, se dispara con un clic.</a:t>
             </a:r>
@@ -4942,7 +4900,7 @@
           </a:ln>
           <a:extLst>
             <a:ext uri="{C572A759-6A51-4108-AA02-DFA0A04FC94B}">
-              <ma14:wrappingTextBoxFlag xmlns:ma14="http://schemas.microsoft.com/office/mac/drawingml/2011/main" val="1"/>
+              <ma14:wrappingTextBoxFlag xmlns:ma14="http://schemas.microsoft.com/office/mac/drawingml/2011/main" xmlns:a14="http://schemas.microsoft.com/office/drawing/2010/main" xmlns:m="http://schemas.openxmlformats.org/officeDocument/2006/math" xmlns="" val="1"/>
             </a:ext>
           </a:extLst>
         </p:spPr>
@@ -4960,7 +4918,6 @@
             </a:lvl1pPr>
           </a:lstStyle>
           <a:p>
-            <a:pPr/>
             <a:r>
               <a:t>—</a:t>
             </a:r>
@@ -4986,7 +4943,7 @@
           </a:ln>
           <a:extLst>
             <a:ext uri="{C572A759-6A51-4108-AA02-DFA0A04FC94B}">
-              <ma14:wrappingTextBoxFlag xmlns:ma14="http://schemas.microsoft.com/office/mac/drawingml/2011/main" val="1"/>
+              <ma14:wrappingTextBoxFlag xmlns:ma14="http://schemas.microsoft.com/office/mac/drawingml/2011/main" xmlns:a14="http://schemas.microsoft.com/office/drawing/2010/main" xmlns:m="http://schemas.openxmlformats.org/officeDocument/2006/math" xmlns="" val="1"/>
             </a:ext>
           </a:extLst>
         </p:spPr>
@@ -5007,7 +4964,6 @@
             </a:lvl1pPr>
           </a:lstStyle>
           <a:p>
-            <a:pPr/>
             <a:r>
               <a:t>Consulta en tiempo real a MySQL — mismos datos que el resto del proyecto.</a:t>
             </a:r>
@@ -5033,7 +4989,7 @@
           </a:ln>
           <a:extLst>
             <a:ext uri="{C572A759-6A51-4108-AA02-DFA0A04FC94B}">
-              <ma14:wrappingTextBoxFlag xmlns:ma14="http://schemas.microsoft.com/office/mac/drawingml/2011/main" val="1"/>
+              <ma14:wrappingTextBoxFlag xmlns:ma14="http://schemas.microsoft.com/office/mac/drawingml/2011/main" xmlns:a14="http://schemas.microsoft.com/office/drawing/2010/main" xmlns:m="http://schemas.openxmlformats.org/officeDocument/2006/math" xmlns="" val="1"/>
             </a:ext>
           </a:extLst>
         </p:spPr>
@@ -5051,7 +5007,6 @@
             </a:lvl1pPr>
           </a:lstStyle>
           <a:p>
-            <a:pPr/>
             <a:r>
               <a:t>—</a:t>
             </a:r>
@@ -5077,7 +5032,7 @@
           </a:ln>
           <a:extLst>
             <a:ext uri="{C572A759-6A51-4108-AA02-DFA0A04FC94B}">
-              <ma14:wrappingTextBoxFlag xmlns:ma14="http://schemas.microsoft.com/office/mac/drawingml/2011/main" val="1"/>
+              <ma14:wrappingTextBoxFlag xmlns:ma14="http://schemas.microsoft.com/office/mac/drawingml/2011/main" xmlns:a14="http://schemas.microsoft.com/office/drawing/2010/main" xmlns:m="http://schemas.openxmlformats.org/officeDocument/2006/math" xmlns="" val="1"/>
             </a:ext>
           </a:extLst>
         </p:spPr>
@@ -5098,7 +5053,6 @@
             </a:lvl1pPr>
           </a:lstStyle>
           <a:p>
-            <a:pPr/>
             <a:r>
               <a:t>Resultado entregado donde se consume de verdad: el móvil, vía Telegram.</a:t>
             </a:r>
@@ -5110,18 +5064,19 @@
   <p:clrMapOvr>
     <a:masterClrMapping/>
   </p:clrMapOvr>
-  <p:transition xmlns:p14="http://schemas.microsoft.com/office/powerpoint/2010/main" spd="med" advClick="1"/>
+  <p:transition spd="med"/>
 </p:sld>
 </file>
 
 <file path=ppt/slides/slide11.xml><?xml version="1.0" encoding="utf-8"?>
-<p:sld xmlns:a="http://schemas.openxmlformats.org/drawingml/2006/main" xmlns:r="http://schemas.openxmlformats.org/officeDocument/2006/relationships" xmlns:p="http://schemas.openxmlformats.org/presentationml/2006/main" xmlns:m="http://schemas.openxmlformats.org/officeDocument/2006/math" xmlns:a14="http://schemas.microsoft.com/office/drawing/2010/main" showMasterSp="1" showMasterPhAnim="1">
+<p:sld xmlns:a="http://schemas.openxmlformats.org/drawingml/2006/main" xmlns:r="http://schemas.openxmlformats.org/officeDocument/2006/relationships" xmlns:p="http://schemas.openxmlformats.org/presentationml/2006/main">
   <p:cSld>
     <p:bg>
       <p:bgPr>
         <a:solidFill>
           <a:srgbClr val="F4EFE6"/>
         </a:solidFill>
+        <a:effectLst/>
       </p:bgPr>
     </p:bg>
     <p:spTree>
@@ -5165,7 +5120,7 @@
           <a:bodyPr lIns="45719" rIns="45719"/>
           <a:lstStyle/>
           <a:p>
-            <a:pPr/>
+            <a:endParaRPr/>
           </a:p>
         </p:txBody>
       </p:sp>
@@ -5188,7 +5143,7 @@
           </a:ln>
           <a:extLst>
             <a:ext uri="{C572A759-6A51-4108-AA02-DFA0A04FC94B}">
-              <ma14:wrappingTextBoxFlag xmlns:ma14="http://schemas.microsoft.com/office/mac/drawingml/2011/main" val="1"/>
+              <ma14:wrappingTextBoxFlag xmlns:ma14="http://schemas.microsoft.com/office/mac/drawingml/2011/main" xmlns:a14="http://schemas.microsoft.com/office/drawing/2010/main" xmlns:m="http://schemas.openxmlformats.org/officeDocument/2006/math" xmlns="" val="1"/>
             </a:ext>
           </a:extLst>
         </p:spPr>
@@ -5198,7 +5153,7 @@
           </a:bodyPr>
           <a:lstStyle>
             <a:lvl1pPr algn="ctr">
-              <a:defRPr b="1" spc="100" sz="1000">
+              <a:defRPr sz="1000" b="1" spc="100">
                 <a:solidFill>
                   <a:srgbClr val="FFFFFF"/>
                 </a:solidFill>
@@ -5206,7 +5161,6 @@
             </a:lvl1pPr>
           </a:lstStyle>
           <a:p>
-            <a:pPr/>
             <a:r>
               <a:t>PASO 6 · N8N · AGENTE IA</a:t>
             </a:r>
@@ -5240,7 +5194,7 @@
           <a:bodyPr lIns="45719" rIns="45719"/>
           <a:lstStyle/>
           <a:p>
-            <a:pPr/>
+            <a:endParaRPr/>
           </a:p>
         </p:txBody>
       </p:sp>
@@ -5263,7 +5217,7 @@
           </a:ln>
           <a:extLst>
             <a:ext uri="{C572A759-6A51-4108-AA02-DFA0A04FC94B}">
-              <ma14:wrappingTextBoxFlag xmlns:ma14="http://schemas.microsoft.com/office/mac/drawingml/2011/main" val="1"/>
+              <ma14:wrappingTextBoxFlag xmlns:ma14="http://schemas.microsoft.com/office/mac/drawingml/2011/main" xmlns:a14="http://schemas.microsoft.com/office/drawing/2010/main" xmlns:m="http://schemas.openxmlformats.org/officeDocument/2006/math" xmlns="" val="1"/>
             </a:ext>
           </a:extLst>
         </p:spPr>
@@ -5273,7 +5227,7 @@
           </a:bodyPr>
           <a:lstStyle>
             <a:lvl1pPr algn="ctr">
-              <a:defRPr b="1" sz="1000">
+              <a:defRPr sz="1000" b="1">
                 <a:solidFill>
                   <a:srgbClr val="FFFFFF"/>
                 </a:solidFill>
@@ -5281,7 +5235,6 @@
             </a:lvl1pPr>
           </a:lstStyle>
           <a:p>
-            <a:pPr/>
             <a:r>
               <a:t>● DEMO EN VIVO</a:t>
             </a:r>
@@ -5307,7 +5260,7 @@
           </a:ln>
           <a:extLst>
             <a:ext uri="{C572A759-6A51-4108-AA02-DFA0A04FC94B}">
-              <ma14:wrappingTextBoxFlag xmlns:ma14="http://schemas.microsoft.com/office/mac/drawingml/2011/main" val="1"/>
+              <ma14:wrappingTextBoxFlag xmlns:ma14="http://schemas.microsoft.com/office/mac/drawingml/2011/main" xmlns:a14="http://schemas.microsoft.com/office/drawing/2010/main" xmlns:m="http://schemas.openxmlformats.org/officeDocument/2006/math" xmlns="" val="1"/>
             </a:ext>
           </a:extLst>
         </p:spPr>
@@ -5317,7 +5270,7 @@
           </a:bodyPr>
           <a:lstStyle>
             <a:lvl1pPr>
-              <a:defRPr b="1" sz="2500">
+              <a:defRPr sz="2500" b="1">
                 <a:solidFill>
                   <a:srgbClr val="22302A"/>
                 </a:solidFill>
@@ -5329,7 +5282,6 @@
             </a:lvl1pPr>
           </a:lstStyle>
           <a:p>
-            <a:pPr/>
             <a:r>
               <a:t>Automatización con n8n — agente conversacional</a:t>
             </a:r>
@@ -5355,7 +5307,7 @@
           </a:ln>
           <a:extLst>
             <a:ext uri="{C572A759-6A51-4108-AA02-DFA0A04FC94B}">
-              <ma14:wrappingTextBoxFlag xmlns:ma14="http://schemas.microsoft.com/office/mac/drawingml/2011/main" val="1"/>
+              <ma14:wrappingTextBoxFlag xmlns:ma14="http://schemas.microsoft.com/office/mac/drawingml/2011/main" xmlns:a14="http://schemas.microsoft.com/office/drawing/2010/main" xmlns:m="http://schemas.openxmlformats.org/officeDocument/2006/math" xmlns="" val="1"/>
             </a:ext>
           </a:extLst>
         </p:spPr>
@@ -5373,7 +5325,6 @@
             </a:lvl1pPr>
           </a:lstStyle>
           <a:p>
-            <a:pPr/>
             <a:r>
               <a:t>emisiones_agente.json — chatbot en Telegram que traduce preguntas en lenguaje natural a SQL con un LLM</a:t>
             </a:r>
@@ -5409,7 +5360,7 @@
           <a:bodyPr lIns="45719" rIns="45719"/>
           <a:lstStyle/>
           <a:p>
-            <a:pPr/>
+            <a:endParaRPr/>
           </a:p>
         </p:txBody>
       </p:sp>
@@ -5432,7 +5383,7 @@
           </a:ln>
           <a:extLst>
             <a:ext uri="{C572A759-6A51-4108-AA02-DFA0A04FC94B}">
-              <ma14:wrappingTextBoxFlag xmlns:ma14="http://schemas.microsoft.com/office/mac/drawingml/2011/main" val="1"/>
+              <ma14:wrappingTextBoxFlag xmlns:ma14="http://schemas.microsoft.com/office/mac/drawingml/2011/main" xmlns:a14="http://schemas.microsoft.com/office/drawing/2010/main" xmlns:m="http://schemas.openxmlformats.org/officeDocument/2006/math" xmlns="" val="1"/>
             </a:ext>
           </a:extLst>
         </p:spPr>
@@ -5450,7 +5401,6 @@
             </a:lvl1pPr>
           </a:lstStyle>
           <a:p>
-            <a:pPr/>
             <a:r>
               <a:t>✈</a:t>
             </a:r>
@@ -5476,7 +5426,7 @@
           </a:ln>
           <a:extLst>
             <a:ext uri="{C572A759-6A51-4108-AA02-DFA0A04FC94B}">
-              <ma14:wrappingTextBoxFlag xmlns:ma14="http://schemas.microsoft.com/office/mac/drawingml/2011/main" val="1"/>
+              <ma14:wrappingTextBoxFlag xmlns:ma14="http://schemas.microsoft.com/office/mac/drawingml/2011/main" xmlns:a14="http://schemas.microsoft.com/office/drawing/2010/main" xmlns:m="http://schemas.openxmlformats.org/officeDocument/2006/math" xmlns="" val="1"/>
             </a:ext>
           </a:extLst>
         </p:spPr>
@@ -5487,7 +5437,7 @@
           <a:lstStyle/>
           <a:p>
             <a:pPr algn="ctr">
-              <a:defRPr b="1" sz="1000">
+              <a:defRPr sz="1000" b="1">
                 <a:solidFill>
                   <a:srgbClr val="22302A"/>
                 </a:solidFill>
@@ -5499,7 +5449,7 @@
           </a:p>
           <a:p>
             <a:pPr algn="ctr">
-              <a:defRPr b="1" sz="1000">
+              <a:defRPr sz="1000" b="1">
                 <a:solidFill>
                   <a:srgbClr val="22302A"/>
                 </a:solidFill>
@@ -5530,7 +5480,7 @@
           </a:ln>
           <a:extLst>
             <a:ext uri="{C572A759-6A51-4108-AA02-DFA0A04FC94B}">
-              <ma14:wrappingTextBoxFlag xmlns:ma14="http://schemas.microsoft.com/office/mac/drawingml/2011/main" val="1"/>
+              <ma14:wrappingTextBoxFlag xmlns:ma14="http://schemas.microsoft.com/office/mac/drawingml/2011/main" xmlns:a14="http://schemas.microsoft.com/office/drawing/2010/main" xmlns:m="http://schemas.openxmlformats.org/officeDocument/2006/math" xmlns="" val="1"/>
             </a:ext>
           </a:extLst>
         </p:spPr>
@@ -5548,7 +5498,6 @@
             </a:lvl1pPr>
           </a:lstStyle>
           <a:p>
-            <a:pPr/>
             <a:r>
               <a:t>cualquier mensaje</a:t>
             </a:r>
@@ -5574,7 +5523,7 @@
           </a:ln>
           <a:extLst>
             <a:ext uri="{C572A759-6A51-4108-AA02-DFA0A04FC94B}">
-              <ma14:wrappingTextBoxFlag xmlns:ma14="http://schemas.microsoft.com/office/mac/drawingml/2011/main" val="1"/>
+              <ma14:wrappingTextBoxFlag xmlns:ma14="http://schemas.microsoft.com/office/mac/drawingml/2011/main" xmlns:a14="http://schemas.microsoft.com/office/drawing/2010/main" xmlns:m="http://schemas.openxmlformats.org/officeDocument/2006/math" xmlns="" val="1"/>
             </a:ext>
           </a:extLst>
         </p:spPr>
@@ -5592,7 +5541,6 @@
             </a:lvl1pPr>
           </a:lstStyle>
           <a:p>
-            <a:pPr/>
             <a:r>
               <a:t>→</a:t>
             </a:r>
@@ -5628,7 +5576,7 @@
           <a:bodyPr lIns="45719" rIns="45719"/>
           <a:lstStyle/>
           <a:p>
-            <a:pPr/>
+            <a:endParaRPr/>
           </a:p>
         </p:txBody>
       </p:sp>
@@ -5651,7 +5599,7 @@
           </a:ln>
           <a:extLst>
             <a:ext uri="{C572A759-6A51-4108-AA02-DFA0A04FC94B}">
-              <ma14:wrappingTextBoxFlag xmlns:ma14="http://schemas.microsoft.com/office/mac/drawingml/2011/main" val="1"/>
+              <ma14:wrappingTextBoxFlag xmlns:ma14="http://schemas.microsoft.com/office/mac/drawingml/2011/main" xmlns:a14="http://schemas.microsoft.com/office/drawing/2010/main" xmlns:m="http://schemas.openxmlformats.org/officeDocument/2006/math" xmlns="" val="1"/>
             </a:ext>
           </a:extLst>
         </p:spPr>
@@ -5669,7 +5617,6 @@
             </a:lvl1pPr>
           </a:lstStyle>
           <a:p>
-            <a:pPr/>
             <a:r>
               <a:t>🤖</a:t>
             </a:r>
@@ -5695,7 +5642,7 @@
           </a:ln>
           <a:extLst>
             <a:ext uri="{C572A759-6A51-4108-AA02-DFA0A04FC94B}">
-              <ma14:wrappingTextBoxFlag xmlns:ma14="http://schemas.microsoft.com/office/mac/drawingml/2011/main" val="1"/>
+              <ma14:wrappingTextBoxFlag xmlns:ma14="http://schemas.microsoft.com/office/mac/drawingml/2011/main" xmlns:a14="http://schemas.microsoft.com/office/drawing/2010/main" xmlns:m="http://schemas.openxmlformats.org/officeDocument/2006/math" xmlns="" val="1"/>
             </a:ext>
           </a:extLst>
         </p:spPr>
@@ -5705,7 +5652,7 @@
           </a:bodyPr>
           <a:lstStyle>
             <a:lvl1pPr algn="ctr">
-              <a:defRPr b="1" sz="1000">
+              <a:defRPr sz="1000" b="1">
                 <a:solidFill>
                   <a:srgbClr val="FFFFFF"/>
                 </a:solidFill>
@@ -5713,7 +5660,6 @@
             </a:lvl1pPr>
           </a:lstStyle>
           <a:p>
-            <a:pPr/>
             <a:r>
               <a:t>AI Agent</a:t>
             </a:r>
@@ -5739,7 +5685,7 @@
           </a:ln>
           <a:extLst>
             <a:ext uri="{C572A759-6A51-4108-AA02-DFA0A04FC94B}">
-              <ma14:wrappingTextBoxFlag xmlns:ma14="http://schemas.microsoft.com/office/mac/drawingml/2011/main" val="1"/>
+              <ma14:wrappingTextBoxFlag xmlns:ma14="http://schemas.microsoft.com/office/mac/drawingml/2011/main" xmlns:a14="http://schemas.microsoft.com/office/drawing/2010/main" xmlns:m="http://schemas.openxmlformats.org/officeDocument/2006/math" xmlns="" val="1"/>
             </a:ext>
           </a:extLst>
         </p:spPr>
@@ -5757,7 +5703,6 @@
             </a:lvl1pPr>
           </a:lstStyle>
           <a:p>
-            <a:pPr/>
             <a:r>
               <a:t>GPT-5-mini · agente ReAct</a:t>
             </a:r>
@@ -5783,7 +5728,7 @@
           </a:ln>
           <a:extLst>
             <a:ext uri="{C572A759-6A51-4108-AA02-DFA0A04FC94B}">
-              <ma14:wrappingTextBoxFlag xmlns:ma14="http://schemas.microsoft.com/office/mac/drawingml/2011/main" val="1"/>
+              <ma14:wrappingTextBoxFlag xmlns:ma14="http://schemas.microsoft.com/office/mac/drawingml/2011/main" xmlns:a14="http://schemas.microsoft.com/office/drawing/2010/main" xmlns:m="http://schemas.openxmlformats.org/officeDocument/2006/math" xmlns="" val="1"/>
             </a:ext>
           </a:extLst>
         </p:spPr>
@@ -5801,7 +5746,6 @@
             </a:lvl1pPr>
           </a:lstStyle>
           <a:p>
-            <a:pPr/>
             <a:r>
               <a:t>→</a:t>
             </a:r>
@@ -5837,7 +5781,7 @@
           <a:bodyPr lIns="45719" rIns="45719"/>
           <a:lstStyle/>
           <a:p>
-            <a:pPr/>
+            <a:endParaRPr/>
           </a:p>
         </p:txBody>
       </p:sp>
@@ -5860,7 +5804,7 @@
           </a:ln>
           <a:extLst>
             <a:ext uri="{C572A759-6A51-4108-AA02-DFA0A04FC94B}">
-              <ma14:wrappingTextBoxFlag xmlns:ma14="http://schemas.microsoft.com/office/mac/drawingml/2011/main" val="1"/>
+              <ma14:wrappingTextBoxFlag xmlns:ma14="http://schemas.microsoft.com/office/mac/drawingml/2011/main" xmlns:a14="http://schemas.microsoft.com/office/drawing/2010/main" xmlns:m="http://schemas.openxmlformats.org/officeDocument/2006/math" xmlns="" val="1"/>
             </a:ext>
           </a:extLst>
         </p:spPr>
@@ -5878,7 +5822,6 @@
             </a:lvl1pPr>
           </a:lstStyle>
           <a:p>
-            <a:pPr/>
             <a:r>
               <a:t>✈</a:t>
             </a:r>
@@ -5904,7 +5847,7 @@
           </a:ln>
           <a:extLst>
             <a:ext uri="{C572A759-6A51-4108-AA02-DFA0A04FC94B}">
-              <ma14:wrappingTextBoxFlag xmlns:ma14="http://schemas.microsoft.com/office/mac/drawingml/2011/main" val="1"/>
+              <ma14:wrappingTextBoxFlag xmlns:ma14="http://schemas.microsoft.com/office/mac/drawingml/2011/main" xmlns:a14="http://schemas.microsoft.com/office/drawing/2010/main" xmlns:m="http://schemas.openxmlformats.org/officeDocument/2006/math" xmlns="" val="1"/>
             </a:ext>
           </a:extLst>
         </p:spPr>
@@ -5914,7 +5857,7 @@
           </a:bodyPr>
           <a:lstStyle>
             <a:lvl1pPr algn="ctr">
-              <a:defRPr b="1" sz="1000">
+              <a:defRPr sz="1000" b="1">
                 <a:solidFill>
                   <a:srgbClr val="FFFFFF"/>
                 </a:solidFill>
@@ -5922,7 +5865,6 @@
             </a:lvl1pPr>
           </a:lstStyle>
           <a:p>
-            <a:pPr/>
             <a:r>
               <a:t>Telegram</a:t>
             </a:r>
@@ -5948,7 +5890,7 @@
           </a:ln>
           <a:extLst>
             <a:ext uri="{C572A759-6A51-4108-AA02-DFA0A04FC94B}">
-              <ma14:wrappingTextBoxFlag xmlns:ma14="http://schemas.microsoft.com/office/mac/drawingml/2011/main" val="1"/>
+              <ma14:wrappingTextBoxFlag xmlns:ma14="http://schemas.microsoft.com/office/mac/drawingml/2011/main" xmlns:a14="http://schemas.microsoft.com/office/drawing/2010/main" xmlns:m="http://schemas.openxmlformats.org/officeDocument/2006/math" xmlns="" val="1"/>
             </a:ext>
           </a:extLst>
         </p:spPr>
@@ -5966,7 +5908,6 @@
             </a:lvl1pPr>
           </a:lstStyle>
           <a:p>
-            <a:pPr/>
             <a:r>
               <a:t>respuesta al chat</a:t>
             </a:r>
@@ -5998,7 +5939,7 @@
           <a:bodyPr lIns="45719" rIns="45719"/>
           <a:lstStyle/>
           <a:p>
-            <a:pPr/>
+            <a:endParaRPr/>
           </a:p>
         </p:txBody>
       </p:sp>
@@ -6027,7 +5968,7 @@
           <a:bodyPr lIns="45719" rIns="45719"/>
           <a:lstStyle/>
           <a:p>
-            <a:pPr/>
+            <a:endParaRPr/>
           </a:p>
         </p:txBody>
       </p:sp>
@@ -6056,7 +5997,7 @@
           <a:bodyPr lIns="45719" rIns="45719"/>
           <a:lstStyle/>
           <a:p>
-            <a:pPr/>
+            <a:endParaRPr/>
           </a:p>
         </p:txBody>
       </p:sp>
@@ -6089,7 +6030,7 @@
           <a:bodyPr lIns="45719" rIns="45719"/>
           <a:lstStyle/>
           <a:p>
-            <a:pPr/>
+            <a:endParaRPr/>
           </a:p>
         </p:txBody>
       </p:sp>
@@ -6112,7 +6053,7 @@
           </a:ln>
           <a:extLst>
             <a:ext uri="{C572A759-6A51-4108-AA02-DFA0A04FC94B}">
-              <ma14:wrappingTextBoxFlag xmlns:ma14="http://schemas.microsoft.com/office/mac/drawingml/2011/main" val="1"/>
+              <ma14:wrappingTextBoxFlag xmlns:ma14="http://schemas.microsoft.com/office/mac/drawingml/2011/main" xmlns:a14="http://schemas.microsoft.com/office/drawing/2010/main" xmlns:m="http://schemas.openxmlformats.org/officeDocument/2006/math" xmlns="" val="1"/>
             </a:ext>
           </a:extLst>
         </p:spPr>
@@ -6130,7 +6071,6 @@
             </a:lvl1pPr>
           </a:lstStyle>
           <a:p>
-            <a:pPr/>
             <a:r>
               <a:t>🧠</a:t>
             </a:r>
@@ -6156,7 +6096,7 @@
           </a:ln>
           <a:extLst>
             <a:ext uri="{C572A759-6A51-4108-AA02-DFA0A04FC94B}">
-              <ma14:wrappingTextBoxFlag xmlns:ma14="http://schemas.microsoft.com/office/mac/drawingml/2011/main" val="1"/>
+              <ma14:wrappingTextBoxFlag xmlns:ma14="http://schemas.microsoft.com/office/mac/drawingml/2011/main" xmlns:a14="http://schemas.microsoft.com/office/drawing/2010/main" xmlns:m="http://schemas.openxmlformats.org/officeDocument/2006/math" xmlns="" val="1"/>
             </a:ext>
           </a:extLst>
         </p:spPr>
@@ -6166,7 +6106,7 @@
           </a:bodyPr>
           <a:lstStyle>
             <a:lvl1pPr algn="ctr">
-              <a:defRPr b="1" sz="1000">
+              <a:defRPr sz="1000" b="1">
                 <a:solidFill>
                   <a:srgbClr val="22302A"/>
                 </a:solidFill>
@@ -6174,7 +6114,6 @@
             </a:lvl1pPr>
           </a:lstStyle>
           <a:p>
-            <a:pPr/>
             <a:r>
               <a:t>OpenAI Chat Model</a:t>
             </a:r>
@@ -6200,7 +6139,7 @@
           </a:ln>
           <a:extLst>
             <a:ext uri="{C572A759-6A51-4108-AA02-DFA0A04FC94B}">
-              <ma14:wrappingTextBoxFlag xmlns:ma14="http://schemas.microsoft.com/office/mac/drawingml/2011/main" val="1"/>
+              <ma14:wrappingTextBoxFlag xmlns:ma14="http://schemas.microsoft.com/office/mac/drawingml/2011/main" xmlns:a14="http://schemas.microsoft.com/office/drawing/2010/main" xmlns:m="http://schemas.openxmlformats.org/officeDocument/2006/math" xmlns="" val="1"/>
             </a:ext>
           </a:extLst>
         </p:spPr>
@@ -6218,7 +6157,6 @@
             </a:lvl1pPr>
           </a:lstStyle>
           <a:p>
-            <a:pPr/>
             <a:r>
               <a:t>gpt-5-mini</a:t>
             </a:r>
@@ -6254,7 +6192,7 @@
           <a:bodyPr lIns="45719" rIns="45719"/>
           <a:lstStyle/>
           <a:p>
-            <a:pPr/>
+            <a:endParaRPr/>
           </a:p>
         </p:txBody>
       </p:sp>
@@ -6277,7 +6215,7 @@
           </a:ln>
           <a:extLst>
             <a:ext uri="{C572A759-6A51-4108-AA02-DFA0A04FC94B}">
-              <ma14:wrappingTextBoxFlag xmlns:ma14="http://schemas.microsoft.com/office/mac/drawingml/2011/main" val="1"/>
+              <ma14:wrappingTextBoxFlag xmlns:ma14="http://schemas.microsoft.com/office/mac/drawingml/2011/main" xmlns:a14="http://schemas.microsoft.com/office/drawing/2010/main" xmlns:m="http://schemas.openxmlformats.org/officeDocument/2006/math" xmlns="" val="1"/>
             </a:ext>
           </a:extLst>
         </p:spPr>
@@ -6295,7 +6233,6 @@
             </a:lvl1pPr>
           </a:lstStyle>
           <a:p>
-            <a:pPr/>
             <a:r>
               <a:t>💬</a:t>
             </a:r>
@@ -6321,7 +6258,7 @@
           </a:ln>
           <a:extLst>
             <a:ext uri="{C572A759-6A51-4108-AA02-DFA0A04FC94B}">
-              <ma14:wrappingTextBoxFlag xmlns:ma14="http://schemas.microsoft.com/office/mac/drawingml/2011/main" val="1"/>
+              <ma14:wrappingTextBoxFlag xmlns:ma14="http://schemas.microsoft.com/office/mac/drawingml/2011/main" xmlns:a14="http://schemas.microsoft.com/office/drawing/2010/main" xmlns:m="http://schemas.openxmlformats.org/officeDocument/2006/math" xmlns="" val="1"/>
             </a:ext>
           </a:extLst>
         </p:spPr>
@@ -6331,7 +6268,7 @@
           </a:bodyPr>
           <a:lstStyle>
             <a:lvl1pPr algn="ctr">
-              <a:defRPr b="1" sz="1000">
+              <a:defRPr sz="1000" b="1">
                 <a:solidFill>
                   <a:srgbClr val="22302A"/>
                 </a:solidFill>
@@ -6339,7 +6276,6 @@
             </a:lvl1pPr>
           </a:lstStyle>
           <a:p>
-            <a:pPr/>
             <a:r>
               <a:t>Simple Memory</a:t>
             </a:r>
@@ -6365,7 +6301,7 @@
           </a:ln>
           <a:extLst>
             <a:ext uri="{C572A759-6A51-4108-AA02-DFA0A04FC94B}">
-              <ma14:wrappingTextBoxFlag xmlns:ma14="http://schemas.microsoft.com/office/mac/drawingml/2011/main" val="1"/>
+              <ma14:wrappingTextBoxFlag xmlns:ma14="http://schemas.microsoft.com/office/mac/drawingml/2011/main" xmlns:a14="http://schemas.microsoft.com/office/drawing/2010/main" xmlns:m="http://schemas.openxmlformats.org/officeDocument/2006/math" xmlns="" val="1"/>
             </a:ext>
           </a:extLst>
         </p:spPr>
@@ -6383,7 +6319,6 @@
             </a:lvl1pPr>
           </a:lstStyle>
           <a:p>
-            <a:pPr/>
             <a:r>
               <a:t>1 sesión por usuario Telegram</a:t>
             </a:r>
@@ -6419,7 +6354,7 @@
           <a:bodyPr lIns="45719" rIns="45719"/>
           <a:lstStyle/>
           <a:p>
-            <a:pPr/>
+            <a:endParaRPr/>
           </a:p>
         </p:txBody>
       </p:sp>
@@ -6442,7 +6377,7 @@
           </a:ln>
           <a:extLst>
             <a:ext uri="{C572A759-6A51-4108-AA02-DFA0A04FC94B}">
-              <ma14:wrappingTextBoxFlag xmlns:ma14="http://schemas.microsoft.com/office/mac/drawingml/2011/main" val="1"/>
+              <ma14:wrappingTextBoxFlag xmlns:ma14="http://schemas.microsoft.com/office/mac/drawingml/2011/main" xmlns:a14="http://schemas.microsoft.com/office/drawing/2010/main" xmlns:m="http://schemas.openxmlformats.org/officeDocument/2006/math" xmlns="" val="1"/>
             </a:ext>
           </a:extLst>
         </p:spPr>
@@ -6460,7 +6395,6 @@
             </a:lvl1pPr>
           </a:lstStyle>
           <a:p>
-            <a:pPr/>
             <a:r>
               <a:t>🗄</a:t>
             </a:r>
@@ -6486,7 +6420,7 @@
           </a:ln>
           <a:extLst>
             <a:ext uri="{C572A759-6A51-4108-AA02-DFA0A04FC94B}">
-              <ma14:wrappingTextBoxFlag xmlns:ma14="http://schemas.microsoft.com/office/mac/drawingml/2011/main" val="1"/>
+              <ma14:wrappingTextBoxFlag xmlns:ma14="http://schemas.microsoft.com/office/mac/drawingml/2011/main" xmlns:a14="http://schemas.microsoft.com/office/drawing/2010/main" xmlns:m="http://schemas.openxmlformats.org/officeDocument/2006/math" xmlns="" val="1"/>
             </a:ext>
           </a:extLst>
         </p:spPr>
@@ -6496,7 +6430,7 @@
           </a:bodyPr>
           <a:lstStyle>
             <a:lvl1pPr algn="ctr">
-              <a:defRPr b="1" sz="1000">
+              <a:defRPr sz="1000" b="1">
                 <a:solidFill>
                   <a:srgbClr val="22302A"/>
                 </a:solidFill>
@@ -6504,7 +6438,6 @@
             </a:lvl1pPr>
           </a:lstStyle>
           <a:p>
-            <a:pPr/>
             <a:r>
               <a:t>execute_query</a:t>
             </a:r>
@@ -6530,7 +6463,7 @@
           </a:ln>
           <a:extLst>
             <a:ext uri="{C572A759-6A51-4108-AA02-DFA0A04FC94B}">
-              <ma14:wrappingTextBoxFlag xmlns:ma14="http://schemas.microsoft.com/office/mac/drawingml/2011/main" val="1"/>
+              <ma14:wrappingTextBoxFlag xmlns:ma14="http://schemas.microsoft.com/office/mac/drawingml/2011/main" xmlns:a14="http://schemas.microsoft.com/office/drawing/2010/main" xmlns:m="http://schemas.openxmlformats.org/officeDocument/2006/math" xmlns="" val="1"/>
             </a:ext>
           </a:extLst>
         </p:spPr>
@@ -6548,7 +6481,6 @@
             </a:lvl1pPr>
           </a:lstStyle>
           <a:p>
-            <a:pPr/>
             <a:r>
               <a:t>tool MySQL — SELECT sobre dataset_fao</a:t>
             </a:r>
@@ -6574,7 +6506,7 @@
           </a:ln>
           <a:extLst>
             <a:ext uri="{C572A759-6A51-4108-AA02-DFA0A04FC94B}">
-              <ma14:wrappingTextBoxFlag xmlns:ma14="http://schemas.microsoft.com/office/mac/drawingml/2011/main" val="1"/>
+              <ma14:wrappingTextBoxFlag xmlns:ma14="http://schemas.microsoft.com/office/mac/drawingml/2011/main" xmlns:a14="http://schemas.microsoft.com/office/drawing/2010/main" xmlns:m="http://schemas.openxmlformats.org/officeDocument/2006/math" xmlns="" val="1"/>
             </a:ext>
           </a:extLst>
         </p:spPr>
@@ -6584,7 +6516,7 @@
           </a:bodyPr>
           <a:lstStyle>
             <a:lvl1pPr>
-              <a:defRPr b="1" spc="50" sz="1100">
+              <a:defRPr sz="1100" b="1" spc="50">
                 <a:solidFill>
                   <a:srgbClr val="1F9BD1"/>
                 </a:solidFill>
@@ -6592,7 +6524,6 @@
             </a:lvl1pPr>
           </a:lstStyle>
           <a:p>
-            <a:pPr/>
             <a:r>
               <a:t>EJEMPLO DE CONVERSACIÓN</a:t>
             </a:r>
@@ -6628,7 +6559,7 @@
           <a:bodyPr lIns="45719" rIns="45719"/>
           <a:lstStyle/>
           <a:p>
-            <a:pPr/>
+            <a:endParaRPr/>
           </a:p>
         </p:txBody>
       </p:sp>
@@ -6659,7 +6590,7 @@
           <a:bodyPr lIns="45719" rIns="45719"/>
           <a:lstStyle/>
           <a:p>
-            <a:pPr/>
+            <a:endParaRPr/>
           </a:p>
         </p:txBody>
       </p:sp>
@@ -6682,7 +6613,7 @@
           </a:ln>
           <a:extLst>
             <a:ext uri="{C572A759-6A51-4108-AA02-DFA0A04FC94B}">
-              <ma14:wrappingTextBoxFlag xmlns:ma14="http://schemas.microsoft.com/office/mac/drawingml/2011/main" val="1"/>
+              <ma14:wrappingTextBoxFlag xmlns:ma14="http://schemas.microsoft.com/office/mac/drawingml/2011/main" xmlns:a14="http://schemas.microsoft.com/office/drawing/2010/main" xmlns:m="http://schemas.openxmlformats.org/officeDocument/2006/math" xmlns="" val="1"/>
             </a:ext>
           </a:extLst>
         </p:spPr>
@@ -6700,7 +6631,6 @@
             </a:lvl1pPr>
           </a:lstStyle>
           <a:p>
-            <a:pPr/>
             <a:r>
               <a:t>¿Cuántas vacas lecheras había en Asia en 2023?</a:t>
             </a:r>
@@ -6736,7 +6666,7 @@
           <a:bodyPr lIns="45719" rIns="45719"/>
           <a:lstStyle/>
           <a:p>
-            <a:pPr/>
+            <a:endParaRPr/>
           </a:p>
         </p:txBody>
       </p:sp>
@@ -6759,7 +6689,7 @@
           </a:ln>
           <a:extLst>
             <a:ext uri="{C572A759-6A51-4108-AA02-DFA0A04FC94B}">
-              <ma14:wrappingTextBoxFlag xmlns:ma14="http://schemas.microsoft.com/office/mac/drawingml/2011/main" val="1"/>
+              <ma14:wrappingTextBoxFlag xmlns:ma14="http://schemas.microsoft.com/office/mac/drawingml/2011/main" xmlns:a14="http://schemas.microsoft.com/office/drawing/2010/main" xmlns:m="http://schemas.openxmlformats.org/officeDocument/2006/math" xmlns="" val="1"/>
             </a:ext>
           </a:extLst>
         </p:spPr>
@@ -6780,7 +6710,6 @@
             </a:lvl1pPr>
           </a:lstStyle>
           <a:p>
-            <a:pPr/>
             <a:r>
               <a:t>Según los datos de FAOSTAT, en 2023 Asia registraba del orden de 150 millones de cabezas de vacas lecheras (dato oficial). ¿Quieres que lo compare con otro continente o año?</a:t>
             </a:r>
@@ -6814,7 +6743,7 @@
           <a:bodyPr lIns="45719" rIns="45719"/>
           <a:lstStyle/>
           <a:p>
-            <a:pPr/>
+            <a:endParaRPr/>
           </a:p>
         </p:txBody>
       </p:sp>
@@ -6837,7 +6766,7 @@
           </a:ln>
           <a:extLst>
             <a:ext uri="{C572A759-6A51-4108-AA02-DFA0A04FC94B}">
-              <ma14:wrappingTextBoxFlag xmlns:ma14="http://schemas.microsoft.com/office/mac/drawingml/2011/main" val="1"/>
+              <ma14:wrappingTextBoxFlag xmlns:ma14="http://schemas.microsoft.com/office/mac/drawingml/2011/main" xmlns:a14="http://schemas.microsoft.com/office/drawing/2010/main" xmlns:m="http://schemas.openxmlformats.org/officeDocument/2006/math" xmlns="" val="1"/>
             </a:ext>
           </a:extLst>
         </p:spPr>
@@ -6847,7 +6776,7 @@
           </a:bodyPr>
           <a:lstStyle>
             <a:lvl1pPr>
-              <a:defRPr b="1" spc="30" sz="1000">
+              <a:defRPr sz="1000" b="1" spc="30">
                 <a:solidFill>
                   <a:srgbClr val="D98C3F"/>
                 </a:solidFill>
@@ -6855,7 +6784,6 @@
             </a:lvl1pPr>
           </a:lstStyle>
           <a:p>
-            <a:pPr/>
             <a:r>
               <a:t>QUÉ DEMUESTRA — Y EN QUÉ SE DIFERENCIA DEL OTRO WORKFLOW</a:t>
             </a:r>
@@ -6881,7 +6809,7 @@
           </a:ln>
           <a:extLst>
             <a:ext uri="{C572A759-6A51-4108-AA02-DFA0A04FC94B}">
-              <ma14:wrappingTextBoxFlag xmlns:ma14="http://schemas.microsoft.com/office/mac/drawingml/2011/main" val="1"/>
+              <ma14:wrappingTextBoxFlag xmlns:ma14="http://schemas.microsoft.com/office/mac/drawingml/2011/main" xmlns:a14="http://schemas.microsoft.com/office/drawing/2010/main" xmlns:m="http://schemas.openxmlformats.org/officeDocument/2006/math" xmlns="" val="1"/>
             </a:ext>
           </a:extLst>
         </p:spPr>
@@ -6899,7 +6827,6 @@
             </a:lvl1pPr>
           </a:lstStyle>
           <a:p>
-            <a:pPr/>
             <a:r>
               <a:t>—</a:t>
             </a:r>
@@ -6925,7 +6852,7 @@
           </a:ln>
           <a:extLst>
             <a:ext uri="{C572A759-6A51-4108-AA02-DFA0A04FC94B}">
-              <ma14:wrappingTextBoxFlag xmlns:ma14="http://schemas.microsoft.com/office/mac/drawingml/2011/main" val="1"/>
+              <ma14:wrappingTextBoxFlag xmlns:ma14="http://schemas.microsoft.com/office/mac/drawingml/2011/main" xmlns:a14="http://schemas.microsoft.com/office/drawing/2010/main" xmlns:m="http://schemas.openxmlformats.org/officeDocument/2006/math" xmlns="" val="1"/>
             </a:ext>
           </a:extLst>
         </p:spPr>
@@ -6946,7 +6873,6 @@
             </a:lvl1pPr>
           </a:lstStyle>
           <a:p>
-            <a:pPr/>
             <a:r>
               <a:t>El SQL no está escrito a mano: lo genera el LLM en cada turno según lo que se le pregunte.</a:t>
             </a:r>
@@ -6972,7 +6898,7 @@
           </a:ln>
           <a:extLst>
             <a:ext uri="{C572A759-6A51-4108-AA02-DFA0A04FC94B}">
-              <ma14:wrappingTextBoxFlag xmlns:ma14="http://schemas.microsoft.com/office/mac/drawingml/2011/main" val="1"/>
+              <ma14:wrappingTextBoxFlag xmlns:ma14="http://schemas.microsoft.com/office/mac/drawingml/2011/main" xmlns:a14="http://schemas.microsoft.com/office/drawing/2010/main" xmlns:m="http://schemas.openxmlformats.org/officeDocument/2006/math" xmlns="" val="1"/>
             </a:ext>
           </a:extLst>
         </p:spPr>
@@ -6990,7 +6916,6 @@
             </a:lvl1pPr>
           </a:lstStyle>
           <a:p>
-            <a:pPr/>
             <a:r>
               <a:t>—</a:t>
             </a:r>
@@ -7016,7 +6941,7 @@
           </a:ln>
           <a:extLst>
             <a:ext uri="{C572A759-6A51-4108-AA02-DFA0A04FC94B}">
-              <ma14:wrappingTextBoxFlag xmlns:ma14="http://schemas.microsoft.com/office/mac/drawingml/2011/main" val="1"/>
+              <ma14:wrappingTextBoxFlag xmlns:ma14="http://schemas.microsoft.com/office/mac/drawingml/2011/main" xmlns:a14="http://schemas.microsoft.com/office/drawing/2010/main" xmlns:m="http://schemas.openxmlformats.org/officeDocument/2006/math" xmlns="" val="1"/>
             </a:ext>
           </a:extLst>
         </p:spPr>
@@ -7037,7 +6962,6 @@
             </a:lvl1pPr>
           </a:lstStyle>
           <a:p>
-            <a:pPr/>
             <a:r>
               <a:t>Mantiene contexto de conversación por usuario (memoria por chatId de Telegram).</a:t>
             </a:r>
@@ -7063,7 +6987,7 @@
           </a:ln>
           <a:extLst>
             <a:ext uri="{C572A759-6A51-4108-AA02-DFA0A04FC94B}">
-              <ma14:wrappingTextBoxFlag xmlns:ma14="http://schemas.microsoft.com/office/mac/drawingml/2011/main" val="1"/>
+              <ma14:wrappingTextBoxFlag xmlns:ma14="http://schemas.microsoft.com/office/mac/drawingml/2011/main" xmlns:a14="http://schemas.microsoft.com/office/drawing/2010/main" xmlns:m="http://schemas.openxmlformats.org/officeDocument/2006/math" xmlns="" val="1"/>
             </a:ext>
           </a:extLst>
         </p:spPr>
@@ -7081,7 +7005,6 @@
             </a:lvl1pPr>
           </a:lstStyle>
           <a:p>
-            <a:pPr/>
             <a:r>
               <a:t>—</a:t>
             </a:r>
@@ -7107,7 +7030,7 @@
           </a:ln>
           <a:extLst>
             <a:ext uri="{C572A759-6A51-4108-AA02-DFA0A04FC94B}">
-              <ma14:wrappingTextBoxFlag xmlns:ma14="http://schemas.microsoft.com/office/mac/drawingml/2011/main" val="1"/>
+              <ma14:wrappingTextBoxFlag xmlns:ma14="http://schemas.microsoft.com/office/mac/drawingml/2011/main" xmlns:a14="http://schemas.microsoft.com/office/drawing/2010/main" xmlns:m="http://schemas.openxmlformats.org/officeDocument/2006/math" xmlns="" val="1"/>
             </a:ext>
           </a:extLst>
         </p:spPr>
@@ -7128,7 +7051,6 @@
             </a:lvl1pPr>
           </a:lstStyle>
           <a:p>
-            <a:pPr/>
             <a:r>
               <a:t>El system prompt fija barandillas: solo SELECT, sin mezclar unidades, sin inventar datos.</a:t>
             </a:r>
@@ -7154,7 +7076,7 @@
           </a:ln>
           <a:extLst>
             <a:ext uri="{C572A759-6A51-4108-AA02-DFA0A04FC94B}">
-              <ma14:wrappingTextBoxFlag xmlns:ma14="http://schemas.microsoft.com/office/mac/drawingml/2011/main" val="1"/>
+              <ma14:wrappingTextBoxFlag xmlns:ma14="http://schemas.microsoft.com/office/mac/drawingml/2011/main" xmlns:a14="http://schemas.microsoft.com/office/drawing/2010/main" xmlns:m="http://schemas.openxmlformats.org/officeDocument/2006/math" xmlns="" val="1"/>
             </a:ext>
           </a:extLst>
         </p:spPr>
@@ -7164,7 +7086,7 @@
           </a:bodyPr>
           <a:lstStyle>
             <a:lvl1pPr>
-              <a:defRPr i="1" sz="900">
+              <a:defRPr sz="900" i="1">
                 <a:solidFill>
                   <a:srgbClr val="5B6B62"/>
                 </a:solidFill>
@@ -7172,7 +7094,6 @@
             </a:lvl1pPr>
           </a:lstStyle>
           <a:p>
-            <a:pPr/>
             <a:r>
               <a:t>Mismo bot de Telegram, dos automatizaciones: la anterior empuja un resumen fijo; esta responde bajo demanda a cualquier pregunta sobre el dataset.</a:t>
             </a:r>
@@ -7184,18 +7105,19 @@
   <p:clrMapOvr>
     <a:masterClrMapping/>
   </p:clrMapOvr>
-  <p:transition xmlns:p14="http://schemas.microsoft.com/office/powerpoint/2010/main" spd="med" advClick="1"/>
+  <p:transition spd="med"/>
 </p:sld>
 </file>
 
 <file path=ppt/slides/slide12.xml><?xml version="1.0" encoding="utf-8"?>
-<p:sld xmlns:a="http://schemas.openxmlformats.org/drawingml/2006/main" xmlns:r="http://schemas.openxmlformats.org/officeDocument/2006/relationships" xmlns:p="http://schemas.openxmlformats.org/presentationml/2006/main" xmlns:m="http://schemas.openxmlformats.org/officeDocument/2006/math" xmlns:a14="http://schemas.microsoft.com/office/drawing/2010/main" showMasterSp="1" showMasterPhAnim="1">
+<p:sld xmlns:a="http://schemas.openxmlformats.org/drawingml/2006/main" xmlns:r="http://schemas.openxmlformats.org/officeDocument/2006/relationships" xmlns:p="http://schemas.openxmlformats.org/presentationml/2006/main">
   <p:cSld>
     <p:bg>
       <p:bgPr>
         <a:solidFill>
           <a:srgbClr val="1F3A2E"/>
         </a:solidFill>
+        <a:effectLst/>
       </p:bgPr>
     </p:bg>
     <p:spTree>
@@ -7223,7 +7145,6 @@
         <p:blipFill>
           <a:blip r:embed="rId2">
             <a:alphaModFix amt="45000"/>
-            <a:extLst/>
           </a:blip>
           <a:stretch>
             <a:fillRect/>
@@ -7244,35 +7165,6 @@
       </p:pic>
       <p:sp>
         <p:nvSpPr>
-          <p:cNvPr id="368" name="Shape 0"/>
-          <p:cNvSpPr/>
-          <p:nvPr/>
-        </p:nvSpPr>
-        <p:spPr>
-          <a:xfrm>
-            <a:off x="-2743200" y="4114800"/>
-            <a:ext cx="5486400" cy="5486400"/>
-          </a:xfrm>
-          <a:prstGeom prst="ellipse">
-            <a:avLst/>
-          </a:prstGeom>
-          <a:solidFill>
-            <a:srgbClr val="16281F"/>
-          </a:solidFill>
-          <a:ln w="12700">
-            <a:miter lim="400000"/>
-          </a:ln>
-        </p:spPr>
-        <p:txBody>
-          <a:bodyPr lIns="45719" rIns="45719"/>
-          <a:lstStyle/>
-          <a:p>
-            <a:pPr/>
-          </a:p>
-        </p:txBody>
-      </p:sp>
-      <p:sp>
-        <p:nvSpPr>
           <p:cNvPr id="369" name="Text 1"/>
           <p:cNvSpPr txBox="1"/>
           <p:nvPr/>
@@ -7290,7 +7182,7 @@
           </a:ln>
           <a:extLst>
             <a:ext uri="{C572A759-6A51-4108-AA02-DFA0A04FC94B}">
-              <ma14:wrappingTextBoxFlag xmlns:ma14="http://schemas.microsoft.com/office/mac/drawingml/2011/main" val="1"/>
+              <ma14:wrappingTextBoxFlag xmlns:ma14="http://schemas.microsoft.com/office/mac/drawingml/2011/main" xmlns:a14="http://schemas.microsoft.com/office/drawing/2010/main" xmlns:m="http://schemas.openxmlformats.org/officeDocument/2006/math" xmlns="" val="1"/>
             </a:ext>
           </a:extLst>
         </p:spPr>
@@ -7300,7 +7192,7 @@
           </a:bodyPr>
           <a:lstStyle>
             <a:lvl1pPr>
-              <a:defRPr b="1" sz="5200">
+              <a:defRPr sz="5200" b="1">
                 <a:solidFill>
                   <a:srgbClr val="FFFFFF"/>
                 </a:solidFill>
@@ -7312,7 +7204,6 @@
             </a:lvl1pPr>
           </a:lstStyle>
           <a:p>
-            <a:pPr/>
             <a:r>
               <a:t>¡Muchas gracias!</a:t>
             </a:r>
@@ -7338,7 +7229,7 @@
           </a:ln>
           <a:extLst>
             <a:ext uri="{C572A759-6A51-4108-AA02-DFA0A04FC94B}">
-              <ma14:wrappingTextBoxFlag xmlns:ma14="http://schemas.microsoft.com/office/mac/drawingml/2011/main" val="1"/>
+              <ma14:wrappingTextBoxFlag xmlns:ma14="http://schemas.microsoft.com/office/mac/drawingml/2011/main" xmlns:a14="http://schemas.microsoft.com/office/drawing/2010/main" xmlns:m="http://schemas.openxmlformats.org/officeDocument/2006/math" xmlns="" val="1"/>
             </a:ext>
           </a:extLst>
         </p:spPr>
@@ -7356,7 +7247,6 @@
             </a:lvl1pPr>
           </a:lstStyle>
           <a:p>
-            <a:pPr/>
             <a:r>
               <a:t>Proyecto — Emisiones del sector ganadero mundial</a:t>
             </a:r>
@@ -7372,9 +7262,7 @@
           <p:nvPr/>
         </p:nvPicPr>
         <p:blipFill>
-          <a:blip r:embed="rId3">
-            <a:extLst/>
-          </a:blip>
+          <a:blip r:embed="rId3"/>
           <a:stretch>
             <a:fillRect/>
           </a:stretch>
@@ -7397,18 +7285,19 @@
   <p:clrMapOvr>
     <a:masterClrMapping/>
   </p:clrMapOvr>
-  <p:transition xmlns:p14="http://schemas.microsoft.com/office/powerpoint/2010/main" spd="med" advClick="1"/>
+  <p:transition spd="med"/>
 </p:sld>
 </file>
 
 <file path=ppt/slides/slide2.xml><?xml version="1.0" encoding="utf-8"?>
-<p:sld xmlns:a="http://schemas.openxmlformats.org/drawingml/2006/main" xmlns:r="http://schemas.openxmlformats.org/officeDocument/2006/relationships" xmlns:p="http://schemas.openxmlformats.org/presentationml/2006/main" xmlns:m="http://schemas.openxmlformats.org/officeDocument/2006/math" xmlns:a14="http://schemas.microsoft.com/office/drawing/2010/main" showMasterSp="1" showMasterPhAnim="1">
+<p:sld xmlns:a="http://schemas.openxmlformats.org/drawingml/2006/main" xmlns:r="http://schemas.openxmlformats.org/officeDocument/2006/relationships" xmlns:p="http://schemas.openxmlformats.org/presentationml/2006/main">
   <p:cSld>
     <p:bg>
       <p:bgPr>
         <a:solidFill>
           <a:srgbClr val="F4EFE6"/>
         </a:solidFill>
+        <a:effectLst/>
       </p:bgPr>
     </p:bg>
     <p:spTree>
@@ -7452,7 +7341,7 @@
           <a:bodyPr lIns="45719" rIns="45719"/>
           <a:lstStyle/>
           <a:p>
-            <a:pPr/>
+            <a:endParaRPr/>
           </a:p>
         </p:txBody>
       </p:sp>
@@ -7475,7 +7364,7 @@
           </a:ln>
           <a:extLst>
             <a:ext uri="{C572A759-6A51-4108-AA02-DFA0A04FC94B}">
-              <ma14:wrappingTextBoxFlag xmlns:ma14="http://schemas.microsoft.com/office/mac/drawingml/2011/main" val="1"/>
+              <ma14:wrappingTextBoxFlag xmlns:ma14="http://schemas.microsoft.com/office/mac/drawingml/2011/main" xmlns:a14="http://schemas.microsoft.com/office/drawing/2010/main" xmlns:m="http://schemas.openxmlformats.org/officeDocument/2006/math" xmlns="" val="1"/>
             </a:ext>
           </a:extLst>
         </p:spPr>
@@ -7485,7 +7374,7 @@
           </a:bodyPr>
           <a:lstStyle>
             <a:lvl1pPr algn="ctr">
-              <a:defRPr b="1" spc="100" sz="1000">
+              <a:defRPr sz="1000" b="1" spc="100">
                 <a:solidFill>
                   <a:srgbClr val="FFFFFF"/>
                 </a:solidFill>
@@ -7493,7 +7382,6 @@
             </a:lvl1pPr>
           </a:lstStyle>
           <a:p>
-            <a:pPr/>
             <a:r>
               <a:t>PASO 2 · PYTHON + PANDAS</a:t>
             </a:r>
@@ -7519,7 +7407,7 @@
           </a:ln>
           <a:extLst>
             <a:ext uri="{C572A759-6A51-4108-AA02-DFA0A04FC94B}">
-              <ma14:wrappingTextBoxFlag xmlns:ma14="http://schemas.microsoft.com/office/mac/drawingml/2011/main" val="1"/>
+              <ma14:wrappingTextBoxFlag xmlns:ma14="http://schemas.microsoft.com/office/mac/drawingml/2011/main" xmlns:a14="http://schemas.microsoft.com/office/drawing/2010/main" xmlns:m="http://schemas.openxmlformats.org/officeDocument/2006/math" xmlns="" val="1"/>
             </a:ext>
           </a:extLst>
         </p:spPr>
@@ -7529,7 +7417,7 @@
           </a:bodyPr>
           <a:lstStyle>
             <a:lvl1pPr>
-              <a:defRPr b="1" sz="3000">
+              <a:defRPr sz="3000" b="1">
                 <a:solidFill>
                   <a:srgbClr val="22302A"/>
                 </a:solidFill>
@@ -7541,7 +7429,6 @@
             </a:lvl1pPr>
           </a:lstStyle>
           <a:p>
-            <a:pPr/>
             <a:r>
               <a:t>Carga y limpieza de datos</a:t>
             </a:r>
@@ -7567,7 +7454,7 @@
           </a:ln>
           <a:extLst>
             <a:ext uri="{C572A759-6A51-4108-AA02-DFA0A04FC94B}">
-              <ma14:wrappingTextBoxFlag xmlns:ma14="http://schemas.microsoft.com/office/mac/drawingml/2011/main" val="1"/>
+              <ma14:wrappingTextBoxFlag xmlns:ma14="http://schemas.microsoft.com/office/mac/drawingml/2011/main" xmlns:a14="http://schemas.microsoft.com/office/drawing/2010/main" xmlns:m="http://schemas.openxmlformats.org/officeDocument/2006/math" xmlns="" val="1"/>
             </a:ext>
           </a:extLst>
         </p:spPr>
@@ -7585,7 +7472,6 @@
             </a:lvl1pPr>
           </a:lstStyle>
           <a:p>
-            <a:pPr/>
             <a:r>
               <a:t>De 5 CSV independientes a un único dataset limpio y normalizado</a:t>
             </a:r>
@@ -7617,7 +7503,7 @@
             </a:solidFill>
           </a:ln>
           <a:effectLst>
-            <a:outerShdw sx="100000" sy="100000" kx="0" ky="0" algn="b" rotWithShape="0" blurRad="76200" dist="25400" dir="5400000">
+            <a:outerShdw blurRad="76200" dist="25400" dir="5400000" rotWithShape="0">
               <a:srgbClr val="000000">
                 <a:alpha val="12000"/>
               </a:srgbClr>
@@ -7628,7 +7514,7 @@
           <a:bodyPr lIns="45719" rIns="45719"/>
           <a:lstStyle/>
           <a:p>
-            <a:pPr/>
+            <a:endParaRPr/>
           </a:p>
         </p:txBody>
       </p:sp>
@@ -7657,7 +7543,7 @@
           <a:bodyPr lIns="45719" rIns="45719"/>
           <a:lstStyle/>
           <a:p>
-            <a:pPr/>
+            <a:endParaRPr/>
           </a:p>
         </p:txBody>
       </p:sp>
@@ -7680,7 +7566,7 @@
           </a:ln>
           <a:extLst>
             <a:ext uri="{C572A759-6A51-4108-AA02-DFA0A04FC94B}">
-              <ma14:wrappingTextBoxFlag xmlns:ma14="http://schemas.microsoft.com/office/mac/drawingml/2011/main" val="1"/>
+              <ma14:wrappingTextBoxFlag xmlns:ma14="http://schemas.microsoft.com/office/mac/drawingml/2011/main" xmlns:a14="http://schemas.microsoft.com/office/drawing/2010/main" xmlns:m="http://schemas.openxmlformats.org/officeDocument/2006/math" xmlns="" val="1"/>
             </a:ext>
           </a:extLst>
         </p:spPr>
@@ -7690,7 +7576,7 @@
           </a:bodyPr>
           <a:lstStyle>
             <a:lvl1pPr>
-              <a:defRPr b="1" sz="1400">
+              <a:defRPr sz="1400" b="1">
                 <a:solidFill>
                   <a:srgbClr val="22302A"/>
                 </a:solidFill>
@@ -7698,7 +7584,6 @@
             </a:lvl1pPr>
           </a:lstStyle>
           <a:p>
-            <a:pPr/>
             <a:r>
               <a:t>5 CSV</a:t>
             </a:r>
@@ -7724,7 +7609,7 @@
           </a:ln>
           <a:extLst>
             <a:ext uri="{C572A759-6A51-4108-AA02-DFA0A04FC94B}">
-              <ma14:wrappingTextBoxFlag xmlns:ma14="http://schemas.microsoft.com/office/mac/drawingml/2011/main" val="1"/>
+              <ma14:wrappingTextBoxFlag xmlns:ma14="http://schemas.microsoft.com/office/mac/drawingml/2011/main" xmlns:a14="http://schemas.microsoft.com/office/drawing/2010/main" xmlns:m="http://schemas.openxmlformats.org/officeDocument/2006/math" xmlns="" val="1"/>
             </a:ext>
           </a:extLst>
         </p:spPr>
@@ -7742,7 +7627,6 @@
             </a:lvl1pPr>
           </a:lstStyle>
           <a:p>
-            <a:pPr/>
             <a:r>
               <a:t>Europa · África · Asia · América · Oceanía</a:t>
             </a:r>
@@ -7768,7 +7652,7 @@
           </a:ln>
           <a:extLst>
             <a:ext uri="{C572A759-6A51-4108-AA02-DFA0A04FC94B}">
-              <ma14:wrappingTextBoxFlag xmlns:ma14="http://schemas.microsoft.com/office/mac/drawingml/2011/main" val="1"/>
+              <ma14:wrappingTextBoxFlag xmlns:ma14="http://schemas.microsoft.com/office/mac/drawingml/2011/main" xmlns:a14="http://schemas.microsoft.com/office/drawing/2010/main" xmlns:m="http://schemas.openxmlformats.org/officeDocument/2006/math" xmlns="" val="1"/>
             </a:ext>
           </a:extLst>
         </p:spPr>
@@ -7786,7 +7670,6 @@
             </a:lvl1pPr>
           </a:lstStyle>
           <a:p>
-            <a:pPr/>
             <a:r>
               <a:t>↓</a:t>
             </a:r>
@@ -7818,7 +7701,7 @@
             </a:solidFill>
           </a:ln>
           <a:effectLst>
-            <a:outerShdw sx="100000" sy="100000" kx="0" ky="0" algn="b" rotWithShape="0" blurRad="76200" dist="25400" dir="5400000">
+            <a:outerShdw blurRad="76200" dist="25400" dir="5400000" rotWithShape="0">
               <a:srgbClr val="000000">
                 <a:alpha val="12000"/>
               </a:srgbClr>
@@ -7829,7 +7712,7 @@
           <a:bodyPr lIns="45719" rIns="45719"/>
           <a:lstStyle/>
           <a:p>
-            <a:pPr/>
+            <a:endParaRPr/>
           </a:p>
         </p:txBody>
       </p:sp>
@@ -7858,7 +7741,7 @@
           <a:bodyPr lIns="45719" rIns="45719"/>
           <a:lstStyle/>
           <a:p>
-            <a:pPr/>
+            <a:endParaRPr/>
           </a:p>
         </p:txBody>
       </p:sp>
@@ -7881,7 +7764,7 @@
           </a:ln>
           <a:extLst>
             <a:ext uri="{C572A759-6A51-4108-AA02-DFA0A04FC94B}">
-              <ma14:wrappingTextBoxFlag xmlns:ma14="http://schemas.microsoft.com/office/mac/drawingml/2011/main" val="1"/>
+              <ma14:wrappingTextBoxFlag xmlns:ma14="http://schemas.microsoft.com/office/mac/drawingml/2011/main" xmlns:a14="http://schemas.microsoft.com/office/drawing/2010/main" xmlns:m="http://schemas.openxmlformats.org/officeDocument/2006/math" xmlns="" val="1"/>
             </a:ext>
           </a:extLst>
         </p:spPr>
@@ -7891,7 +7774,7 @@
           </a:bodyPr>
           <a:lstStyle>
             <a:lvl1pPr>
-              <a:defRPr b="1" sz="1400">
+              <a:defRPr sz="1400" b="1">
                 <a:solidFill>
                   <a:srgbClr val="22302A"/>
                 </a:solidFill>
@@ -7899,7 +7782,6 @@
             </a:lvl1pPr>
           </a:lstStyle>
           <a:p>
-            <a:pPr/>
             <a:r>
               <a:t>carga_datos.py</a:t>
             </a:r>
@@ -7925,7 +7807,7 @@
           </a:ln>
           <a:extLst>
             <a:ext uri="{C572A759-6A51-4108-AA02-DFA0A04FC94B}">
-              <ma14:wrappingTextBoxFlag xmlns:ma14="http://schemas.microsoft.com/office/mac/drawingml/2011/main" val="1"/>
+              <ma14:wrappingTextBoxFlag xmlns:ma14="http://schemas.microsoft.com/office/mac/drawingml/2011/main" xmlns:a14="http://schemas.microsoft.com/office/drawing/2010/main" xmlns:m="http://schemas.openxmlformats.org/officeDocument/2006/math" xmlns="" val="1"/>
             </a:ext>
           </a:extLst>
         </p:spPr>
@@ -7943,7 +7825,6 @@
             </a:lvl1pPr>
           </a:lstStyle>
           <a:p>
-            <a:pPr/>
             <a:r>
               <a:t>lee cada CSV y los concatena en un único DataFrame</a:t>
             </a:r>
@@ -7969,7 +7850,7 @@
           </a:ln>
           <a:extLst>
             <a:ext uri="{C572A759-6A51-4108-AA02-DFA0A04FC94B}">
-              <ma14:wrappingTextBoxFlag xmlns:ma14="http://schemas.microsoft.com/office/mac/drawingml/2011/main" val="1"/>
+              <ma14:wrappingTextBoxFlag xmlns:ma14="http://schemas.microsoft.com/office/mac/drawingml/2011/main" xmlns:a14="http://schemas.microsoft.com/office/drawing/2010/main" xmlns:m="http://schemas.openxmlformats.org/officeDocument/2006/math" xmlns="" val="1"/>
             </a:ext>
           </a:extLst>
         </p:spPr>
@@ -7987,7 +7868,6 @@
             </a:lvl1pPr>
           </a:lstStyle>
           <a:p>
-            <a:pPr/>
             <a:r>
               <a:t>↓</a:t>
             </a:r>
@@ -8019,7 +7899,7 @@
             </a:solidFill>
           </a:ln>
           <a:effectLst>
-            <a:outerShdw sx="100000" sy="100000" kx="0" ky="0" algn="b" rotWithShape="0" blurRad="76200" dist="25400" dir="5400000">
+            <a:outerShdw blurRad="76200" dist="25400" dir="5400000" rotWithShape="0">
               <a:srgbClr val="000000">
                 <a:alpha val="12000"/>
               </a:srgbClr>
@@ -8030,7 +7910,7 @@
           <a:bodyPr lIns="45719" rIns="45719"/>
           <a:lstStyle/>
           <a:p>
-            <a:pPr/>
+            <a:endParaRPr/>
           </a:p>
         </p:txBody>
       </p:sp>
@@ -8059,7 +7939,7 @@
           <a:bodyPr lIns="45719" rIns="45719"/>
           <a:lstStyle/>
           <a:p>
-            <a:pPr/>
+            <a:endParaRPr/>
           </a:p>
         </p:txBody>
       </p:sp>
@@ -8082,7 +7962,7 @@
           </a:ln>
           <a:extLst>
             <a:ext uri="{C572A759-6A51-4108-AA02-DFA0A04FC94B}">
-              <ma14:wrappingTextBoxFlag xmlns:ma14="http://schemas.microsoft.com/office/mac/drawingml/2011/main" val="1"/>
+              <ma14:wrappingTextBoxFlag xmlns:ma14="http://schemas.microsoft.com/office/mac/drawingml/2011/main" xmlns:a14="http://schemas.microsoft.com/office/drawing/2010/main" xmlns:m="http://schemas.openxmlformats.org/officeDocument/2006/math" xmlns="" val="1"/>
             </a:ext>
           </a:extLst>
         </p:spPr>
@@ -8092,7 +7972,7 @@
           </a:bodyPr>
           <a:lstStyle>
             <a:lvl1pPr>
-              <a:defRPr b="1" sz="1400">
+              <a:defRPr sz="1400" b="1">
                 <a:solidFill>
                   <a:srgbClr val="22302A"/>
                 </a:solidFill>
@@ -8100,7 +7980,6 @@
             </a:lvl1pPr>
           </a:lstStyle>
           <a:p>
-            <a:pPr/>
             <a:r>
               <a:t>limpieza_datos.py</a:t>
             </a:r>
@@ -8126,7 +8005,7 @@
           </a:ln>
           <a:extLst>
             <a:ext uri="{C572A759-6A51-4108-AA02-DFA0A04FC94B}">
-              <ma14:wrappingTextBoxFlag xmlns:ma14="http://schemas.microsoft.com/office/mac/drawingml/2011/main" val="1"/>
+              <ma14:wrappingTextBoxFlag xmlns:ma14="http://schemas.microsoft.com/office/mac/drawingml/2011/main" xmlns:a14="http://schemas.microsoft.com/office/drawing/2010/main" xmlns:m="http://schemas.openxmlformats.org/officeDocument/2006/math" xmlns="" val="1"/>
             </a:ext>
           </a:extLst>
         </p:spPr>
@@ -8144,7 +8023,6 @@
             </a:lvl1pPr>
           </a:lstStyle>
           <a:p>
-            <a:pPr/>
             <a:r>
               <a:t>eliminar_columnas() + normalizar_columnas()</a:t>
             </a:r>
@@ -8170,7 +8048,7 @@
           </a:ln>
           <a:extLst>
             <a:ext uri="{C572A759-6A51-4108-AA02-DFA0A04FC94B}">
-              <ma14:wrappingTextBoxFlag xmlns:ma14="http://schemas.microsoft.com/office/mac/drawingml/2011/main" val="1"/>
+              <ma14:wrappingTextBoxFlag xmlns:ma14="http://schemas.microsoft.com/office/mac/drawingml/2011/main" xmlns:a14="http://schemas.microsoft.com/office/drawing/2010/main" xmlns:m="http://schemas.openxmlformats.org/officeDocument/2006/math" xmlns="" val="1"/>
             </a:ext>
           </a:extLst>
         </p:spPr>
@@ -8188,7 +8066,6 @@
             </a:lvl1pPr>
           </a:lstStyle>
           <a:p>
-            <a:pPr/>
             <a:r>
               <a:t>↓</a:t>
             </a:r>
@@ -8220,7 +8097,7 @@
             </a:solidFill>
           </a:ln>
           <a:effectLst>
-            <a:outerShdw sx="100000" sy="100000" kx="0" ky="0" algn="b" rotWithShape="0" blurRad="76200" dist="25400" dir="5400000">
+            <a:outerShdw blurRad="76200" dist="25400" dir="5400000" rotWithShape="0">
               <a:srgbClr val="000000">
                 <a:alpha val="12000"/>
               </a:srgbClr>
@@ -8231,7 +8108,7 @@
           <a:bodyPr lIns="45719" rIns="45719"/>
           <a:lstStyle/>
           <a:p>
-            <a:pPr/>
+            <a:endParaRPr/>
           </a:p>
         </p:txBody>
       </p:sp>
@@ -8260,7 +8137,7 @@
           <a:bodyPr lIns="45719" rIns="45719"/>
           <a:lstStyle/>
           <a:p>
-            <a:pPr/>
+            <a:endParaRPr/>
           </a:p>
         </p:txBody>
       </p:sp>
@@ -8283,7 +8160,7 @@
           </a:ln>
           <a:extLst>
             <a:ext uri="{C572A759-6A51-4108-AA02-DFA0A04FC94B}">
-              <ma14:wrappingTextBoxFlag xmlns:ma14="http://schemas.microsoft.com/office/mac/drawingml/2011/main" val="1"/>
+              <ma14:wrappingTextBoxFlag xmlns:ma14="http://schemas.microsoft.com/office/mac/drawingml/2011/main" xmlns:a14="http://schemas.microsoft.com/office/drawing/2010/main" xmlns:m="http://schemas.openxmlformats.org/officeDocument/2006/math" xmlns="" val="1"/>
             </a:ext>
           </a:extLst>
         </p:spPr>
@@ -8293,7 +8170,7 @@
           </a:bodyPr>
           <a:lstStyle>
             <a:lvl1pPr>
-              <a:defRPr b="1" sz="1400">
+              <a:defRPr sz="1400" b="1">
                 <a:solidFill>
                   <a:srgbClr val="22302A"/>
                 </a:solidFill>
@@ -8301,7 +8178,6 @@
             </a:lvl1pPr>
           </a:lstStyle>
           <a:p>
-            <a:pPr/>
             <a:r>
               <a:t>continentes.csv</a:t>
             </a:r>
@@ -8327,7 +8203,7 @@
           </a:ln>
           <a:extLst>
             <a:ext uri="{C572A759-6A51-4108-AA02-DFA0A04FC94B}">
-              <ma14:wrappingTextBoxFlag xmlns:ma14="http://schemas.microsoft.com/office/mac/drawingml/2011/main" val="1"/>
+              <ma14:wrappingTextBoxFlag xmlns:ma14="http://schemas.microsoft.com/office/mac/drawingml/2011/main" xmlns:a14="http://schemas.microsoft.com/office/drawing/2010/main" xmlns:m="http://schemas.openxmlformats.org/officeDocument/2006/math" xmlns="" val="1"/>
             </a:ext>
           </a:extLst>
         </p:spPr>
@@ -8345,7 +8221,6 @@
             </a:lvl1pPr>
           </a:lstStyle>
           <a:p>
-            <a:pPr/>
             <a:r>
               <a:t>dataset limpio, listo para MySQL</a:t>
             </a:r>
@@ -8371,7 +8246,7 @@
           </a:ln>
           <a:extLst>
             <a:ext uri="{C572A759-6A51-4108-AA02-DFA0A04FC94B}">
-              <ma14:wrappingTextBoxFlag xmlns:ma14="http://schemas.microsoft.com/office/mac/drawingml/2011/main" val="1"/>
+              <ma14:wrappingTextBoxFlag xmlns:ma14="http://schemas.microsoft.com/office/mac/drawingml/2011/main" xmlns:a14="http://schemas.microsoft.com/office/drawing/2010/main" xmlns:m="http://schemas.openxmlformats.org/officeDocument/2006/math" xmlns="" val="1"/>
             </a:ext>
           </a:extLst>
         </p:spPr>
@@ -8381,7 +8256,7 @@
           </a:bodyPr>
           <a:lstStyle>
             <a:lvl1pPr>
-              <a:defRPr i="1" sz="1200">
+              <a:defRPr sz="1200" i="1">
                 <a:solidFill>
                   <a:srgbClr val="5B6B62"/>
                 </a:solidFill>
@@ -8389,7 +8264,6 @@
             </a:lvl1pPr>
           </a:lstStyle>
           <a:p>
-            <a:pPr/>
             <a:r>
               <a:t>main.py orquesta todo el flujo: importa lib.carga_datos y lib.limpieza_datos, exporta continentes.csv y llama a la inserción en MySQL.</a:t>
             </a:r>
@@ -8415,7 +8289,7 @@
           </a:ln>
           <a:extLst>
             <a:ext uri="{C572A759-6A51-4108-AA02-DFA0A04FC94B}">
-              <ma14:wrappingTextBoxFlag xmlns:ma14="http://schemas.microsoft.com/office/mac/drawingml/2011/main" val="1"/>
+              <ma14:wrappingTextBoxFlag xmlns:ma14="http://schemas.microsoft.com/office/mac/drawingml/2011/main" xmlns:a14="http://schemas.microsoft.com/office/drawing/2010/main" xmlns:m="http://schemas.openxmlformats.org/officeDocument/2006/math" xmlns="" val="1"/>
             </a:ext>
           </a:extLst>
         </p:spPr>
@@ -8425,7 +8299,7 @@
           </a:bodyPr>
           <a:lstStyle>
             <a:lvl1pPr>
-              <a:defRPr b="1" spc="118" sz="1300">
+              <a:defRPr sz="1300" b="1" spc="118">
                 <a:solidFill>
                   <a:srgbClr val="B5443A"/>
                 </a:solidFill>
@@ -8433,7 +8307,6 @@
             </a:lvl1pPr>
           </a:lstStyle>
           <a:p>
-            <a:pPr/>
             <a:r>
               <a:t>ANTES → DESPUÉS DE LA LIMPIEZA</a:t>
             </a:r>
@@ -8469,7 +8342,7 @@
           <a:bodyPr lIns="45719" rIns="45719"/>
           <a:lstStyle/>
           <a:p>
-            <a:pPr/>
+            <a:endParaRPr/>
           </a:p>
         </p:txBody>
       </p:sp>
@@ -8492,7 +8365,7 @@
           </a:ln>
           <a:extLst>
             <a:ext uri="{C572A759-6A51-4108-AA02-DFA0A04FC94B}">
-              <ma14:wrappingTextBoxFlag xmlns:ma14="http://schemas.microsoft.com/office/mac/drawingml/2011/main" val="1"/>
+              <ma14:wrappingTextBoxFlag xmlns:ma14="http://schemas.microsoft.com/office/mac/drawingml/2011/main" xmlns:a14="http://schemas.microsoft.com/office/drawing/2010/main" xmlns:m="http://schemas.openxmlformats.org/officeDocument/2006/math" xmlns="" val="1"/>
             </a:ext>
           </a:extLst>
         </p:spPr>
@@ -8502,7 +8375,7 @@
           </a:bodyPr>
           <a:lstStyle>
             <a:lvl1pPr>
-              <a:defRPr b="1" sz="1300">
+              <a:defRPr sz="1300" b="1">
                 <a:solidFill>
                   <a:srgbClr val="B5443A"/>
                 </a:solidFill>
@@ -8510,7 +8383,6 @@
             </a:lvl1pPr>
           </a:lstStyle>
           <a:p>
-            <a:pPr/>
             <a:r>
               <a:t>CSV en bruto (17 columnas)</a:t>
             </a:r>
@@ -8536,7 +8408,7 @@
           </a:ln>
           <a:extLst>
             <a:ext uri="{C572A759-6A51-4108-AA02-DFA0A04FC94B}">
-              <ma14:wrappingTextBoxFlag xmlns:ma14="http://schemas.microsoft.com/office/mac/drawingml/2011/main" val="1"/>
+              <ma14:wrappingTextBoxFlag xmlns:ma14="http://schemas.microsoft.com/office/mac/drawingml/2011/main" xmlns:a14="http://schemas.microsoft.com/office/drawing/2010/main" xmlns:m="http://schemas.openxmlformats.org/officeDocument/2006/math" xmlns="" val="1"/>
             </a:ext>
           </a:extLst>
         </p:spPr>
@@ -8557,7 +8429,6 @@
             </a:lvl1pPr>
           </a:lstStyle>
           <a:p>
-            <a:pPr/>
             <a:r>
               <a:t>Código del ámbito, Ámbito, Código del área, Área, Código del elemento, Elemento, Código del producto, Producto, Código del año, Año, Código fuente, Fuente, Unidad, Valor, Símbolo, Descripción, Nota</a:t>
             </a:r>
@@ -8583,7 +8454,7 @@
           </a:ln>
           <a:extLst>
             <a:ext uri="{C572A759-6A51-4108-AA02-DFA0A04FC94B}">
-              <ma14:wrappingTextBoxFlag xmlns:ma14="http://schemas.microsoft.com/office/mac/drawingml/2011/main" val="1"/>
+              <ma14:wrappingTextBoxFlag xmlns:ma14="http://schemas.microsoft.com/office/mac/drawingml/2011/main" xmlns:a14="http://schemas.microsoft.com/office/drawing/2010/main" xmlns:m="http://schemas.openxmlformats.org/officeDocument/2006/math" xmlns="" val="1"/>
             </a:ext>
           </a:extLst>
         </p:spPr>
@@ -8594,7 +8465,7 @@
           <a:lstStyle/>
           <a:p>
             <a:pPr>
-              <a:defRPr i="1" sz="1200">
+              <a:defRPr sz="1200" i="1">
                 <a:solidFill>
                   <a:srgbClr val="8A6151"/>
                 </a:solidFill>
@@ -8606,7 +8477,7 @@
           </a:p>
           <a:p>
             <a:pPr>
-              <a:defRPr i="1" sz="1200">
+              <a:defRPr sz="1200" i="1">
                 <a:solidFill>
                   <a:srgbClr val="8A6151"/>
                 </a:solidFill>
@@ -8647,7 +8518,7 @@
           <a:bodyPr lIns="45719" rIns="45719"/>
           <a:lstStyle/>
           <a:p>
-            <a:pPr/>
+            <a:endParaRPr/>
           </a:p>
         </p:txBody>
       </p:sp>
@@ -8670,7 +8541,7 @@
           </a:ln>
           <a:extLst>
             <a:ext uri="{C572A759-6A51-4108-AA02-DFA0A04FC94B}">
-              <ma14:wrappingTextBoxFlag xmlns:ma14="http://schemas.microsoft.com/office/mac/drawingml/2011/main" val="1"/>
+              <ma14:wrappingTextBoxFlag xmlns:ma14="http://schemas.microsoft.com/office/mac/drawingml/2011/main" xmlns:a14="http://schemas.microsoft.com/office/drawing/2010/main" xmlns:m="http://schemas.openxmlformats.org/officeDocument/2006/math" xmlns="" val="1"/>
             </a:ext>
           </a:extLst>
         </p:spPr>
@@ -8680,7 +8551,7 @@
           </a:bodyPr>
           <a:lstStyle>
             <a:lvl1pPr>
-              <a:defRPr b="1" sz="1300">
+              <a:defRPr sz="1300" b="1">
                 <a:solidFill>
                   <a:srgbClr val="4F8C5A"/>
                 </a:solidFill>
@@ -8688,7 +8559,6 @@
             </a:lvl1pPr>
           </a:lstStyle>
           <a:p>
-            <a:pPr/>
             <a:r>
               <a:t>Dataset limpio (11 columnas)</a:t>
             </a:r>
@@ -8714,7 +8584,7 @@
           </a:ln>
           <a:extLst>
             <a:ext uri="{C572A759-6A51-4108-AA02-DFA0A04FC94B}">
-              <ma14:wrappingTextBoxFlag xmlns:ma14="http://schemas.microsoft.com/office/mac/drawingml/2011/main" val="1"/>
+              <ma14:wrappingTextBoxFlag xmlns:ma14="http://schemas.microsoft.com/office/mac/drawingml/2011/main" xmlns:a14="http://schemas.microsoft.com/office/drawing/2010/main" xmlns:m="http://schemas.openxmlformats.org/officeDocument/2006/math" xmlns="" val="1"/>
             </a:ext>
           </a:extLst>
         </p:spPr>
@@ -8735,7 +8605,6 @@
             </a:lvl1pPr>
           </a:lstStyle>
           <a:p>
-            <a:pPr/>
             <a:r>
               <a:t>codigo_area, area, codigo_elemento, elemento, codigo_producto, producto, anio, unidad, valor, simbolo, descripcion_simbolo</a:t>
             </a:r>
@@ -8761,7 +8630,7 @@
           </a:ln>
           <a:extLst>
             <a:ext uri="{C572A759-6A51-4108-AA02-DFA0A04FC94B}">
-              <ma14:wrappingTextBoxFlag xmlns:ma14="http://schemas.microsoft.com/office/mac/drawingml/2011/main" val="1"/>
+              <ma14:wrappingTextBoxFlag xmlns:ma14="http://schemas.microsoft.com/office/mac/drawingml/2011/main" xmlns:a14="http://schemas.microsoft.com/office/drawing/2010/main" xmlns:m="http://schemas.openxmlformats.org/officeDocument/2006/math" xmlns="" val="1"/>
             </a:ext>
           </a:extLst>
         </p:spPr>
@@ -8771,7 +8640,7 @@
           </a:bodyPr>
           <a:lstStyle>
             <a:lvl1pPr>
-              <a:defRPr i="1" sz="1200">
+              <a:defRPr sz="1200" i="1">
                 <a:solidFill>
                   <a:srgbClr val="5B7A63"/>
                 </a:solidFill>
@@ -8779,7 +8648,6 @@
             </a:lvl1pPr>
           </a:lstStyle>
           <a:p>
-            <a:pPr/>
             <a:r>
               <a:t>normalizar_columnas(): nombres estandarizados en snake_case, listos para SQL</a:t>
             </a:r>
@@ -8813,7 +8681,7 @@
           <a:bodyPr lIns="45719" rIns="45719"/>
           <a:lstStyle/>
           <a:p>
-            <a:pPr/>
+            <a:endParaRPr/>
           </a:p>
         </p:txBody>
       </p:sp>
@@ -8836,7 +8704,7 @@
           </a:ln>
           <a:extLst>
             <a:ext uri="{C572A759-6A51-4108-AA02-DFA0A04FC94B}">
-              <ma14:wrappingTextBoxFlag xmlns:ma14="http://schemas.microsoft.com/office/mac/drawingml/2011/main" val="1"/>
+              <ma14:wrappingTextBoxFlag xmlns:ma14="http://schemas.microsoft.com/office/mac/drawingml/2011/main" xmlns:a14="http://schemas.microsoft.com/office/drawing/2010/main" xmlns:m="http://schemas.openxmlformats.org/officeDocument/2006/math" xmlns="" val="1"/>
             </a:ext>
           </a:extLst>
         </p:spPr>
@@ -8847,7 +8715,7 @@
           <a:lstStyle/>
           <a:p>
             <a:pPr>
-              <a:defRPr b="1" sz="2000">
+              <a:defRPr sz="2000" b="1">
                 <a:solidFill>
                   <a:srgbClr val="D98C3F"/>
                 </a:solidFill>
@@ -8857,7 +8725,7 @@
               <a:t>77.491</a:t>
             </a:r>
             <a:r>
-              <a:rPr b="0" sz="1200">
+              <a:rPr sz="1200" b="0">
                 <a:solidFill>
                   <a:srgbClr val="E7E2D6"/>
                 </a:solidFill>
@@ -8880,18 +8748,19 @@
   <p:clrMapOvr>
     <a:masterClrMapping/>
   </p:clrMapOvr>
-  <p:transition xmlns:p14="http://schemas.microsoft.com/office/powerpoint/2010/main" spd="med" advClick="1"/>
+  <p:transition spd="med"/>
 </p:sld>
 </file>
 
 <file path=ppt/slides/slide3.xml><?xml version="1.0" encoding="utf-8"?>
-<p:sld xmlns:a="http://schemas.openxmlformats.org/drawingml/2006/main" xmlns:r="http://schemas.openxmlformats.org/officeDocument/2006/relationships" xmlns:p="http://schemas.openxmlformats.org/presentationml/2006/main" xmlns:m="http://schemas.openxmlformats.org/officeDocument/2006/math" xmlns:a14="http://schemas.microsoft.com/office/drawing/2010/main" showMasterSp="1" showMasterPhAnim="1">
+<p:sld xmlns:a="http://schemas.openxmlformats.org/drawingml/2006/main" xmlns:r="http://schemas.openxmlformats.org/officeDocument/2006/relationships" xmlns:p="http://schemas.openxmlformats.org/presentationml/2006/main">
   <p:cSld>
     <p:bg>
       <p:bgPr>
         <a:solidFill>
           <a:srgbClr val="F4EFE6"/>
         </a:solidFill>
+        <a:effectLst/>
       </p:bgPr>
     </p:bg>
     <p:spTree>
@@ -8935,7 +8804,7 @@
           <a:bodyPr lIns="45719" rIns="45719"/>
           <a:lstStyle/>
           <a:p>
-            <a:pPr/>
+            <a:endParaRPr/>
           </a:p>
         </p:txBody>
       </p:sp>
@@ -8958,7 +8827,7 @@
           </a:ln>
           <a:extLst>
             <a:ext uri="{C572A759-6A51-4108-AA02-DFA0A04FC94B}">
-              <ma14:wrappingTextBoxFlag xmlns:ma14="http://schemas.microsoft.com/office/mac/drawingml/2011/main" val="1"/>
+              <ma14:wrappingTextBoxFlag xmlns:ma14="http://schemas.microsoft.com/office/mac/drawingml/2011/main" xmlns:a14="http://schemas.microsoft.com/office/drawing/2010/main" xmlns:m="http://schemas.openxmlformats.org/officeDocument/2006/math" xmlns="" val="1"/>
             </a:ext>
           </a:extLst>
         </p:spPr>
@@ -8968,7 +8837,7 @@
           </a:bodyPr>
           <a:lstStyle>
             <a:lvl1pPr algn="ctr">
-              <a:defRPr b="1" spc="100" sz="1000">
+              <a:defRPr sz="1000" b="1" spc="100">
                 <a:solidFill>
                   <a:srgbClr val="FFFFFF"/>
                 </a:solidFill>
@@ -8976,7 +8845,6 @@
             </a:lvl1pPr>
           </a:lstStyle>
           <a:p>
-            <a:pPr/>
             <a:r>
               <a:t>PASO 3 · MYSQL</a:t>
             </a:r>
@@ -9002,7 +8870,7 @@
           </a:ln>
           <a:extLst>
             <a:ext uri="{C572A759-6A51-4108-AA02-DFA0A04FC94B}">
-              <ma14:wrappingTextBoxFlag xmlns:ma14="http://schemas.microsoft.com/office/mac/drawingml/2011/main" val="1"/>
+              <ma14:wrappingTextBoxFlag xmlns:ma14="http://schemas.microsoft.com/office/mac/drawingml/2011/main" xmlns:a14="http://schemas.microsoft.com/office/drawing/2010/main" xmlns:m="http://schemas.openxmlformats.org/officeDocument/2006/math" xmlns="" val="1"/>
             </a:ext>
           </a:extLst>
         </p:spPr>
@@ -9012,7 +8880,7 @@
           </a:bodyPr>
           <a:lstStyle>
             <a:lvl1pPr>
-              <a:defRPr b="1" sz="3000">
+              <a:defRPr sz="3000" b="1">
                 <a:solidFill>
                   <a:srgbClr val="22302A"/>
                 </a:solidFill>
@@ -9024,7 +8892,6 @@
             </a:lvl1pPr>
           </a:lstStyle>
           <a:p>
-            <a:pPr/>
             <a:r>
               <a:t>Almacenamiento MySQL</a:t>
             </a:r>
@@ -9050,7 +8917,7 @@
           </a:ln>
           <a:extLst>
             <a:ext uri="{C572A759-6A51-4108-AA02-DFA0A04FC94B}">
-              <ma14:wrappingTextBoxFlag xmlns:ma14="http://schemas.microsoft.com/office/mac/drawingml/2011/main" val="1"/>
+              <ma14:wrappingTextBoxFlag xmlns:ma14="http://schemas.microsoft.com/office/mac/drawingml/2011/main" xmlns:a14="http://schemas.microsoft.com/office/drawing/2010/main" xmlns:m="http://schemas.openxmlformats.org/officeDocument/2006/math" xmlns="" val="1"/>
             </a:ext>
           </a:extLst>
         </p:spPr>
@@ -9102,7 +8969,7 @@
             </a:solidFill>
           </a:ln>
           <a:effectLst>
-            <a:outerShdw sx="100000" sy="100000" kx="0" ky="0" algn="b" rotWithShape="0" blurRad="76200" dist="25400" dir="5400000">
+            <a:outerShdw blurRad="76200" dist="25400" dir="5400000" rotWithShape="0">
               <a:srgbClr val="000000">
                 <a:alpha val="12000"/>
               </a:srgbClr>
@@ -9113,7 +8980,7 @@
           <a:bodyPr lIns="45719" rIns="45719"/>
           <a:lstStyle/>
           <a:p>
-            <a:pPr/>
+            <a:endParaRPr/>
           </a:p>
         </p:txBody>
       </p:sp>
@@ -9136,7 +9003,7 @@
           </a:ln>
           <a:extLst>
             <a:ext uri="{C572A759-6A51-4108-AA02-DFA0A04FC94B}">
-              <ma14:wrappingTextBoxFlag xmlns:ma14="http://schemas.microsoft.com/office/mac/drawingml/2011/main" val="1"/>
+              <ma14:wrappingTextBoxFlag xmlns:ma14="http://schemas.microsoft.com/office/mac/drawingml/2011/main" xmlns:a14="http://schemas.microsoft.com/office/drawing/2010/main" xmlns:m="http://schemas.openxmlformats.org/officeDocument/2006/math" xmlns="" val="1"/>
             </a:ext>
           </a:extLst>
         </p:spPr>
@@ -9146,7 +9013,7 @@
           </a:bodyPr>
           <a:lstStyle>
             <a:lvl1pPr>
-              <a:defRPr b="1" sz="1400">
+              <a:defRPr sz="1400" b="1">
                 <a:solidFill>
                   <a:srgbClr val="22302A"/>
                 </a:solidFill>
@@ -9154,7 +9021,6 @@
             </a:lvl1pPr>
           </a:lstStyle>
           <a:p>
-            <a:pPr/>
             <a:r>
               <a:t>df_normalizado</a:t>
             </a:r>
@@ -9180,7 +9046,7 @@
           </a:ln>
           <a:extLst>
             <a:ext uri="{C572A759-6A51-4108-AA02-DFA0A04FC94B}">
-              <ma14:wrappingTextBoxFlag xmlns:ma14="http://schemas.microsoft.com/office/mac/drawingml/2011/main" val="1"/>
+              <ma14:wrappingTextBoxFlag xmlns:ma14="http://schemas.microsoft.com/office/mac/drawingml/2011/main" xmlns:a14="http://schemas.microsoft.com/office/drawing/2010/main" xmlns:m="http://schemas.openxmlformats.org/officeDocument/2006/math" xmlns="" val="1"/>
             </a:ext>
           </a:extLst>
         </p:spPr>
@@ -9234,7 +9100,7 @@
           </a:ln>
           <a:extLst>
             <a:ext uri="{C572A759-6A51-4108-AA02-DFA0A04FC94B}">
-              <ma14:wrappingTextBoxFlag xmlns:ma14="http://schemas.microsoft.com/office/mac/drawingml/2011/main" val="1"/>
+              <ma14:wrappingTextBoxFlag xmlns:ma14="http://schemas.microsoft.com/office/mac/drawingml/2011/main" xmlns:a14="http://schemas.microsoft.com/office/drawing/2010/main" xmlns:m="http://schemas.openxmlformats.org/officeDocument/2006/math" xmlns="" val="1"/>
             </a:ext>
           </a:extLst>
         </p:spPr>
@@ -9244,7 +9110,7 @@
           </a:bodyPr>
           <a:lstStyle>
             <a:lvl1pPr>
-              <a:defRPr i="1" sz="1100">
+              <a:defRPr sz="1100" i="1">
                 <a:solidFill>
                   <a:srgbClr val="9C9480"/>
                 </a:solidFill>
@@ -9252,7 +9118,6 @@
             </a:lvl1pPr>
           </a:lstStyle>
           <a:p>
-            <a:pPr/>
             <a:r>
               <a:t>insercion_mysql.py</a:t>
             </a:r>
@@ -9278,7 +9143,7 @@
           </a:ln>
           <a:extLst>
             <a:ext uri="{C572A759-6A51-4108-AA02-DFA0A04FC94B}">
-              <ma14:wrappingTextBoxFlag xmlns:ma14="http://schemas.microsoft.com/office/mac/drawingml/2011/main" val="1"/>
+              <ma14:wrappingTextBoxFlag xmlns:ma14="http://schemas.microsoft.com/office/mac/drawingml/2011/main" xmlns:a14="http://schemas.microsoft.com/office/drawing/2010/main" xmlns:m="http://schemas.openxmlformats.org/officeDocument/2006/math" xmlns="" val="1"/>
             </a:ext>
           </a:extLst>
         </p:spPr>
@@ -9296,7 +9161,6 @@
             </a:lvl1pPr>
           </a:lstStyle>
           <a:p>
-            <a:pPr/>
             <a:r>
               <a:t>→</a:t>
             </a:r>
@@ -9330,7 +9194,7 @@
           <a:bodyPr lIns="45719" rIns="45719"/>
           <a:lstStyle/>
           <a:p>
-            <a:pPr/>
+            <a:endParaRPr/>
           </a:p>
         </p:txBody>
       </p:sp>
@@ -9353,7 +9217,7 @@
           </a:ln>
           <a:extLst>
             <a:ext uri="{C572A759-6A51-4108-AA02-DFA0A04FC94B}">
-              <ma14:wrappingTextBoxFlag xmlns:ma14="http://schemas.microsoft.com/office/mac/drawingml/2011/main" val="1"/>
+              <ma14:wrappingTextBoxFlag xmlns:ma14="http://schemas.microsoft.com/office/mac/drawingml/2011/main" xmlns:a14="http://schemas.microsoft.com/office/drawing/2010/main" xmlns:m="http://schemas.openxmlformats.org/officeDocument/2006/math" xmlns="" val="1"/>
             </a:ext>
           </a:extLst>
         </p:spPr>
@@ -9363,7 +9227,7 @@
           </a:bodyPr>
           <a:lstStyle>
             <a:lvl1pPr>
-              <a:defRPr b="1" sz="1400">
+              <a:defRPr sz="1400" b="1">
                 <a:solidFill>
                   <a:srgbClr val="FFFFFF"/>
                 </a:solidFill>
@@ -9371,7 +9235,6 @@
             </a:lvl1pPr>
           </a:lstStyle>
           <a:p>
-            <a:pPr/>
             <a:r>
               <a:t>MySQL · proyecto_final</a:t>
             </a:r>
@@ -9397,7 +9260,7 @@
           </a:ln>
           <a:extLst>
             <a:ext uri="{C572A759-6A51-4108-AA02-DFA0A04FC94B}">
-              <ma14:wrappingTextBoxFlag xmlns:ma14="http://schemas.microsoft.com/office/mac/drawingml/2011/main" val="1"/>
+              <ma14:wrappingTextBoxFlag xmlns:ma14="http://schemas.microsoft.com/office/mac/drawingml/2011/main" xmlns:a14="http://schemas.microsoft.com/office/drawing/2010/main" xmlns:m="http://schemas.openxmlformats.org/officeDocument/2006/math" xmlns="" val="1"/>
             </a:ext>
           </a:extLst>
         </p:spPr>
@@ -9443,7 +9306,7 @@
           </a:ln>
           <a:extLst>
             <a:ext uri="{C572A759-6A51-4108-AA02-DFA0A04FC94B}">
-              <ma14:wrappingTextBoxFlag xmlns:ma14="http://schemas.microsoft.com/office/mac/drawingml/2011/main" val="1"/>
+              <ma14:wrappingTextBoxFlag xmlns:ma14="http://schemas.microsoft.com/office/mac/drawingml/2011/main" xmlns:a14="http://schemas.microsoft.com/office/drawing/2010/main" xmlns:m="http://schemas.openxmlformats.org/officeDocument/2006/math" xmlns="" val="1"/>
             </a:ext>
           </a:extLst>
         </p:spPr>
@@ -9454,7 +9317,7 @@
           <a:lstStyle/>
           <a:p>
             <a:pPr>
-              <a:defRPr i="1" sz="900">
+              <a:defRPr sz="900" i="1">
                 <a:solidFill>
                   <a:srgbClr val="CFE1EC"/>
                 </a:solidFill>
@@ -9466,7 +9329,7 @@
           </a:p>
           <a:p>
             <a:pPr>
-              <a:defRPr i="1" sz="900">
+              <a:defRPr sz="900" i="1">
                 <a:solidFill>
                   <a:srgbClr val="CFE1EC"/>
                 </a:solidFill>
@@ -9503,7 +9366,7 @@
           <a:bodyPr lIns="45719" rIns="45719"/>
           <a:lstStyle/>
           <a:p>
-            <a:pPr/>
+            <a:endParaRPr/>
           </a:p>
         </p:txBody>
       </p:sp>
@@ -9526,7 +9389,7 @@
           </a:ln>
           <a:extLst>
             <a:ext uri="{C572A759-6A51-4108-AA02-DFA0A04FC94B}">
-              <ma14:wrappingTextBoxFlag xmlns:ma14="http://schemas.microsoft.com/office/mac/drawingml/2011/main" val="1"/>
+              <ma14:wrappingTextBoxFlag xmlns:ma14="http://schemas.microsoft.com/office/mac/drawingml/2011/main" xmlns:a14="http://schemas.microsoft.com/office/drawing/2010/main" xmlns:m="http://schemas.openxmlformats.org/officeDocument/2006/math" xmlns="" val="1"/>
             </a:ext>
           </a:extLst>
         </p:spPr>
@@ -9536,7 +9399,7 @@
           </a:bodyPr>
           <a:lstStyle>
             <a:lvl1pPr algn="ctr">
-              <a:defRPr b="1" sz="1400">
+              <a:defRPr sz="1400" b="1">
                 <a:solidFill>
                   <a:srgbClr val="FFFFFF"/>
                 </a:solidFill>
@@ -9544,7 +9407,6 @@
             </a:lvl1pPr>
           </a:lstStyle>
           <a:p>
-            <a:pPr/>
             <a:r>
               <a:t>1</a:t>
             </a:r>
@@ -9570,7 +9432,7 @@
           </a:ln>
           <a:extLst>
             <a:ext uri="{C572A759-6A51-4108-AA02-DFA0A04FC94B}">
-              <ma14:wrappingTextBoxFlag xmlns:ma14="http://schemas.microsoft.com/office/mac/drawingml/2011/main" val="1"/>
+              <ma14:wrappingTextBoxFlag xmlns:ma14="http://schemas.microsoft.com/office/mac/drawingml/2011/main" xmlns:a14="http://schemas.microsoft.com/office/drawing/2010/main" xmlns:m="http://schemas.openxmlformats.org/officeDocument/2006/math" xmlns="" val="1"/>
             </a:ext>
           </a:extLst>
         </p:spPr>
@@ -9581,7 +9443,7 @@
           <a:lstStyle/>
           <a:p>
             <a:pPr>
-              <a:defRPr b="1" sz="1300">
+              <a:defRPr sz="1300" b="1">
                 <a:solidFill>
                   <a:srgbClr val="22302A"/>
                 </a:solidFill>
@@ -9591,7 +9453,7 @@
               <a:t>vaciar_tabla()  </a:t>
             </a:r>
             <a:r>
-              <a:rPr b="0" sz="1100">
+              <a:rPr sz="1100" b="0">
                 <a:solidFill>
                   <a:srgbClr val="5B6B62"/>
                 </a:solidFill>
@@ -9626,7 +9488,7 @@
           <a:bodyPr lIns="45719" rIns="45719"/>
           <a:lstStyle/>
           <a:p>
-            <a:pPr/>
+            <a:endParaRPr/>
           </a:p>
         </p:txBody>
       </p:sp>
@@ -9649,7 +9511,7 @@
           </a:ln>
           <a:extLst>
             <a:ext uri="{C572A759-6A51-4108-AA02-DFA0A04FC94B}">
-              <ma14:wrappingTextBoxFlag xmlns:ma14="http://schemas.microsoft.com/office/mac/drawingml/2011/main" val="1"/>
+              <ma14:wrappingTextBoxFlag xmlns:ma14="http://schemas.microsoft.com/office/mac/drawingml/2011/main" xmlns:a14="http://schemas.microsoft.com/office/drawing/2010/main" xmlns:m="http://schemas.openxmlformats.org/officeDocument/2006/math" xmlns="" val="1"/>
             </a:ext>
           </a:extLst>
         </p:spPr>
@@ -9659,7 +9521,7 @@
           </a:bodyPr>
           <a:lstStyle>
             <a:lvl1pPr algn="ctr">
-              <a:defRPr b="1" sz="1400">
+              <a:defRPr sz="1400" b="1">
                 <a:solidFill>
                   <a:srgbClr val="FFFFFF"/>
                 </a:solidFill>
@@ -9667,7 +9529,6 @@
             </a:lvl1pPr>
           </a:lstStyle>
           <a:p>
-            <a:pPr/>
             <a:r>
               <a:t>2</a:t>
             </a:r>
@@ -9693,7 +9554,7 @@
           </a:ln>
           <a:extLst>
             <a:ext uri="{C572A759-6A51-4108-AA02-DFA0A04FC94B}">
-              <ma14:wrappingTextBoxFlag xmlns:ma14="http://schemas.microsoft.com/office/mac/drawingml/2011/main" val="1"/>
+              <ma14:wrappingTextBoxFlag xmlns:ma14="http://schemas.microsoft.com/office/mac/drawingml/2011/main" xmlns:a14="http://schemas.microsoft.com/office/drawing/2010/main" xmlns:m="http://schemas.openxmlformats.org/officeDocument/2006/math" xmlns="" val="1"/>
             </a:ext>
           </a:extLst>
         </p:spPr>
@@ -9704,7 +9565,7 @@
           <a:lstStyle/>
           <a:p>
             <a:pPr>
-              <a:defRPr b="1" sz="1300">
+              <a:defRPr sz="1300" b="1">
                 <a:solidFill>
                   <a:srgbClr val="22302A"/>
                 </a:solidFill>
@@ -9714,7 +9575,7 @@
               <a:t>insert_emissions(df)  </a:t>
             </a:r>
             <a:r>
-              <a:rPr b="0" sz="1100">
+              <a:rPr sz="1100" b="0">
                 <a:solidFill>
                   <a:srgbClr val="5B6B62"/>
                 </a:solidFill>
@@ -9749,7 +9610,7 @@
           <a:bodyPr lIns="45719" rIns="45719"/>
           <a:lstStyle/>
           <a:p>
-            <a:pPr/>
+            <a:endParaRPr/>
           </a:p>
         </p:txBody>
       </p:sp>
@@ -9772,7 +9633,7 @@
           </a:ln>
           <a:extLst>
             <a:ext uri="{C572A759-6A51-4108-AA02-DFA0A04FC94B}">
-              <ma14:wrappingTextBoxFlag xmlns:ma14="http://schemas.microsoft.com/office/mac/drawingml/2011/main" val="1"/>
+              <ma14:wrappingTextBoxFlag xmlns:ma14="http://schemas.microsoft.com/office/mac/drawingml/2011/main" xmlns:a14="http://schemas.microsoft.com/office/drawing/2010/main" xmlns:m="http://schemas.openxmlformats.org/officeDocument/2006/math" xmlns="" val="1"/>
             </a:ext>
           </a:extLst>
         </p:spPr>
@@ -9782,7 +9643,7 @@
           </a:bodyPr>
           <a:lstStyle>
             <a:lvl1pPr algn="ctr">
-              <a:defRPr b="1" sz="1400">
+              <a:defRPr sz="1400" b="1">
                 <a:solidFill>
                   <a:srgbClr val="FFFFFF"/>
                 </a:solidFill>
@@ -9790,7 +9651,6 @@
             </a:lvl1pPr>
           </a:lstStyle>
           <a:p>
-            <a:pPr/>
             <a:r>
               <a:t>3</a:t>
             </a:r>
@@ -9816,7 +9676,7 @@
           </a:ln>
           <a:extLst>
             <a:ext uri="{C572A759-6A51-4108-AA02-DFA0A04FC94B}">
-              <ma14:wrappingTextBoxFlag xmlns:ma14="http://schemas.microsoft.com/office/mac/drawingml/2011/main" val="1"/>
+              <ma14:wrappingTextBoxFlag xmlns:ma14="http://schemas.microsoft.com/office/mac/drawingml/2011/main" xmlns:a14="http://schemas.microsoft.com/office/drawing/2010/main" xmlns:m="http://schemas.openxmlformats.org/officeDocument/2006/math" xmlns="" val="1"/>
             </a:ext>
           </a:extLst>
         </p:spPr>
@@ -9827,7 +9687,7 @@
           <a:lstStyle/>
           <a:p>
             <a:pPr>
-              <a:defRPr b="1" sz="1300">
+              <a:defRPr sz="1300" b="1">
                 <a:solidFill>
                   <a:srgbClr val="22302A"/>
                 </a:solidFill>
@@ -9837,7 +9697,7 @@
               <a:t>Validación  </a:t>
             </a:r>
             <a:r>
-              <a:rPr b="0" sz="1100">
+              <a:rPr sz="1100" b="0">
                 <a:solidFill>
                   <a:srgbClr val="5B6B62"/>
                 </a:solidFill>
@@ -9874,7 +9734,7 @@
           <a:bodyPr lIns="45719" rIns="45719"/>
           <a:lstStyle/>
           <a:p>
-            <a:pPr/>
+            <a:endParaRPr/>
           </a:p>
         </p:txBody>
       </p:sp>
@@ -9897,7 +9757,7 @@
           </a:ln>
           <a:extLst>
             <a:ext uri="{C572A759-6A51-4108-AA02-DFA0A04FC94B}">
-              <ma14:wrappingTextBoxFlag xmlns:ma14="http://schemas.microsoft.com/office/mac/drawingml/2011/main" val="1"/>
+              <ma14:wrappingTextBoxFlag xmlns:ma14="http://schemas.microsoft.com/office/mac/drawingml/2011/main" xmlns:a14="http://schemas.microsoft.com/office/drawing/2010/main" xmlns:m="http://schemas.openxmlformats.org/officeDocument/2006/math" xmlns="" val="1"/>
             </a:ext>
           </a:extLst>
         </p:spPr>
@@ -9907,7 +9767,7 @@
           </a:bodyPr>
           <a:lstStyle>
             <a:lvl1pPr>
-              <a:defRPr b="1" spc="50" sz="1100">
+              <a:defRPr sz="1100" b="1" spc="50">
                 <a:solidFill>
                   <a:srgbClr val="D98C3F"/>
                 </a:solidFill>
@@ -9915,7 +9775,6 @@
             </a:lvl1pPr>
           </a:lstStyle>
           <a:p>
-            <a:pPr/>
             <a:r>
               <a:t>ESQUEMA · dataset_fao</a:t>
             </a:r>
@@ -9941,7 +9800,7 @@
           </a:ln>
           <a:extLst>
             <a:ext uri="{C572A759-6A51-4108-AA02-DFA0A04FC94B}">
-              <ma14:wrappingTextBoxFlag xmlns:ma14="http://schemas.microsoft.com/office/mac/drawingml/2011/main" val="1"/>
+              <ma14:wrappingTextBoxFlag xmlns:ma14="http://schemas.microsoft.com/office/mac/drawingml/2011/main" xmlns:a14="http://schemas.microsoft.com/office/drawing/2010/main" xmlns:m="http://schemas.openxmlformats.org/officeDocument/2006/math" xmlns="" val="1"/>
             </a:ext>
           </a:extLst>
         </p:spPr>
@@ -9959,7 +9818,6 @@
             </a:lvl1pPr>
           </a:lstStyle>
           <a:p>
-            <a:pPr/>
             <a:r>
               <a:t>•  codigo_area</a:t>
             </a:r>
@@ -9985,7 +9843,7 @@
           </a:ln>
           <a:extLst>
             <a:ext uri="{C572A759-6A51-4108-AA02-DFA0A04FC94B}">
-              <ma14:wrappingTextBoxFlag xmlns:ma14="http://schemas.microsoft.com/office/mac/drawingml/2011/main" val="1"/>
+              <ma14:wrappingTextBoxFlag xmlns:ma14="http://schemas.microsoft.com/office/mac/drawingml/2011/main" xmlns:a14="http://schemas.microsoft.com/office/drawing/2010/main" xmlns:m="http://schemas.openxmlformats.org/officeDocument/2006/math" xmlns="" val="1"/>
             </a:ext>
           </a:extLst>
         </p:spPr>
@@ -10003,7 +9861,6 @@
             </a:lvl1pPr>
           </a:lstStyle>
           <a:p>
-            <a:pPr/>
             <a:r>
               <a:t>•  area</a:t>
             </a:r>
@@ -10029,7 +9886,7 @@
           </a:ln>
           <a:extLst>
             <a:ext uri="{C572A759-6A51-4108-AA02-DFA0A04FC94B}">
-              <ma14:wrappingTextBoxFlag xmlns:ma14="http://schemas.microsoft.com/office/mac/drawingml/2011/main" val="1"/>
+              <ma14:wrappingTextBoxFlag xmlns:ma14="http://schemas.microsoft.com/office/mac/drawingml/2011/main" xmlns:a14="http://schemas.microsoft.com/office/drawing/2010/main" xmlns:m="http://schemas.openxmlformats.org/officeDocument/2006/math" xmlns="" val="1"/>
             </a:ext>
           </a:extLst>
         </p:spPr>
@@ -10047,7 +9904,6 @@
             </a:lvl1pPr>
           </a:lstStyle>
           <a:p>
-            <a:pPr/>
             <a:r>
               <a:t>•  codigo_elemento</a:t>
             </a:r>
@@ -10073,7 +9929,7 @@
           </a:ln>
           <a:extLst>
             <a:ext uri="{C572A759-6A51-4108-AA02-DFA0A04FC94B}">
-              <ma14:wrappingTextBoxFlag xmlns:ma14="http://schemas.microsoft.com/office/mac/drawingml/2011/main" val="1"/>
+              <ma14:wrappingTextBoxFlag xmlns:ma14="http://schemas.microsoft.com/office/mac/drawingml/2011/main" xmlns:a14="http://schemas.microsoft.com/office/drawing/2010/main" xmlns:m="http://schemas.openxmlformats.org/officeDocument/2006/math" xmlns="" val="1"/>
             </a:ext>
           </a:extLst>
         </p:spPr>
@@ -10091,7 +9947,6 @@
             </a:lvl1pPr>
           </a:lstStyle>
           <a:p>
-            <a:pPr/>
             <a:r>
               <a:t>•  elemento</a:t>
             </a:r>
@@ -10117,7 +9972,7 @@
           </a:ln>
           <a:extLst>
             <a:ext uri="{C572A759-6A51-4108-AA02-DFA0A04FC94B}">
-              <ma14:wrappingTextBoxFlag xmlns:ma14="http://schemas.microsoft.com/office/mac/drawingml/2011/main" val="1"/>
+              <ma14:wrappingTextBoxFlag xmlns:ma14="http://schemas.microsoft.com/office/mac/drawingml/2011/main" xmlns:a14="http://schemas.microsoft.com/office/drawing/2010/main" xmlns:m="http://schemas.openxmlformats.org/officeDocument/2006/math" xmlns="" val="1"/>
             </a:ext>
           </a:extLst>
         </p:spPr>
@@ -10135,7 +9990,6 @@
             </a:lvl1pPr>
           </a:lstStyle>
           <a:p>
-            <a:pPr/>
             <a:r>
               <a:t>•  codigo_producto</a:t>
             </a:r>
@@ -10161,7 +10015,7 @@
           </a:ln>
           <a:extLst>
             <a:ext uri="{C572A759-6A51-4108-AA02-DFA0A04FC94B}">
-              <ma14:wrappingTextBoxFlag xmlns:ma14="http://schemas.microsoft.com/office/mac/drawingml/2011/main" val="1"/>
+              <ma14:wrappingTextBoxFlag xmlns:ma14="http://schemas.microsoft.com/office/mac/drawingml/2011/main" xmlns:a14="http://schemas.microsoft.com/office/drawing/2010/main" xmlns:m="http://schemas.openxmlformats.org/officeDocument/2006/math" xmlns="" val="1"/>
             </a:ext>
           </a:extLst>
         </p:spPr>
@@ -10179,7 +10033,6 @@
             </a:lvl1pPr>
           </a:lstStyle>
           <a:p>
-            <a:pPr/>
             <a:r>
               <a:t>•  producto</a:t>
             </a:r>
@@ -10205,7 +10058,7 @@
           </a:ln>
           <a:extLst>
             <a:ext uri="{C572A759-6A51-4108-AA02-DFA0A04FC94B}">
-              <ma14:wrappingTextBoxFlag xmlns:ma14="http://schemas.microsoft.com/office/mac/drawingml/2011/main" val="1"/>
+              <ma14:wrappingTextBoxFlag xmlns:ma14="http://schemas.microsoft.com/office/mac/drawingml/2011/main" xmlns:a14="http://schemas.microsoft.com/office/drawing/2010/main" xmlns:m="http://schemas.openxmlformats.org/officeDocument/2006/math" xmlns="" val="1"/>
             </a:ext>
           </a:extLst>
         </p:spPr>
@@ -10223,7 +10076,6 @@
             </a:lvl1pPr>
           </a:lstStyle>
           <a:p>
-            <a:pPr/>
             <a:r>
               <a:t>•  anio</a:t>
             </a:r>
@@ -10249,7 +10101,7 @@
           </a:ln>
           <a:extLst>
             <a:ext uri="{C572A759-6A51-4108-AA02-DFA0A04FC94B}">
-              <ma14:wrappingTextBoxFlag xmlns:ma14="http://schemas.microsoft.com/office/mac/drawingml/2011/main" val="1"/>
+              <ma14:wrappingTextBoxFlag xmlns:ma14="http://schemas.microsoft.com/office/mac/drawingml/2011/main" xmlns:a14="http://schemas.microsoft.com/office/drawing/2010/main" xmlns:m="http://schemas.openxmlformats.org/officeDocument/2006/math" xmlns="" val="1"/>
             </a:ext>
           </a:extLst>
         </p:spPr>
@@ -10267,7 +10119,6 @@
             </a:lvl1pPr>
           </a:lstStyle>
           <a:p>
-            <a:pPr/>
             <a:r>
               <a:t>•  unidad</a:t>
             </a:r>
@@ -10293,7 +10144,7 @@
           </a:ln>
           <a:extLst>
             <a:ext uri="{C572A759-6A51-4108-AA02-DFA0A04FC94B}">
-              <ma14:wrappingTextBoxFlag xmlns:ma14="http://schemas.microsoft.com/office/mac/drawingml/2011/main" val="1"/>
+              <ma14:wrappingTextBoxFlag xmlns:ma14="http://schemas.microsoft.com/office/mac/drawingml/2011/main" xmlns:a14="http://schemas.microsoft.com/office/drawing/2010/main" xmlns:m="http://schemas.openxmlformats.org/officeDocument/2006/math" xmlns="" val="1"/>
             </a:ext>
           </a:extLst>
         </p:spPr>
@@ -10311,7 +10162,6 @@
             </a:lvl1pPr>
           </a:lstStyle>
           <a:p>
-            <a:pPr/>
             <a:r>
               <a:t>•  valor</a:t>
             </a:r>
@@ -10337,7 +10187,7 @@
           </a:ln>
           <a:extLst>
             <a:ext uri="{C572A759-6A51-4108-AA02-DFA0A04FC94B}">
-              <ma14:wrappingTextBoxFlag xmlns:ma14="http://schemas.microsoft.com/office/mac/drawingml/2011/main" val="1"/>
+              <ma14:wrappingTextBoxFlag xmlns:ma14="http://schemas.microsoft.com/office/mac/drawingml/2011/main" xmlns:a14="http://schemas.microsoft.com/office/drawing/2010/main" xmlns:m="http://schemas.openxmlformats.org/officeDocument/2006/math" xmlns="" val="1"/>
             </a:ext>
           </a:extLst>
         </p:spPr>
@@ -10355,7 +10205,6 @@
             </a:lvl1pPr>
           </a:lstStyle>
           <a:p>
-            <a:pPr/>
             <a:r>
               <a:t>•  simbolo</a:t>
             </a:r>
@@ -10381,7 +10230,7 @@
           </a:ln>
           <a:extLst>
             <a:ext uri="{C572A759-6A51-4108-AA02-DFA0A04FC94B}">
-              <ma14:wrappingTextBoxFlag xmlns:ma14="http://schemas.microsoft.com/office/mac/drawingml/2011/main" val="1"/>
+              <ma14:wrappingTextBoxFlag xmlns:ma14="http://schemas.microsoft.com/office/mac/drawingml/2011/main" xmlns:a14="http://schemas.microsoft.com/office/drawing/2010/main" xmlns:m="http://schemas.openxmlformats.org/officeDocument/2006/math" xmlns="" val="1"/>
             </a:ext>
           </a:extLst>
         </p:spPr>
@@ -10399,7 +10248,6 @@
             </a:lvl1pPr>
           </a:lstStyle>
           <a:p>
-            <a:pPr/>
             <a:r>
               <a:t>•  descripcion_simbolo</a:t>
             </a:r>
@@ -10430,7 +10278,7 @@
           <a:bodyPr lIns="45719" rIns="45719"/>
           <a:lstStyle/>
           <a:p>
-            <a:pPr/>
+            <a:endParaRPr/>
           </a:p>
         </p:txBody>
       </p:sp>
@@ -10453,7 +10301,7 @@
           </a:ln>
           <a:extLst>
             <a:ext uri="{C572A759-6A51-4108-AA02-DFA0A04FC94B}">
-              <ma14:wrappingTextBoxFlag xmlns:ma14="http://schemas.microsoft.com/office/mac/drawingml/2011/main" val="1"/>
+              <ma14:wrappingTextBoxFlag xmlns:ma14="http://schemas.microsoft.com/office/mac/drawingml/2011/main" xmlns:a14="http://schemas.microsoft.com/office/drawing/2010/main" xmlns:m="http://schemas.openxmlformats.org/officeDocument/2006/math" xmlns="" val="1"/>
             </a:ext>
           </a:extLst>
         </p:spPr>
@@ -10475,7 +10323,6 @@
             </a:lvl1pPr>
           </a:lstStyle>
           <a:p>
-            <a:pPr/>
             <a:r>
               <a:t>77.491 filas</a:t>
             </a:r>
@@ -10501,7 +10348,7 @@
           </a:ln>
           <a:extLst>
             <a:ext uri="{C572A759-6A51-4108-AA02-DFA0A04FC94B}">
-              <ma14:wrappingTextBoxFlag xmlns:ma14="http://schemas.microsoft.com/office/mac/drawingml/2011/main" val="1"/>
+              <ma14:wrappingTextBoxFlag xmlns:ma14="http://schemas.microsoft.com/office/mac/drawingml/2011/main" xmlns:a14="http://schemas.microsoft.com/office/drawing/2010/main" xmlns:m="http://schemas.openxmlformats.org/officeDocument/2006/math" xmlns="" val="1"/>
             </a:ext>
           </a:extLst>
         </p:spPr>
@@ -10519,7 +10366,6 @@
             </a:lvl1pPr>
           </a:lstStyle>
           <a:p>
-            <a:pPr/>
             <a:r>
               <a:t>filas insertadas por executemany()</a:t>
             </a:r>
@@ -10555,7 +10401,7 @@
           <a:bodyPr lIns="45719" rIns="45719"/>
           <a:lstStyle/>
           <a:p>
-            <a:pPr/>
+            <a:endParaRPr/>
           </a:p>
         </p:txBody>
       </p:sp>
@@ -10578,7 +10424,7 @@
           </a:ln>
           <a:extLst>
             <a:ext uri="{C572A759-6A51-4108-AA02-DFA0A04FC94B}">
-              <ma14:wrappingTextBoxFlag xmlns:ma14="http://schemas.microsoft.com/office/mac/drawingml/2011/main" val="1"/>
+              <ma14:wrappingTextBoxFlag xmlns:ma14="http://schemas.microsoft.com/office/mac/drawingml/2011/main" xmlns:a14="http://schemas.microsoft.com/office/drawing/2010/main" xmlns:m="http://schemas.openxmlformats.org/officeDocument/2006/math" xmlns="" val="1"/>
             </a:ext>
           </a:extLst>
         </p:spPr>
@@ -10588,7 +10434,7 @@
           </a:bodyPr>
           <a:lstStyle>
             <a:lvl1pPr>
-              <a:defRPr b="1" i="1" sz="1200">
+              <a:defRPr sz="1200" b="1" i="1">
                 <a:solidFill>
                   <a:srgbClr val="5B6B62"/>
                 </a:solidFill>
@@ -10596,7 +10442,6 @@
             </a:lvl1pPr>
           </a:lstStyle>
           <a:p>
-            <a:pPr/>
             <a:r>
               <a:t>Por qué vaciar antes de insertar: evita duplicados si el pipeline se ejecuta más de una vez sobre los mismos datos.</a:t>
             </a:r>
@@ -10608,18 +10453,19 @@
   <p:clrMapOvr>
     <a:masterClrMapping/>
   </p:clrMapOvr>
-  <p:transition xmlns:p14="http://schemas.microsoft.com/office/powerpoint/2010/main" spd="med" advClick="1"/>
+  <p:transition spd="med"/>
 </p:sld>
 </file>
 
 <file path=ppt/slides/slide4.xml><?xml version="1.0" encoding="utf-8"?>
-<p:sld xmlns:a="http://schemas.openxmlformats.org/drawingml/2006/main" xmlns:r="http://schemas.openxmlformats.org/officeDocument/2006/relationships" xmlns:p="http://schemas.openxmlformats.org/presentationml/2006/main" xmlns:m="http://schemas.openxmlformats.org/officeDocument/2006/math" xmlns:a14="http://schemas.microsoft.com/office/drawing/2010/main" showMasterSp="1" showMasterPhAnim="1">
+<p:sld xmlns:a="http://schemas.openxmlformats.org/drawingml/2006/main" xmlns:r="http://schemas.openxmlformats.org/officeDocument/2006/relationships" xmlns:p="http://schemas.openxmlformats.org/presentationml/2006/main">
   <p:cSld>
     <p:bg>
       <p:bgPr>
         <a:solidFill>
           <a:srgbClr val="F4EFE6"/>
         </a:solidFill>
+        <a:effectLst/>
       </p:bgPr>
     </p:bg>
     <p:spTree>
@@ -10663,7 +10509,7 @@
           <a:bodyPr lIns="45719" rIns="45719"/>
           <a:lstStyle/>
           <a:p>
-            <a:pPr/>
+            <a:endParaRPr/>
           </a:p>
         </p:txBody>
       </p:sp>
@@ -10686,7 +10532,7 @@
           </a:ln>
           <a:extLst>
             <a:ext uri="{C572A759-6A51-4108-AA02-DFA0A04FC94B}">
-              <ma14:wrappingTextBoxFlag xmlns:ma14="http://schemas.microsoft.com/office/mac/drawingml/2011/main" val="1"/>
+              <ma14:wrappingTextBoxFlag xmlns:ma14="http://schemas.microsoft.com/office/mac/drawingml/2011/main" xmlns:a14="http://schemas.microsoft.com/office/drawing/2010/main" xmlns:m="http://schemas.openxmlformats.org/officeDocument/2006/math" xmlns="" val="1"/>
             </a:ext>
           </a:extLst>
         </p:spPr>
@@ -10696,7 +10542,7 @@
           </a:bodyPr>
           <a:lstStyle>
             <a:lvl1pPr algn="ctr">
-              <a:defRPr b="1" spc="100" sz="1000">
+              <a:defRPr sz="1000" b="1" spc="100">
                 <a:solidFill>
                   <a:srgbClr val="FFFFFF"/>
                 </a:solidFill>
@@ -10704,7 +10550,6 @@
             </a:lvl1pPr>
           </a:lstStyle>
           <a:p>
-            <a:pPr/>
             <a:r>
               <a:t>PASO 4 · EMISIONES.IPYNB · PUNTO 1</a:t>
             </a:r>
@@ -10730,7 +10575,7 @@
           </a:ln>
           <a:extLst>
             <a:ext uri="{C572A759-6A51-4108-AA02-DFA0A04FC94B}">
-              <ma14:wrappingTextBoxFlag xmlns:ma14="http://schemas.microsoft.com/office/mac/drawingml/2011/main" val="1"/>
+              <ma14:wrappingTextBoxFlag xmlns:ma14="http://schemas.microsoft.com/office/mac/drawingml/2011/main" xmlns:a14="http://schemas.microsoft.com/office/drawing/2010/main" xmlns:m="http://schemas.openxmlformats.org/officeDocument/2006/math" xmlns="" val="1"/>
             </a:ext>
           </a:extLst>
         </p:spPr>
@@ -10740,7 +10585,7 @@
           </a:bodyPr>
           <a:lstStyle>
             <a:lvl1pPr>
-              <a:defRPr b="1" sz="2700">
+              <a:defRPr sz="2700" b="1">
                 <a:solidFill>
                   <a:srgbClr val="22302A"/>
                 </a:solidFill>
@@ -10752,7 +10597,6 @@
             </a:lvl1pPr>
           </a:lstStyle>
           <a:p>
-            <a:pPr/>
             <a:r>
               <a:t>¿Cuánto emite la ganadería y hacia dónde va?</a:t>
             </a:r>
@@ -10778,7 +10622,7 @@
           </a:ln>
           <a:extLst>
             <a:ext uri="{C572A759-6A51-4108-AA02-DFA0A04FC94B}">
-              <ma14:wrappingTextBoxFlag xmlns:ma14="http://schemas.microsoft.com/office/mac/drawingml/2011/main" val="1"/>
+              <ma14:wrappingTextBoxFlag xmlns:ma14="http://schemas.microsoft.com/office/mac/drawingml/2011/main" xmlns:a14="http://schemas.microsoft.com/office/drawing/2010/main" xmlns:m="http://schemas.openxmlformats.org/officeDocument/2006/math" xmlns="" val="1"/>
             </a:ext>
           </a:extLst>
         </p:spPr>
@@ -10796,7 +10640,6 @@
             </a:lvl1pPr>
           </a:lstStyle>
           <a:p>
-            <a:pPr/>
             <a:r>
               <a:t>Serie temporal mundial: metano y óxido nitroso, todos los animales y continentes, en una sola curva</a:t>
             </a:r>
@@ -10828,7 +10671,7 @@
             </a:solidFill>
           </a:ln>
           <a:effectLst>
-            <a:outerShdw sx="100000" sy="100000" kx="0" ky="0" algn="b" rotWithShape="0" blurRad="101600" dist="25400" dir="5400000">
+            <a:outerShdw blurRad="101600" dist="25400" dir="5400000" rotWithShape="0">
               <a:srgbClr val="000000">
                 <a:alpha val="10000"/>
               </a:srgbClr>
@@ -10839,7 +10682,7 @@
           <a:bodyPr lIns="45719" rIns="45719"/>
           <a:lstStyle/>
           <a:p>
-            <a:pPr/>
+            <a:endParaRPr/>
           </a:p>
         </p:txBody>
       </p:sp>
@@ -10852,9 +10695,7 @@
           <p:nvPr/>
         </p:nvPicPr>
         <p:blipFill>
-          <a:blip r:embed="rId2">
-            <a:extLst/>
-          </a:blip>
+          <a:blip r:embed="rId2"/>
           <a:stretch>
             <a:fillRect/>
           </a:stretch>
@@ -10899,7 +10740,7 @@
           <a:bodyPr lIns="45719" rIns="45719"/>
           <a:lstStyle/>
           <a:p>
-            <a:pPr/>
+            <a:endParaRPr/>
           </a:p>
         </p:txBody>
       </p:sp>
@@ -10922,7 +10763,7 @@
           </a:ln>
           <a:extLst>
             <a:ext uri="{C572A759-6A51-4108-AA02-DFA0A04FC94B}">
-              <ma14:wrappingTextBoxFlag xmlns:ma14="http://schemas.microsoft.com/office/mac/drawingml/2011/main" val="1"/>
+              <ma14:wrappingTextBoxFlag xmlns:ma14="http://schemas.microsoft.com/office/mac/drawingml/2011/main" xmlns:a14="http://schemas.microsoft.com/office/drawing/2010/main" xmlns:m="http://schemas.openxmlformats.org/officeDocument/2006/math" xmlns="" val="1"/>
             </a:ext>
           </a:extLst>
         </p:spPr>
@@ -10936,7 +10777,7 @@
               <a:lnSpc>
                 <a:spcPct val="110000"/>
               </a:lnSpc>
-              <a:defRPr b="1" sz="1200">
+              <a:defRPr sz="1200" b="1">
                 <a:solidFill>
                   <a:srgbClr val="D98C3F"/>
                 </a:solidFill>
@@ -10946,18 +10787,13 @@
               <a:t>+60% en seis décadas, sin señal de techo.  </a:t>
             </a:r>
             <a:r>
-              <a:rPr b="0" sz="1300">
+              <a:rPr sz="1300" b="0">
                 <a:solidFill>
                   <a:srgbClr val="E7E2D6"/>
                 </a:solidFill>
               </a:rPr>
               <a:t>El estancamiento de los 90 responde a la disolución de la URSS (1991) y a la reforma de la PAC europea (1992).</a:t>
             </a:r>
-            <a:endParaRPr b="0" sz="1300">
-              <a:solidFill>
-                <a:srgbClr val="E7E2D6"/>
-              </a:solidFill>
-            </a:endParaRPr>
           </a:p>
           <a:p>
             <a:pPr defTabSz="457200">
@@ -11000,18 +10836,19 @@
   <p:clrMapOvr>
     <a:masterClrMapping/>
   </p:clrMapOvr>
-  <p:transition xmlns:p14="http://schemas.microsoft.com/office/powerpoint/2010/main" spd="med" advClick="1"/>
+  <p:transition spd="med"/>
 </p:sld>
 </file>
 
 <file path=ppt/slides/slide5.xml><?xml version="1.0" encoding="utf-8"?>
-<p:sld xmlns:a="http://schemas.openxmlformats.org/drawingml/2006/main" xmlns:r="http://schemas.openxmlformats.org/officeDocument/2006/relationships" xmlns:p="http://schemas.openxmlformats.org/presentationml/2006/main" xmlns:m="http://schemas.openxmlformats.org/officeDocument/2006/math" xmlns:a14="http://schemas.microsoft.com/office/drawing/2010/main" showMasterSp="1" showMasterPhAnim="1">
+<p:sld xmlns:a="http://schemas.openxmlformats.org/drawingml/2006/main" xmlns:r="http://schemas.openxmlformats.org/officeDocument/2006/relationships" xmlns:p="http://schemas.openxmlformats.org/presentationml/2006/main">
   <p:cSld>
     <p:bg>
       <p:bgPr>
         <a:solidFill>
           <a:srgbClr val="F4EFE6"/>
         </a:solidFill>
+        <a:effectLst/>
       </p:bgPr>
     </p:bg>
     <p:spTree>
@@ -11055,7 +10892,7 @@
           <a:bodyPr lIns="45719" rIns="45719"/>
           <a:lstStyle/>
           <a:p>
-            <a:pPr/>
+            <a:endParaRPr/>
           </a:p>
         </p:txBody>
       </p:sp>
@@ -11078,7 +10915,7 @@
           </a:ln>
           <a:extLst>
             <a:ext uri="{C572A759-6A51-4108-AA02-DFA0A04FC94B}">
-              <ma14:wrappingTextBoxFlag xmlns:ma14="http://schemas.microsoft.com/office/mac/drawingml/2011/main" val="1"/>
+              <ma14:wrappingTextBoxFlag xmlns:ma14="http://schemas.microsoft.com/office/mac/drawingml/2011/main" xmlns:a14="http://schemas.microsoft.com/office/drawing/2010/main" xmlns:m="http://schemas.openxmlformats.org/officeDocument/2006/math" xmlns="" val="1"/>
             </a:ext>
           </a:extLst>
         </p:spPr>
@@ -11088,7 +10925,7 @@
           </a:bodyPr>
           <a:lstStyle>
             <a:lvl1pPr algn="ctr">
-              <a:defRPr b="1" spc="100" sz="1000">
+              <a:defRPr sz="1000" b="1" spc="100">
                 <a:solidFill>
                   <a:srgbClr val="FFFFFF"/>
                 </a:solidFill>
@@ -11096,7 +10933,6 @@
             </a:lvl1pPr>
           </a:lstStyle>
           <a:p>
-            <a:pPr/>
             <a:r>
               <a:t>PASO 4 · EMISIONES.IPYNB · PUNTO 2</a:t>
             </a:r>
@@ -11122,7 +10958,7 @@
           </a:ln>
           <a:extLst>
             <a:ext uri="{C572A759-6A51-4108-AA02-DFA0A04FC94B}">
-              <ma14:wrappingTextBoxFlag xmlns:ma14="http://schemas.microsoft.com/office/mac/drawingml/2011/main" val="1"/>
+              <ma14:wrappingTextBoxFlag xmlns:ma14="http://schemas.microsoft.com/office/mac/drawingml/2011/main" xmlns:a14="http://schemas.microsoft.com/office/drawing/2010/main" xmlns:m="http://schemas.openxmlformats.org/officeDocument/2006/math" xmlns="" val="1"/>
             </a:ext>
           </a:extLst>
         </p:spPr>
@@ -11132,7 +10968,7 @@
           </a:bodyPr>
           <a:lstStyle>
             <a:lvl1pPr>
-              <a:defRPr b="1" sz="2700">
+              <a:defRPr sz="2700" b="1">
                 <a:solidFill>
                   <a:srgbClr val="22302A"/>
                 </a:solidFill>
@@ -11144,7 +10980,6 @@
             </a:lvl1pPr>
           </a:lstStyle>
           <a:p>
-            <a:pPr/>
             <a:r>
               <a:t>¿Qué animales están detrás de esas emisiones?</a:t>
             </a:r>
@@ -11170,7 +11005,7 @@
           </a:ln>
           <a:extLst>
             <a:ext uri="{C572A759-6A51-4108-AA02-DFA0A04FC94B}">
-              <ma14:wrappingTextBoxFlag xmlns:ma14="http://schemas.microsoft.com/office/mac/drawingml/2011/main" val="1"/>
+              <ma14:wrappingTextBoxFlag xmlns:ma14="http://schemas.microsoft.com/office/mac/drawingml/2011/main" xmlns:a14="http://schemas.microsoft.com/office/drawing/2010/main" xmlns:m="http://schemas.openxmlformats.org/officeDocument/2006/math" xmlns="" val="1"/>
             </a:ext>
           </a:extLst>
         </p:spPr>
@@ -11188,7 +11023,6 @@
             </a:lvl1pPr>
           </a:lstStyle>
           <a:p>
-            <a:pPr/>
             <a:r>
               <a:t>Dos gráficos: cuánto emite cada tipo de ganado en conjunto y cuánto emite cada animal individual</a:t>
             </a:r>
@@ -11214,7 +11048,7 @@
           </a:ln>
           <a:extLst>
             <a:ext uri="{C572A759-6A51-4108-AA02-DFA0A04FC94B}">
-              <ma14:wrappingTextBoxFlag xmlns:ma14="http://schemas.microsoft.com/office/mac/drawingml/2011/main" val="1"/>
+              <ma14:wrappingTextBoxFlag xmlns:ma14="http://schemas.microsoft.com/office/mac/drawingml/2011/main" xmlns:a14="http://schemas.microsoft.com/office/drawing/2010/main" xmlns:m="http://schemas.openxmlformats.org/officeDocument/2006/math" xmlns="" val="1"/>
             </a:ext>
           </a:extLst>
         </p:spPr>
@@ -11224,7 +11058,7 @@
           </a:bodyPr>
           <a:lstStyle>
             <a:lvl1pPr>
-              <a:defRPr b="1" spc="50" sz="1100">
+              <a:defRPr sz="1100" b="1" spc="50">
                 <a:solidFill>
                   <a:srgbClr val="B5443A"/>
                 </a:solidFill>
@@ -11232,7 +11066,6 @@
             </a:lvl1pPr>
           </a:lstStyle>
           <a:p>
-            <a:pPr/>
             <a:r>
               <a:t>EN CONJUNTO (2023)</a:t>
             </a:r>
@@ -11268,7 +11101,7 @@
           <a:bodyPr lIns="45719" rIns="45719"/>
           <a:lstStyle/>
           <a:p>
-            <a:pPr/>
+            <a:endParaRPr/>
           </a:p>
         </p:txBody>
       </p:sp>
@@ -11281,9 +11114,7 @@
           <p:nvPr/>
         </p:nvPicPr>
         <p:blipFill>
-          <a:blip r:embed="rId2">
-            <a:extLst/>
-          </a:blip>
+          <a:blip r:embed="rId2"/>
           <a:stretch>
             <a:fillRect/>
           </a:stretch>
@@ -11320,7 +11151,7 @@
           </a:ln>
           <a:extLst>
             <a:ext uri="{C572A759-6A51-4108-AA02-DFA0A04FC94B}">
-              <ma14:wrappingTextBoxFlag xmlns:ma14="http://schemas.microsoft.com/office/mac/drawingml/2011/main" val="1"/>
+              <ma14:wrappingTextBoxFlag xmlns:ma14="http://schemas.microsoft.com/office/mac/drawingml/2011/main" xmlns:a14="http://schemas.microsoft.com/office/drawing/2010/main" xmlns:m="http://schemas.openxmlformats.org/officeDocument/2006/math" xmlns="" val="1"/>
             </a:ext>
           </a:extLst>
         </p:spPr>
@@ -11330,7 +11161,7 @@
           </a:bodyPr>
           <a:lstStyle>
             <a:lvl1pPr>
-              <a:defRPr b="1" spc="50" sz="1100">
+              <a:defRPr sz="1100" b="1" spc="50">
                 <a:solidFill>
                   <a:srgbClr val="3A6B8F"/>
                 </a:solidFill>
@@ -11338,7 +11169,6 @@
             </a:lvl1pPr>
           </a:lstStyle>
           <a:p>
-            <a:pPr/>
             <a:r>
               <a:t>POR CABEZA Y AÑO — escala logarítmica (2023)</a:t>
             </a:r>
@@ -11374,7 +11204,7 @@
           <a:bodyPr lIns="45719" rIns="45719"/>
           <a:lstStyle/>
           <a:p>
-            <a:pPr/>
+            <a:endParaRPr/>
           </a:p>
         </p:txBody>
       </p:sp>
@@ -11387,9 +11217,7 @@
           <p:nvPr/>
         </p:nvPicPr>
         <p:blipFill>
-          <a:blip r:embed="rId3">
-            <a:extLst/>
-          </a:blip>
+          <a:blip r:embed="rId3"/>
           <a:stretch>
             <a:fillRect/>
           </a:stretch>
@@ -11434,7 +11262,7 @@
           <a:bodyPr lIns="45719" rIns="45719"/>
           <a:lstStyle/>
           <a:p>
-            <a:pPr/>
+            <a:endParaRPr/>
           </a:p>
         </p:txBody>
       </p:sp>
@@ -11457,7 +11285,7 @@
           </a:ln>
           <a:extLst>
             <a:ext uri="{C572A759-6A51-4108-AA02-DFA0A04FC94B}">
-              <ma14:wrappingTextBoxFlag xmlns:ma14="http://schemas.microsoft.com/office/mac/drawingml/2011/main" val="1"/>
+              <ma14:wrappingTextBoxFlag xmlns:ma14="http://schemas.microsoft.com/office/mac/drawingml/2011/main" xmlns:a14="http://schemas.microsoft.com/office/drawing/2010/main" xmlns:m="http://schemas.openxmlformats.org/officeDocument/2006/math" xmlns="" val="1"/>
             </a:ext>
           </a:extLst>
         </p:spPr>
@@ -11471,7 +11299,7 @@
               <a:lnSpc>
                 <a:spcPct val="108000"/>
               </a:lnSpc>
-              <a:defRPr b="1" sz="1300">
+              <a:defRPr sz="1300" b="1">
                 <a:solidFill>
                   <a:srgbClr val="D98C3F"/>
                 </a:solidFill>
@@ -11496,18 +11324,19 @@
   <p:clrMapOvr>
     <a:masterClrMapping/>
   </p:clrMapOvr>
-  <p:transition xmlns:p14="http://schemas.microsoft.com/office/powerpoint/2010/main" spd="med" advClick="1"/>
+  <p:transition spd="med"/>
 </p:sld>
 </file>
 
 <file path=ppt/slides/slide6.xml><?xml version="1.0" encoding="utf-8"?>
-<p:sld xmlns:a="http://schemas.openxmlformats.org/drawingml/2006/main" xmlns:r="http://schemas.openxmlformats.org/officeDocument/2006/relationships" xmlns:p="http://schemas.openxmlformats.org/presentationml/2006/main" xmlns:m="http://schemas.openxmlformats.org/officeDocument/2006/math" xmlns:a14="http://schemas.microsoft.com/office/drawing/2010/main" showMasterSp="1" showMasterPhAnim="1">
+<p:sld xmlns:a="http://schemas.openxmlformats.org/drawingml/2006/main" xmlns:r="http://schemas.openxmlformats.org/officeDocument/2006/relationships" xmlns:p="http://schemas.openxmlformats.org/presentationml/2006/main">
   <p:cSld>
     <p:bg>
       <p:bgPr>
         <a:solidFill>
           <a:srgbClr val="F4EFE6"/>
         </a:solidFill>
+        <a:effectLst/>
       </p:bgPr>
     </p:bg>
     <p:spTree>
@@ -11551,7 +11380,7 @@
           <a:bodyPr lIns="45719" rIns="45719"/>
           <a:lstStyle/>
           <a:p>
-            <a:pPr/>
+            <a:endParaRPr/>
           </a:p>
         </p:txBody>
       </p:sp>
@@ -11574,7 +11403,7 @@
           </a:ln>
           <a:extLst>
             <a:ext uri="{C572A759-6A51-4108-AA02-DFA0A04FC94B}">
-              <ma14:wrappingTextBoxFlag xmlns:ma14="http://schemas.microsoft.com/office/mac/drawingml/2011/main" val="1"/>
+              <ma14:wrappingTextBoxFlag xmlns:ma14="http://schemas.microsoft.com/office/mac/drawingml/2011/main" xmlns:a14="http://schemas.microsoft.com/office/drawing/2010/main" xmlns:m="http://schemas.openxmlformats.org/officeDocument/2006/math" xmlns="" val="1"/>
             </a:ext>
           </a:extLst>
         </p:spPr>
@@ -11584,7 +11413,7 @@
           </a:bodyPr>
           <a:lstStyle>
             <a:lvl1pPr algn="ctr">
-              <a:defRPr b="1" spc="100" sz="1000">
+              <a:defRPr sz="1000" b="1" spc="100">
                 <a:solidFill>
                   <a:srgbClr val="FFFFFF"/>
                 </a:solidFill>
@@ -11592,7 +11421,6 @@
             </a:lvl1pPr>
           </a:lstStyle>
           <a:p>
-            <a:pPr/>
             <a:r>
               <a:t>PASO 4 · EMISIONES.IPYNB · PUNTO 3</a:t>
             </a:r>
@@ -11618,7 +11446,7 @@
           </a:ln>
           <a:extLst>
             <a:ext uri="{C572A759-6A51-4108-AA02-DFA0A04FC94B}">
-              <ma14:wrappingTextBoxFlag xmlns:ma14="http://schemas.microsoft.com/office/mac/drawingml/2011/main" val="1"/>
+              <ma14:wrappingTextBoxFlag xmlns:ma14="http://schemas.microsoft.com/office/mac/drawingml/2011/main" xmlns:a14="http://schemas.microsoft.com/office/drawing/2010/main" xmlns:m="http://schemas.openxmlformats.org/officeDocument/2006/math" xmlns="" val="1"/>
             </a:ext>
           </a:extLst>
         </p:spPr>
@@ -11628,7 +11456,7 @@
           </a:bodyPr>
           <a:lstStyle>
             <a:lvl1pPr>
-              <a:defRPr b="1" sz="2800">
+              <a:defRPr sz="2800" b="1">
                 <a:solidFill>
                   <a:srgbClr val="22302A"/>
                 </a:solidFill>
@@ -11640,7 +11468,6 @@
             </a:lvl1pPr>
           </a:lstStyle>
           <a:p>
-            <a:pPr/>
             <a:r>
               <a:t>¿Ha crecido todo por igual?</a:t>
             </a:r>
@@ -11666,7 +11493,7 @@
           </a:ln>
           <a:extLst>
             <a:ext uri="{C572A759-6A51-4108-AA02-DFA0A04FC94B}">
-              <ma14:wrappingTextBoxFlag xmlns:ma14="http://schemas.microsoft.com/office/mac/drawingml/2011/main" val="1"/>
+              <ma14:wrappingTextBoxFlag xmlns:ma14="http://schemas.microsoft.com/office/mac/drawingml/2011/main" xmlns:a14="http://schemas.microsoft.com/office/drawing/2010/main" xmlns:m="http://schemas.openxmlformats.org/officeDocument/2006/math" xmlns="" val="1"/>
             </a:ext>
           </a:extLst>
         </p:spPr>
@@ -11684,7 +11511,6 @@
             </a:lvl1pPr>
           </a:lstStyle>
           <a:p>
-            <a:pPr/>
             <a:r>
               <a:t>Si las emisiones dependieran solo del número de animales, ambas magnitudes crecerían al mismo ritmo</a:t>
             </a:r>
@@ -11710,7 +11536,7 @@
           </a:ln>
           <a:extLst>
             <a:ext uri="{C572A759-6A51-4108-AA02-DFA0A04FC94B}">
-              <ma14:wrappingTextBoxFlag xmlns:ma14="http://schemas.microsoft.com/office/mac/drawingml/2011/main" val="1"/>
+              <ma14:wrappingTextBoxFlag xmlns:ma14="http://schemas.microsoft.com/office/mac/drawingml/2011/main" xmlns:a14="http://schemas.microsoft.com/office/drawing/2010/main" xmlns:m="http://schemas.openxmlformats.org/officeDocument/2006/math" xmlns="" val="1"/>
             </a:ext>
           </a:extLst>
         </p:spPr>
@@ -11720,7 +11546,7 @@
           </a:bodyPr>
           <a:lstStyle>
             <a:lvl1pPr>
-              <a:defRPr b="1" spc="50" sz="1100">
+              <a:defRPr sz="1100" b="1" spc="50">
                 <a:solidFill>
                   <a:srgbClr val="3A6B8F"/>
                 </a:solidFill>
@@ -11728,7 +11554,6 @@
             </a:lvl1pPr>
           </a:lstStyle>
           <a:p>
-            <a:pPr/>
             <a:r>
               <a:t>ANIMALES VS. EMISIONES (1961 = 100)</a:t>
             </a:r>
@@ -11764,7 +11589,7 @@
           <a:bodyPr lIns="45719" rIns="45719"/>
           <a:lstStyle/>
           <a:p>
-            <a:pPr/>
+            <a:endParaRPr/>
           </a:p>
         </p:txBody>
       </p:sp>
@@ -11777,9 +11602,7 @@
           <p:nvPr/>
         </p:nvPicPr>
         <p:blipFill>
-          <a:blip r:embed="rId2">
-            <a:extLst/>
-          </a:blip>
+          <a:blip r:embed="rId2"/>
           <a:stretch>
             <a:fillRect/>
           </a:stretch>
@@ -11816,7 +11639,7 @@
           </a:ln>
           <a:extLst>
             <a:ext uri="{C572A759-6A51-4108-AA02-DFA0A04FC94B}">
-              <ma14:wrappingTextBoxFlag xmlns:ma14="http://schemas.microsoft.com/office/mac/drawingml/2011/main" val="1"/>
+              <ma14:wrappingTextBoxFlag xmlns:ma14="http://schemas.microsoft.com/office/mac/drawingml/2011/main" xmlns:a14="http://schemas.microsoft.com/office/drawing/2010/main" xmlns:m="http://schemas.openxmlformats.org/officeDocument/2006/math" xmlns="" val="1"/>
             </a:ext>
           </a:extLst>
         </p:spPr>
@@ -11827,7 +11650,7 @@
           <a:lstStyle/>
           <a:p>
             <a:pPr>
-              <a:defRPr b="1" sz="1200">
+              <a:defRPr sz="1200" b="1">
                 <a:solidFill>
                   <a:srgbClr val="3A6B8F"/>
                 </a:solidFill>
@@ -11837,7 +11660,7 @@
               <a:t>×4,7 animales  </a:t>
             </a:r>
             <a:r>
-              <a:rPr b="0" sz="1000">
+              <a:rPr sz="1000" b="0">
                 <a:solidFill>
                   <a:srgbClr val="5B6B62"/>
                 </a:solidFill>
@@ -11853,7 +11676,7 @@
               <a:t>×1,6 emisiones</a:t>
             </a:r>
             <a:r>
-              <a:rPr b="0" sz="1000">
+              <a:rPr sz="1000" b="0">
                 <a:solidFill>
                   <a:srgbClr val="5B6B62"/>
                 </a:solidFill>
@@ -11882,7 +11705,7 @@
           </a:ln>
           <a:extLst>
             <a:ext uri="{C572A759-6A51-4108-AA02-DFA0A04FC94B}">
-              <ma14:wrappingTextBoxFlag xmlns:ma14="http://schemas.microsoft.com/office/mac/drawingml/2011/main" val="1"/>
+              <ma14:wrappingTextBoxFlag xmlns:ma14="http://schemas.microsoft.com/office/mac/drawingml/2011/main" xmlns:a14="http://schemas.microsoft.com/office/drawing/2010/main" xmlns:m="http://schemas.openxmlformats.org/officeDocument/2006/math" xmlns="" val="1"/>
             </a:ext>
           </a:extLst>
         </p:spPr>
@@ -11892,7 +11715,7 @@
           </a:bodyPr>
           <a:lstStyle>
             <a:lvl1pPr>
-              <a:defRPr b="1" spc="50" sz="1100">
+              <a:defRPr sz="1100" b="1" spc="50">
                 <a:solidFill>
                   <a:srgbClr val="D98C3F"/>
                 </a:solidFill>
@@ -11900,7 +11723,6 @@
             </a:lvl1pPr>
           </a:lstStyle>
           <a:p>
-            <a:pPr/>
             <a:r>
               <a:t>COMPOSICIÓN DEL CENSO MUNDIAL (%)</a:t>
             </a:r>
@@ -11936,7 +11758,7 @@
           <a:bodyPr lIns="45719" rIns="45719"/>
           <a:lstStyle/>
           <a:p>
-            <a:pPr/>
+            <a:endParaRPr/>
           </a:p>
         </p:txBody>
       </p:sp>
@@ -11949,9 +11771,7 @@
           <p:nvPr/>
         </p:nvPicPr>
         <p:blipFill>
-          <a:blip r:embed="rId3">
-            <a:extLst/>
-          </a:blip>
+          <a:blip r:embed="rId3"/>
           <a:stretch>
             <a:fillRect/>
           </a:stretch>
@@ -11988,7 +11808,7 @@
           </a:ln>
           <a:extLst>
             <a:ext uri="{C572A759-6A51-4108-AA02-DFA0A04FC94B}">
-              <ma14:wrappingTextBoxFlag xmlns:ma14="http://schemas.microsoft.com/office/mac/drawingml/2011/main" val="1"/>
+              <ma14:wrappingTextBoxFlag xmlns:ma14="http://schemas.microsoft.com/office/mac/drawingml/2011/main" xmlns:a14="http://schemas.microsoft.com/office/drawing/2010/main" xmlns:m="http://schemas.openxmlformats.org/officeDocument/2006/math" xmlns="" val="1"/>
             </a:ext>
           </a:extLst>
         </p:spPr>
@@ -11999,7 +11819,7 @@
           <a:lstStyle/>
           <a:p>
             <a:pPr>
-              <a:defRPr b="1" sz="1200">
+              <a:defRPr sz="1200" b="1">
                 <a:solidFill>
                   <a:srgbClr val="D98C3F"/>
                 </a:solidFill>
@@ -12009,7 +11829,7 @@
               <a:t>Aves: 61,5% → 85%  </a:t>
             </a:r>
             <a:r>
-              <a:rPr b="0" sz="1000">
+              <a:rPr sz="1000" b="0">
                 <a:solidFill>
                   <a:srgbClr val="5B6B62"/>
                 </a:solidFill>
@@ -12054,7 +11874,7 @@
           <a:bodyPr lIns="45719" rIns="45719"/>
           <a:lstStyle/>
           <a:p>
-            <a:pPr/>
+            <a:endParaRPr/>
           </a:p>
         </p:txBody>
       </p:sp>
@@ -12077,7 +11897,7 @@
           </a:ln>
           <a:extLst>
             <a:ext uri="{C572A759-6A51-4108-AA02-DFA0A04FC94B}">
-              <ma14:wrappingTextBoxFlag xmlns:ma14="http://schemas.microsoft.com/office/mac/drawingml/2011/main" val="1"/>
+              <ma14:wrappingTextBoxFlag xmlns:ma14="http://schemas.microsoft.com/office/mac/drawingml/2011/main" xmlns:a14="http://schemas.microsoft.com/office/drawing/2010/main" xmlns:m="http://schemas.openxmlformats.org/officeDocument/2006/math" xmlns="" val="1"/>
             </a:ext>
           </a:extLst>
         </p:spPr>
@@ -12091,7 +11911,7 @@
               <a:lnSpc>
                 <a:spcPct val="108000"/>
               </a:lnSpc>
-              <a:defRPr b="1" sz="1300">
+              <a:defRPr sz="1300" b="1">
                 <a:solidFill>
                   <a:srgbClr val="D98C3F"/>
                 </a:solidFill>
@@ -12116,18 +11936,19 @@
   <p:clrMapOvr>
     <a:masterClrMapping/>
   </p:clrMapOvr>
-  <p:transition xmlns:p14="http://schemas.microsoft.com/office/powerpoint/2010/main" spd="med" advClick="1"/>
+  <p:transition spd="med"/>
 </p:sld>
 </file>
 
 <file path=ppt/slides/slide7.xml><?xml version="1.0" encoding="utf-8"?>
-<p:sld xmlns:a="http://schemas.openxmlformats.org/drawingml/2006/main" xmlns:r="http://schemas.openxmlformats.org/officeDocument/2006/relationships" xmlns:p="http://schemas.openxmlformats.org/presentationml/2006/main" xmlns:m="http://schemas.openxmlformats.org/officeDocument/2006/math" xmlns:a14="http://schemas.microsoft.com/office/drawing/2010/main" showMasterSp="1" showMasterPhAnim="1">
+<p:sld xmlns:a="http://schemas.openxmlformats.org/drawingml/2006/main" xmlns:r="http://schemas.openxmlformats.org/officeDocument/2006/relationships" xmlns:p="http://schemas.openxmlformats.org/presentationml/2006/main">
   <p:cSld>
     <p:bg>
       <p:bgPr>
         <a:solidFill>
           <a:srgbClr val="F4EFE6"/>
         </a:solidFill>
+        <a:effectLst/>
       </p:bgPr>
     </p:bg>
     <p:spTree>
@@ -12171,7 +11992,7 @@
           <a:bodyPr lIns="45719" rIns="45719"/>
           <a:lstStyle/>
           <a:p>
-            <a:pPr/>
+            <a:endParaRPr/>
           </a:p>
         </p:txBody>
       </p:sp>
@@ -12194,7 +12015,7 @@
           </a:ln>
           <a:extLst>
             <a:ext uri="{C572A759-6A51-4108-AA02-DFA0A04FC94B}">
-              <ma14:wrappingTextBoxFlag xmlns:ma14="http://schemas.microsoft.com/office/mac/drawingml/2011/main" val="1"/>
+              <ma14:wrappingTextBoxFlag xmlns:ma14="http://schemas.microsoft.com/office/mac/drawingml/2011/main" xmlns:a14="http://schemas.microsoft.com/office/drawing/2010/main" xmlns:m="http://schemas.openxmlformats.org/officeDocument/2006/math" xmlns="" val="1"/>
             </a:ext>
           </a:extLst>
         </p:spPr>
@@ -12204,7 +12025,7 @@
           </a:bodyPr>
           <a:lstStyle>
             <a:lvl1pPr algn="ctr">
-              <a:defRPr b="1" spc="100" sz="1000">
+              <a:defRPr sz="1000" b="1" spc="100">
                 <a:solidFill>
                   <a:srgbClr val="FFFFFF"/>
                 </a:solidFill>
@@ -12212,7 +12033,6 @@
             </a:lvl1pPr>
           </a:lstStyle>
           <a:p>
-            <a:pPr/>
             <a:r>
               <a:t>PASO 4 · EMISIONES.IPYNB · PUNTO 4</a:t>
             </a:r>
@@ -12238,7 +12058,7 @@
           </a:ln>
           <a:extLst>
             <a:ext uri="{C572A759-6A51-4108-AA02-DFA0A04FC94B}">
-              <ma14:wrappingTextBoxFlag xmlns:ma14="http://schemas.microsoft.com/office/mac/drawingml/2011/main" val="1"/>
+              <ma14:wrappingTextBoxFlag xmlns:ma14="http://schemas.microsoft.com/office/mac/drawingml/2011/main" xmlns:a14="http://schemas.microsoft.com/office/drawing/2010/main" xmlns:m="http://schemas.openxmlformats.org/officeDocument/2006/math" xmlns="" val="1"/>
             </a:ext>
           </a:extLst>
         </p:spPr>
@@ -12256,7 +12076,6 @@
             </a:lvl1pPr>
           </a:lstStyle>
           <a:p>
-            <a:pPr/>
             <a:r>
               <a:t>El mapa de color muestra qué especies son responsables de las emisiones dentro de cada continente¿Dónde se emite?</a:t>
             </a:r>
@@ -12282,7 +12101,7 @@
           </a:ln>
           <a:extLst>
             <a:ext uri="{C572A759-6A51-4108-AA02-DFA0A04FC94B}">
-              <ma14:wrappingTextBoxFlag xmlns:ma14="http://schemas.microsoft.com/office/mac/drawingml/2011/main" val="1"/>
+              <ma14:wrappingTextBoxFlag xmlns:ma14="http://schemas.microsoft.com/office/mac/drawingml/2011/main" xmlns:a14="http://schemas.microsoft.com/office/drawing/2010/main" xmlns:m="http://schemas.openxmlformats.org/officeDocument/2006/math" xmlns="" val="1"/>
             </a:ext>
           </a:extLst>
         </p:spPr>
@@ -12300,7 +12119,6 @@
             </a:lvl1pPr>
           </a:lstStyle>
           <a:p>
-            <a:pPr/>
             <a:r>
               <a:t>Al separar por continentes aparece un panorama mucho menos homogéneo que el agregado mundial. </a:t>
             </a:r>
@@ -12326,7 +12144,7 @@
           </a:ln>
           <a:extLst>
             <a:ext uri="{C572A759-6A51-4108-AA02-DFA0A04FC94B}">
-              <ma14:wrappingTextBoxFlag xmlns:ma14="http://schemas.microsoft.com/office/mac/drawingml/2011/main" val="1"/>
+              <ma14:wrappingTextBoxFlag xmlns:ma14="http://schemas.microsoft.com/office/mac/drawingml/2011/main" xmlns:a14="http://schemas.microsoft.com/office/drawing/2010/main" xmlns:m="http://schemas.openxmlformats.org/officeDocument/2006/math" xmlns="" val="1"/>
             </a:ext>
           </a:extLst>
         </p:spPr>
@@ -12336,7 +12154,7 @@
           </a:bodyPr>
           <a:lstStyle>
             <a:lvl1pPr>
-              <a:defRPr b="1" spc="50" sz="1100">
+              <a:defRPr sz="1100" b="1" spc="50">
                 <a:solidFill>
                   <a:srgbClr val="B5443A"/>
                 </a:solidFill>
@@ -12344,7 +12162,6 @@
             </a:lvl1pPr>
           </a:lstStyle>
           <a:p>
-            <a:pPr/>
             <a:r>
               <a:t>EMISIONES POR CONTINENTE (1961–2023)</a:t>
             </a:r>
@@ -12380,7 +12197,7 @@
           <a:bodyPr lIns="45719" rIns="45719"/>
           <a:lstStyle/>
           <a:p>
-            <a:pPr/>
+            <a:endParaRPr/>
           </a:p>
         </p:txBody>
       </p:sp>
@@ -12393,9 +12210,7 @@
           <p:nvPr/>
         </p:nvPicPr>
         <p:blipFill>
-          <a:blip r:embed="rId2">
-            <a:extLst/>
-          </a:blip>
+          <a:blip r:embed="rId2"/>
           <a:stretch>
             <a:fillRect/>
           </a:stretch>
@@ -12432,7 +12247,7 @@
           </a:ln>
           <a:extLst>
             <a:ext uri="{C572A759-6A51-4108-AA02-DFA0A04FC94B}">
-              <ma14:wrappingTextBoxFlag xmlns:ma14="http://schemas.microsoft.com/office/mac/drawingml/2011/main" val="1"/>
+              <ma14:wrappingTextBoxFlag xmlns:ma14="http://schemas.microsoft.com/office/mac/drawingml/2011/main" xmlns:a14="http://schemas.microsoft.com/office/drawing/2010/main" xmlns:m="http://schemas.openxmlformats.org/officeDocument/2006/math" xmlns="" val="1"/>
             </a:ext>
           </a:extLst>
         </p:spPr>
@@ -12442,7 +12257,7 @@
           </a:bodyPr>
           <a:lstStyle>
             <a:lvl1pPr>
-              <a:defRPr b="1" spc="50" sz="1100">
+              <a:defRPr sz="1100" b="1" spc="50">
                 <a:solidFill>
                   <a:srgbClr val="D98C3F"/>
                 </a:solidFill>
@@ -12450,7 +12265,6 @@
             </a:lvl1pPr>
           </a:lstStyle>
           <a:p>
-            <a:pPr/>
             <a:r>
               <a:t>PESO DE CADA ESPECIE POR CONTINENTE (%, 2023)</a:t>
             </a:r>
@@ -12486,7 +12300,7 @@
           <a:bodyPr lIns="45719" rIns="45719"/>
           <a:lstStyle/>
           <a:p>
-            <a:pPr/>
+            <a:endParaRPr/>
           </a:p>
         </p:txBody>
       </p:sp>
@@ -12499,9 +12313,7 @@
           <p:nvPr/>
         </p:nvPicPr>
         <p:blipFill>
-          <a:blip r:embed="rId3">
-            <a:extLst/>
-          </a:blip>
+          <a:blip r:embed="rId3"/>
           <a:stretch>
             <a:fillRect/>
           </a:stretch>
@@ -12546,7 +12358,7 @@
           <a:bodyPr lIns="45719" rIns="45719"/>
           <a:lstStyle/>
           <a:p>
-            <a:pPr/>
+            <a:endParaRPr/>
           </a:p>
         </p:txBody>
       </p:sp>
@@ -12569,7 +12381,7 @@
           </a:ln>
           <a:extLst>
             <a:ext uri="{C572A759-6A51-4108-AA02-DFA0A04FC94B}">
-              <ma14:wrappingTextBoxFlag xmlns:ma14="http://schemas.microsoft.com/office/mac/drawingml/2011/main" val="1"/>
+              <ma14:wrappingTextBoxFlag xmlns:ma14="http://schemas.microsoft.com/office/mac/drawingml/2011/main" xmlns:a14="http://schemas.microsoft.com/office/drawing/2010/main" xmlns:m="http://schemas.openxmlformats.org/officeDocument/2006/math" xmlns="" val="1"/>
             </a:ext>
           </a:extLst>
         </p:spPr>
@@ -12583,7 +12395,7 @@
               <a:lnSpc>
                 <a:spcPct val="108000"/>
               </a:lnSpc>
-              <a:defRPr b="1" sz="1300">
+              <a:defRPr sz="1300" b="1">
                 <a:solidFill>
                   <a:srgbClr val="D98C3F"/>
                 </a:solidFill>
@@ -12600,18 +12412,13 @@
               </a:rPr>
               <a:t>Europa es el único continente que ha revertido la tendencia (pasó del 31% al 11% del reparto mundial); África la ha triplicado y ya alcanza el 21%. </a:t>
             </a:r>
-            <a:endParaRPr b="0">
-              <a:solidFill>
-                <a:srgbClr val="E7E2D6"/>
-              </a:solidFill>
-            </a:endParaRPr>
           </a:p>
           <a:p>
             <a:pPr>
               <a:lnSpc>
                 <a:spcPct val="108000"/>
               </a:lnSpc>
-              <a:defRPr b="1" sz="1300">
+              <a:defRPr sz="1300" b="1">
                 <a:solidFill>
                   <a:srgbClr val="D98C3F"/>
                 </a:solidFill>
@@ -12655,7 +12462,7 @@
           <a:bodyPr lIns="45719" rIns="45719"/>
           <a:lstStyle/>
           <a:p>
-            <a:pPr/>
+            <a:endParaRPr/>
           </a:p>
         </p:txBody>
       </p:sp>
@@ -12678,7 +12485,7 @@
           </a:ln>
           <a:extLst>
             <a:ext uri="{C572A759-6A51-4108-AA02-DFA0A04FC94B}">
-              <ma14:wrappingTextBoxFlag xmlns:ma14="http://schemas.microsoft.com/office/mac/drawingml/2011/main" val="1"/>
+              <ma14:wrappingTextBoxFlag xmlns:ma14="http://schemas.microsoft.com/office/mac/drawingml/2011/main" xmlns:a14="http://schemas.microsoft.com/office/drawing/2010/main" xmlns:m="http://schemas.openxmlformats.org/officeDocument/2006/math" xmlns="" val="1"/>
             </a:ext>
           </a:extLst>
         </p:spPr>
@@ -12692,7 +12499,7 @@
               <a:lnSpc>
                 <a:spcPct val="108000"/>
               </a:lnSpc>
-              <a:defRPr b="1" sz="1300">
+              <a:defRPr sz="1300" b="1">
                 <a:solidFill>
                   <a:srgbClr val="D98C3F"/>
                 </a:solidFill>
@@ -12706,18 +12513,13 @@
               </a:rPr>
               <a:t> Los bovinos concentran el mayor porcentaje de emisiones en todos los continentes. En América, en concreto, el vacuno de carne supone casi un 80% del total de emisiones.  </a:t>
             </a:r>
-            <a:endParaRPr b="0">
-              <a:solidFill>
-                <a:srgbClr val="E7E2D6"/>
-              </a:solidFill>
-            </a:endParaRPr>
           </a:p>
           <a:p>
             <a:pPr>
               <a:lnSpc>
                 <a:spcPct val="108000"/>
               </a:lnSpc>
-              <a:defRPr b="1" sz="1300">
+              <a:defRPr sz="1300" b="1">
                 <a:solidFill>
                   <a:srgbClr val="D98C3F"/>
                 </a:solidFill>
@@ -12739,18 +12541,19 @@
   <p:clrMapOvr>
     <a:masterClrMapping/>
   </p:clrMapOvr>
-  <p:transition xmlns:p14="http://schemas.microsoft.com/office/powerpoint/2010/main" spd="med" advClick="1"/>
+  <p:transition spd="med"/>
 </p:sld>
 </file>
 
 <file path=ppt/slides/slide8.xml><?xml version="1.0" encoding="utf-8"?>
-<p:sld xmlns:a="http://schemas.openxmlformats.org/drawingml/2006/main" xmlns:r="http://schemas.openxmlformats.org/officeDocument/2006/relationships" xmlns:p="http://schemas.openxmlformats.org/presentationml/2006/main" xmlns:m="http://schemas.openxmlformats.org/officeDocument/2006/math" xmlns:a14="http://schemas.microsoft.com/office/drawing/2010/main" showMasterSp="1" showMasterPhAnim="1">
+<p:sld xmlns:a="http://schemas.openxmlformats.org/drawingml/2006/main" xmlns:r="http://schemas.openxmlformats.org/officeDocument/2006/relationships" xmlns:p="http://schemas.openxmlformats.org/presentationml/2006/main">
   <p:cSld>
     <p:bg>
       <p:bgPr>
         <a:solidFill>
           <a:srgbClr val="1F3A2E"/>
         </a:solidFill>
+        <a:effectLst/>
       </p:bgPr>
     </p:bg>
     <p:spTree>
@@ -12794,7 +12597,7 @@
           <a:bodyPr lIns="45719" rIns="45719"/>
           <a:lstStyle/>
           <a:p>
-            <a:pPr/>
+            <a:endParaRPr/>
           </a:p>
         </p:txBody>
       </p:sp>
@@ -12817,7 +12620,7 @@
           </a:ln>
           <a:extLst>
             <a:ext uri="{C572A759-6A51-4108-AA02-DFA0A04FC94B}">
-              <ma14:wrappingTextBoxFlag xmlns:ma14="http://schemas.microsoft.com/office/mac/drawingml/2011/main" val="1"/>
+              <ma14:wrappingTextBoxFlag xmlns:ma14="http://schemas.microsoft.com/office/mac/drawingml/2011/main" xmlns:a14="http://schemas.microsoft.com/office/drawing/2010/main" xmlns:m="http://schemas.openxmlformats.org/officeDocument/2006/math" xmlns="" val="1"/>
             </a:ext>
           </a:extLst>
         </p:spPr>
@@ -12827,7 +12630,7 @@
           </a:bodyPr>
           <a:lstStyle>
             <a:lvl1pPr algn="ctr">
-              <a:defRPr b="1" spc="100" sz="1000">
+              <a:defRPr sz="1000" b="1" spc="100">
                 <a:solidFill>
                   <a:srgbClr val="FFFFFF"/>
                 </a:solidFill>
@@ -12835,7 +12638,6 @@
             </a:lvl1pPr>
           </a:lstStyle>
           <a:p>
-            <a:pPr/>
             <a:r>
               <a:t>PASO 4 · EMISIONES.IPYNB · PUNTO 5</a:t>
             </a:r>
@@ -12861,7 +12663,7 @@
           </a:ln>
           <a:extLst>
             <a:ext uri="{C572A759-6A51-4108-AA02-DFA0A04FC94B}">
-              <ma14:wrappingTextBoxFlag xmlns:ma14="http://schemas.microsoft.com/office/mac/drawingml/2011/main" val="1"/>
+              <ma14:wrappingTextBoxFlag xmlns:ma14="http://schemas.microsoft.com/office/mac/drawingml/2011/main" xmlns:a14="http://schemas.microsoft.com/office/drawing/2010/main" xmlns:m="http://schemas.openxmlformats.org/officeDocument/2006/math" xmlns="" val="1"/>
             </a:ext>
           </a:extLst>
         </p:spPr>
@@ -12871,7 +12673,7 @@
           </a:bodyPr>
           <a:lstStyle>
             <a:lvl1pPr>
-              <a:defRPr b="1" sz="3000">
+              <a:defRPr sz="3000" b="1">
                 <a:solidFill>
                   <a:srgbClr val="FFFFFF"/>
                 </a:solidFill>
@@ -12883,7 +12685,6 @@
             </a:lvl1pPr>
           </a:lstStyle>
           <a:p>
-            <a:pPr/>
             <a:r>
               <a:t>Conclusiones</a:t>
             </a:r>
@@ -12909,7 +12710,7 @@
           </a:ln>
           <a:extLst>
             <a:ext uri="{C572A759-6A51-4108-AA02-DFA0A04FC94B}">
-              <ma14:wrappingTextBoxFlag xmlns:ma14="http://schemas.microsoft.com/office/mac/drawingml/2011/main" val="1"/>
+              <ma14:wrappingTextBoxFlag xmlns:ma14="http://schemas.microsoft.com/office/mac/drawingml/2011/main" xmlns:a14="http://schemas.microsoft.com/office/drawing/2010/main" xmlns:m="http://schemas.openxmlformats.org/officeDocument/2006/math" xmlns="" val="1"/>
             </a:ext>
           </a:extLst>
         </p:spPr>
@@ -12927,7 +12728,6 @@
             </a:lvl1pPr>
           </a:lstStyle>
           <a:p>
-            <a:pPr/>
             <a:r>
               <a:t>Lo que muestran los datos</a:t>
             </a:r>
@@ -12959,7 +12759,7 @@
           <a:bodyPr lIns="45719" rIns="45719"/>
           <a:lstStyle/>
           <a:p>
-            <a:pPr/>
+            <a:endParaRPr/>
           </a:p>
         </p:txBody>
       </p:sp>
@@ -12982,7 +12782,7 @@
           </a:ln>
           <a:extLst>
             <a:ext uri="{C572A759-6A51-4108-AA02-DFA0A04FC94B}">
-              <ma14:wrappingTextBoxFlag xmlns:ma14="http://schemas.microsoft.com/office/mac/drawingml/2011/main" val="1"/>
+              <ma14:wrappingTextBoxFlag xmlns:ma14="http://schemas.microsoft.com/office/mac/drawingml/2011/main" xmlns:a14="http://schemas.microsoft.com/office/drawing/2010/main" xmlns:m="http://schemas.openxmlformats.org/officeDocument/2006/math" xmlns="" val="1"/>
             </a:ext>
           </a:extLst>
         </p:spPr>
@@ -12992,7 +12792,7 @@
           </a:bodyPr>
           <a:lstStyle>
             <a:lvl1pPr algn="ctr">
-              <a:defRPr b="1" sz="1500">
+              <a:defRPr sz="1500" b="1">
                 <a:solidFill>
                   <a:srgbClr val="FFFFFF"/>
                 </a:solidFill>
@@ -13000,7 +12800,6 @@
             </a:lvl1pPr>
           </a:lstStyle>
           <a:p>
-            <a:pPr/>
             <a:r>
               <a:t>1</a:t>
             </a:r>
@@ -13026,7 +12825,7 @@
           </a:ln>
           <a:extLst>
             <a:ext uri="{C572A759-6A51-4108-AA02-DFA0A04FC94B}">
-              <ma14:wrappingTextBoxFlag xmlns:ma14="http://schemas.microsoft.com/office/mac/drawingml/2011/main" val="1"/>
+              <ma14:wrappingTextBoxFlag xmlns:ma14="http://schemas.microsoft.com/office/mac/drawingml/2011/main" xmlns:a14="http://schemas.microsoft.com/office/drawing/2010/main" xmlns:m="http://schemas.openxmlformats.org/officeDocument/2006/math" xmlns="" val="1"/>
             </a:ext>
           </a:extLst>
         </p:spPr>
@@ -13036,7 +12835,7 @@
           </a:bodyPr>
           <a:lstStyle>
             <a:lvl1pPr>
-              <a:defRPr b="1" sz="1500">
+              <a:defRPr sz="1500" b="1">
                 <a:solidFill>
                   <a:srgbClr val="FFFFFF"/>
                 </a:solidFill>
@@ -13044,7 +12843,6 @@
             </a:lvl1pPr>
           </a:lstStyle>
           <a:p>
-            <a:pPr/>
             <a:r>
               <a:t>El impacto es grande y sigue creciendo</a:t>
             </a:r>
@@ -13070,7 +12868,7 @@
           </a:ln>
           <a:extLst>
             <a:ext uri="{C572A759-6A51-4108-AA02-DFA0A04FC94B}">
-              <ma14:wrappingTextBoxFlag xmlns:ma14="http://schemas.microsoft.com/office/mac/drawingml/2011/main" val="1"/>
+              <ma14:wrappingTextBoxFlag xmlns:ma14="http://schemas.microsoft.com/office/mac/drawingml/2011/main" xmlns:a14="http://schemas.microsoft.com/office/drawing/2010/main" xmlns:m="http://schemas.openxmlformats.org/officeDocument/2006/math" xmlns="" val="1"/>
             </a:ext>
           </a:extLst>
         </p:spPr>
@@ -13088,7 +12886,6 @@
             </a:lvl1pPr>
           </a:lstStyle>
           <a:p>
-            <a:pPr/>
             <a:r>
               <a:t>2.347 → 3.765 Mt CO₂eq entre 1961 y 2023 (+60%). No hay señal de techo.</a:t>
             </a:r>
@@ -13120,7 +12917,7 @@
           <a:bodyPr lIns="45719" rIns="45719"/>
           <a:lstStyle/>
           <a:p>
-            <a:pPr/>
+            <a:endParaRPr/>
           </a:p>
         </p:txBody>
       </p:sp>
@@ -13143,7 +12940,7 @@
           </a:ln>
           <a:extLst>
             <a:ext uri="{C572A759-6A51-4108-AA02-DFA0A04FC94B}">
-              <ma14:wrappingTextBoxFlag xmlns:ma14="http://schemas.microsoft.com/office/mac/drawingml/2011/main" val="1"/>
+              <ma14:wrappingTextBoxFlag xmlns:ma14="http://schemas.microsoft.com/office/mac/drawingml/2011/main" xmlns:a14="http://schemas.microsoft.com/office/drawing/2010/main" xmlns:m="http://schemas.openxmlformats.org/officeDocument/2006/math" xmlns="" val="1"/>
             </a:ext>
           </a:extLst>
         </p:spPr>
@@ -13153,7 +12950,7 @@
           </a:bodyPr>
           <a:lstStyle>
             <a:lvl1pPr algn="ctr">
-              <a:defRPr b="1" sz="1500">
+              <a:defRPr sz="1500" b="1">
                 <a:solidFill>
                   <a:srgbClr val="FFFFFF"/>
                 </a:solidFill>
@@ -13161,7 +12958,6 @@
             </a:lvl1pPr>
           </a:lstStyle>
           <a:p>
-            <a:pPr/>
             <a:r>
               <a:t>2</a:t>
             </a:r>
@@ -13187,7 +12983,7 @@
           </a:ln>
           <a:extLst>
             <a:ext uri="{C572A759-6A51-4108-AA02-DFA0A04FC94B}">
-              <ma14:wrappingTextBoxFlag xmlns:ma14="http://schemas.microsoft.com/office/mac/drawingml/2011/main" val="1"/>
+              <ma14:wrappingTextBoxFlag xmlns:ma14="http://schemas.microsoft.com/office/mac/drawingml/2011/main" xmlns:a14="http://schemas.microsoft.com/office/drawing/2010/main" xmlns:m="http://schemas.openxmlformats.org/officeDocument/2006/math" xmlns="" val="1"/>
             </a:ext>
           </a:extLst>
         </p:spPr>
@@ -13197,7 +12993,7 @@
           </a:bodyPr>
           <a:lstStyle>
             <a:lvl1pPr>
-              <a:defRPr b="1" sz="1500">
+              <a:defRPr sz="1500" b="1">
                 <a:solidFill>
                   <a:srgbClr val="FFFFFF"/>
                 </a:solidFill>
@@ -13205,7 +13001,6 @@
             </a:lvl1pPr>
           </a:lstStyle>
           <a:p>
-            <a:pPr/>
             <a:r>
               <a:t>La responsabilidad está muy concentrada</a:t>
             </a:r>
@@ -13231,7 +13026,7 @@
           </a:ln>
           <a:extLst>
             <a:ext uri="{C572A759-6A51-4108-AA02-DFA0A04FC94B}">
-              <ma14:wrappingTextBoxFlag xmlns:ma14="http://schemas.microsoft.com/office/mac/drawingml/2011/main" val="1"/>
+              <ma14:wrappingTextBoxFlag xmlns:ma14="http://schemas.microsoft.com/office/mac/drawingml/2011/main" xmlns:a14="http://schemas.microsoft.com/office/drawing/2010/main" xmlns:m="http://schemas.openxmlformats.org/officeDocument/2006/math" xmlns="" val="1"/>
             </a:ext>
           </a:extLst>
         </p:spPr>
@@ -13249,7 +13044,6 @@
             </a:lvl1pPr>
           </a:lstStyle>
           <a:p>
-            <a:pPr/>
             <a:r>
               <a:t>Los rumiantes generan el 91,2% de las emisiones; el vacuno (carne + leche) el 75,8%, por la fermentación entérica.</a:t>
             </a:r>
@@ -13281,7 +13075,7 @@
           <a:bodyPr lIns="45719" rIns="45719"/>
           <a:lstStyle/>
           <a:p>
-            <a:pPr/>
+            <a:endParaRPr/>
           </a:p>
         </p:txBody>
       </p:sp>
@@ -13304,7 +13098,7 @@
           </a:ln>
           <a:extLst>
             <a:ext uri="{C572A759-6A51-4108-AA02-DFA0A04FC94B}">
-              <ma14:wrappingTextBoxFlag xmlns:ma14="http://schemas.microsoft.com/office/mac/drawingml/2011/main" val="1"/>
+              <ma14:wrappingTextBoxFlag xmlns:ma14="http://schemas.microsoft.com/office/mac/drawingml/2011/main" xmlns:a14="http://schemas.microsoft.com/office/drawing/2010/main" xmlns:m="http://schemas.openxmlformats.org/officeDocument/2006/math" xmlns="" val="1"/>
             </a:ext>
           </a:extLst>
         </p:spPr>
@@ -13314,7 +13108,7 @@
           </a:bodyPr>
           <a:lstStyle>
             <a:lvl1pPr algn="ctr">
-              <a:defRPr b="1" sz="1500">
+              <a:defRPr sz="1500" b="1">
                 <a:solidFill>
                   <a:srgbClr val="FFFFFF"/>
                 </a:solidFill>
@@ -13322,7 +13116,6 @@
             </a:lvl1pPr>
           </a:lstStyle>
           <a:p>
-            <a:pPr/>
             <a:r>
               <a:t>3</a:t>
             </a:r>
@@ -13348,7 +13141,7 @@
           </a:ln>
           <a:extLst>
             <a:ext uri="{C572A759-6A51-4108-AA02-DFA0A04FC94B}">
-              <ma14:wrappingTextBoxFlag xmlns:ma14="http://schemas.microsoft.com/office/mac/drawingml/2011/main" val="1"/>
+              <ma14:wrappingTextBoxFlag xmlns:ma14="http://schemas.microsoft.com/office/mac/drawingml/2011/main" xmlns:a14="http://schemas.microsoft.com/office/drawing/2010/main" xmlns:m="http://schemas.openxmlformats.org/officeDocument/2006/math" xmlns="" val="1"/>
             </a:ext>
           </a:extLst>
         </p:spPr>
@@ -13358,7 +13151,7 @@
           </a:bodyPr>
           <a:lstStyle>
             <a:lvl1pPr>
-              <a:defRPr b="1" sz="1500">
+              <a:defRPr sz="1500" b="1">
                 <a:solidFill>
                   <a:srgbClr val="FFFFFF"/>
                 </a:solidFill>
@@ -13366,7 +13159,6 @@
             </a:lvl1pPr>
           </a:lstStyle>
           <a:p>
-            <a:pPr/>
             <a:r>
               <a:t>La diferencia entre especies es de otro orden</a:t>
             </a:r>
@@ -13392,7 +13184,7 @@
           </a:ln>
           <a:extLst>
             <a:ext uri="{C572A759-6A51-4108-AA02-DFA0A04FC94B}">
-              <ma14:wrappingTextBoxFlag xmlns:ma14="http://schemas.microsoft.com/office/mac/drawingml/2011/main" val="1"/>
+              <ma14:wrappingTextBoxFlag xmlns:ma14="http://schemas.microsoft.com/office/mac/drawingml/2011/main" xmlns:a14="http://schemas.microsoft.com/office/drawing/2010/main" xmlns:m="http://schemas.openxmlformats.org/officeDocument/2006/math" xmlns="" val="1"/>
             </a:ext>
           </a:extLst>
         </p:spPr>
@@ -13410,7 +13202,6 @@
             </a:lvl1pPr>
           </a:lstStyle>
           <a:p>
-            <a:pPr/>
             <a:r>
               <a:t>Una vaca lechera emite al año lo mismo que 680 pollos parrilleros. No es diferencia de grado, es de naturaleza.</a:t>
             </a:r>
@@ -13442,7 +13233,7 @@
           <a:bodyPr lIns="45719" rIns="45719"/>
           <a:lstStyle/>
           <a:p>
-            <a:pPr/>
+            <a:endParaRPr/>
           </a:p>
         </p:txBody>
       </p:sp>
@@ -13465,7 +13256,7 @@
           </a:ln>
           <a:extLst>
             <a:ext uri="{C572A759-6A51-4108-AA02-DFA0A04FC94B}">
-              <ma14:wrappingTextBoxFlag xmlns:ma14="http://schemas.microsoft.com/office/mac/drawingml/2011/main" val="1"/>
+              <ma14:wrappingTextBoxFlag xmlns:ma14="http://schemas.microsoft.com/office/mac/drawingml/2011/main" xmlns:a14="http://schemas.microsoft.com/office/drawing/2010/main" xmlns:m="http://schemas.openxmlformats.org/officeDocument/2006/math" xmlns="" val="1"/>
             </a:ext>
           </a:extLst>
         </p:spPr>
@@ -13475,7 +13266,7 @@
           </a:bodyPr>
           <a:lstStyle>
             <a:lvl1pPr algn="ctr">
-              <a:defRPr b="1" sz="1500">
+              <a:defRPr sz="1500" b="1">
                 <a:solidFill>
                   <a:srgbClr val="FFFFFF"/>
                 </a:solidFill>
@@ -13483,7 +13274,6 @@
             </a:lvl1pPr>
           </a:lstStyle>
           <a:p>
-            <a:pPr/>
             <a:r>
               <a:t>4</a:t>
             </a:r>
@@ -13509,7 +13299,7 @@
           </a:ln>
           <a:extLst>
             <a:ext uri="{C572A759-6A51-4108-AA02-DFA0A04FC94B}">
-              <ma14:wrappingTextBoxFlag xmlns:ma14="http://schemas.microsoft.com/office/mac/drawingml/2011/main" val="1"/>
+              <ma14:wrappingTextBoxFlag xmlns:ma14="http://schemas.microsoft.com/office/mac/drawingml/2011/main" xmlns:a14="http://schemas.microsoft.com/office/drawing/2010/main" xmlns:m="http://schemas.openxmlformats.org/officeDocument/2006/math" xmlns="" val="1"/>
             </a:ext>
           </a:extLst>
         </p:spPr>
@@ -13519,7 +13309,7 @@
           </a:bodyPr>
           <a:lstStyle>
             <a:lvl1pPr>
-              <a:defRPr b="1" sz="1500">
+              <a:defRPr sz="1500" b="1">
                 <a:solidFill>
                   <a:srgbClr val="FFFFFF"/>
                 </a:solidFill>
@@ -13527,7 +13317,6 @@
             </a:lvl1pPr>
           </a:lstStyle>
           <a:p>
-            <a:pPr/>
             <a:r>
               <a:t>Importa más la composición que el tamaño</a:t>
             </a:r>
@@ -13553,7 +13342,7 @@
           </a:ln>
           <a:extLst>
             <a:ext uri="{C572A759-6A51-4108-AA02-DFA0A04FC94B}">
-              <ma14:wrappingTextBoxFlag xmlns:ma14="http://schemas.microsoft.com/office/mac/drawingml/2011/main" val="1"/>
+              <ma14:wrappingTextBoxFlag xmlns:ma14="http://schemas.microsoft.com/office/mac/drawingml/2011/main" xmlns:a14="http://schemas.microsoft.com/office/drawing/2010/main" xmlns:m="http://schemas.openxmlformats.org/officeDocument/2006/math" xmlns="" val="1"/>
             </a:ext>
           </a:extLst>
         </p:spPr>
@@ -13571,7 +13360,6 @@
             </a:lvl1pPr>
           </a:lstStyle>
           <a:p>
-            <a:pPr/>
             <a:r>
               <a:t>El censo se multiplicó ×4,7 y las emisiones solo ×1,6, porque el crecimiento fue casi íntegramente avícola.</a:t>
             </a:r>
@@ -13603,7 +13391,7 @@
           <a:bodyPr lIns="45719" rIns="45719"/>
           <a:lstStyle/>
           <a:p>
-            <a:pPr/>
+            <a:endParaRPr/>
           </a:p>
         </p:txBody>
       </p:sp>
@@ -13626,7 +13414,7 @@
           </a:ln>
           <a:extLst>
             <a:ext uri="{C572A759-6A51-4108-AA02-DFA0A04FC94B}">
-              <ma14:wrappingTextBoxFlag xmlns:ma14="http://schemas.microsoft.com/office/mac/drawingml/2011/main" val="1"/>
+              <ma14:wrappingTextBoxFlag xmlns:ma14="http://schemas.microsoft.com/office/mac/drawingml/2011/main" xmlns:a14="http://schemas.microsoft.com/office/drawing/2010/main" xmlns:m="http://schemas.openxmlformats.org/officeDocument/2006/math" xmlns="" val="1"/>
             </a:ext>
           </a:extLst>
         </p:spPr>
@@ -13636,7 +13424,7 @@
           </a:bodyPr>
           <a:lstStyle>
             <a:lvl1pPr algn="ctr">
-              <a:defRPr b="1" sz="1500">
+              <a:defRPr sz="1500" b="1">
                 <a:solidFill>
                   <a:srgbClr val="FFFFFF"/>
                 </a:solidFill>
@@ -13644,7 +13432,6 @@
             </a:lvl1pPr>
           </a:lstStyle>
           <a:p>
-            <a:pPr/>
             <a:r>
               <a:t>5</a:t>
             </a:r>
@@ -13670,7 +13457,7 @@
           </a:ln>
           <a:extLst>
             <a:ext uri="{C572A759-6A51-4108-AA02-DFA0A04FC94B}">
-              <ma14:wrappingTextBoxFlag xmlns:ma14="http://schemas.microsoft.com/office/mac/drawingml/2011/main" val="1"/>
+              <ma14:wrappingTextBoxFlag xmlns:ma14="http://schemas.microsoft.com/office/mac/drawingml/2011/main" xmlns:a14="http://schemas.microsoft.com/office/drawing/2010/main" xmlns:m="http://schemas.openxmlformats.org/officeDocument/2006/math" xmlns="" val="1"/>
             </a:ext>
           </a:extLst>
         </p:spPr>
@@ -13680,7 +13467,7 @@
           </a:bodyPr>
           <a:lstStyle>
             <a:lvl1pPr>
-              <a:defRPr b="1" sz="1500">
+              <a:defRPr sz="1500" b="1">
                 <a:solidFill>
                   <a:srgbClr val="FFFFFF"/>
                 </a:solidFill>
@@ -13688,7 +13475,6 @@
             </a:lvl1pPr>
           </a:lstStyle>
           <a:p>
-            <a:pPr/>
             <a:r>
               <a:t>La distribución geográfica es muy desigual</a:t>
             </a:r>
@@ -13714,7 +13500,7 @@
           </a:ln>
           <a:extLst>
             <a:ext uri="{C572A759-6A51-4108-AA02-DFA0A04FC94B}">
-              <ma14:wrappingTextBoxFlag xmlns:ma14="http://schemas.microsoft.com/office/mac/drawingml/2011/main" val="1"/>
+              <ma14:wrappingTextBoxFlag xmlns:ma14="http://schemas.microsoft.com/office/mac/drawingml/2011/main" xmlns:a14="http://schemas.microsoft.com/office/drawing/2010/main" xmlns:m="http://schemas.openxmlformats.org/officeDocument/2006/math" xmlns="" val="1"/>
             </a:ext>
           </a:extLst>
         </p:spPr>
@@ -13732,7 +13518,6 @@
             </a:lvl1pPr>
           </a:lstStyle>
           <a:p>
-            <a:pPr/>
             <a:r>
               <a:t>África triplicó sus emisiones, Asia las duplicó; Europa las redujo un 43% .</a:t>
             </a:r>
@@ -13768,7 +13553,7 @@
           <a:bodyPr lIns="45719" rIns="45719"/>
           <a:lstStyle/>
           <a:p>
-            <a:pPr/>
+            <a:endParaRPr/>
           </a:p>
         </p:txBody>
       </p:sp>
@@ -13791,7 +13576,7 @@
           </a:ln>
           <a:extLst>
             <a:ext uri="{C572A759-6A51-4108-AA02-DFA0A04FC94B}">
-              <ma14:wrappingTextBoxFlag xmlns:ma14="http://schemas.microsoft.com/office/mac/drawingml/2011/main" val="1"/>
+              <ma14:wrappingTextBoxFlag xmlns:ma14="http://schemas.microsoft.com/office/mac/drawingml/2011/main" xmlns:a14="http://schemas.microsoft.com/office/drawing/2010/main" xmlns:m="http://schemas.openxmlformats.org/officeDocument/2006/math" xmlns="" val="1"/>
             </a:ext>
           </a:extLst>
         </p:spPr>
@@ -13841,6 +13626,7 @@
                 </a:solidFill>
               </a:defRPr>
             </a:pPr>
+            <a:endParaRPr/>
           </a:p>
           <a:p>
             <a:pPr>
@@ -13853,6 +13639,7 @@
                 </a:solidFill>
               </a:defRPr>
             </a:pPr>
+            <a:endParaRPr/>
           </a:p>
         </p:txBody>
       </p:sp>
@@ -13861,18 +13648,19 @@
   <p:clrMapOvr>
     <a:masterClrMapping/>
   </p:clrMapOvr>
-  <p:transition xmlns:p14="http://schemas.microsoft.com/office/powerpoint/2010/main" spd="med" advClick="1"/>
+  <p:transition spd="med"/>
 </p:sld>
 </file>
 
 <file path=ppt/slides/slide9.xml><?xml version="1.0" encoding="utf-8"?>
-<p:sld xmlns:a="http://schemas.openxmlformats.org/drawingml/2006/main" xmlns:r="http://schemas.openxmlformats.org/officeDocument/2006/relationships" xmlns:p="http://schemas.openxmlformats.org/presentationml/2006/main" xmlns:m="http://schemas.openxmlformats.org/officeDocument/2006/math" xmlns:a14="http://schemas.microsoft.com/office/drawing/2010/main" showMasterSp="1" showMasterPhAnim="1">
+<p:sld xmlns:a="http://schemas.openxmlformats.org/drawingml/2006/main" xmlns:r="http://schemas.openxmlformats.org/officeDocument/2006/relationships" xmlns:p="http://schemas.openxmlformats.org/presentationml/2006/main">
   <p:cSld>
     <p:bg>
       <p:bgPr>
         <a:solidFill>
           <a:srgbClr val="1F3A2E"/>
         </a:solidFill>
+        <a:effectLst/>
       </p:bgPr>
     </p:bg>
     <p:spTree>
@@ -13916,7 +13704,7 @@
           <a:bodyPr lIns="45719" rIns="45719"/>
           <a:lstStyle/>
           <a:p>
-            <a:pPr/>
+            <a:endParaRPr/>
           </a:p>
         </p:txBody>
       </p:sp>
@@ -13939,7 +13727,7 @@
           </a:ln>
           <a:extLst>
             <a:ext uri="{C572A759-6A51-4108-AA02-DFA0A04FC94B}">
-              <ma14:wrappingTextBoxFlag xmlns:ma14="http://schemas.microsoft.com/office/mac/drawingml/2011/main" val="1"/>
+              <ma14:wrappingTextBoxFlag xmlns:ma14="http://schemas.microsoft.com/office/mac/drawingml/2011/main" xmlns:a14="http://schemas.microsoft.com/office/drawing/2010/main" xmlns:m="http://schemas.openxmlformats.org/officeDocument/2006/math" xmlns="" val="1"/>
             </a:ext>
           </a:extLst>
         </p:spPr>
@@ -13949,7 +13737,7 @@
           </a:bodyPr>
           <a:lstStyle>
             <a:lvl1pPr algn="ctr">
-              <a:defRPr b="1" spc="100" sz="1000">
+              <a:defRPr sz="1000" b="1" spc="100">
                 <a:solidFill>
                   <a:srgbClr val="FFFFFF"/>
                 </a:solidFill>
@@ -13957,7 +13745,6 @@
             </a:lvl1pPr>
           </a:lstStyle>
           <a:p>
-            <a:pPr/>
             <a:r>
               <a:t>PASO 5 · POWER BI (EMISIONES.PBIX)</a:t>
             </a:r>
@@ -13983,7 +13770,7 @@
           </a:ln>
           <a:extLst>
             <a:ext uri="{C572A759-6A51-4108-AA02-DFA0A04FC94B}">
-              <ma14:wrappingTextBoxFlag xmlns:ma14="http://schemas.microsoft.com/office/mac/drawingml/2011/main" val="1"/>
+              <ma14:wrappingTextBoxFlag xmlns:ma14="http://schemas.microsoft.com/office/mac/drawingml/2011/main" xmlns:a14="http://schemas.microsoft.com/office/drawing/2010/main" xmlns:m="http://schemas.openxmlformats.org/officeDocument/2006/math" xmlns="" val="1"/>
             </a:ext>
           </a:extLst>
         </p:spPr>
@@ -13993,7 +13780,7 @@
           </a:bodyPr>
           <a:lstStyle>
             <a:lvl1pPr>
-              <a:defRPr b="1" sz="3000">
+              <a:defRPr sz="3000" b="1">
                 <a:solidFill>
                   <a:srgbClr val="FFFFFF"/>
                 </a:solidFill>
@@ -14005,7 +13792,6 @@
             </a:lvl1pPr>
           </a:lstStyle>
           <a:p>
-            <a:pPr/>
             <a:r>
               <a:t>El dashboard: página Vacunos</a:t>
             </a:r>
@@ -14020,18 +13806,18 @@
         </p:nvSpPr>
         <p:spPr>
           <a:xfrm>
-            <a:off x="667511" y="1425379"/>
-            <a:ext cx="10424161" cy="258202"/>
-          </a:xfrm>
-          <a:prstGeom prst="rect">
-            <a:avLst/>
-          </a:prstGeom>
-          <a:ln w="12700">
-            <a:miter lim="400000"/>
-          </a:ln>
-          <a:extLst>
-            <a:ext uri="{C572A759-6A51-4108-AA02-DFA0A04FC94B}">
-              <ma14:wrappingTextBoxFlag xmlns:ma14="http://schemas.microsoft.com/office/mac/drawingml/2011/main" val="1"/>
+            <a:off x="667511" y="1408286"/>
+            <a:ext cx="10424161" cy="292388"/>
+          </a:xfrm>
+          <a:prstGeom prst="rect">
+            <a:avLst/>
+          </a:prstGeom>
+          <a:ln w="12700">
+            <a:miter lim="400000"/>
+          </a:ln>
+          <a:extLst>
+            <a:ext uri="{C572A759-6A51-4108-AA02-DFA0A04FC94B}">
+              <ma14:wrappingTextBoxFlag xmlns:ma14="http://schemas.microsoft.com/office/mac/drawingml/2011/main" xmlns:a14="http://schemas.microsoft.com/office/drawing/2010/main" xmlns:m="http://schemas.openxmlformats.org/officeDocument/2006/math" xmlns="" val="1"/>
             </a:ext>
           </a:extLst>
         </p:spPr>
@@ -14049,43 +13835,34 @@
             </a:lvl1pPr>
           </a:lstStyle>
           <a:p>
-            <a:pPr/>
-            <a:r>
-              <a:t>Power BI conectado directamente a MySQL (proyecto_final.dataset_fao) — 1 de 4 páginas del informe</a:t>
-            </a:r>
-          </a:p>
-        </p:txBody>
-      </p:sp>
-      <p:sp>
-        <p:nvSpPr>
-          <p:cNvPr id="221" name="Shape 4"/>
-          <p:cNvSpPr/>
-          <p:nvPr/>
-        </p:nvSpPr>
-        <p:spPr>
-          <a:xfrm>
-            <a:off x="621791" y="1920239"/>
-            <a:ext cx="10972801" cy="4160522"/>
-          </a:xfrm>
-          <a:prstGeom prst="roundRect">
-            <a:avLst>
-              <a:gd name="adj" fmla="val 2198"/>
-            </a:avLst>
-          </a:prstGeom>
-          <a:solidFill>
-            <a:srgbClr val="17291F"/>
-          </a:solidFill>
-          <a:ln w="12700">
-            <a:solidFill>
-              <a:srgbClr val="2E5443"/>
-            </a:solidFill>
-          </a:ln>
-        </p:spPr>
-        <p:txBody>
-          <a:bodyPr lIns="45719" rIns="45719"/>
-          <a:lstStyle/>
-          <a:p>
-            <a:pPr/>
+            <a:r>
+              <a:rPr dirty="0"/>
+              <a:t>Power BI </a:t>
+            </a:r>
+            <a:r>
+              <a:rPr dirty="0" err="1"/>
+              <a:t>conectado</a:t>
+            </a:r>
+            <a:r>
+              <a:rPr dirty="0"/>
+              <a:t> </a:t>
+            </a:r>
+            <a:r>
+              <a:rPr dirty="0" err="1"/>
+              <a:t>directamente</a:t>
+            </a:r>
+            <a:r>
+              <a:rPr dirty="0"/>
+              <a:t> a MySQL (</a:t>
+            </a:r>
+            <a:r>
+              <a:rPr dirty="0" err="1"/>
+              <a:t>proyecto_final.dataset_fao</a:t>
+            </a:r>
+            <a:r>
+              <a:rPr dirty="0"/>
+              <a:t>) </a:t>
+            </a:r>
           </a:p>
         </p:txBody>
       </p:sp>
@@ -14097,28 +13874,28 @@
         </p:nvSpPr>
         <p:spPr>
           <a:xfrm>
-            <a:off x="914400" y="2097839"/>
-            <a:ext cx="7223760" cy="248306"/>
-          </a:xfrm>
-          <a:prstGeom prst="rect">
-            <a:avLst/>
-          </a:prstGeom>
-          <a:ln w="12700">
-            <a:miter lim="400000"/>
-          </a:ln>
-          <a:extLst>
-            <a:ext uri="{C572A759-6A51-4108-AA02-DFA0A04FC94B}">
-              <ma14:wrappingTextBoxFlag xmlns:ma14="http://schemas.microsoft.com/office/mac/drawingml/2011/main" val="1"/>
-            </a:ext>
-          </a:extLst>
-        </p:spPr>
-        <p:txBody>
-          <a:bodyPr lIns="45719" rIns="45719" anchor="ctr">
+            <a:off x="868680" y="2707290"/>
+            <a:ext cx="3020833" cy="276999"/>
+          </a:xfrm>
+          <a:prstGeom prst="rect">
+            <a:avLst/>
+          </a:prstGeom>
+          <a:ln w="12700">
+            <a:miter lim="400000"/>
+          </a:ln>
+          <a:extLst>
+            <a:ext uri="{C572A759-6A51-4108-AA02-DFA0A04FC94B}">
+              <ma14:wrappingTextBoxFlag xmlns:ma14="http://schemas.microsoft.com/office/mac/drawingml/2011/main" xmlns:a14="http://schemas.microsoft.com/office/drawing/2010/main" xmlns:m="http://schemas.openxmlformats.org/officeDocument/2006/math" xmlns="" val="1"/>
+            </a:ext>
+          </a:extLst>
+        </p:spPr>
+        <p:txBody>
+          <a:bodyPr wrap="square" lIns="45719" rIns="45719" anchor="ctr">
             <a:spAutoFit/>
           </a:bodyPr>
           <a:lstStyle>
             <a:lvl1pPr>
-              <a:defRPr b="1" sz="1200">
+              <a:defRPr sz="1200" b="1">
                 <a:solidFill>
                   <a:srgbClr val="FFFFFF"/>
                 </a:solidFill>
@@ -14126,72 +13903,39 @@
             </a:lvl1pPr>
           </a:lstStyle>
           <a:p>
-            <a:pPr/>
-            <a:r>
-              <a:t>VACUNOS  ·  vacas lecheras + vacunos, otros</a:t>
-            </a:r>
-          </a:p>
-        </p:txBody>
-      </p:sp>
-      <p:sp>
-        <p:nvSpPr>
-          <p:cNvPr id="223" name="Shape 6"/>
-          <p:cNvSpPr/>
-          <p:nvPr/>
-        </p:nvSpPr>
-        <p:spPr>
-          <a:xfrm>
-            <a:off x="868680" y="2450592"/>
-            <a:ext cx="2331721" cy="777241"/>
-          </a:xfrm>
-          <a:prstGeom prst="roundRect">
-            <a:avLst>
-              <a:gd name="adj" fmla="val 7059"/>
-            </a:avLst>
-          </a:prstGeom>
-          <a:solidFill>
-            <a:srgbClr val="1F3A2E"/>
-          </a:solidFill>
-          <a:ln w="12700">
-            <a:solidFill>
-              <a:srgbClr val="2E5443"/>
-            </a:solidFill>
-          </a:ln>
-        </p:spPr>
-        <p:txBody>
-          <a:bodyPr lIns="45719" rIns="45719"/>
-          <a:lstStyle/>
-          <a:p>
-            <a:pPr/>
-          </a:p>
-        </p:txBody>
-      </p:sp>
-      <p:sp>
-        <p:nvSpPr>
-          <p:cNvPr id="224" name="Shape 7"/>
-          <p:cNvSpPr/>
-          <p:nvPr/>
-        </p:nvSpPr>
-        <p:spPr>
-          <a:xfrm>
-            <a:off x="868680" y="2450592"/>
-            <a:ext cx="54865" cy="777241"/>
-          </a:xfrm>
-          <a:prstGeom prst="rect">
-            <a:avLst/>
-          </a:prstGeom>
-          <a:solidFill>
-            <a:srgbClr val="B5443A"/>
-          </a:solidFill>
-          <a:ln w="12700">
-            <a:miter lim="400000"/>
-          </a:ln>
-        </p:spPr>
-        <p:txBody>
-          <a:bodyPr lIns="45719" rIns="45719"/>
-          <a:lstStyle/>
-          <a:p>
-            <a:pPr/>
+            <a:r>
+              <a:rPr dirty="0"/>
+              <a:t>VACUNOS  ·  </a:t>
+            </a:r>
+            <a:r>
+              <a:rPr dirty="0" err="1"/>
+              <a:t>vacas</a:t>
+            </a:r>
+            <a:r>
+              <a:rPr dirty="0"/>
+              <a:t> </a:t>
+            </a:r>
+            <a:r>
+              <a:rPr dirty="0" err="1"/>
+              <a:t>lecheras</a:t>
+            </a:r>
+            <a:r>
+              <a:rPr dirty="0"/>
+              <a:t> + </a:t>
+            </a:r>
+            <a:r>
+              <a:rPr dirty="0" err="1"/>
+              <a:t>vacunos</a:t>
+            </a:r>
+            <a:r>
+              <a:rPr dirty="0"/>
+              <a:t>, </a:t>
+            </a:r>
+            <a:r>
+              <a:rPr dirty="0" err="1"/>
+              <a:t>otros</a:t>
+            </a:r>
+            <a:endParaRPr dirty="0"/>
           </a:p>
         </p:txBody>
       </p:sp>
@@ -14203,18 +13947,18 @@
         </p:nvSpPr>
         <p:spPr>
           <a:xfrm>
-            <a:off x="1078991" y="2557947"/>
-            <a:ext cx="2011682" cy="205914"/>
-          </a:xfrm>
-          <a:prstGeom prst="rect">
-            <a:avLst/>
-          </a:prstGeom>
-          <a:ln w="12700">
-            <a:miter lim="400000"/>
-          </a:ln>
-          <a:extLst>
-            <a:ext uri="{C572A759-6A51-4108-AA02-DFA0A04FC94B}">
-              <ma14:wrappingTextBoxFlag xmlns:ma14="http://schemas.microsoft.com/office/mac/drawingml/2011/main" val="1"/>
+            <a:off x="1078991" y="2545488"/>
+            <a:ext cx="2011682" cy="230832"/>
+          </a:xfrm>
+          <a:prstGeom prst="rect">
+            <a:avLst/>
+          </a:prstGeom>
+          <a:ln w="12700">
+            <a:miter lim="400000"/>
+          </a:ln>
+          <a:extLst>
+            <a:ext uri="{C572A759-6A51-4108-AA02-DFA0A04FC94B}">
+              <ma14:wrappingTextBoxFlag xmlns:ma14="http://schemas.microsoft.com/office/mac/drawingml/2011/main" xmlns:a14="http://schemas.microsoft.com/office/drawing/2010/main" xmlns:m="http://schemas.openxmlformats.org/officeDocument/2006/math" xmlns="" val="1"/>
             </a:ext>
           </a:extLst>
         </p:spPr>
@@ -14232,10 +13976,7 @@
             </a:lvl1pPr>
           </a:lstStyle>
           <a:p>
-            <a:pPr/>
-            <a:r>
-              <a:t>Incremento cabezas 1961–2023</a:t>
-            </a:r>
+            <a:endParaRPr dirty="0"/>
           </a:p>
         </p:txBody>
       </p:sp>
@@ -14247,18 +13988,18 @@
         </p:nvSpPr>
         <p:spPr>
           <a:xfrm>
-            <a:off x="1078991" y="2742691"/>
-            <a:ext cx="2011682" cy="421641"/>
-          </a:xfrm>
-          <a:prstGeom prst="rect">
-            <a:avLst/>
-          </a:prstGeom>
-          <a:ln w="12700">
-            <a:miter lim="400000"/>
-          </a:ln>
-          <a:extLst>
-            <a:ext uri="{C572A759-6A51-4108-AA02-DFA0A04FC94B}">
-              <ma14:wrappingTextBoxFlag xmlns:ma14="http://schemas.microsoft.com/office/mac/drawingml/2011/main" val="1"/>
+            <a:off x="1078991" y="2738068"/>
+            <a:ext cx="2011682" cy="430887"/>
+          </a:xfrm>
+          <a:prstGeom prst="rect">
+            <a:avLst/>
+          </a:prstGeom>
+          <a:ln w="12700">
+            <a:miter lim="400000"/>
+          </a:ln>
+          <a:extLst>
+            <a:ext uri="{C572A759-6A51-4108-AA02-DFA0A04FC94B}">
+              <ma14:wrappingTextBoxFlag xmlns:ma14="http://schemas.microsoft.com/office/mac/drawingml/2011/main" xmlns:a14="http://schemas.microsoft.com/office/drawing/2010/main" xmlns:m="http://schemas.openxmlformats.org/officeDocument/2006/math" xmlns="" val="1"/>
             </a:ext>
           </a:extLst>
         </p:spPr>
@@ -14268,7 +14009,7 @@
           </a:bodyPr>
           <a:lstStyle>
             <a:lvl1pPr>
-              <a:defRPr b="1" sz="2200">
+              <a:defRPr sz="2200" b="1">
                 <a:solidFill>
                   <a:srgbClr val="FFFFFF"/>
                 </a:solidFill>
@@ -14280,95 +14021,30 @@
             </a:lvl1pPr>
           </a:lstStyle>
           <a:p>
-            <a:pPr/>
-            <a:r>
-              <a:t>128,23 mill</a:t>
-            </a:r>
-          </a:p>
-        </p:txBody>
-      </p:sp>
-      <p:sp>
-        <p:nvSpPr>
-          <p:cNvPr id="227" name="Shape 10"/>
-          <p:cNvSpPr/>
-          <p:nvPr/>
-        </p:nvSpPr>
-        <p:spPr>
-          <a:xfrm>
-            <a:off x="3383279" y="2450592"/>
-            <a:ext cx="2331721" cy="777241"/>
-          </a:xfrm>
-          <a:prstGeom prst="roundRect">
-            <a:avLst>
-              <a:gd name="adj" fmla="val 7059"/>
-            </a:avLst>
-          </a:prstGeom>
-          <a:solidFill>
-            <a:srgbClr val="1F3A2E"/>
-          </a:solidFill>
-          <a:ln w="12700">
-            <a:solidFill>
-              <a:srgbClr val="2E5443"/>
-            </a:solidFill>
-          </a:ln>
-        </p:spPr>
-        <p:txBody>
-          <a:bodyPr lIns="45719" rIns="45719"/>
-          <a:lstStyle/>
-          <a:p>
-            <a:pPr/>
-          </a:p>
-        </p:txBody>
-      </p:sp>
-      <p:sp>
-        <p:nvSpPr>
-          <p:cNvPr id="228" name="Shape 11"/>
-          <p:cNvSpPr/>
-          <p:nvPr/>
-        </p:nvSpPr>
-        <p:spPr>
-          <a:xfrm>
-            <a:off x="3383279" y="2450592"/>
-            <a:ext cx="54865" cy="777241"/>
-          </a:xfrm>
-          <a:prstGeom prst="rect">
-            <a:avLst/>
-          </a:prstGeom>
-          <a:solidFill>
-            <a:srgbClr val="D98C3F"/>
-          </a:solidFill>
-          <a:ln w="12700">
-            <a:miter lim="400000"/>
-          </a:ln>
-        </p:spPr>
-        <p:txBody>
-          <a:bodyPr lIns="45719" rIns="45719"/>
-          <a:lstStyle/>
-          <a:p>
-            <a:pPr/>
-          </a:p>
-        </p:txBody>
-      </p:sp>
-      <p:sp>
-        <p:nvSpPr>
-          <p:cNvPr id="229" name="Text 12"/>
-          <p:cNvSpPr txBox="1"/>
-          <p:nvPr/>
-        </p:nvSpPr>
-        <p:spPr>
-          <a:xfrm>
-            <a:off x="3593591" y="2557947"/>
-            <a:ext cx="2011682" cy="205914"/>
-          </a:xfrm>
-          <a:prstGeom prst="rect">
-            <a:avLst/>
-          </a:prstGeom>
-          <a:ln w="12700">
-            <a:miter lim="400000"/>
-          </a:ln>
-          <a:extLst>
-            <a:ext uri="{C572A759-6A51-4108-AA02-DFA0A04FC94B}">
-              <ma14:wrappingTextBoxFlag xmlns:ma14="http://schemas.microsoft.com/office/mac/drawingml/2011/main" val="1"/>
+            <a:endParaRPr dirty="0"/>
+          </a:p>
+        </p:txBody>
+      </p:sp>
+      <p:sp>
+        <p:nvSpPr>
+          <p:cNvPr id="236" name="Text 19"/>
+          <p:cNvSpPr txBox="1"/>
+          <p:nvPr/>
+        </p:nvSpPr>
+        <p:spPr>
+          <a:xfrm>
+            <a:off x="8595359" y="2530322"/>
+            <a:ext cx="1737361" cy="215444"/>
+          </a:xfrm>
+          <a:prstGeom prst="rect">
+            <a:avLst/>
+          </a:prstGeom>
+          <a:ln w="12700">
+            <a:miter lim="400000"/>
+          </a:ln>
+          <a:extLst>
+            <a:ext uri="{C572A759-6A51-4108-AA02-DFA0A04FC94B}">
+              <ma14:wrappingTextBoxFlag xmlns:ma14="http://schemas.microsoft.com/office/mac/drawingml/2011/main" xmlns:a14="http://schemas.microsoft.com/office/drawing/2010/main" xmlns:m="http://schemas.openxmlformats.org/officeDocument/2006/math" xmlns="" val="1"/>
             </a:ext>
           </a:extLst>
         </p:spPr>
@@ -14378,287 +14054,7 @@
           </a:bodyPr>
           <a:lstStyle>
             <a:lvl1pPr>
-              <a:defRPr sz="900">
-                <a:solidFill>
-                  <a:srgbClr val="9FB6A8"/>
-                </a:solidFill>
-              </a:defRPr>
-            </a:lvl1pPr>
-          </a:lstStyle>
-          <a:p>
-            <a:pPr/>
-            <a:r>
-              <a:t>Vacas lecheras 2023 (Mt)</a:t>
-            </a:r>
-          </a:p>
-        </p:txBody>
-      </p:sp>
-      <p:sp>
-        <p:nvSpPr>
-          <p:cNvPr id="230" name="Text 13"/>
-          <p:cNvSpPr txBox="1"/>
-          <p:nvPr/>
-        </p:nvSpPr>
-        <p:spPr>
-          <a:xfrm>
-            <a:off x="3593591" y="2742691"/>
-            <a:ext cx="2011682" cy="421641"/>
-          </a:xfrm>
-          <a:prstGeom prst="rect">
-            <a:avLst/>
-          </a:prstGeom>
-          <a:ln w="12700">
-            <a:miter lim="400000"/>
-          </a:ln>
-          <a:extLst>
-            <a:ext uri="{C572A759-6A51-4108-AA02-DFA0A04FC94B}">
-              <ma14:wrappingTextBoxFlag xmlns:ma14="http://schemas.microsoft.com/office/mac/drawingml/2011/main" val="1"/>
-            </a:ext>
-          </a:extLst>
-        </p:spPr>
-        <p:txBody>
-          <a:bodyPr lIns="45719" rIns="45719" anchor="ctr">
-            <a:spAutoFit/>
-          </a:bodyPr>
-          <a:lstStyle>
-            <a:lvl1pPr>
-              <a:defRPr b="1" sz="2200">
-                <a:solidFill>
-                  <a:srgbClr val="FFFFFF"/>
-                </a:solidFill>
-                <a:latin typeface="Cambria"/>
-                <a:ea typeface="Cambria"/>
-                <a:cs typeface="Cambria"/>
-                <a:sym typeface="Cambria"/>
-              </a:defRPr>
-            </a:lvl1pPr>
-          </a:lstStyle>
-          <a:p>
-            <a:pPr/>
-            <a:r>
-              <a:t>741</a:t>
-            </a:r>
-          </a:p>
-        </p:txBody>
-      </p:sp>
-      <p:sp>
-        <p:nvSpPr>
-          <p:cNvPr id="231" name="Shape 14"/>
-          <p:cNvSpPr/>
-          <p:nvPr/>
-        </p:nvSpPr>
-        <p:spPr>
-          <a:xfrm>
-            <a:off x="5897879" y="2450592"/>
-            <a:ext cx="2331721" cy="777241"/>
-          </a:xfrm>
-          <a:prstGeom prst="roundRect">
-            <a:avLst>
-              <a:gd name="adj" fmla="val 7059"/>
-            </a:avLst>
-          </a:prstGeom>
-          <a:solidFill>
-            <a:srgbClr val="1F3A2E"/>
-          </a:solidFill>
-          <a:ln w="12700">
-            <a:solidFill>
-              <a:srgbClr val="2E5443"/>
-            </a:solidFill>
-          </a:ln>
-        </p:spPr>
-        <p:txBody>
-          <a:bodyPr lIns="45719" rIns="45719"/>
-          <a:lstStyle/>
-          <a:p>
-            <a:pPr/>
-          </a:p>
-        </p:txBody>
-      </p:sp>
-      <p:sp>
-        <p:nvSpPr>
-          <p:cNvPr id="232" name="Shape 15"/>
-          <p:cNvSpPr/>
-          <p:nvPr/>
-        </p:nvSpPr>
-        <p:spPr>
-          <a:xfrm>
-            <a:off x="5897879" y="2450592"/>
-            <a:ext cx="54865" cy="777241"/>
-          </a:xfrm>
-          <a:prstGeom prst="rect">
-            <a:avLst/>
-          </a:prstGeom>
-          <a:solidFill>
-            <a:srgbClr val="4F8C5A"/>
-          </a:solidFill>
-          <a:ln w="12700">
-            <a:miter lim="400000"/>
-          </a:ln>
-        </p:spPr>
-        <p:txBody>
-          <a:bodyPr lIns="45719" rIns="45719"/>
-          <a:lstStyle/>
-          <a:p>
-            <a:pPr/>
-          </a:p>
-        </p:txBody>
-      </p:sp>
-      <p:sp>
-        <p:nvSpPr>
-          <p:cNvPr id="233" name="Text 16"/>
-          <p:cNvSpPr txBox="1"/>
-          <p:nvPr/>
-        </p:nvSpPr>
-        <p:spPr>
-          <a:xfrm>
-            <a:off x="6108191" y="2557947"/>
-            <a:ext cx="2011682" cy="205914"/>
-          </a:xfrm>
-          <a:prstGeom prst="rect">
-            <a:avLst/>
-          </a:prstGeom>
-          <a:ln w="12700">
-            <a:miter lim="400000"/>
-          </a:ln>
-          <a:extLst>
-            <a:ext uri="{C572A759-6A51-4108-AA02-DFA0A04FC94B}">
-              <ma14:wrappingTextBoxFlag xmlns:ma14="http://schemas.microsoft.com/office/mac/drawingml/2011/main" val="1"/>
-            </a:ext>
-          </a:extLst>
-        </p:spPr>
-        <p:txBody>
-          <a:bodyPr lIns="45719" rIns="45719" anchor="ctr">
-            <a:spAutoFit/>
-          </a:bodyPr>
-          <a:lstStyle>
-            <a:lvl1pPr>
-              <a:defRPr sz="900">
-                <a:solidFill>
-                  <a:srgbClr val="9FB6A8"/>
-                </a:solidFill>
-              </a:defRPr>
-            </a:lvl1pPr>
-          </a:lstStyle>
-          <a:p>
-            <a:pPr/>
-            <a:r>
-              <a:t>Total emisiones 2023 (Mt)</a:t>
-            </a:r>
-          </a:p>
-        </p:txBody>
-      </p:sp>
-      <p:sp>
-        <p:nvSpPr>
-          <p:cNvPr id="234" name="Text 17"/>
-          <p:cNvSpPr txBox="1"/>
-          <p:nvPr/>
-        </p:nvSpPr>
-        <p:spPr>
-          <a:xfrm>
-            <a:off x="6108191" y="2742691"/>
-            <a:ext cx="2011682" cy="421641"/>
-          </a:xfrm>
-          <a:prstGeom prst="rect">
-            <a:avLst/>
-          </a:prstGeom>
-          <a:ln w="12700">
-            <a:miter lim="400000"/>
-          </a:ln>
-          <a:extLst>
-            <a:ext uri="{C572A759-6A51-4108-AA02-DFA0A04FC94B}">
-              <ma14:wrappingTextBoxFlag xmlns:ma14="http://schemas.microsoft.com/office/mac/drawingml/2011/main" val="1"/>
-            </a:ext>
-          </a:extLst>
-        </p:spPr>
-        <p:txBody>
-          <a:bodyPr lIns="45719" rIns="45719" anchor="ctr">
-            <a:spAutoFit/>
-          </a:bodyPr>
-          <a:lstStyle>
-            <a:lvl1pPr>
-              <a:defRPr b="1" sz="2200">
-                <a:solidFill>
-                  <a:srgbClr val="FFFFFF"/>
-                </a:solidFill>
-                <a:latin typeface="Cambria"/>
-                <a:ea typeface="Cambria"/>
-                <a:cs typeface="Cambria"/>
-                <a:sym typeface="Cambria"/>
-              </a:defRPr>
-            </a:lvl1pPr>
-          </a:lstStyle>
-          <a:p>
-            <a:pPr/>
-            <a:r>
-              <a:t>2.855</a:t>
-            </a:r>
-          </a:p>
-        </p:txBody>
-      </p:sp>
-      <p:sp>
-        <p:nvSpPr>
-          <p:cNvPr id="235" name="Shape 18"/>
-          <p:cNvSpPr/>
-          <p:nvPr/>
-        </p:nvSpPr>
-        <p:spPr>
-          <a:xfrm>
-            <a:off x="8412480" y="2450592"/>
-            <a:ext cx="2057401" cy="777241"/>
-          </a:xfrm>
-          <a:prstGeom prst="roundRect">
-            <a:avLst>
-              <a:gd name="adj" fmla="val 7059"/>
-            </a:avLst>
-          </a:prstGeom>
-          <a:solidFill>
-            <a:srgbClr val="1F3A2E"/>
-          </a:solidFill>
-          <a:ln w="12700">
-            <a:solidFill>
-              <a:srgbClr val="3A5A48"/>
-            </a:solidFill>
-            <a:prstDash val="dash"/>
-          </a:ln>
-        </p:spPr>
-        <p:txBody>
-          <a:bodyPr lIns="45719" rIns="45719"/>
-          <a:lstStyle/>
-          <a:p>
-            <a:pPr/>
-          </a:p>
-        </p:txBody>
-      </p:sp>
-      <p:sp>
-        <p:nvSpPr>
-          <p:cNvPr id="236" name="Text 19"/>
-          <p:cNvSpPr txBox="1"/>
-          <p:nvPr/>
-        </p:nvSpPr>
-        <p:spPr>
-          <a:xfrm>
-            <a:off x="8595359" y="2540035"/>
-            <a:ext cx="1737361" cy="196018"/>
-          </a:xfrm>
-          <a:prstGeom prst="rect">
-            <a:avLst/>
-          </a:prstGeom>
-          <a:ln w="12700">
-            <a:miter lim="400000"/>
-          </a:ln>
-          <a:extLst>
-            <a:ext uri="{C572A759-6A51-4108-AA02-DFA0A04FC94B}">
-              <ma14:wrappingTextBoxFlag xmlns:ma14="http://schemas.microsoft.com/office/mac/drawingml/2011/main" val="1"/>
-            </a:ext>
-          </a:extLst>
-        </p:spPr>
-        <p:txBody>
-          <a:bodyPr lIns="45719" rIns="45719" anchor="ctr">
-            <a:spAutoFit/>
-          </a:bodyPr>
-          <a:lstStyle>
-            <a:lvl1pPr>
-              <a:defRPr b="1" sz="800">
+              <a:defRPr sz="800" b="1">
                 <a:solidFill>
                   <a:srgbClr val="8A6B9C"/>
                 </a:solidFill>
@@ -14666,10 +14062,7 @@
             </a:lvl1pPr>
           </a:lstStyle>
           <a:p>
-            <a:pPr/>
-            <a:r>
-              <a:t>SEGMENTADOR</a:t>
-            </a:r>
+            <a:endParaRPr dirty="0"/>
           </a:p>
         </p:txBody>
       </p:sp>
@@ -14681,18 +14074,18 @@
         </p:nvSpPr>
         <p:spPr>
           <a:xfrm>
-            <a:off x="8595359" y="2761287"/>
-            <a:ext cx="1737361" cy="375306"/>
-          </a:xfrm>
-          <a:prstGeom prst="rect">
-            <a:avLst/>
-          </a:prstGeom>
-          <a:ln w="12700">
-            <a:miter lim="400000"/>
-          </a:ln>
-          <a:extLst>
-            <a:ext uri="{C572A759-6A51-4108-AA02-DFA0A04FC94B}">
-              <ma14:wrappingTextBoxFlag xmlns:ma14="http://schemas.microsoft.com/office/mac/drawingml/2011/main" val="1"/>
+            <a:off x="8595359" y="2833524"/>
+            <a:ext cx="1737361" cy="230832"/>
+          </a:xfrm>
+          <a:prstGeom prst="rect">
+            <a:avLst/>
+          </a:prstGeom>
+          <a:ln w="12700">
+            <a:miter lim="400000"/>
+          </a:ln>
+          <a:extLst>
+            <a:ext uri="{C572A759-6A51-4108-AA02-DFA0A04FC94B}">
+              <ma14:wrappingTextBoxFlag xmlns:ma14="http://schemas.microsoft.com/office/mac/drawingml/2011/main" xmlns:a14="http://schemas.microsoft.com/office/drawing/2010/main" xmlns:m="http://schemas.openxmlformats.org/officeDocument/2006/math" xmlns="" val="1"/>
             </a:ext>
           </a:extLst>
         </p:spPr>
@@ -14709,87 +14102,169 @@
                 </a:solidFill>
               </a:defRPr>
             </a:pPr>
-            <a:r>
-              <a:t>Tipo de emisión ▾</a:t>
-            </a:r>
-          </a:p>
-          <a:p>
-            <a:pPr>
-              <a:defRPr sz="900">
-                <a:solidFill>
-                  <a:srgbClr val="D6E5DA"/>
-                </a:solidFill>
-              </a:defRPr>
+            <a:endParaRPr dirty="0"/>
+          </a:p>
+        </p:txBody>
+      </p:sp>
+      <p:sp>
+        <p:nvSpPr>
+          <p:cNvPr id="265" name="Text 48"/>
+          <p:cNvSpPr txBox="1"/>
+          <p:nvPr/>
+        </p:nvSpPr>
+        <p:spPr>
+          <a:xfrm>
+            <a:off x="4389119" y="5454730"/>
+            <a:ext cx="6949441" cy="246221"/>
+          </a:xfrm>
+          <a:prstGeom prst="rect">
+            <a:avLst/>
+          </a:prstGeom>
+          <a:ln w="12700">
+            <a:miter lim="400000"/>
+          </a:ln>
+          <a:extLst>
+            <a:ext uri="{C572A759-6A51-4108-AA02-DFA0A04FC94B}">
+              <ma14:wrappingTextBoxFlag xmlns:ma14="http://schemas.microsoft.com/office/mac/drawingml/2011/main" xmlns:a14="http://schemas.microsoft.com/office/drawing/2010/main" xmlns:m="http://schemas.openxmlformats.org/officeDocument/2006/math" xmlns="" val="1"/>
+            </a:ext>
+          </a:extLst>
+        </p:spPr>
+        <p:txBody>
+          <a:bodyPr lIns="45719" rIns="45719" anchor="ctr">
+            <a:spAutoFit/>
+          </a:bodyPr>
+          <a:lstStyle>
+            <a:lvl1pPr>
+              <a:defRPr sz="1000" i="1">
+                <a:solidFill>
+                  <a:srgbClr val="9FB6A8"/>
+                </a:solidFill>
+              </a:defRPr>
+            </a:lvl1pPr>
+          </a:lstStyle>
+          <a:p>
+            <a:endParaRPr dirty="0"/>
+          </a:p>
+        </p:txBody>
+      </p:sp>
+      <p:sp>
+        <p:nvSpPr>
+          <p:cNvPr id="2" name="CuadroTexto 1">
+            <a:extLst>
+              <a:ext uri="{FF2B5EF4-FFF2-40B4-BE49-F238E27FC236}">
+                <a16:creationId xmlns:a16="http://schemas.microsoft.com/office/drawing/2014/main" id="{C4852957-5E16-2A86-F74A-A27E787B498B}"/>
+              </a:ext>
+            </a:extLst>
+          </p:cNvPr>
+          <p:cNvSpPr txBox="1"/>
+          <p:nvPr/>
+        </p:nvSpPr>
+        <p:spPr>
+          <a:xfrm>
+            <a:off x="4452730" y="1976814"/>
+            <a:ext cx="2577547" cy="369330"/>
+          </a:xfrm>
+          <a:prstGeom prst="rect">
+            <a:avLst/>
+          </a:prstGeom>
+          <a:noFill/>
+          <a:ln w="12700" cap="flat">
+            <a:noFill/>
+            <a:miter lim="400000"/>
+          </a:ln>
+          <a:effectLst/>
+          <a:sp3d/>
+        </p:spPr>
+        <p:style>
+          <a:lnRef idx="0">
+            <a:scrgbClr r="0" g="0" b="0"/>
+          </a:lnRef>
+          <a:fillRef idx="0">
+            <a:scrgbClr r="0" g="0" b="0"/>
+          </a:fillRef>
+          <a:effectRef idx="0">
+            <a:scrgbClr r="0" g="0" b="0"/>
+          </a:effectRef>
+          <a:fontRef idx="none"/>
+        </p:style>
+        <p:txBody>
+          <a:bodyPr rot="0" spcFirstLastPara="1" vertOverflow="overflow" horzOverflow="overflow" vert="horz" wrap="square" lIns="45719" tIns="45719" rIns="45719" bIns="45719" numCol="1" spcCol="38100" rtlCol="0" anchor="t">
+            <a:spAutoFit/>
+          </a:bodyPr>
+          <a:lstStyle/>
+          <a:p>
+            <a:pPr marL="0" marR="0" indent="0" algn="ctr" defTabSz="914400" rtl="0" fontAlgn="auto" latinLnBrk="0" hangingPunct="0">
+              <a:lnSpc>
+                <a:spcPct val="100000"/>
+              </a:lnSpc>
+              <a:spcBef>
+                <a:spcPts val="0"/>
+              </a:spcBef>
+              <a:spcAft>
+                <a:spcPts val="0"/>
+              </a:spcAft>
+              <a:buClrTx/>
+              <a:buSzTx/>
+              <a:buFontTx/>
+              <a:buNone/>
+              <a:tabLst/>
             </a:pPr>
             <a:r>
-              <a:t>(CH₄ / N₂O)</a:t>
-            </a:r>
-          </a:p>
-        </p:txBody>
-      </p:sp>
-      <p:sp>
-        <p:nvSpPr>
-          <p:cNvPr id="238" name="Shape 21"/>
-          <p:cNvSpPr/>
-          <p:nvPr/>
-        </p:nvSpPr>
-        <p:spPr>
-          <a:xfrm>
-            <a:off x="868680" y="3364991"/>
-            <a:ext cx="4937760" cy="1417321"/>
-          </a:xfrm>
-          <a:prstGeom prst="roundRect">
-            <a:avLst>
-              <a:gd name="adj" fmla="val 3871"/>
-            </a:avLst>
-          </a:prstGeom>
-          <a:solidFill>
-            <a:srgbClr val="1F3A2E"/>
-          </a:solidFill>
-          <a:ln w="12700">
-            <a:solidFill>
-              <a:srgbClr val="2E5443"/>
-            </a:solidFill>
-          </a:ln>
-        </p:spPr>
-        <p:txBody>
-          <a:bodyPr lIns="45719" rIns="45719"/>
-          <a:lstStyle/>
-          <a:p>
-            <a:pPr/>
-          </a:p>
-        </p:txBody>
-      </p:sp>
-      <p:sp>
-        <p:nvSpPr>
-          <p:cNvPr id="239" name="Text 22"/>
-          <p:cNvSpPr txBox="1"/>
-          <p:nvPr/>
-        </p:nvSpPr>
-        <p:spPr>
-          <a:xfrm>
-            <a:off x="1078991" y="3490634"/>
-            <a:ext cx="4517137" cy="205915"/>
-          </a:xfrm>
-          <a:prstGeom prst="rect">
-            <a:avLst/>
-          </a:prstGeom>
-          <a:ln w="12700">
-            <a:miter lim="400000"/>
-          </a:ln>
-          <a:extLst>
-            <a:ext uri="{C572A759-6A51-4108-AA02-DFA0A04FC94B}">
-              <ma14:wrappingTextBoxFlag xmlns:ma14="http://schemas.microsoft.com/office/mac/drawingml/2011/main" val="1"/>
-            </a:ext>
-          </a:extLst>
-        </p:spPr>
-        <p:txBody>
-          <a:bodyPr lIns="45719" rIns="45719" anchor="ctr">
+              <a:rPr kumimoji="0" lang="es-ES" sz="1800" b="0" i="0" u="none" strike="noStrike" cap="none" spc="0" normalizeH="0" baseline="0" dirty="0">
+                <a:ln>
+                  <a:noFill/>
+                </a:ln>
+                <a:solidFill>
+                  <a:schemeClr val="bg1"/>
+                </a:solidFill>
+                <a:effectLst/>
+                <a:uFillTx/>
+                <a:latin typeface="+mn-lt"/>
+                <a:ea typeface="+mn-ea"/>
+                <a:cs typeface="+mn-cs"/>
+                <a:sym typeface="Calibri"/>
+              </a:rPr>
+              <a:t>Demo Power BI</a:t>
+            </a:r>
+          </a:p>
+        </p:txBody>
+      </p:sp>
+      <p:sp>
+        <p:nvSpPr>
+          <p:cNvPr id="4" name="Text 5">
+            <a:extLst>
+              <a:ext uri="{FF2B5EF4-FFF2-40B4-BE49-F238E27FC236}">
+                <a16:creationId xmlns:a16="http://schemas.microsoft.com/office/drawing/2014/main" id="{7974C5AC-6ED2-1155-2807-C92F1635DE46}"/>
+              </a:ext>
+            </a:extLst>
+          </p:cNvPr>
+          <p:cNvSpPr txBox="1"/>
+          <p:nvPr/>
+        </p:nvSpPr>
+        <p:spPr>
+          <a:xfrm>
+            <a:off x="868679" y="3194336"/>
+            <a:ext cx="4160521" cy="276999"/>
+          </a:xfrm>
+          <a:prstGeom prst="rect">
+            <a:avLst/>
+          </a:prstGeom>
+          <a:ln w="12700">
+            <a:miter lim="400000"/>
+          </a:ln>
+          <a:extLst>
+            <a:ext uri="{C572A759-6A51-4108-AA02-DFA0A04FC94B}">
+              <ma14:wrappingTextBoxFlag xmlns="" xmlns:m="http://schemas.openxmlformats.org/officeDocument/2006/math" xmlns:a14="http://schemas.microsoft.com/office/drawing/2010/main" xmlns:ma14="http://schemas.microsoft.com/office/mac/drawingml/2011/main" val="1"/>
+            </a:ext>
+          </a:extLst>
+        </p:spPr>
+        <p:txBody>
+          <a:bodyPr wrap="square" lIns="45719" rIns="45719" anchor="ctr">
             <a:spAutoFit/>
           </a:bodyPr>
           <a:lstStyle>
             <a:lvl1pPr>
-              <a:defRPr b="1" sz="900">
+              <a:defRPr sz="1200" b="1">
                 <a:solidFill>
                   <a:srgbClr val="FFFFFF"/>
                 </a:solidFill>
@@ -14797,328 +14272,66 @@
             </a:lvl1pPr>
           </a:lstStyle>
           <a:p>
-            <a:pPr/>
-            <a:r>
-              <a:t>Evolución de cabezas de ganado (1961–2023)</a:t>
-            </a:r>
-          </a:p>
-        </p:txBody>
-      </p:sp>
-      <p:sp>
-        <p:nvSpPr>
-          <p:cNvPr id="240" name="Shape 23"/>
-          <p:cNvSpPr/>
-          <p:nvPr/>
-        </p:nvSpPr>
-        <p:spPr>
-          <a:xfrm>
-            <a:off x="1143000" y="3982211"/>
-            <a:ext cx="487681" cy="82297"/>
-          </a:xfrm>
-          <a:prstGeom prst="line">
-            <a:avLst/>
-          </a:prstGeom>
-          <a:ln w="28575">
-            <a:solidFill>
-              <a:srgbClr val="B5443A"/>
-            </a:solidFill>
-          </a:ln>
-        </p:spPr>
-        <p:txBody>
-          <a:bodyPr lIns="45719" rIns="45719"/>
-          <a:lstStyle/>
-          <a:p>
-            <a:pPr/>
-          </a:p>
-        </p:txBody>
-      </p:sp>
-      <p:sp>
-        <p:nvSpPr>
-          <p:cNvPr id="241" name="Shape 24"/>
-          <p:cNvSpPr/>
-          <p:nvPr/>
-        </p:nvSpPr>
-        <p:spPr>
-          <a:xfrm flipV="1">
-            <a:off x="1630679" y="4023359"/>
-            <a:ext cx="487681" cy="41149"/>
-          </a:xfrm>
-          <a:prstGeom prst="line">
-            <a:avLst/>
-          </a:prstGeom>
-          <a:ln w="28575">
-            <a:solidFill>
-              <a:srgbClr val="B5443A"/>
-            </a:solidFill>
-          </a:ln>
-        </p:spPr>
-        <p:txBody>
-          <a:bodyPr lIns="45719" rIns="45719"/>
-          <a:lstStyle/>
-          <a:p>
-            <a:pPr/>
-          </a:p>
-        </p:txBody>
-      </p:sp>
-      <p:sp>
-        <p:nvSpPr>
-          <p:cNvPr id="242" name="Shape 25"/>
-          <p:cNvSpPr/>
-          <p:nvPr/>
-        </p:nvSpPr>
-        <p:spPr>
-          <a:xfrm>
-            <a:off x="2118360" y="4023359"/>
-            <a:ext cx="487681" cy="123445"/>
-          </a:xfrm>
-          <a:prstGeom prst="line">
-            <a:avLst/>
-          </a:prstGeom>
-          <a:ln w="28575">
-            <a:solidFill>
-              <a:srgbClr val="B5443A"/>
-            </a:solidFill>
-          </a:ln>
-        </p:spPr>
-        <p:txBody>
-          <a:bodyPr lIns="45719" rIns="45719"/>
-          <a:lstStyle/>
-          <a:p>
-            <a:pPr/>
-          </a:p>
-        </p:txBody>
-      </p:sp>
-      <p:sp>
-        <p:nvSpPr>
-          <p:cNvPr id="243" name="Shape 26"/>
-          <p:cNvSpPr/>
-          <p:nvPr/>
-        </p:nvSpPr>
-        <p:spPr>
-          <a:xfrm>
-            <a:off x="2606039" y="4146803"/>
-            <a:ext cx="487681" cy="41149"/>
-          </a:xfrm>
-          <a:prstGeom prst="line">
-            <a:avLst/>
-          </a:prstGeom>
-          <a:ln w="28575">
-            <a:solidFill>
-              <a:srgbClr val="B5443A"/>
-            </a:solidFill>
-          </a:ln>
-        </p:spPr>
-        <p:txBody>
-          <a:bodyPr lIns="45719" rIns="45719"/>
-          <a:lstStyle/>
-          <a:p>
-            <a:pPr/>
-          </a:p>
-        </p:txBody>
-      </p:sp>
-      <p:sp>
-        <p:nvSpPr>
-          <p:cNvPr id="244" name="Shape 27"/>
-          <p:cNvSpPr/>
-          <p:nvPr/>
-        </p:nvSpPr>
-        <p:spPr>
-          <a:xfrm>
-            <a:off x="3093719" y="4187952"/>
-            <a:ext cx="487682" cy="65838"/>
-          </a:xfrm>
-          <a:prstGeom prst="line">
-            <a:avLst/>
-          </a:prstGeom>
-          <a:ln w="28575">
-            <a:solidFill>
-              <a:srgbClr val="B5443A"/>
-            </a:solidFill>
-          </a:ln>
-        </p:spPr>
-        <p:txBody>
-          <a:bodyPr lIns="45719" rIns="45719"/>
-          <a:lstStyle/>
-          <a:p>
-            <a:pPr/>
-          </a:p>
-        </p:txBody>
-      </p:sp>
-      <p:sp>
-        <p:nvSpPr>
-          <p:cNvPr id="245" name="Shape 28"/>
-          <p:cNvSpPr/>
-          <p:nvPr/>
-        </p:nvSpPr>
-        <p:spPr>
-          <a:xfrm>
-            <a:off x="3581399" y="4253789"/>
-            <a:ext cx="487681" cy="32919"/>
-          </a:xfrm>
-          <a:prstGeom prst="line">
-            <a:avLst/>
-          </a:prstGeom>
-          <a:ln w="28575">
-            <a:solidFill>
-              <a:srgbClr val="B5443A"/>
-            </a:solidFill>
-          </a:ln>
-        </p:spPr>
-        <p:txBody>
-          <a:bodyPr lIns="45719" rIns="45719"/>
-          <a:lstStyle/>
-          <a:p>
-            <a:pPr/>
-          </a:p>
-        </p:txBody>
-      </p:sp>
-      <p:sp>
-        <p:nvSpPr>
-          <p:cNvPr id="246" name="Shape 29"/>
-          <p:cNvSpPr/>
-          <p:nvPr/>
-        </p:nvSpPr>
-        <p:spPr>
-          <a:xfrm>
-            <a:off x="4069080" y="4286706"/>
-            <a:ext cx="487681" cy="65839"/>
-          </a:xfrm>
-          <a:prstGeom prst="line">
-            <a:avLst/>
-          </a:prstGeom>
-          <a:ln w="28575">
-            <a:solidFill>
-              <a:srgbClr val="B5443A"/>
-            </a:solidFill>
-          </a:ln>
-        </p:spPr>
-        <p:txBody>
-          <a:bodyPr lIns="45719" rIns="45719"/>
-          <a:lstStyle/>
-          <a:p>
-            <a:pPr/>
-          </a:p>
-        </p:txBody>
-      </p:sp>
-      <p:sp>
-        <p:nvSpPr>
-          <p:cNvPr id="247" name="Shape 30"/>
-          <p:cNvSpPr/>
-          <p:nvPr/>
-        </p:nvSpPr>
-        <p:spPr>
-          <a:xfrm>
-            <a:off x="4556759" y="4352544"/>
-            <a:ext cx="487681" cy="65838"/>
-          </a:xfrm>
-          <a:prstGeom prst="line">
-            <a:avLst/>
-          </a:prstGeom>
-          <a:ln w="28575">
-            <a:solidFill>
-              <a:srgbClr val="B5443A"/>
-            </a:solidFill>
-          </a:ln>
-        </p:spPr>
-        <p:txBody>
-          <a:bodyPr lIns="45719" rIns="45719"/>
-          <a:lstStyle/>
-          <a:p>
-            <a:pPr/>
-          </a:p>
-        </p:txBody>
-      </p:sp>
-      <p:sp>
-        <p:nvSpPr>
-          <p:cNvPr id="248" name="Shape 31"/>
-          <p:cNvSpPr/>
-          <p:nvPr/>
-        </p:nvSpPr>
-        <p:spPr>
-          <a:xfrm>
-            <a:off x="5044440" y="4418381"/>
-            <a:ext cx="487681" cy="57606"/>
-          </a:xfrm>
-          <a:prstGeom prst="line">
-            <a:avLst/>
-          </a:prstGeom>
-          <a:ln w="28575">
-            <a:solidFill>
-              <a:srgbClr val="B5443A"/>
-            </a:solidFill>
-          </a:ln>
-        </p:spPr>
-        <p:txBody>
-          <a:bodyPr lIns="45719" rIns="45719"/>
-          <a:lstStyle/>
-          <a:p>
-            <a:pPr/>
-          </a:p>
-        </p:txBody>
-      </p:sp>
-      <p:sp>
-        <p:nvSpPr>
-          <p:cNvPr id="249" name="Shape 32"/>
-          <p:cNvSpPr/>
-          <p:nvPr/>
-        </p:nvSpPr>
-        <p:spPr>
-          <a:xfrm>
-            <a:off x="5943600" y="3364991"/>
-            <a:ext cx="4937760" cy="1417321"/>
-          </a:xfrm>
-          <a:prstGeom prst="roundRect">
-            <a:avLst>
-              <a:gd name="adj" fmla="val 3871"/>
-            </a:avLst>
-          </a:prstGeom>
-          <a:solidFill>
-            <a:srgbClr val="1F3A2E"/>
-          </a:solidFill>
-          <a:ln w="12700">
-            <a:solidFill>
-              <a:srgbClr val="2E5443"/>
-            </a:solidFill>
-          </a:ln>
-        </p:spPr>
-        <p:txBody>
-          <a:bodyPr lIns="45719" rIns="45719"/>
-          <a:lstStyle/>
-          <a:p>
-            <a:pPr/>
-          </a:p>
-        </p:txBody>
-      </p:sp>
-      <p:sp>
-        <p:nvSpPr>
-          <p:cNvPr id="250" name="Text 33"/>
-          <p:cNvSpPr txBox="1"/>
-          <p:nvPr/>
-        </p:nvSpPr>
-        <p:spPr>
-          <a:xfrm>
-            <a:off x="6153911" y="3490634"/>
-            <a:ext cx="4517137" cy="205915"/>
-          </a:xfrm>
-          <a:prstGeom prst="rect">
-            <a:avLst/>
-          </a:prstGeom>
-          <a:ln w="12700">
-            <a:miter lim="400000"/>
-          </a:ln>
-          <a:extLst>
-            <a:ext uri="{C572A759-6A51-4108-AA02-DFA0A04FC94B}">
-              <ma14:wrappingTextBoxFlag xmlns:ma14="http://schemas.microsoft.com/office/mac/drawingml/2011/main" val="1"/>
-            </a:ext>
-          </a:extLst>
-        </p:spPr>
-        <p:txBody>
-          <a:bodyPr lIns="45719" rIns="45719" anchor="ctr">
+            <a:r>
+              <a:rPr lang="es-ES" dirty="0"/>
+              <a:t>AVES</a:t>
+            </a:r>
+            <a:r>
+              <a:rPr dirty="0"/>
+              <a:t>  · </a:t>
+            </a:r>
+            <a:r>
+              <a:rPr lang="es-ES" dirty="0"/>
+              <a:t>gallinas, parrilleras</a:t>
+            </a:r>
+            <a:r>
+              <a:rPr dirty="0"/>
+              <a:t> + </a:t>
+            </a:r>
+            <a:r>
+              <a:rPr lang="es-ES" dirty="0"/>
+              <a:t>gallinas ponedoras + patos + pavos</a:t>
+            </a:r>
+            <a:endParaRPr dirty="0"/>
+          </a:p>
+        </p:txBody>
+      </p:sp>
+      <p:sp>
+        <p:nvSpPr>
+          <p:cNvPr id="6" name="Text 5">
+            <a:extLst>
+              <a:ext uri="{FF2B5EF4-FFF2-40B4-BE49-F238E27FC236}">
+                <a16:creationId xmlns:a16="http://schemas.microsoft.com/office/drawing/2014/main" id="{A95FA4C9-7D27-851C-CFFB-4FD490A8163A}"/>
+              </a:ext>
+            </a:extLst>
+          </p:cNvPr>
+          <p:cNvSpPr txBox="1"/>
+          <p:nvPr/>
+        </p:nvSpPr>
+        <p:spPr>
+          <a:xfrm>
+            <a:off x="868679" y="4122338"/>
+            <a:ext cx="3020833" cy="276999"/>
+          </a:xfrm>
+          <a:prstGeom prst="rect">
+            <a:avLst/>
+          </a:prstGeom>
+          <a:ln w="12700">
+            <a:miter lim="400000"/>
+          </a:ln>
+          <a:extLst>
+            <a:ext uri="{C572A759-6A51-4108-AA02-DFA0A04FC94B}">
+              <ma14:wrappingTextBoxFlag xmlns="" xmlns:m="http://schemas.openxmlformats.org/officeDocument/2006/math" xmlns:a14="http://schemas.microsoft.com/office/drawing/2010/main" xmlns:ma14="http://schemas.microsoft.com/office/mac/drawingml/2011/main" val="1"/>
+            </a:ext>
+          </a:extLst>
+        </p:spPr>
+        <p:txBody>
+          <a:bodyPr wrap="square" lIns="45719" rIns="45719" anchor="ctr">
             <a:spAutoFit/>
           </a:bodyPr>
           <a:lstStyle>
             <a:lvl1pPr>
-              <a:defRPr b="1" sz="900">
+              <a:defRPr sz="1200" b="1">
                 <a:solidFill>
                   <a:srgbClr val="FFFFFF"/>
                 </a:solidFill>
@@ -15126,328 +14339,50 @@
             </a:lvl1pPr>
           </a:lstStyle>
           <a:p>
-            <a:pPr/>
-            <a:r>
-              <a:t>Evolución de emisiones CO₂eq (1961–2023)</a:t>
-            </a:r>
-          </a:p>
-        </p:txBody>
-      </p:sp>
-      <p:sp>
-        <p:nvSpPr>
-          <p:cNvPr id="251" name="Shape 34"/>
-          <p:cNvSpPr/>
-          <p:nvPr/>
-        </p:nvSpPr>
-        <p:spPr>
-          <a:xfrm>
-            <a:off x="6217920" y="3982211"/>
-            <a:ext cx="487681" cy="82297"/>
-          </a:xfrm>
-          <a:prstGeom prst="line">
-            <a:avLst/>
-          </a:prstGeom>
-          <a:ln w="28575">
-            <a:solidFill>
-              <a:srgbClr val="D98C3F"/>
-            </a:solidFill>
-          </a:ln>
-        </p:spPr>
-        <p:txBody>
-          <a:bodyPr lIns="45719" rIns="45719"/>
-          <a:lstStyle/>
-          <a:p>
-            <a:pPr/>
-          </a:p>
-        </p:txBody>
-      </p:sp>
-      <p:sp>
-        <p:nvSpPr>
-          <p:cNvPr id="252" name="Shape 35"/>
-          <p:cNvSpPr/>
-          <p:nvPr/>
-        </p:nvSpPr>
-        <p:spPr>
-          <a:xfrm flipV="1">
-            <a:off x="6705599" y="4023359"/>
-            <a:ext cx="487681" cy="41149"/>
-          </a:xfrm>
-          <a:prstGeom prst="line">
-            <a:avLst/>
-          </a:prstGeom>
-          <a:ln w="28575">
-            <a:solidFill>
-              <a:srgbClr val="D98C3F"/>
-            </a:solidFill>
-          </a:ln>
-        </p:spPr>
-        <p:txBody>
-          <a:bodyPr lIns="45719" rIns="45719"/>
-          <a:lstStyle/>
-          <a:p>
-            <a:pPr/>
-          </a:p>
-        </p:txBody>
-      </p:sp>
-      <p:sp>
-        <p:nvSpPr>
-          <p:cNvPr id="253" name="Shape 36"/>
-          <p:cNvSpPr/>
-          <p:nvPr/>
-        </p:nvSpPr>
-        <p:spPr>
-          <a:xfrm>
-            <a:off x="7193280" y="4023359"/>
-            <a:ext cx="487681" cy="123445"/>
-          </a:xfrm>
-          <a:prstGeom prst="line">
-            <a:avLst/>
-          </a:prstGeom>
-          <a:ln w="28575">
-            <a:solidFill>
-              <a:srgbClr val="D98C3F"/>
-            </a:solidFill>
-          </a:ln>
-        </p:spPr>
-        <p:txBody>
-          <a:bodyPr lIns="45719" rIns="45719"/>
-          <a:lstStyle/>
-          <a:p>
-            <a:pPr/>
-          </a:p>
-        </p:txBody>
-      </p:sp>
-      <p:sp>
-        <p:nvSpPr>
-          <p:cNvPr id="254" name="Shape 37"/>
-          <p:cNvSpPr/>
-          <p:nvPr/>
-        </p:nvSpPr>
-        <p:spPr>
-          <a:xfrm>
-            <a:off x="7680959" y="4146803"/>
-            <a:ext cx="487681" cy="41149"/>
-          </a:xfrm>
-          <a:prstGeom prst="line">
-            <a:avLst/>
-          </a:prstGeom>
-          <a:ln w="28575">
-            <a:solidFill>
-              <a:srgbClr val="D98C3F"/>
-            </a:solidFill>
-          </a:ln>
-        </p:spPr>
-        <p:txBody>
-          <a:bodyPr lIns="45719" rIns="45719"/>
-          <a:lstStyle/>
-          <a:p>
-            <a:pPr/>
-          </a:p>
-        </p:txBody>
-      </p:sp>
-      <p:sp>
-        <p:nvSpPr>
-          <p:cNvPr id="255" name="Shape 38"/>
-          <p:cNvSpPr/>
-          <p:nvPr/>
-        </p:nvSpPr>
-        <p:spPr>
-          <a:xfrm>
-            <a:off x="8168639" y="4187952"/>
-            <a:ext cx="487681" cy="65838"/>
-          </a:xfrm>
-          <a:prstGeom prst="line">
-            <a:avLst/>
-          </a:prstGeom>
-          <a:ln w="28575">
-            <a:solidFill>
-              <a:srgbClr val="D98C3F"/>
-            </a:solidFill>
-          </a:ln>
-        </p:spPr>
-        <p:txBody>
-          <a:bodyPr lIns="45719" rIns="45719"/>
-          <a:lstStyle/>
-          <a:p>
-            <a:pPr/>
-          </a:p>
-        </p:txBody>
-      </p:sp>
-      <p:sp>
-        <p:nvSpPr>
-          <p:cNvPr id="256" name="Shape 39"/>
-          <p:cNvSpPr/>
-          <p:nvPr/>
-        </p:nvSpPr>
-        <p:spPr>
-          <a:xfrm>
-            <a:off x="8656319" y="4253789"/>
-            <a:ext cx="487681" cy="32919"/>
-          </a:xfrm>
-          <a:prstGeom prst="line">
-            <a:avLst/>
-          </a:prstGeom>
-          <a:ln w="28575">
-            <a:solidFill>
-              <a:srgbClr val="D98C3F"/>
-            </a:solidFill>
-          </a:ln>
-        </p:spPr>
-        <p:txBody>
-          <a:bodyPr lIns="45719" rIns="45719"/>
-          <a:lstStyle/>
-          <a:p>
-            <a:pPr/>
-          </a:p>
-        </p:txBody>
-      </p:sp>
-      <p:sp>
-        <p:nvSpPr>
-          <p:cNvPr id="257" name="Shape 40"/>
-          <p:cNvSpPr/>
-          <p:nvPr/>
-        </p:nvSpPr>
-        <p:spPr>
-          <a:xfrm>
-            <a:off x="9143999" y="4286706"/>
-            <a:ext cx="487681" cy="65839"/>
-          </a:xfrm>
-          <a:prstGeom prst="line">
-            <a:avLst/>
-          </a:prstGeom>
-          <a:ln w="28575">
-            <a:solidFill>
-              <a:srgbClr val="D98C3F"/>
-            </a:solidFill>
-          </a:ln>
-        </p:spPr>
-        <p:txBody>
-          <a:bodyPr lIns="45719" rIns="45719"/>
-          <a:lstStyle/>
-          <a:p>
-            <a:pPr/>
-          </a:p>
-        </p:txBody>
-      </p:sp>
-      <p:sp>
-        <p:nvSpPr>
-          <p:cNvPr id="258" name="Shape 41"/>
-          <p:cNvSpPr/>
-          <p:nvPr/>
-        </p:nvSpPr>
-        <p:spPr>
-          <a:xfrm>
-            <a:off x="9631680" y="4352544"/>
-            <a:ext cx="487681" cy="65838"/>
-          </a:xfrm>
-          <a:prstGeom prst="line">
-            <a:avLst/>
-          </a:prstGeom>
-          <a:ln w="28575">
-            <a:solidFill>
-              <a:srgbClr val="D98C3F"/>
-            </a:solidFill>
-          </a:ln>
-        </p:spPr>
-        <p:txBody>
-          <a:bodyPr lIns="45719" rIns="45719"/>
-          <a:lstStyle/>
-          <a:p>
-            <a:pPr/>
-          </a:p>
-        </p:txBody>
-      </p:sp>
-      <p:sp>
-        <p:nvSpPr>
-          <p:cNvPr id="259" name="Shape 42"/>
-          <p:cNvSpPr/>
-          <p:nvPr/>
-        </p:nvSpPr>
-        <p:spPr>
-          <a:xfrm>
-            <a:off x="10119359" y="4418381"/>
-            <a:ext cx="487681" cy="57606"/>
-          </a:xfrm>
-          <a:prstGeom prst="line">
-            <a:avLst/>
-          </a:prstGeom>
-          <a:ln w="28575">
-            <a:solidFill>
-              <a:srgbClr val="D98C3F"/>
-            </a:solidFill>
-          </a:ln>
-        </p:spPr>
-        <p:txBody>
-          <a:bodyPr lIns="45719" rIns="45719"/>
-          <a:lstStyle/>
-          <a:p>
-            <a:pPr/>
-          </a:p>
-        </p:txBody>
-      </p:sp>
-      <p:sp>
-        <p:nvSpPr>
-          <p:cNvPr id="260" name="Shape 43"/>
-          <p:cNvSpPr/>
-          <p:nvPr/>
-        </p:nvSpPr>
-        <p:spPr>
-          <a:xfrm>
-            <a:off x="868680" y="4919471"/>
-            <a:ext cx="3200401" cy="1051561"/>
-          </a:xfrm>
-          <a:prstGeom prst="roundRect">
-            <a:avLst>
-              <a:gd name="adj" fmla="val 5217"/>
-            </a:avLst>
-          </a:prstGeom>
-          <a:solidFill>
-            <a:srgbClr val="1F3A2E"/>
-          </a:solidFill>
-          <a:ln w="12700">
-            <a:solidFill>
-              <a:srgbClr val="2E5443"/>
-            </a:solidFill>
-          </a:ln>
-        </p:spPr>
-        <p:txBody>
-          <a:bodyPr lIns="45719" rIns="45719"/>
-          <a:lstStyle/>
-          <a:p>
-            <a:pPr/>
-          </a:p>
-        </p:txBody>
-      </p:sp>
-      <p:sp>
-        <p:nvSpPr>
-          <p:cNvPr id="261" name="Text 44"/>
-          <p:cNvSpPr txBox="1"/>
-          <p:nvPr/>
-        </p:nvSpPr>
-        <p:spPr>
-          <a:xfrm>
-            <a:off x="1078991" y="5040543"/>
-            <a:ext cx="2743201" cy="205914"/>
-          </a:xfrm>
-          <a:prstGeom prst="rect">
-            <a:avLst/>
-          </a:prstGeom>
-          <a:ln w="12700">
-            <a:miter lim="400000"/>
-          </a:ln>
-          <a:extLst>
-            <a:ext uri="{C572A759-6A51-4108-AA02-DFA0A04FC94B}">
-              <ma14:wrappingTextBoxFlag xmlns:ma14="http://schemas.microsoft.com/office/mac/drawingml/2011/main" val="1"/>
-            </a:ext>
-          </a:extLst>
-        </p:spPr>
-        <p:txBody>
-          <a:bodyPr lIns="45719" rIns="45719" anchor="ctr">
+            <a:r>
+              <a:rPr lang="es-ES" dirty="0"/>
+              <a:t>OVINOS / CAPRINOS</a:t>
+            </a:r>
+            <a:endParaRPr dirty="0"/>
+          </a:p>
+        </p:txBody>
+      </p:sp>
+      <p:sp>
+        <p:nvSpPr>
+          <p:cNvPr id="8" name="Text 5">
+            <a:extLst>
+              <a:ext uri="{FF2B5EF4-FFF2-40B4-BE49-F238E27FC236}">
+                <a16:creationId xmlns:a16="http://schemas.microsoft.com/office/drawing/2014/main" id="{E4ADEBD9-D916-F0E8-A171-54D015EDAB4B}"/>
+              </a:ext>
+            </a:extLst>
+          </p:cNvPr>
+          <p:cNvSpPr txBox="1"/>
+          <p:nvPr/>
+        </p:nvSpPr>
+        <p:spPr>
+          <a:xfrm>
+            <a:off x="868679" y="3658337"/>
+            <a:ext cx="3020833" cy="276999"/>
+          </a:xfrm>
+          <a:prstGeom prst="rect">
+            <a:avLst/>
+          </a:prstGeom>
+          <a:ln w="12700">
+            <a:miter lim="400000"/>
+          </a:ln>
+          <a:extLst>
+            <a:ext uri="{C572A759-6A51-4108-AA02-DFA0A04FC94B}">
+              <ma14:wrappingTextBoxFlag xmlns="" xmlns:m="http://schemas.openxmlformats.org/officeDocument/2006/math" xmlns:a14="http://schemas.microsoft.com/office/drawing/2010/main" xmlns:ma14="http://schemas.microsoft.com/office/mac/drawingml/2011/main" val="1"/>
+            </a:ext>
+          </a:extLst>
+        </p:spPr>
+        <p:txBody>
+          <a:bodyPr wrap="square" lIns="45719" rIns="45719" anchor="ctr">
             <a:spAutoFit/>
           </a:bodyPr>
           <a:lstStyle>
             <a:lvl1pPr>
-              <a:defRPr b="1" sz="900">
+              <a:defRPr sz="1200" b="1">
                 <a:solidFill>
                   <a:srgbClr val="FFFFFF"/>
                 </a:solidFill>
@@ -15455,337 +14390,19 @@
             </a:lvl1pPr>
           </a:lstStyle>
           <a:p>
-            <a:pPr/>
-            <a:r>
-              <a:t>Reparto CH₄ / N₂O</a:t>
-            </a:r>
-          </a:p>
-        </p:txBody>
-      </p:sp>
-      <p:sp>
-        <p:nvSpPr>
-          <p:cNvPr id="262" name="Shape 45"/>
-          <p:cNvSpPr/>
-          <p:nvPr/>
-        </p:nvSpPr>
-        <p:spPr>
-          <a:xfrm>
-            <a:off x="1143000" y="5285232"/>
-            <a:ext cx="621792" cy="621793"/>
-          </a:xfrm>
-          <a:custGeom>
-            <a:avLst/>
-            <a:gdLst/>
-            <a:ahLst/>
-            <a:cxnLst>
-              <a:cxn ang="0">
-                <a:pos x="wd2" y="hd2"/>
-              </a:cxn>
-              <a:cxn ang="5400000">
-                <a:pos x="wd2" y="hd2"/>
-              </a:cxn>
-              <a:cxn ang="10800000">
-                <a:pos x="wd2" y="hd2"/>
-              </a:cxn>
-              <a:cxn ang="16200000">
-                <a:pos x="wd2" y="hd2"/>
-              </a:cxn>
-            </a:cxnLst>
-            <a:rect l="0" t="0" r="r" b="b"/>
-            <a:pathLst>
-              <a:path w="21600" h="21600" fill="norm" stroke="1" extrusionOk="0">
-                <a:moveTo>
-                  <a:pt x="21600" y="10800"/>
-                </a:moveTo>
-                <a:cubicBezTo>
-                  <a:pt x="21600" y="16765"/>
-                  <a:pt x="16765" y="21600"/>
-                  <a:pt x="10800" y="21600"/>
-                </a:cubicBezTo>
-                <a:cubicBezTo>
-                  <a:pt x="4835" y="21600"/>
-                  <a:pt x="0" y="16765"/>
-                  <a:pt x="0" y="10800"/>
-                </a:cubicBezTo>
-                <a:cubicBezTo>
-                  <a:pt x="0" y="4835"/>
-                  <a:pt x="4835" y="0"/>
-                  <a:pt x="10800" y="0"/>
-                </a:cubicBezTo>
-                <a:cubicBezTo>
-                  <a:pt x="16765" y="0"/>
-                  <a:pt x="21600" y="4835"/>
-                  <a:pt x="21600" y="10800"/>
-                </a:cubicBezTo>
-                <a:lnTo>
-                  <a:pt x="10800" y="10800"/>
-                </a:lnTo>
-                <a:close/>
-              </a:path>
-            </a:pathLst>
-          </a:custGeom>
-          <a:solidFill>
-            <a:srgbClr val="3A6B8F"/>
-          </a:solidFill>
-          <a:ln w="12700">
-            <a:miter lim="400000"/>
-          </a:ln>
-        </p:spPr>
-        <p:txBody>
-          <a:bodyPr lIns="45719" rIns="45719"/>
-          <a:lstStyle/>
-          <a:p>
-            <a:pPr/>
-          </a:p>
-        </p:txBody>
-      </p:sp>
-      <p:sp>
-        <p:nvSpPr>
-          <p:cNvPr id="263" name="Shape 46"/>
-          <p:cNvSpPr/>
-          <p:nvPr/>
-        </p:nvSpPr>
-        <p:spPr>
-          <a:xfrm>
-            <a:off x="1143000" y="5285232"/>
-            <a:ext cx="621792" cy="621793"/>
-          </a:xfrm>
-          <a:custGeom>
-            <a:avLst/>
-            <a:gdLst/>
-            <a:ahLst/>
-            <a:cxnLst>
-              <a:cxn ang="0">
-                <a:pos x="wd2" y="hd2"/>
-              </a:cxn>
-              <a:cxn ang="5400000">
-                <a:pos x="wd2" y="hd2"/>
-              </a:cxn>
-              <a:cxn ang="10800000">
-                <a:pos x="wd2" y="hd2"/>
-              </a:cxn>
-              <a:cxn ang="16200000">
-                <a:pos x="wd2" y="hd2"/>
-              </a:cxn>
-            </a:cxnLst>
-            <a:rect l="0" t="0" r="r" b="b"/>
-            <a:pathLst>
-              <a:path w="21600" h="21600" fill="norm" stroke="1" extrusionOk="0">
-                <a:moveTo>
-                  <a:pt x="21600" y="10800"/>
-                </a:moveTo>
-                <a:cubicBezTo>
-                  <a:pt x="21600" y="16765"/>
-                  <a:pt x="16765" y="21600"/>
-                  <a:pt x="10800" y="21600"/>
-                </a:cubicBezTo>
-                <a:cubicBezTo>
-                  <a:pt x="4835" y="21600"/>
-                  <a:pt x="0" y="16765"/>
-                  <a:pt x="0" y="10800"/>
-                </a:cubicBezTo>
-                <a:cubicBezTo>
-                  <a:pt x="0" y="4835"/>
-                  <a:pt x="4835" y="0"/>
-                  <a:pt x="10800" y="0"/>
-                </a:cubicBezTo>
-                <a:cubicBezTo>
-                  <a:pt x="12390" y="0"/>
-                  <a:pt x="13960" y="351"/>
-                  <a:pt x="15398" y="1028"/>
-                </a:cubicBezTo>
-                <a:lnTo>
-                  <a:pt x="10800" y="10800"/>
-                </a:lnTo>
-                <a:close/>
-              </a:path>
-            </a:pathLst>
-          </a:custGeom>
-          <a:solidFill>
-            <a:srgbClr val="B5443A"/>
-          </a:solidFill>
-          <a:ln w="12700">
-            <a:miter lim="400000"/>
-          </a:ln>
-        </p:spPr>
-        <p:txBody>
-          <a:bodyPr lIns="45719" rIns="45719"/>
-          <a:lstStyle/>
-          <a:p>
-            <a:pPr/>
-          </a:p>
-        </p:txBody>
-      </p:sp>
-      <p:sp>
-        <p:nvSpPr>
-          <p:cNvPr id="264" name="Text 47"/>
-          <p:cNvSpPr txBox="1"/>
-          <p:nvPr/>
-        </p:nvSpPr>
-        <p:spPr>
-          <a:xfrm>
-            <a:off x="2011680" y="5427892"/>
-            <a:ext cx="1828801" cy="345615"/>
-          </a:xfrm>
-          <a:prstGeom prst="rect">
-            <a:avLst/>
-          </a:prstGeom>
-          <a:ln w="12700">
-            <a:miter lim="400000"/>
-          </a:ln>
-          <a:extLst>
-            <a:ext uri="{C572A759-6A51-4108-AA02-DFA0A04FC94B}">
-              <ma14:wrappingTextBoxFlag xmlns:ma14="http://schemas.microsoft.com/office/mac/drawingml/2011/main" val="1"/>
-            </a:ext>
-          </a:extLst>
-        </p:spPr>
-        <p:txBody>
-          <a:bodyPr lIns="45719" rIns="45719" anchor="ctr">
-            <a:spAutoFit/>
-          </a:bodyPr>
-          <a:lstStyle/>
-          <a:p>
-            <a:pPr>
-              <a:defRPr sz="900">
-                <a:solidFill>
-                  <a:srgbClr val="D6E5DA"/>
-                </a:solidFill>
-              </a:defRPr>
-            </a:pPr>
-            <a:r>
-              <a:t>CH₄  82%</a:t>
-            </a:r>
-          </a:p>
-          <a:p>
-            <a:pPr>
-              <a:defRPr sz="900">
-                <a:solidFill>
-                  <a:srgbClr val="D6E5DA"/>
-                </a:solidFill>
-              </a:defRPr>
-            </a:pPr>
-            <a:r>
-              <a:t>N₂O  18%</a:t>
-            </a:r>
-          </a:p>
-        </p:txBody>
-      </p:sp>
-      <p:sp>
-        <p:nvSpPr>
-          <p:cNvPr id="265" name="Text 48"/>
-          <p:cNvSpPr txBox="1"/>
-          <p:nvPr/>
-        </p:nvSpPr>
-        <p:spPr>
-          <a:xfrm>
-            <a:off x="4389119" y="5463584"/>
-            <a:ext cx="6949441" cy="228512"/>
-          </a:xfrm>
-          <a:prstGeom prst="rect">
-            <a:avLst/>
-          </a:prstGeom>
-          <a:ln w="12700">
-            <a:miter lim="400000"/>
-          </a:ln>
-          <a:extLst>
-            <a:ext uri="{C572A759-6A51-4108-AA02-DFA0A04FC94B}">
-              <ma14:wrappingTextBoxFlag xmlns:ma14="http://schemas.microsoft.com/office/mac/drawingml/2011/main" val="1"/>
-            </a:ext>
-          </a:extLst>
-        </p:spPr>
-        <p:txBody>
-          <a:bodyPr lIns="45719" rIns="45719" anchor="ctr">
-            <a:spAutoFit/>
-          </a:bodyPr>
-          <a:lstStyle>
-            <a:lvl1pPr>
-              <a:defRPr i="1" sz="1000">
-                <a:solidFill>
-                  <a:srgbClr val="9FB6A8"/>
-                </a:solidFill>
-              </a:defRPr>
-            </a:lvl1pPr>
-          </a:lstStyle>
-          <a:p>
-            <a:pPr/>
-            <a:r>
-              <a:t>Filtro interactivo por tipo de emisión — el resto de visuales se actualiza al vuelo.</a:t>
-            </a:r>
-          </a:p>
-        </p:txBody>
-      </p:sp>
-      <p:sp>
-        <p:nvSpPr>
-          <p:cNvPr id="266" name="Shape 49"/>
-          <p:cNvSpPr/>
-          <p:nvPr/>
-        </p:nvSpPr>
-        <p:spPr>
-          <a:xfrm>
-            <a:off x="621791" y="6263640"/>
-            <a:ext cx="10972801" cy="365761"/>
-          </a:xfrm>
-          <a:prstGeom prst="roundRect">
-            <a:avLst>
-              <a:gd name="adj" fmla="val 15000"/>
-            </a:avLst>
-          </a:prstGeom>
-          <a:solidFill>
-            <a:srgbClr val="17291F"/>
-          </a:solidFill>
-          <a:ln w="12700">
-            <a:miter lim="400000"/>
-          </a:ln>
-        </p:spPr>
-        <p:txBody>
-          <a:bodyPr lIns="45719" rIns="45719"/>
-          <a:lstStyle/>
-          <a:p>
-            <a:pPr/>
-          </a:p>
-        </p:txBody>
-      </p:sp>
-      <p:sp>
-        <p:nvSpPr>
-          <p:cNvPr id="267" name="Text 50"/>
-          <p:cNvSpPr txBox="1"/>
-          <p:nvPr/>
-        </p:nvSpPr>
-        <p:spPr>
-          <a:xfrm>
-            <a:off x="868680" y="6343563"/>
-            <a:ext cx="10424160" cy="205914"/>
-          </a:xfrm>
-          <a:prstGeom prst="rect">
-            <a:avLst/>
-          </a:prstGeom>
-          <a:ln w="12700">
-            <a:miter lim="400000"/>
-          </a:ln>
-          <a:extLst>
-            <a:ext uri="{C572A759-6A51-4108-AA02-DFA0A04FC94B}">
-              <ma14:wrappingTextBoxFlag xmlns:ma14="http://schemas.microsoft.com/office/mac/drawingml/2011/main" val="1"/>
-            </a:ext>
-          </a:extLst>
-        </p:spPr>
-        <p:txBody>
-          <a:bodyPr lIns="45719" rIns="45719" anchor="ctr">
-            <a:spAutoFit/>
-          </a:bodyPr>
-          <a:lstStyle>
-            <a:lvl1pPr>
-              <a:defRPr i="1" sz="900">
-                <a:solidFill>
-                  <a:srgbClr val="6E8578"/>
-                </a:solidFill>
-              </a:defRPr>
-            </a:lvl1pPr>
-          </a:lstStyle>
-          <a:p>
-            <a:pPr/>
-            <a:r>
-              <a:t>Las otras 3 páginas repiten este layout con su propio incremento de cabezas: Aves +555,0% · Porcinos +137,5% · Ovinos/Caprinos +82,5% (1961–2023).</a:t>
-            </a:r>
+            <a:r>
+              <a:rPr lang="es-ES" dirty="0"/>
+              <a:t>PORCINOS</a:t>
+            </a:r>
+            <a:r>
+              <a:rPr dirty="0"/>
+              <a:t>  ·  </a:t>
+            </a:r>
+            <a:r>
+              <a:rPr lang="es-ES" dirty="0"/>
+              <a:t>porcinos, carne + porcinos, cría</a:t>
+            </a:r>
+            <a:endParaRPr dirty="0"/>
           </a:p>
         </p:txBody>
       </p:sp>
@@ -15794,12 +14411,12 @@
   <p:clrMapOvr>
     <a:masterClrMapping/>
   </p:clrMapOvr>
-  <p:transition xmlns:p14="http://schemas.microsoft.com/office/powerpoint/2010/main" spd="med" advClick="1"/>
+  <p:transition spd="med"/>
 </p:sld>
 </file>
 
 <file path=ppt/theme/theme1.xml><?xml version="1.0" encoding="utf-8"?>
-<a:theme xmlns:a="http://schemas.openxmlformats.org/drawingml/2006/main" xmlns:r="http://schemas.openxmlformats.org/officeDocument/2006/relationships" name="Office Theme">
+<a:theme xmlns:a="http://schemas.openxmlformats.org/drawingml/2006/main" name="Office Theme">
   <a:themeElements>
     <a:clrScheme name="Office Theme">
       <a:dk1>
@@ -16001,7 +14618,7 @@
         <a:effectLst/>
         <a:sp3d/>
       </a:spPr>
-      <a:bodyPr rot="0" spcFirstLastPara="1" vertOverflow="overflow" horzOverflow="overflow" vert="horz" wrap="square" lIns="45719" tIns="45719" rIns="45719" bIns="45719" numCol="1" spcCol="38100" rtlCol="0" anchor="ctr" upright="0">
+      <a:bodyPr rot="0" spcFirstLastPara="1" vertOverflow="overflow" horzOverflow="overflow" vert="horz" wrap="square" lIns="45719" tIns="45719" rIns="45719" bIns="45719" numCol="1" spcCol="38100" rtlCol="0" anchor="ctr">
         <a:spAutoFit/>
       </a:bodyPr>
       <a:lstStyle>
@@ -16020,7 +14637,7 @@
           <a:buFontTx/>
           <a:buNone/>
           <a:tabLst/>
-          <a:defRPr b="0" baseline="0" cap="none" i="0" spc="0" strike="noStrike" sz="1800" u="none" kumimoji="0" normalizeH="0">
+          <a:defRPr kumimoji="0" sz="1800" b="0" i="0" u="none" strike="noStrike" cap="none" spc="0" normalizeH="0" baseline="0">
             <a:ln>
               <a:noFill/>
             </a:ln>
@@ -16050,7 +14667,7 @@
           <a:buFontTx/>
           <a:buNone/>
           <a:tabLst/>
-          <a:defRPr b="0" baseline="0" cap="none" i="0" spc="0" strike="noStrike" sz="1800" u="none" kumimoji="0" normalizeH="0">
+          <a:defRPr kumimoji="0" sz="1800" b="0" i="0" u="none" strike="noStrike" cap="none" spc="0" normalizeH="0" baseline="0">
             <a:ln>
               <a:noFill/>
             </a:ln>
@@ -16076,7 +14693,7 @@
           <a:buFontTx/>
           <a:buNone/>
           <a:tabLst/>
-          <a:defRPr b="0" baseline="0" cap="none" i="0" spc="0" strike="noStrike" sz="1800" u="none" kumimoji="0" normalizeH="0">
+          <a:defRPr kumimoji="0" sz="1800" b="0" i="0" u="none" strike="noStrike" cap="none" spc="0" normalizeH="0" baseline="0">
             <a:ln>
               <a:noFill/>
             </a:ln>
@@ -16102,7 +14719,7 @@
           <a:buFontTx/>
           <a:buNone/>
           <a:tabLst/>
-          <a:defRPr b="0" baseline="0" cap="none" i="0" spc="0" strike="noStrike" sz="1800" u="none" kumimoji="0" normalizeH="0">
+          <a:defRPr kumimoji="0" sz="1800" b="0" i="0" u="none" strike="noStrike" cap="none" spc="0" normalizeH="0" baseline="0">
             <a:ln>
               <a:noFill/>
             </a:ln>
@@ -16128,7 +14745,7 @@
           <a:buFontTx/>
           <a:buNone/>
           <a:tabLst/>
-          <a:defRPr b="0" baseline="0" cap="none" i="0" spc="0" strike="noStrike" sz="1800" u="none" kumimoji="0" normalizeH="0">
+          <a:defRPr kumimoji="0" sz="1800" b="0" i="0" u="none" strike="noStrike" cap="none" spc="0" normalizeH="0" baseline="0">
             <a:ln>
               <a:noFill/>
             </a:ln>
@@ -16154,7 +14771,7 @@
           <a:buFontTx/>
           <a:buNone/>
           <a:tabLst/>
-          <a:defRPr b="0" baseline="0" cap="none" i="0" spc="0" strike="noStrike" sz="1800" u="none" kumimoji="0" normalizeH="0">
+          <a:defRPr kumimoji="0" sz="1800" b="0" i="0" u="none" strike="noStrike" cap="none" spc="0" normalizeH="0" baseline="0">
             <a:ln>
               <a:noFill/>
             </a:ln>
@@ -16180,7 +14797,7 @@
           <a:buFontTx/>
           <a:buNone/>
           <a:tabLst/>
-          <a:defRPr b="0" baseline="0" cap="none" i="0" spc="0" strike="noStrike" sz="1800" u="none" kumimoji="0" normalizeH="0">
+          <a:defRPr kumimoji="0" sz="1800" b="0" i="0" u="none" strike="noStrike" cap="none" spc="0" normalizeH="0" baseline="0">
             <a:ln>
               <a:noFill/>
             </a:ln>
@@ -16206,7 +14823,7 @@
           <a:buFontTx/>
           <a:buNone/>
           <a:tabLst/>
-          <a:defRPr b="0" baseline="0" cap="none" i="0" spc="0" strike="noStrike" sz="1800" u="none" kumimoji="0" normalizeH="0">
+          <a:defRPr kumimoji="0" sz="1800" b="0" i="0" u="none" strike="noStrike" cap="none" spc="0" normalizeH="0" baseline="0">
             <a:ln>
               <a:noFill/>
             </a:ln>
@@ -16232,7 +14849,7 @@
           <a:buFontTx/>
           <a:buNone/>
           <a:tabLst/>
-          <a:defRPr b="0" baseline="0" cap="none" i="0" spc="0" strike="noStrike" sz="1800" u="none" kumimoji="0" normalizeH="0">
+          <a:defRPr kumimoji="0" sz="1800" b="0" i="0" u="none" strike="noStrike" cap="none" spc="0" normalizeH="0" baseline="0">
             <a:ln>
               <a:noFill/>
             </a:ln>
@@ -16258,7 +14875,7 @@
           <a:buFontTx/>
           <a:buNone/>
           <a:tabLst/>
-          <a:defRPr b="0" baseline="0" cap="none" i="0" spc="0" strike="noStrike" sz="1800" u="none" kumimoji="0" normalizeH="0">
+          <a:defRPr kumimoji="0" sz="1800" b="0" i="0" u="none" strike="noStrike" cap="none" spc="0" normalizeH="0" baseline="0">
             <a:ln>
               <a:noFill/>
             </a:ln>
@@ -16271,9 +14888,15 @@
         </a:lvl9pPr>
       </a:lstStyle>
       <a:style>
-        <a:lnRef idx="0"/>
-        <a:fillRef idx="0"/>
-        <a:effectRef idx="0"/>
+        <a:lnRef idx="0">
+          <a:scrgbClr r="0" g="0" b="0"/>
+        </a:lnRef>
+        <a:fillRef idx="0">
+          <a:scrgbClr r="0" g="0" b="0"/>
+        </a:fillRef>
+        <a:effectRef idx="0">
+          <a:scrgbClr r="0" g="0" b="0"/>
+        </a:effectRef>
         <a:fontRef idx="none"/>
       </a:style>
     </a:spDef>
@@ -16290,7 +14913,7 @@
         <a:effectLst/>
         <a:sp3d/>
       </a:spPr>
-      <a:bodyPr rot="0" spcFirstLastPara="1" vertOverflow="overflow" horzOverflow="overflow" vert="horz" wrap="square" lIns="91439" tIns="45719" rIns="91439" bIns="45719" numCol="1" spcCol="38100" rtlCol="0" anchor="t" upright="0">
+      <a:bodyPr rot="0" spcFirstLastPara="1" vertOverflow="overflow" horzOverflow="overflow" vert="horz" wrap="square" lIns="91439" tIns="45719" rIns="91439" bIns="45719" numCol="1" spcCol="38100" rtlCol="0" anchor="t">
         <a:noAutofit/>
       </a:bodyPr>
       <a:lstStyle>
@@ -16309,7 +14932,7 @@
           <a:buFontTx/>
           <a:buNone/>
           <a:tabLst/>
-          <a:defRPr b="0" baseline="0" cap="none" i="0" spc="0" strike="noStrike" sz="1800" u="none" kumimoji="0" normalizeH="0">
+          <a:defRPr kumimoji="0" sz="1800" b="0" i="0" u="none" strike="noStrike" cap="none" spc="0" normalizeH="0" baseline="0">
             <a:ln>
               <a:noFill/>
             </a:ln>
@@ -16335,7 +14958,7 @@
           <a:buFontTx/>
           <a:buNone/>
           <a:tabLst/>
-          <a:defRPr b="0" baseline="0" cap="none" i="0" spc="0" strike="noStrike" sz="1800" u="none" kumimoji="0" normalizeH="0">
+          <a:defRPr kumimoji="0" sz="1800" b="0" i="0" u="none" strike="noStrike" cap="none" spc="0" normalizeH="0" baseline="0">
             <a:ln>
               <a:noFill/>
             </a:ln>
@@ -16361,7 +14984,7 @@
           <a:buFontTx/>
           <a:buNone/>
           <a:tabLst/>
-          <a:defRPr b="0" baseline="0" cap="none" i="0" spc="0" strike="noStrike" sz="1800" u="none" kumimoji="0" normalizeH="0">
+          <a:defRPr kumimoji="0" sz="1800" b="0" i="0" u="none" strike="noStrike" cap="none" spc="0" normalizeH="0" baseline="0">
             <a:ln>
               <a:noFill/>
             </a:ln>
@@ -16387,7 +15010,7 @@
           <a:buFontTx/>
           <a:buNone/>
           <a:tabLst/>
-          <a:defRPr b="0" baseline="0" cap="none" i="0" spc="0" strike="noStrike" sz="1800" u="none" kumimoji="0" normalizeH="0">
+          <a:defRPr kumimoji="0" sz="1800" b="0" i="0" u="none" strike="noStrike" cap="none" spc="0" normalizeH="0" baseline="0">
             <a:ln>
               <a:noFill/>
             </a:ln>
@@ -16413,7 +15036,7 @@
           <a:buFontTx/>
           <a:buNone/>
           <a:tabLst/>
-          <a:defRPr b="0" baseline="0" cap="none" i="0" spc="0" strike="noStrike" sz="1800" u="none" kumimoji="0" normalizeH="0">
+          <a:defRPr kumimoji="0" sz="1800" b="0" i="0" u="none" strike="noStrike" cap="none" spc="0" normalizeH="0" baseline="0">
             <a:ln>
               <a:noFill/>
             </a:ln>
@@ -16439,7 +15062,7 @@
           <a:buFontTx/>
           <a:buNone/>
           <a:tabLst/>
-          <a:defRPr b="0" baseline="0" cap="none" i="0" spc="0" strike="noStrike" sz="1800" u="none" kumimoji="0" normalizeH="0">
+          <a:defRPr kumimoji="0" sz="1800" b="0" i="0" u="none" strike="noStrike" cap="none" spc="0" normalizeH="0" baseline="0">
             <a:ln>
               <a:noFill/>
             </a:ln>
@@ -16465,7 +15088,7 @@
           <a:buFontTx/>
           <a:buNone/>
           <a:tabLst/>
-          <a:defRPr b="0" baseline="0" cap="none" i="0" spc="0" strike="noStrike" sz="1800" u="none" kumimoji="0" normalizeH="0">
+          <a:defRPr kumimoji="0" sz="1800" b="0" i="0" u="none" strike="noStrike" cap="none" spc="0" normalizeH="0" baseline="0">
             <a:ln>
               <a:noFill/>
             </a:ln>
@@ -16491,7 +15114,7 @@
           <a:buFontTx/>
           <a:buNone/>
           <a:tabLst/>
-          <a:defRPr b="0" baseline="0" cap="none" i="0" spc="0" strike="noStrike" sz="1800" u="none" kumimoji="0" normalizeH="0">
+          <a:defRPr kumimoji="0" sz="1800" b="0" i="0" u="none" strike="noStrike" cap="none" spc="0" normalizeH="0" baseline="0">
             <a:ln>
               <a:noFill/>
             </a:ln>
@@ -16517,7 +15140,7 @@
           <a:buFontTx/>
           <a:buNone/>
           <a:tabLst/>
-          <a:defRPr b="0" baseline="0" cap="none" i="0" spc="0" strike="noStrike" sz="1800" u="none" kumimoji="0" normalizeH="0">
+          <a:defRPr kumimoji="0" sz="1800" b="0" i="0" u="none" strike="noStrike" cap="none" spc="0" normalizeH="0" baseline="0">
             <a:ln>
               <a:noFill/>
             </a:ln>
@@ -16543,7 +15166,7 @@
           <a:buFontTx/>
           <a:buNone/>
           <a:tabLst/>
-          <a:defRPr b="0" baseline="0" cap="none" i="0" spc="0" strike="noStrike" sz="1800" u="none" kumimoji="0" normalizeH="0">
+          <a:defRPr kumimoji="0" sz="1800" b="0" i="0" u="none" strike="noStrike" cap="none" spc="0" normalizeH="0" baseline="0">
             <a:ln>
               <a:noFill/>
             </a:ln>
@@ -16556,9 +15179,15 @@
         </a:lvl9pPr>
       </a:lstStyle>
       <a:style>
-        <a:lnRef idx="0"/>
-        <a:fillRef idx="0"/>
-        <a:effectRef idx="0"/>
+        <a:lnRef idx="0">
+          <a:scrgbClr r="0" g="0" b="0"/>
+        </a:lnRef>
+        <a:fillRef idx="0">
+          <a:scrgbClr r="0" g="0" b="0"/>
+        </a:fillRef>
+        <a:effectRef idx="0">
+          <a:scrgbClr r="0" g="0" b="0"/>
+        </a:effectRef>
         <a:fontRef idx="none"/>
       </a:style>
     </a:lnDef>
@@ -16572,7 +15201,7 @@
         <a:effectLst/>
         <a:sp3d/>
       </a:spPr>
-      <a:bodyPr rot="0" spcFirstLastPara="1" vertOverflow="overflow" horzOverflow="overflow" vert="horz" wrap="square" lIns="45719" tIns="45719" rIns="45719" bIns="45719" numCol="1" spcCol="38100" rtlCol="0" anchor="t" upright="0">
+      <a:bodyPr rot="0" spcFirstLastPara="1" vertOverflow="overflow" horzOverflow="overflow" vert="horz" wrap="square" lIns="45719" tIns="45719" rIns="45719" bIns="45719" numCol="1" spcCol="38100" rtlCol="0" anchor="t">
         <a:spAutoFit/>
       </a:bodyPr>
       <a:lstStyle>
@@ -16591,7 +15220,7 @@
           <a:buFontTx/>
           <a:buNone/>
           <a:tabLst/>
-          <a:defRPr b="0" baseline="0" cap="none" i="0" spc="0" strike="noStrike" sz="1800" u="none" kumimoji="0" normalizeH="0">
+          <a:defRPr kumimoji="0" sz="1800" b="0" i="0" u="none" strike="noStrike" cap="none" spc="0" normalizeH="0" baseline="0">
             <a:ln>
               <a:noFill/>
             </a:ln>
@@ -16621,7 +15250,7 @@
           <a:buFontTx/>
           <a:buNone/>
           <a:tabLst/>
-          <a:defRPr b="0" baseline="0" cap="none" i="0" spc="0" strike="noStrike" sz="1800" u="none" kumimoji="0" normalizeH="0">
+          <a:defRPr kumimoji="0" sz="1800" b="0" i="0" u="none" strike="noStrike" cap="none" spc="0" normalizeH="0" baseline="0">
             <a:ln>
               <a:noFill/>
             </a:ln>
@@ -16647,7 +15276,7 @@
           <a:buFontTx/>
           <a:buNone/>
           <a:tabLst/>
-          <a:defRPr b="0" baseline="0" cap="none" i="0" spc="0" strike="noStrike" sz="1800" u="none" kumimoji="0" normalizeH="0">
+          <a:defRPr kumimoji="0" sz="1800" b="0" i="0" u="none" strike="noStrike" cap="none" spc="0" normalizeH="0" baseline="0">
             <a:ln>
               <a:noFill/>
             </a:ln>
@@ -16673,7 +15302,7 @@
           <a:buFontTx/>
           <a:buNone/>
           <a:tabLst/>
-          <a:defRPr b="0" baseline="0" cap="none" i="0" spc="0" strike="noStrike" sz="1800" u="none" kumimoji="0" normalizeH="0">
+          <a:defRPr kumimoji="0" sz="1800" b="0" i="0" u="none" strike="noStrike" cap="none" spc="0" normalizeH="0" baseline="0">
             <a:ln>
               <a:noFill/>
             </a:ln>
@@ -16699,7 +15328,7 @@
           <a:buFontTx/>
           <a:buNone/>
           <a:tabLst/>
-          <a:defRPr b="0" baseline="0" cap="none" i="0" spc="0" strike="noStrike" sz="1800" u="none" kumimoji="0" normalizeH="0">
+          <a:defRPr kumimoji="0" sz="1800" b="0" i="0" u="none" strike="noStrike" cap="none" spc="0" normalizeH="0" baseline="0">
             <a:ln>
               <a:noFill/>
             </a:ln>
@@ -16725,7 +15354,7 @@
           <a:buFontTx/>
           <a:buNone/>
           <a:tabLst/>
-          <a:defRPr b="0" baseline="0" cap="none" i="0" spc="0" strike="noStrike" sz="1800" u="none" kumimoji="0" normalizeH="0">
+          <a:defRPr kumimoji="0" sz="1800" b="0" i="0" u="none" strike="noStrike" cap="none" spc="0" normalizeH="0" baseline="0">
             <a:ln>
               <a:noFill/>
             </a:ln>
@@ -16751,7 +15380,7 @@
           <a:buFontTx/>
           <a:buNone/>
           <a:tabLst/>
-          <a:defRPr b="0" baseline="0" cap="none" i="0" spc="0" strike="noStrike" sz="1800" u="none" kumimoji="0" normalizeH="0">
+          <a:defRPr kumimoji="0" sz="1800" b="0" i="0" u="none" strike="noStrike" cap="none" spc="0" normalizeH="0" baseline="0">
             <a:ln>
               <a:noFill/>
             </a:ln>
@@ -16777,7 +15406,7 @@
           <a:buFontTx/>
           <a:buNone/>
           <a:tabLst/>
-          <a:defRPr b="0" baseline="0" cap="none" i="0" spc="0" strike="noStrike" sz="1800" u="none" kumimoji="0" normalizeH="0">
+          <a:defRPr kumimoji="0" sz="1800" b="0" i="0" u="none" strike="noStrike" cap="none" spc="0" normalizeH="0" baseline="0">
             <a:ln>
               <a:noFill/>
             </a:ln>
@@ -16803,7 +15432,7 @@
           <a:buFontTx/>
           <a:buNone/>
           <a:tabLst/>
-          <a:defRPr b="0" baseline="0" cap="none" i="0" spc="0" strike="noStrike" sz="1800" u="none" kumimoji="0" normalizeH="0">
+          <a:defRPr kumimoji="0" sz="1800" b="0" i="0" u="none" strike="noStrike" cap="none" spc="0" normalizeH="0" baseline="0">
             <a:ln>
               <a:noFill/>
             </a:ln>
@@ -16829,7 +15458,7 @@
           <a:buFontTx/>
           <a:buNone/>
           <a:tabLst/>
-          <a:defRPr b="0" baseline="0" cap="none" i="0" spc="0" strike="noStrike" sz="1800" u="none" kumimoji="0" normalizeH="0">
+          <a:defRPr kumimoji="0" sz="1800" b="0" i="0" u="none" strike="noStrike" cap="none" spc="0" normalizeH="0" baseline="0">
             <a:ln>
               <a:noFill/>
             </a:ln>
@@ -16842,18 +15471,25 @@
         </a:lvl9pPr>
       </a:lstStyle>
       <a:style>
-        <a:lnRef idx="0"/>
-        <a:fillRef idx="0"/>
-        <a:effectRef idx="0"/>
+        <a:lnRef idx="0">
+          <a:scrgbClr r="0" g="0" b="0"/>
+        </a:lnRef>
+        <a:fillRef idx="0">
+          <a:scrgbClr r="0" g="0" b="0"/>
+        </a:fillRef>
+        <a:effectRef idx="0">
+          <a:scrgbClr r="0" g="0" b="0"/>
+        </a:effectRef>
         <a:fontRef idx="none"/>
       </a:style>
     </a:txDef>
   </a:objectDefaults>
+  <a:extraClrSchemeLst/>
 </a:theme>
 </file>
 
 <file path=ppt/theme/theme2.xml><?xml version="1.0" encoding="utf-8"?>
-<a:theme xmlns:a="http://schemas.openxmlformats.org/drawingml/2006/main" xmlns:r="http://schemas.openxmlformats.org/officeDocument/2006/relationships" name="Office Theme">
+<a:theme xmlns:a="http://schemas.openxmlformats.org/drawingml/2006/main" name="Office Theme">
   <a:themeElements>
     <a:clrScheme name="Office Theme">
       <a:dk1>
@@ -17055,7 +15691,7 @@
         <a:effectLst/>
         <a:sp3d/>
       </a:spPr>
-      <a:bodyPr rot="0" spcFirstLastPara="1" vertOverflow="overflow" horzOverflow="overflow" vert="horz" wrap="square" lIns="45719" tIns="45719" rIns="45719" bIns="45719" numCol="1" spcCol="38100" rtlCol="0" anchor="ctr" upright="0">
+      <a:bodyPr rot="0" spcFirstLastPara="1" vertOverflow="overflow" horzOverflow="overflow" vert="horz" wrap="square" lIns="45719" tIns="45719" rIns="45719" bIns="45719" numCol="1" spcCol="38100" rtlCol="0" anchor="ctr">
         <a:spAutoFit/>
       </a:bodyPr>
       <a:lstStyle>
@@ -17074,7 +15710,7 @@
           <a:buFontTx/>
           <a:buNone/>
           <a:tabLst/>
-          <a:defRPr b="0" baseline="0" cap="none" i="0" spc="0" strike="noStrike" sz="1800" u="none" kumimoji="0" normalizeH="0">
+          <a:defRPr kumimoji="0" sz="1800" b="0" i="0" u="none" strike="noStrike" cap="none" spc="0" normalizeH="0" baseline="0">
             <a:ln>
               <a:noFill/>
             </a:ln>
@@ -17104,7 +15740,7 @@
           <a:buFontTx/>
           <a:buNone/>
           <a:tabLst/>
-          <a:defRPr b="0" baseline="0" cap="none" i="0" spc="0" strike="noStrike" sz="1800" u="none" kumimoji="0" normalizeH="0">
+          <a:defRPr kumimoji="0" sz="1800" b="0" i="0" u="none" strike="noStrike" cap="none" spc="0" normalizeH="0" baseline="0">
             <a:ln>
               <a:noFill/>
             </a:ln>
@@ -17130,7 +15766,7 @@
           <a:buFontTx/>
           <a:buNone/>
           <a:tabLst/>
-          <a:defRPr b="0" baseline="0" cap="none" i="0" spc="0" strike="noStrike" sz="1800" u="none" kumimoji="0" normalizeH="0">
+          <a:defRPr kumimoji="0" sz="1800" b="0" i="0" u="none" strike="noStrike" cap="none" spc="0" normalizeH="0" baseline="0">
             <a:ln>
               <a:noFill/>
             </a:ln>
@@ -17156,7 +15792,7 @@
           <a:buFontTx/>
           <a:buNone/>
           <a:tabLst/>
-          <a:defRPr b="0" baseline="0" cap="none" i="0" spc="0" strike="noStrike" sz="1800" u="none" kumimoji="0" normalizeH="0">
+          <a:defRPr kumimoji="0" sz="1800" b="0" i="0" u="none" strike="noStrike" cap="none" spc="0" normalizeH="0" baseline="0">
             <a:ln>
               <a:noFill/>
             </a:ln>
@@ -17182,7 +15818,7 @@
           <a:buFontTx/>
           <a:buNone/>
           <a:tabLst/>
-          <a:defRPr b="0" baseline="0" cap="none" i="0" spc="0" strike="noStrike" sz="1800" u="none" kumimoji="0" normalizeH="0">
+          <a:defRPr kumimoji="0" sz="1800" b="0" i="0" u="none" strike="noStrike" cap="none" spc="0" normalizeH="0" baseline="0">
             <a:ln>
               <a:noFill/>
             </a:ln>
@@ -17208,7 +15844,7 @@
           <a:buFontTx/>
           <a:buNone/>
           <a:tabLst/>
-          <a:defRPr b="0" baseline="0" cap="none" i="0" spc="0" strike="noStrike" sz="1800" u="none" kumimoji="0" normalizeH="0">
+          <a:defRPr kumimoji="0" sz="1800" b="0" i="0" u="none" strike="noStrike" cap="none" spc="0" normalizeH="0" baseline="0">
             <a:ln>
               <a:noFill/>
             </a:ln>
@@ -17234,7 +15870,7 @@
           <a:buFontTx/>
           <a:buNone/>
           <a:tabLst/>
-          <a:defRPr b="0" baseline="0" cap="none" i="0" spc="0" strike="noStrike" sz="1800" u="none" kumimoji="0" normalizeH="0">
+          <a:defRPr kumimoji="0" sz="1800" b="0" i="0" u="none" strike="noStrike" cap="none" spc="0" normalizeH="0" baseline="0">
             <a:ln>
               <a:noFill/>
             </a:ln>
@@ -17260,7 +15896,7 @@
           <a:buFontTx/>
           <a:buNone/>
           <a:tabLst/>
-          <a:defRPr b="0" baseline="0" cap="none" i="0" spc="0" strike="noStrike" sz="1800" u="none" kumimoji="0" normalizeH="0">
+          <a:defRPr kumimoji="0" sz="1800" b="0" i="0" u="none" strike="noStrike" cap="none" spc="0" normalizeH="0" baseline="0">
             <a:ln>
               <a:noFill/>
             </a:ln>
@@ -17286,7 +15922,7 @@
           <a:buFontTx/>
           <a:buNone/>
           <a:tabLst/>
-          <a:defRPr b="0" baseline="0" cap="none" i="0" spc="0" strike="noStrike" sz="1800" u="none" kumimoji="0" normalizeH="0">
+          <a:defRPr kumimoji="0" sz="1800" b="0" i="0" u="none" strike="noStrike" cap="none" spc="0" normalizeH="0" baseline="0">
             <a:ln>
               <a:noFill/>
             </a:ln>
@@ -17312,7 +15948,7 @@
           <a:buFontTx/>
           <a:buNone/>
           <a:tabLst/>
-          <a:defRPr b="0" baseline="0" cap="none" i="0" spc="0" strike="noStrike" sz="1800" u="none" kumimoji="0" normalizeH="0">
+          <a:defRPr kumimoji="0" sz="1800" b="0" i="0" u="none" strike="noStrike" cap="none" spc="0" normalizeH="0" baseline="0">
             <a:ln>
               <a:noFill/>
             </a:ln>
@@ -17325,9 +15961,15 @@
         </a:lvl9pPr>
       </a:lstStyle>
       <a:style>
-        <a:lnRef idx="0"/>
-        <a:fillRef idx="0"/>
-        <a:effectRef idx="0"/>
+        <a:lnRef idx="0">
+          <a:scrgbClr r="0" g="0" b="0"/>
+        </a:lnRef>
+        <a:fillRef idx="0">
+          <a:scrgbClr r="0" g="0" b="0"/>
+        </a:fillRef>
+        <a:effectRef idx="0">
+          <a:scrgbClr r="0" g="0" b="0"/>
+        </a:effectRef>
         <a:fontRef idx="none"/>
       </a:style>
     </a:spDef>
@@ -17344,7 +15986,7 @@
         <a:effectLst/>
         <a:sp3d/>
       </a:spPr>
-      <a:bodyPr rot="0" spcFirstLastPara="1" vertOverflow="overflow" horzOverflow="overflow" vert="horz" wrap="square" lIns="91439" tIns="45719" rIns="91439" bIns="45719" numCol="1" spcCol="38100" rtlCol="0" anchor="t" upright="0">
+      <a:bodyPr rot="0" spcFirstLastPara="1" vertOverflow="overflow" horzOverflow="overflow" vert="horz" wrap="square" lIns="91439" tIns="45719" rIns="91439" bIns="45719" numCol="1" spcCol="38100" rtlCol="0" anchor="t">
         <a:noAutofit/>
       </a:bodyPr>
       <a:lstStyle>
@@ -17363,7 +16005,7 @@
           <a:buFontTx/>
           <a:buNone/>
           <a:tabLst/>
-          <a:defRPr b="0" baseline="0" cap="none" i="0" spc="0" strike="noStrike" sz="1800" u="none" kumimoji="0" normalizeH="0">
+          <a:defRPr kumimoji="0" sz="1800" b="0" i="0" u="none" strike="noStrike" cap="none" spc="0" normalizeH="0" baseline="0">
             <a:ln>
               <a:noFill/>
             </a:ln>
@@ -17389,7 +16031,7 @@
           <a:buFontTx/>
           <a:buNone/>
           <a:tabLst/>
-          <a:defRPr b="0" baseline="0" cap="none" i="0" spc="0" strike="noStrike" sz="1800" u="none" kumimoji="0" normalizeH="0">
+          <a:defRPr kumimoji="0" sz="1800" b="0" i="0" u="none" strike="noStrike" cap="none" spc="0" normalizeH="0" baseline="0">
             <a:ln>
               <a:noFill/>
             </a:ln>
@@ -17415,7 +16057,7 @@
           <a:buFontTx/>
           <a:buNone/>
           <a:tabLst/>
-          <a:defRPr b="0" baseline="0" cap="none" i="0" spc="0" strike="noStrike" sz="1800" u="none" kumimoji="0" normalizeH="0">
+          <a:defRPr kumimoji="0" sz="1800" b="0" i="0" u="none" strike="noStrike" cap="none" spc="0" normalizeH="0" baseline="0">
             <a:ln>
               <a:noFill/>
             </a:ln>
@@ -17441,7 +16083,7 @@
           <a:buFontTx/>
           <a:buNone/>
           <a:tabLst/>
-          <a:defRPr b="0" baseline="0" cap="none" i="0" spc="0" strike="noStrike" sz="1800" u="none" kumimoji="0" normalizeH="0">
+          <a:defRPr kumimoji="0" sz="1800" b="0" i="0" u="none" strike="noStrike" cap="none" spc="0" normalizeH="0" baseline="0">
             <a:ln>
               <a:noFill/>
             </a:ln>
@@ -17467,7 +16109,7 @@
           <a:buFontTx/>
           <a:buNone/>
           <a:tabLst/>
-          <a:defRPr b="0" baseline="0" cap="none" i="0" spc="0" strike="noStrike" sz="1800" u="none" kumimoji="0" normalizeH="0">
+          <a:defRPr kumimoji="0" sz="1800" b="0" i="0" u="none" strike="noStrike" cap="none" spc="0" normalizeH="0" baseline="0">
             <a:ln>
               <a:noFill/>
             </a:ln>
@@ -17493,7 +16135,7 @@
           <a:buFontTx/>
           <a:buNone/>
           <a:tabLst/>
-          <a:defRPr b="0" baseline="0" cap="none" i="0" spc="0" strike="noStrike" sz="1800" u="none" kumimoji="0" normalizeH="0">
+          <a:defRPr kumimoji="0" sz="1800" b="0" i="0" u="none" strike="noStrike" cap="none" spc="0" normalizeH="0" baseline="0">
             <a:ln>
               <a:noFill/>
             </a:ln>
@@ -17519,7 +16161,7 @@
           <a:buFontTx/>
           <a:buNone/>
           <a:tabLst/>
-          <a:defRPr b="0" baseline="0" cap="none" i="0" spc="0" strike="noStrike" sz="1800" u="none" kumimoji="0" normalizeH="0">
+          <a:defRPr kumimoji="0" sz="1800" b="0" i="0" u="none" strike="noStrike" cap="none" spc="0" normalizeH="0" baseline="0">
             <a:ln>
               <a:noFill/>
             </a:ln>
@@ -17545,7 +16187,7 @@
           <a:buFontTx/>
           <a:buNone/>
           <a:tabLst/>
-          <a:defRPr b="0" baseline="0" cap="none" i="0" spc="0" strike="noStrike" sz="1800" u="none" kumimoji="0" normalizeH="0">
+          <a:defRPr kumimoji="0" sz="1800" b="0" i="0" u="none" strike="noStrike" cap="none" spc="0" normalizeH="0" baseline="0">
             <a:ln>
               <a:noFill/>
             </a:ln>
@@ -17571,7 +16213,7 @@
           <a:buFontTx/>
           <a:buNone/>
           <a:tabLst/>
-          <a:defRPr b="0" baseline="0" cap="none" i="0" spc="0" strike="noStrike" sz="1800" u="none" kumimoji="0" normalizeH="0">
+          <a:defRPr kumimoji="0" sz="1800" b="0" i="0" u="none" strike="noStrike" cap="none" spc="0" normalizeH="0" baseline="0">
             <a:ln>
               <a:noFill/>
             </a:ln>
@@ -17597,7 +16239,7 @@
           <a:buFontTx/>
           <a:buNone/>
           <a:tabLst/>
-          <a:defRPr b="0" baseline="0" cap="none" i="0" spc="0" strike="noStrike" sz="1800" u="none" kumimoji="0" normalizeH="0">
+          <a:defRPr kumimoji="0" sz="1800" b="0" i="0" u="none" strike="noStrike" cap="none" spc="0" normalizeH="0" baseline="0">
             <a:ln>
               <a:noFill/>
             </a:ln>
@@ -17610,9 +16252,15 @@
         </a:lvl9pPr>
       </a:lstStyle>
       <a:style>
-        <a:lnRef idx="0"/>
-        <a:fillRef idx="0"/>
-        <a:effectRef idx="0"/>
+        <a:lnRef idx="0">
+          <a:scrgbClr r="0" g="0" b="0"/>
+        </a:lnRef>
+        <a:fillRef idx="0">
+          <a:scrgbClr r="0" g="0" b="0"/>
+        </a:fillRef>
+        <a:effectRef idx="0">
+          <a:scrgbClr r="0" g="0" b="0"/>
+        </a:effectRef>
         <a:fontRef idx="none"/>
       </a:style>
     </a:lnDef>
@@ -17626,7 +16274,7 @@
         <a:effectLst/>
         <a:sp3d/>
       </a:spPr>
-      <a:bodyPr rot="0" spcFirstLastPara="1" vertOverflow="overflow" horzOverflow="overflow" vert="horz" wrap="square" lIns="45719" tIns="45719" rIns="45719" bIns="45719" numCol="1" spcCol="38100" rtlCol="0" anchor="t" upright="0">
+      <a:bodyPr rot="0" spcFirstLastPara="1" vertOverflow="overflow" horzOverflow="overflow" vert="horz" wrap="square" lIns="45719" tIns="45719" rIns="45719" bIns="45719" numCol="1" spcCol="38100" rtlCol="0" anchor="t">
         <a:spAutoFit/>
       </a:bodyPr>
       <a:lstStyle>
@@ -17645,7 +16293,7 @@
           <a:buFontTx/>
           <a:buNone/>
           <a:tabLst/>
-          <a:defRPr b="0" baseline="0" cap="none" i="0" spc="0" strike="noStrike" sz="1800" u="none" kumimoji="0" normalizeH="0">
+          <a:defRPr kumimoji="0" sz="1800" b="0" i="0" u="none" strike="noStrike" cap="none" spc="0" normalizeH="0" baseline="0">
             <a:ln>
               <a:noFill/>
             </a:ln>
@@ -17675,7 +16323,7 @@
           <a:buFontTx/>
           <a:buNone/>
           <a:tabLst/>
-          <a:defRPr b="0" baseline="0" cap="none" i="0" spc="0" strike="noStrike" sz="1800" u="none" kumimoji="0" normalizeH="0">
+          <a:defRPr kumimoji="0" sz="1800" b="0" i="0" u="none" strike="noStrike" cap="none" spc="0" normalizeH="0" baseline="0">
             <a:ln>
               <a:noFill/>
             </a:ln>
@@ -17701,7 +16349,7 @@
           <a:buFontTx/>
           <a:buNone/>
           <a:tabLst/>
-          <a:defRPr b="0" baseline="0" cap="none" i="0" spc="0" strike="noStrike" sz="1800" u="none" kumimoji="0" normalizeH="0">
+          <a:defRPr kumimoji="0" sz="1800" b="0" i="0" u="none" strike="noStrike" cap="none" spc="0" normalizeH="0" baseline="0">
             <a:ln>
               <a:noFill/>
             </a:ln>
@@ -17727,7 +16375,7 @@
           <a:buFontTx/>
           <a:buNone/>
           <a:tabLst/>
-          <a:defRPr b="0" baseline="0" cap="none" i="0" spc="0" strike="noStrike" sz="1800" u="none" kumimoji="0" normalizeH="0">
+          <a:defRPr kumimoji="0" sz="1800" b="0" i="0" u="none" strike="noStrike" cap="none" spc="0" normalizeH="0" baseline="0">
             <a:ln>
               <a:noFill/>
             </a:ln>
@@ -17753,7 +16401,7 @@
           <a:buFontTx/>
           <a:buNone/>
           <a:tabLst/>
-          <a:defRPr b="0" baseline="0" cap="none" i="0" spc="0" strike="noStrike" sz="1800" u="none" kumimoji="0" normalizeH="0">
+          <a:defRPr kumimoji="0" sz="1800" b="0" i="0" u="none" strike="noStrike" cap="none" spc="0" normalizeH="0" baseline="0">
             <a:ln>
               <a:noFill/>
             </a:ln>
@@ -17779,7 +16427,7 @@
           <a:buFontTx/>
           <a:buNone/>
           <a:tabLst/>
-          <a:defRPr b="0" baseline="0" cap="none" i="0" spc="0" strike="noStrike" sz="1800" u="none" kumimoji="0" normalizeH="0">
+          <a:defRPr kumimoji="0" sz="1800" b="0" i="0" u="none" strike="noStrike" cap="none" spc="0" normalizeH="0" baseline="0">
             <a:ln>
               <a:noFill/>
             </a:ln>
@@ -17805,7 +16453,7 @@
           <a:buFontTx/>
           <a:buNone/>
           <a:tabLst/>
-          <a:defRPr b="0" baseline="0" cap="none" i="0" spc="0" strike="noStrike" sz="1800" u="none" kumimoji="0" normalizeH="0">
+          <a:defRPr kumimoji="0" sz="1800" b="0" i="0" u="none" strike="noStrike" cap="none" spc="0" normalizeH="0" baseline="0">
             <a:ln>
               <a:noFill/>
             </a:ln>
@@ -17831,7 +16479,7 @@
           <a:buFontTx/>
           <a:buNone/>
           <a:tabLst/>
-          <a:defRPr b="0" baseline="0" cap="none" i="0" spc="0" strike="noStrike" sz="1800" u="none" kumimoji="0" normalizeH="0">
+          <a:defRPr kumimoji="0" sz="1800" b="0" i="0" u="none" strike="noStrike" cap="none" spc="0" normalizeH="0" baseline="0">
             <a:ln>
               <a:noFill/>
             </a:ln>
@@ -17857,7 +16505,7 @@
           <a:buFontTx/>
           <a:buNone/>
           <a:tabLst/>
-          <a:defRPr b="0" baseline="0" cap="none" i="0" spc="0" strike="noStrike" sz="1800" u="none" kumimoji="0" normalizeH="0">
+          <a:defRPr kumimoji="0" sz="1800" b="0" i="0" u="none" strike="noStrike" cap="none" spc="0" normalizeH="0" baseline="0">
             <a:ln>
               <a:noFill/>
             </a:ln>
@@ -17883,7 +16531,7 @@
           <a:buFontTx/>
           <a:buNone/>
           <a:tabLst/>
-          <a:defRPr b="0" baseline="0" cap="none" i="0" spc="0" strike="noStrike" sz="1800" u="none" kumimoji="0" normalizeH="0">
+          <a:defRPr kumimoji="0" sz="1800" b="0" i="0" u="none" strike="noStrike" cap="none" spc="0" normalizeH="0" baseline="0">
             <a:ln>
               <a:noFill/>
             </a:ln>
@@ -17896,12 +16544,19 @@
         </a:lvl9pPr>
       </a:lstStyle>
       <a:style>
-        <a:lnRef idx="0"/>
-        <a:fillRef idx="0"/>
-        <a:effectRef idx="0"/>
+        <a:lnRef idx="0">
+          <a:scrgbClr r="0" g="0" b="0"/>
+        </a:lnRef>
+        <a:fillRef idx="0">
+          <a:scrgbClr r="0" g="0" b="0"/>
+        </a:fillRef>
+        <a:effectRef idx="0">
+          <a:scrgbClr r="0" g="0" b="0"/>
+        </a:effectRef>
         <a:fontRef idx="none"/>
       </a:style>
     </a:txDef>
   </a:objectDefaults>
+  <a:extraClrSchemeLst/>
 </a:theme>
 </file>